--- a/docs/pptx/whole/jx-linsubhr-ratio-grade3.pptx
+++ b/docs/pptx/whole/jx-linsubhr-ratio-grade3.pptx
@@ -2271,7 +2271,7 @@
           </p:nvSpPr>
           <p:spPr>
             <a:xfrm>
-              <a:off x="817517" y="5114368"/>
+              <a:off x="817517" y="5142518"/>
               <a:ext cx="7799693" cy="0"/>
             </a:xfrm>
             <a:custGeom>
@@ -2314,7 +2314,7 @@
           </p:nvSpPr>
           <p:spPr>
             <a:xfrm>
-              <a:off x="817517" y="4244691"/>
+              <a:off x="817517" y="4313054"/>
               <a:ext cx="7799693" cy="0"/>
             </a:xfrm>
             <a:custGeom>
@@ -2357,7 +2357,7 @@
           </p:nvSpPr>
           <p:spPr>
             <a:xfrm>
-              <a:off x="817517" y="3375014"/>
+              <a:off x="817517" y="3483591"/>
               <a:ext cx="7799693" cy="0"/>
             </a:xfrm>
             <a:custGeom>
@@ -2400,7 +2400,7 @@
           </p:nvSpPr>
           <p:spPr>
             <a:xfrm>
-              <a:off x="817517" y="2505337"/>
+              <a:off x="817517" y="2654127"/>
               <a:ext cx="7799693" cy="0"/>
             </a:xfrm>
             <a:custGeom>
@@ -2443,15 +2443,15 @@
           </p:nvSpPr>
           <p:spPr>
             <a:xfrm>
-              <a:off x="1615213" y="1896563"/>
-              <a:ext cx="0" cy="3826579"/>
+              <a:off x="1615213" y="2073503"/>
+              <a:ext cx="0" cy="3649639"/>
             </a:xfrm>
             <a:custGeom>
               <a:avLst/>
               <a:pathLst>
-                <a:path w="0" h="3826579">
+                <a:path w="0" h="3649639">
                   <a:moveTo>
-                    <a:pt x="0" y="3826579"/>
+                    <a:pt x="0" y="3649639"/>
                   </a:moveTo>
                   <a:lnTo>
                     <a:pt x="0" y="0"/>
@@ -2486,15 +2486,15 @@
           </p:nvSpPr>
           <p:spPr>
             <a:xfrm>
-              <a:off x="3387871" y="1896563"/>
-              <a:ext cx="0" cy="3826579"/>
+              <a:off x="3387871" y="2073503"/>
+              <a:ext cx="0" cy="3649639"/>
             </a:xfrm>
             <a:custGeom>
               <a:avLst/>
               <a:pathLst>
-                <a:path w="0" h="3826579">
+                <a:path w="0" h="3649639">
                   <a:moveTo>
-                    <a:pt x="0" y="3826579"/>
+                    <a:pt x="0" y="3649639"/>
                   </a:moveTo>
                   <a:lnTo>
                     <a:pt x="0" y="0"/>
@@ -2529,15 +2529,15 @@
           </p:nvSpPr>
           <p:spPr>
             <a:xfrm>
-              <a:off x="5160528" y="1896563"/>
-              <a:ext cx="0" cy="3826579"/>
+              <a:off x="5160528" y="2073503"/>
+              <a:ext cx="0" cy="3649639"/>
             </a:xfrm>
             <a:custGeom>
               <a:avLst/>
               <a:pathLst>
-                <a:path w="0" h="3826579">
+                <a:path w="0" h="3649639">
                   <a:moveTo>
-                    <a:pt x="0" y="3826579"/>
+                    <a:pt x="0" y="3649639"/>
                   </a:moveTo>
                   <a:lnTo>
                     <a:pt x="0" y="0"/>
@@ -2572,15 +2572,15 @@
           </p:nvSpPr>
           <p:spPr>
             <a:xfrm>
-              <a:off x="6933186" y="1896563"/>
-              <a:ext cx="0" cy="3826579"/>
+              <a:off x="6933186" y="2073503"/>
+              <a:ext cx="0" cy="3649639"/>
             </a:xfrm>
             <a:custGeom>
               <a:avLst/>
               <a:pathLst>
-                <a:path w="0" h="3826579">
+                <a:path w="0" h="3649639">
                   <a:moveTo>
-                    <a:pt x="0" y="3826579"/>
+                    <a:pt x="0" y="3649639"/>
                   </a:moveTo>
                   <a:lnTo>
                     <a:pt x="0" y="0"/>
@@ -2615,7 +2615,7 @@
           </p:nvSpPr>
           <p:spPr>
             <a:xfrm>
-              <a:off x="817517" y="5549207"/>
+              <a:off x="817517" y="5557249"/>
               <a:ext cx="7799693" cy="0"/>
             </a:xfrm>
             <a:custGeom>
@@ -2658,7 +2658,7 @@
           </p:nvSpPr>
           <p:spPr>
             <a:xfrm>
-              <a:off x="817517" y="4679530"/>
+              <a:off x="817517" y="4727786"/>
               <a:ext cx="7799693" cy="0"/>
             </a:xfrm>
             <a:custGeom>
@@ -2701,7 +2701,7 @@
           </p:nvSpPr>
           <p:spPr>
             <a:xfrm>
-              <a:off x="817517" y="3809853"/>
+              <a:off x="817517" y="3898322"/>
               <a:ext cx="7799693" cy="0"/>
             </a:xfrm>
             <a:custGeom>
@@ -2744,7 +2744,7 @@
           </p:nvSpPr>
           <p:spPr>
             <a:xfrm>
-              <a:off x="817517" y="2940175"/>
+              <a:off x="817517" y="3068859"/>
               <a:ext cx="7799693" cy="0"/>
             </a:xfrm>
             <a:custGeom>
@@ -2787,7 +2787,7 @@
           </p:nvSpPr>
           <p:spPr>
             <a:xfrm>
-              <a:off x="817517" y="2070498"/>
+              <a:off x="817517" y="2239395"/>
               <a:ext cx="7799693" cy="0"/>
             </a:xfrm>
             <a:custGeom>
@@ -2830,15 +2830,15 @@
           </p:nvSpPr>
           <p:spPr>
             <a:xfrm>
-              <a:off x="2501542" y="1896563"/>
-              <a:ext cx="0" cy="3826579"/>
+              <a:off x="2501542" y="2073503"/>
+              <a:ext cx="0" cy="3649639"/>
             </a:xfrm>
             <a:custGeom>
               <a:avLst/>
               <a:pathLst>
-                <a:path w="0" h="3826579">
+                <a:path w="0" h="3649639">
                   <a:moveTo>
-                    <a:pt x="0" y="3826579"/>
+                    <a:pt x="0" y="3649639"/>
                   </a:moveTo>
                   <a:lnTo>
                     <a:pt x="0" y="0"/>
@@ -2873,15 +2873,15 @@
           </p:nvSpPr>
           <p:spPr>
             <a:xfrm>
-              <a:off x="4274200" y="1896563"/>
-              <a:ext cx="0" cy="3826579"/>
+              <a:off x="4274200" y="2073503"/>
+              <a:ext cx="0" cy="3649639"/>
             </a:xfrm>
             <a:custGeom>
               <a:avLst/>
               <a:pathLst>
-                <a:path w="0" h="3826579">
+                <a:path w="0" h="3649639">
                   <a:moveTo>
-                    <a:pt x="0" y="3826579"/>
+                    <a:pt x="0" y="3649639"/>
                   </a:moveTo>
                   <a:lnTo>
                     <a:pt x="0" y="0"/>
@@ -2916,15 +2916,15 @@
           </p:nvSpPr>
           <p:spPr>
             <a:xfrm>
-              <a:off x="6046857" y="1896563"/>
-              <a:ext cx="0" cy="3826579"/>
+              <a:off x="6046857" y="2073503"/>
+              <a:ext cx="0" cy="3649639"/>
             </a:xfrm>
             <a:custGeom>
               <a:avLst/>
               <a:pathLst>
-                <a:path w="0" h="3826579">
+                <a:path w="0" h="3649639">
                   <a:moveTo>
-                    <a:pt x="0" y="3826579"/>
+                    <a:pt x="0" y="3649639"/>
                   </a:moveTo>
                   <a:lnTo>
                     <a:pt x="0" y="0"/>
@@ -2959,15 +2959,15 @@
           </p:nvSpPr>
           <p:spPr>
             <a:xfrm>
-              <a:off x="7819515" y="1896563"/>
-              <a:ext cx="0" cy="3826579"/>
+              <a:off x="7819515" y="2073503"/>
+              <a:ext cx="0" cy="3649639"/>
             </a:xfrm>
             <a:custGeom>
               <a:avLst/>
               <a:pathLst>
-                <a:path w="0" h="3826579">
+                <a:path w="0" h="3649639">
                   <a:moveTo>
-                    <a:pt x="0" y="3826579"/>
+                    <a:pt x="0" y="3649639"/>
                   </a:moveTo>
                   <a:lnTo>
                     <a:pt x="0" y="0"/>
@@ -3002,561 +3002,561 @@
           </p:nvSpPr>
           <p:spPr>
             <a:xfrm>
-              <a:off x="817517" y="1896563"/>
-              <a:ext cx="7235830" cy="3576420"/>
+              <a:off x="817517" y="2073503"/>
+              <a:ext cx="7235830" cy="3411047"/>
             </a:xfrm>
             <a:custGeom>
               <a:avLst/>
               <a:pathLst>
-                <a:path w="7235830" h="3576420">
+                <a:path w="7235830" h="3411047">
                   <a:moveTo>
                     <a:pt x="1221329" y="0"/>
                   </a:moveTo>
                   <a:lnTo>
-                    <a:pt x="1261268" y="93645"/>
-                  </a:lnTo>
-                  <a:lnTo>
-                    <a:pt x="1335028" y="258580"/>
-                  </a:lnTo>
-                  <a:lnTo>
-                    <a:pt x="1408788" y="415872"/>
-                  </a:lnTo>
-                  <a:lnTo>
-                    <a:pt x="1482548" y="565874"/>
-                  </a:lnTo>
-                  <a:lnTo>
-                    <a:pt x="1556308" y="708925"/>
-                  </a:lnTo>
-                  <a:lnTo>
-                    <a:pt x="1630068" y="845346"/>
-                  </a:lnTo>
-                  <a:lnTo>
-                    <a:pt x="1703828" y="975445"/>
-                  </a:lnTo>
-                  <a:lnTo>
-                    <a:pt x="1777588" y="1099515"/>
-                  </a:lnTo>
-                  <a:lnTo>
-                    <a:pt x="1851348" y="1217835"/>
-                  </a:lnTo>
-                  <a:lnTo>
-                    <a:pt x="1925108" y="1330672"/>
-                  </a:lnTo>
-                  <a:lnTo>
-                    <a:pt x="1998868" y="1438279"/>
-                  </a:lnTo>
-                  <a:lnTo>
-                    <a:pt x="2072628" y="1540900"/>
-                  </a:lnTo>
-                  <a:lnTo>
-                    <a:pt x="2146388" y="1638765"/>
-                  </a:lnTo>
-                  <a:lnTo>
-                    <a:pt x="2220148" y="1732094"/>
-                  </a:lnTo>
-                  <a:lnTo>
-                    <a:pt x="2293908" y="1821099"/>
-                  </a:lnTo>
-                  <a:lnTo>
-                    <a:pt x="2367668" y="1905978"/>
-                  </a:lnTo>
-                  <a:lnTo>
-                    <a:pt x="2441428" y="1986924"/>
-                  </a:lnTo>
-                  <a:lnTo>
-                    <a:pt x="2515188" y="2064119"/>
-                  </a:lnTo>
-                  <a:lnTo>
-                    <a:pt x="2588948" y="2137736"/>
-                  </a:lnTo>
-                  <a:lnTo>
-                    <a:pt x="2662708" y="2207942"/>
-                  </a:lnTo>
-                  <a:lnTo>
-                    <a:pt x="2736468" y="2274894"/>
-                  </a:lnTo>
-                  <a:lnTo>
-                    <a:pt x="2810228" y="2338743"/>
-                  </a:lnTo>
-                  <a:lnTo>
-                    <a:pt x="2883988" y="2399633"/>
-                  </a:lnTo>
-                  <a:lnTo>
-                    <a:pt x="2957748" y="2457702"/>
-                  </a:lnTo>
-                  <a:lnTo>
-                    <a:pt x="3031508" y="2513079"/>
-                  </a:lnTo>
-                  <a:lnTo>
-                    <a:pt x="3105268" y="2565890"/>
-                  </a:lnTo>
-                  <a:lnTo>
-                    <a:pt x="3179028" y="2616254"/>
-                  </a:lnTo>
-                  <a:lnTo>
-                    <a:pt x="3252788" y="2664283"/>
-                  </a:lnTo>
-                  <a:lnTo>
-                    <a:pt x="3326548" y="2710087"/>
-                  </a:lnTo>
-                  <a:lnTo>
-                    <a:pt x="3400308" y="2753768"/>
-                  </a:lnTo>
-                  <a:lnTo>
-                    <a:pt x="3474068" y="2789952"/>
-                  </a:lnTo>
-                  <a:lnTo>
-                    <a:pt x="3547828" y="2812531"/>
-                  </a:lnTo>
-                  <a:lnTo>
-                    <a:pt x="3621588" y="2834519"/>
-                  </a:lnTo>
-                  <a:lnTo>
-                    <a:pt x="3695348" y="2855932"/>
-                  </a:lnTo>
-                  <a:lnTo>
-                    <a:pt x="3769108" y="2876785"/>
-                  </a:lnTo>
-                  <a:lnTo>
-                    <a:pt x="3842868" y="2897091"/>
-                  </a:lnTo>
-                  <a:lnTo>
-                    <a:pt x="3916628" y="2916867"/>
-                  </a:lnTo>
-                  <a:lnTo>
-                    <a:pt x="3990388" y="2936124"/>
-                  </a:lnTo>
-                  <a:lnTo>
-                    <a:pt x="4064149" y="2954878"/>
-                  </a:lnTo>
-                  <a:lnTo>
-                    <a:pt x="4137909" y="2973140"/>
-                  </a:lnTo>
-                  <a:lnTo>
-                    <a:pt x="4211669" y="2990925"/>
-                  </a:lnTo>
-                  <a:lnTo>
-                    <a:pt x="4285429" y="3008244"/>
-                  </a:lnTo>
-                  <a:lnTo>
-                    <a:pt x="4359189" y="3025110"/>
-                  </a:lnTo>
-                  <a:lnTo>
-                    <a:pt x="4432949" y="3041535"/>
-                  </a:lnTo>
-                  <a:lnTo>
-                    <a:pt x="4506709" y="3057529"/>
-                  </a:lnTo>
-                  <a:lnTo>
-                    <a:pt x="4580469" y="3073105"/>
-                  </a:lnTo>
-                  <a:lnTo>
-                    <a:pt x="4654229" y="3088274"/>
-                  </a:lnTo>
-                  <a:lnTo>
-                    <a:pt x="4727989" y="3103045"/>
-                  </a:lnTo>
-                  <a:lnTo>
-                    <a:pt x="4801749" y="3117430"/>
-                  </a:lnTo>
-                  <a:lnTo>
-                    <a:pt x="4875509" y="3131438"/>
-                  </a:lnTo>
-                  <a:lnTo>
-                    <a:pt x="4949269" y="3145080"/>
-                  </a:lnTo>
-                  <a:lnTo>
-                    <a:pt x="5023029" y="3158364"/>
-                  </a:lnTo>
-                  <a:lnTo>
-                    <a:pt x="5096789" y="3171301"/>
-                  </a:lnTo>
-                  <a:lnTo>
-                    <a:pt x="5170549" y="3183899"/>
-                  </a:lnTo>
-                  <a:lnTo>
-                    <a:pt x="5244309" y="3196168"/>
-                  </a:lnTo>
-                  <a:lnTo>
-                    <a:pt x="5318069" y="3208115"/>
-                  </a:lnTo>
-                  <a:lnTo>
-                    <a:pt x="5391829" y="3219750"/>
-                  </a:lnTo>
-                  <a:lnTo>
-                    <a:pt x="5465589" y="3231080"/>
-                  </a:lnTo>
-                  <a:lnTo>
-                    <a:pt x="5539349" y="3242114"/>
-                  </a:lnTo>
-                  <a:lnTo>
-                    <a:pt x="5613109" y="3252858"/>
-                  </a:lnTo>
-                  <a:lnTo>
-                    <a:pt x="5686869" y="3263322"/>
-                  </a:lnTo>
-                  <a:lnTo>
-                    <a:pt x="5760629" y="3273512"/>
-                  </a:lnTo>
-                  <a:lnTo>
-                    <a:pt x="5834389" y="3283435"/>
-                  </a:lnTo>
-                  <a:lnTo>
-                    <a:pt x="5908149" y="3293098"/>
-                  </a:lnTo>
-                  <a:lnTo>
-                    <a:pt x="5981909" y="3302509"/>
-                  </a:lnTo>
-                  <a:lnTo>
-                    <a:pt x="6055669" y="3311673"/>
-                  </a:lnTo>
-                  <a:lnTo>
-                    <a:pt x="6129429" y="3320597"/>
-                  </a:lnTo>
-                  <a:lnTo>
-                    <a:pt x="6203189" y="3329288"/>
-                  </a:lnTo>
-                  <a:lnTo>
-                    <a:pt x="6276949" y="3337751"/>
-                  </a:lnTo>
-                  <a:lnTo>
-                    <a:pt x="6350709" y="3345993"/>
-                  </a:lnTo>
-                  <a:lnTo>
-                    <a:pt x="6424469" y="3354019"/>
-                  </a:lnTo>
-                  <a:lnTo>
-                    <a:pt x="6498229" y="3361835"/>
-                  </a:lnTo>
-                  <a:lnTo>
-                    <a:pt x="6571989" y="3369446"/>
-                  </a:lnTo>
-                  <a:lnTo>
-                    <a:pt x="6645749" y="3376858"/>
-                  </a:lnTo>
-                  <a:lnTo>
-                    <a:pt x="6719509" y="3384076"/>
-                  </a:lnTo>
-                  <a:lnTo>
-                    <a:pt x="6793269" y="3391106"/>
-                  </a:lnTo>
-                  <a:lnTo>
-                    <a:pt x="6867029" y="3397951"/>
-                  </a:lnTo>
-                  <a:lnTo>
-                    <a:pt x="6940789" y="3404617"/>
-                  </a:lnTo>
-                  <a:lnTo>
-                    <a:pt x="7014550" y="3411109"/>
-                  </a:lnTo>
-                  <a:lnTo>
-                    <a:pt x="7088310" y="3417430"/>
-                  </a:lnTo>
-                  <a:lnTo>
-                    <a:pt x="7162070" y="3423587"/>
-                  </a:lnTo>
-                  <a:lnTo>
-                    <a:pt x="7235830" y="3429582"/>
-                  </a:lnTo>
-                  <a:lnTo>
-                    <a:pt x="7235830" y="3576420"/>
-                  </a:lnTo>
-                  <a:lnTo>
-                    <a:pt x="7162070" y="3572715"/>
-                  </a:lnTo>
-                  <a:lnTo>
-                    <a:pt x="7088310" y="3568831"/>
-                  </a:lnTo>
-                  <a:lnTo>
-                    <a:pt x="7014550" y="3564759"/>
-                  </a:lnTo>
-                  <a:lnTo>
-                    <a:pt x="6940789" y="3560488"/>
-                  </a:lnTo>
-                  <a:lnTo>
-                    <a:pt x="6867029" y="3556009"/>
-                  </a:lnTo>
-                  <a:lnTo>
-                    <a:pt x="6793269" y="3551313"/>
-                  </a:lnTo>
-                  <a:lnTo>
-                    <a:pt x="6719509" y="3546389"/>
-                  </a:lnTo>
-                  <a:lnTo>
-                    <a:pt x="6645749" y="3541226"/>
-                  </a:lnTo>
-                  <a:lnTo>
-                    <a:pt x="6571989" y="3535812"/>
-                  </a:lnTo>
-                  <a:lnTo>
-                    <a:pt x="6498229" y="3530134"/>
-                  </a:lnTo>
-                  <a:lnTo>
-                    <a:pt x="6424469" y="3524181"/>
-                  </a:lnTo>
-                  <a:lnTo>
-                    <a:pt x="6350709" y="3517938"/>
-                  </a:lnTo>
-                  <a:lnTo>
-                    <a:pt x="6276949" y="3511392"/>
-                  </a:lnTo>
-                  <a:lnTo>
-                    <a:pt x="6203189" y="3504528"/>
-                  </a:lnTo>
-                  <a:lnTo>
-                    <a:pt x="6129429" y="3497330"/>
-                  </a:lnTo>
-                  <a:lnTo>
-                    <a:pt x="6055669" y="3489783"/>
-                  </a:lnTo>
-                  <a:lnTo>
-                    <a:pt x="5981909" y="3481868"/>
-                  </a:lnTo>
-                  <a:lnTo>
-                    <a:pt x="5908149" y="3473570"/>
-                  </a:lnTo>
-                  <a:lnTo>
-                    <a:pt x="5834389" y="3464867"/>
-                  </a:lnTo>
-                  <a:lnTo>
-                    <a:pt x="5760629" y="3455742"/>
-                  </a:lnTo>
-                  <a:lnTo>
-                    <a:pt x="5686869" y="3446174"/>
-                  </a:lnTo>
-                  <a:lnTo>
-                    <a:pt x="5613109" y="3436141"/>
-                  </a:lnTo>
-                  <a:lnTo>
-                    <a:pt x="5539349" y="3425620"/>
-                  </a:lnTo>
-                  <a:lnTo>
-                    <a:pt x="5465589" y="3414587"/>
-                  </a:lnTo>
-                  <a:lnTo>
-                    <a:pt x="5391829" y="3403019"/>
-                  </a:lnTo>
-                  <a:lnTo>
-                    <a:pt x="5318069" y="3390888"/>
-                  </a:lnTo>
-                  <a:lnTo>
-                    <a:pt x="5244309" y="3378168"/>
-                  </a:lnTo>
-                  <a:lnTo>
-                    <a:pt x="5170549" y="3364830"/>
-                  </a:lnTo>
-                  <a:lnTo>
-                    <a:pt x="5096789" y="3350844"/>
-                  </a:lnTo>
-                  <a:lnTo>
-                    <a:pt x="5023029" y="3336178"/>
-                  </a:lnTo>
-                  <a:lnTo>
-                    <a:pt x="4949269" y="3320799"/>
-                  </a:lnTo>
-                  <a:lnTo>
-                    <a:pt x="4875509" y="3304673"/>
-                  </a:lnTo>
-                  <a:lnTo>
-                    <a:pt x="4801749" y="3287763"/>
-                  </a:lnTo>
-                  <a:lnTo>
-                    <a:pt x="4727989" y="3270032"/>
-                  </a:lnTo>
-                  <a:lnTo>
-                    <a:pt x="4654229" y="3251439"/>
-                  </a:lnTo>
-                  <a:lnTo>
-                    <a:pt x="4580469" y="3231942"/>
-                  </a:lnTo>
-                  <a:lnTo>
-                    <a:pt x="4506709" y="3211498"/>
-                  </a:lnTo>
-                  <a:lnTo>
-                    <a:pt x="4432949" y="3190061"/>
-                  </a:lnTo>
-                  <a:lnTo>
-                    <a:pt x="4359189" y="3167581"/>
-                  </a:lnTo>
-                  <a:lnTo>
-                    <a:pt x="4285429" y="3144010"/>
-                  </a:lnTo>
-                  <a:lnTo>
-                    <a:pt x="4211669" y="3119293"/>
-                  </a:lnTo>
-                  <a:lnTo>
-                    <a:pt x="4137909" y="3093374"/>
-                  </a:lnTo>
-                  <a:lnTo>
-                    <a:pt x="4064149" y="3066197"/>
-                  </a:lnTo>
-                  <a:lnTo>
-                    <a:pt x="3990388" y="3037698"/>
-                  </a:lnTo>
-                  <a:lnTo>
-                    <a:pt x="3916628" y="3007815"/>
-                  </a:lnTo>
-                  <a:lnTo>
-                    <a:pt x="3842868" y="2976479"/>
-                  </a:lnTo>
-                  <a:lnTo>
-                    <a:pt x="3769108" y="2943621"/>
-                  </a:lnTo>
-                  <a:lnTo>
-                    <a:pt x="3695348" y="2909166"/>
-                  </a:lnTo>
-                  <a:lnTo>
-                    <a:pt x="3621588" y="2873036"/>
-                  </a:lnTo>
-                  <a:lnTo>
-                    <a:pt x="3547828" y="2835151"/>
-                  </a:lnTo>
-                  <a:lnTo>
-                    <a:pt x="3474068" y="2795425"/>
-                  </a:lnTo>
-                  <a:lnTo>
-                    <a:pt x="3400308" y="2766766"/>
-                  </a:lnTo>
-                  <a:lnTo>
-                    <a:pt x="3326548" y="2742956"/>
-                  </a:lnTo>
-                  <a:lnTo>
-                    <a:pt x="3252788" y="2718507"/>
-                  </a:lnTo>
-                  <a:lnTo>
-                    <a:pt x="3179028" y="2693400"/>
-                  </a:lnTo>
-                  <a:lnTo>
-                    <a:pt x="3105268" y="2667619"/>
-                  </a:lnTo>
-                  <a:lnTo>
-                    <a:pt x="3031508" y="2641145"/>
-                  </a:lnTo>
-                  <a:lnTo>
-                    <a:pt x="2957748" y="2613960"/>
-                  </a:lnTo>
-                  <a:lnTo>
-                    <a:pt x="2883988" y="2586043"/>
-                  </a:lnTo>
-                  <a:lnTo>
-                    <a:pt x="2810228" y="2557377"/>
-                  </a:lnTo>
-                  <a:lnTo>
-                    <a:pt x="2736468" y="2527940"/>
-                  </a:lnTo>
-                  <a:lnTo>
-                    <a:pt x="2662708" y="2497712"/>
-                  </a:lnTo>
-                  <a:lnTo>
-                    <a:pt x="2588948" y="2466671"/>
-                  </a:lnTo>
-                  <a:lnTo>
-                    <a:pt x="2515188" y="2434796"/>
-                  </a:lnTo>
-                  <a:lnTo>
-                    <a:pt x="2441428" y="2402065"/>
-                  </a:lnTo>
-                  <a:lnTo>
-                    <a:pt x="2367668" y="2368453"/>
-                  </a:lnTo>
-                  <a:lnTo>
-                    <a:pt x="2293908" y="2333939"/>
-                  </a:lnTo>
-                  <a:lnTo>
-                    <a:pt x="2220148" y="2298496"/>
-                  </a:lnTo>
-                  <a:lnTo>
-                    <a:pt x="2146388" y="2262102"/>
-                  </a:lnTo>
-                  <a:lnTo>
-                    <a:pt x="2072628" y="2224729"/>
-                  </a:lnTo>
-                  <a:lnTo>
-                    <a:pt x="1998868" y="2186351"/>
-                  </a:lnTo>
-                  <a:lnTo>
-                    <a:pt x="1925108" y="2146942"/>
-                  </a:lnTo>
-                  <a:lnTo>
-                    <a:pt x="1851348" y="2106474"/>
-                  </a:lnTo>
-                  <a:lnTo>
-                    <a:pt x="1777588" y="2064918"/>
-                  </a:lnTo>
-                  <a:lnTo>
-                    <a:pt x="1703828" y="2022246"/>
-                  </a:lnTo>
-                  <a:lnTo>
-                    <a:pt x="1630068" y="1978426"/>
-                  </a:lnTo>
-                  <a:lnTo>
-                    <a:pt x="1556308" y="1933429"/>
-                  </a:lnTo>
-                  <a:lnTo>
-                    <a:pt x="1482548" y="1887222"/>
-                  </a:lnTo>
-                  <a:lnTo>
-                    <a:pt x="1408788" y="1839774"/>
-                  </a:lnTo>
-                  <a:lnTo>
-                    <a:pt x="1335028" y="1791050"/>
-                  </a:lnTo>
-                  <a:lnTo>
-                    <a:pt x="1261268" y="1741017"/>
-                  </a:lnTo>
-                  <a:lnTo>
-                    <a:pt x="1187508" y="1689639"/>
-                  </a:lnTo>
-                  <a:lnTo>
-                    <a:pt x="1113747" y="1636880"/>
-                  </a:lnTo>
-                  <a:lnTo>
-                    <a:pt x="1039987" y="1582703"/>
-                  </a:lnTo>
-                  <a:lnTo>
-                    <a:pt x="966227" y="1527070"/>
-                  </a:lnTo>
-                  <a:lnTo>
-                    <a:pt x="892467" y="1469942"/>
-                  </a:lnTo>
-                  <a:lnTo>
-                    <a:pt x="818707" y="1411279"/>
-                  </a:lnTo>
-                  <a:lnTo>
-                    <a:pt x="744947" y="1351038"/>
-                  </a:lnTo>
-                  <a:lnTo>
-                    <a:pt x="671187" y="1289179"/>
-                  </a:lnTo>
-                  <a:lnTo>
-                    <a:pt x="597427" y="1225657"/>
-                  </a:lnTo>
-                  <a:lnTo>
-                    <a:pt x="523667" y="1160428"/>
-                  </a:lnTo>
-                  <a:lnTo>
-                    <a:pt x="449907" y="1093446"/>
-                  </a:lnTo>
-                  <a:lnTo>
-                    <a:pt x="376147" y="1024664"/>
-                  </a:lnTo>
-                  <a:lnTo>
-                    <a:pt x="302387" y="954032"/>
-                  </a:lnTo>
-                  <a:lnTo>
-                    <a:pt x="228627" y="881503"/>
-                  </a:lnTo>
-                  <a:lnTo>
-                    <a:pt x="154867" y="807024"/>
-                  </a:lnTo>
-                  <a:lnTo>
-                    <a:pt x="81107" y="730544"/>
-                  </a:lnTo>
-                  <a:lnTo>
-                    <a:pt x="7347" y="652008"/>
-                  </a:lnTo>
-                  <a:lnTo>
-                    <a:pt x="0" y="643974"/>
+                    <a:pt x="1261268" y="89315"/>
+                  </a:lnTo>
+                  <a:lnTo>
+                    <a:pt x="1335028" y="246624"/>
+                  </a:lnTo>
+                  <a:lnTo>
+                    <a:pt x="1408788" y="396642"/>
+                  </a:lnTo>
+                  <a:lnTo>
+                    <a:pt x="1482548" y="539708"/>
+                  </a:lnTo>
+                  <a:lnTo>
+                    <a:pt x="1556308" y="676144"/>
+                  </a:lnTo>
+                  <a:lnTo>
+                    <a:pt x="1630068" y="806258"/>
+                  </a:lnTo>
+                  <a:lnTo>
+                    <a:pt x="1703828" y="930341"/>
+                  </a:lnTo>
+                  <a:lnTo>
+                    <a:pt x="1777588" y="1048674"/>
+                  </a:lnTo>
+                  <a:lnTo>
+                    <a:pt x="1851348" y="1161523"/>
+                  </a:lnTo>
+                  <a:lnTo>
+                    <a:pt x="1925108" y="1269142"/>
+                  </a:lnTo>
+                  <a:lnTo>
+                    <a:pt x="1998868" y="1371774"/>
+                  </a:lnTo>
+                  <a:lnTo>
+                    <a:pt x="2072628" y="1469649"/>
+                  </a:lnTo>
+                  <a:lnTo>
+                    <a:pt x="2146388" y="1562989"/>
+                  </a:lnTo>
+                  <a:lnTo>
+                    <a:pt x="2220148" y="1652003"/>
+                  </a:lnTo>
+                  <a:lnTo>
+                    <a:pt x="2293908" y="1736892"/>
+                  </a:lnTo>
+                  <a:lnTo>
+                    <a:pt x="2367668" y="1817846"/>
+                  </a:lnTo>
+                  <a:lnTo>
+                    <a:pt x="2441428" y="1895049"/>
+                  </a:lnTo>
+                  <a:lnTo>
+                    <a:pt x="2515188" y="1968675"/>
+                  </a:lnTo>
+                  <a:lnTo>
+                    <a:pt x="2588948" y="2038888"/>
+                  </a:lnTo>
+                  <a:lnTo>
+                    <a:pt x="2662708" y="2105847"/>
+                  </a:lnTo>
+                  <a:lnTo>
+                    <a:pt x="2736468" y="2169703"/>
+                  </a:lnTo>
+                  <a:lnTo>
+                    <a:pt x="2810228" y="2230600"/>
+                  </a:lnTo>
+                  <a:lnTo>
+                    <a:pt x="2883988" y="2288675"/>
+                  </a:lnTo>
+                  <a:lnTo>
+                    <a:pt x="2957748" y="2344058"/>
+                  </a:lnTo>
+                  <a:lnTo>
+                    <a:pt x="3031508" y="2396875"/>
+                  </a:lnTo>
+                  <a:lnTo>
+                    <a:pt x="3105268" y="2447244"/>
+                  </a:lnTo>
+                  <a:lnTo>
+                    <a:pt x="3179028" y="2495279"/>
+                  </a:lnTo>
+                  <a:lnTo>
+                    <a:pt x="3252788" y="2541088"/>
+                  </a:lnTo>
+                  <a:lnTo>
+                    <a:pt x="3326548" y="2584773"/>
+                  </a:lnTo>
+                  <a:lnTo>
+                    <a:pt x="3400308" y="2626435"/>
+                  </a:lnTo>
+                  <a:lnTo>
+                    <a:pt x="3474068" y="2660945"/>
+                  </a:lnTo>
+                  <a:lnTo>
+                    <a:pt x="3547828" y="2682481"/>
+                  </a:lnTo>
+                  <a:lnTo>
+                    <a:pt x="3621588" y="2703452"/>
+                  </a:lnTo>
+                  <a:lnTo>
+                    <a:pt x="3695348" y="2723875"/>
+                  </a:lnTo>
+                  <a:lnTo>
+                    <a:pt x="3769108" y="2743763"/>
+                  </a:lnTo>
+                  <a:lnTo>
+                    <a:pt x="3842868" y="2763131"/>
+                  </a:lnTo>
+                  <a:lnTo>
+                    <a:pt x="3916628" y="2781992"/>
+                  </a:lnTo>
+                  <a:lnTo>
+                    <a:pt x="3990388" y="2800359"/>
+                  </a:lnTo>
+                  <a:lnTo>
+                    <a:pt x="4064149" y="2818245"/>
+                  </a:lnTo>
+                  <a:lnTo>
+                    <a:pt x="4137909" y="2835663"/>
+                  </a:lnTo>
+                  <a:lnTo>
+                    <a:pt x="4211669" y="2852626"/>
+                  </a:lnTo>
+                  <a:lnTo>
+                    <a:pt x="4285429" y="2869144"/>
+                  </a:lnTo>
+                  <a:lnTo>
+                    <a:pt x="4359189" y="2885230"/>
+                  </a:lnTo>
+                  <a:lnTo>
+                    <a:pt x="4432949" y="2900895"/>
+                  </a:lnTo>
+                  <a:lnTo>
+                    <a:pt x="4506709" y="2916150"/>
+                  </a:lnTo>
+                  <a:lnTo>
+                    <a:pt x="4580469" y="2931006"/>
+                  </a:lnTo>
+                  <a:lnTo>
+                    <a:pt x="4654229" y="2945473"/>
+                  </a:lnTo>
+                  <a:lnTo>
+                    <a:pt x="4727989" y="2959561"/>
+                  </a:lnTo>
+                  <a:lnTo>
+                    <a:pt x="4801749" y="2973281"/>
+                  </a:lnTo>
+                  <a:lnTo>
+                    <a:pt x="4875509" y="2986641"/>
+                  </a:lnTo>
+                  <a:lnTo>
+                    <a:pt x="4949269" y="2999652"/>
+                  </a:lnTo>
+                  <a:lnTo>
+                    <a:pt x="5023029" y="3012322"/>
+                  </a:lnTo>
+                  <a:lnTo>
+                    <a:pt x="5096789" y="3024661"/>
+                  </a:lnTo>
+                  <a:lnTo>
+                    <a:pt x="5170549" y="3036677"/>
+                  </a:lnTo>
+                  <a:lnTo>
+                    <a:pt x="5244309" y="3048378"/>
+                  </a:lnTo>
+                  <a:lnTo>
+                    <a:pt x="5318069" y="3059773"/>
+                  </a:lnTo>
+                  <a:lnTo>
+                    <a:pt x="5391829" y="3070870"/>
+                  </a:lnTo>
+                  <a:lnTo>
+                    <a:pt x="5465589" y="3081676"/>
+                  </a:lnTo>
+                  <a:lnTo>
+                    <a:pt x="5539349" y="3092199"/>
+                  </a:lnTo>
+                  <a:lnTo>
+                    <a:pt x="5613109" y="3102447"/>
+                  </a:lnTo>
+                  <a:lnTo>
+                    <a:pt x="5686869" y="3112427"/>
+                  </a:lnTo>
+                  <a:lnTo>
+                    <a:pt x="5760629" y="3122146"/>
+                  </a:lnTo>
+                  <a:lnTo>
+                    <a:pt x="5834389" y="3131610"/>
+                  </a:lnTo>
+                  <a:lnTo>
+                    <a:pt x="5908149" y="3140827"/>
+                  </a:lnTo>
+                  <a:lnTo>
+                    <a:pt x="5981909" y="3149802"/>
+                  </a:lnTo>
+                  <a:lnTo>
+                    <a:pt x="6055669" y="3158542"/>
+                  </a:lnTo>
+                  <a:lnTo>
+                    <a:pt x="6129429" y="3167054"/>
+                  </a:lnTo>
+                  <a:lnTo>
+                    <a:pt x="6203189" y="3175343"/>
+                  </a:lnTo>
+                  <a:lnTo>
+                    <a:pt x="6276949" y="3183415"/>
+                  </a:lnTo>
+                  <a:lnTo>
+                    <a:pt x="6350709" y="3191275"/>
+                  </a:lnTo>
+                  <a:lnTo>
+                    <a:pt x="6424469" y="3198930"/>
+                  </a:lnTo>
+                  <a:lnTo>
+                    <a:pt x="6498229" y="3206385"/>
+                  </a:lnTo>
+                  <a:lnTo>
+                    <a:pt x="6571989" y="3213644"/>
+                  </a:lnTo>
+                  <a:lnTo>
+                    <a:pt x="6645749" y="3220713"/>
+                  </a:lnTo>
+                  <a:lnTo>
+                    <a:pt x="6719509" y="3227598"/>
+                  </a:lnTo>
+                  <a:lnTo>
+                    <a:pt x="6793269" y="3234302"/>
+                  </a:lnTo>
+                  <a:lnTo>
+                    <a:pt x="6867029" y="3240831"/>
+                  </a:lnTo>
+                  <a:lnTo>
+                    <a:pt x="6940789" y="3247189"/>
+                  </a:lnTo>
+                  <a:lnTo>
+                    <a:pt x="7014550" y="3253380"/>
+                  </a:lnTo>
+                  <a:lnTo>
+                    <a:pt x="7088310" y="3259410"/>
+                  </a:lnTo>
+                  <a:lnTo>
+                    <a:pt x="7162070" y="3265281"/>
+                  </a:lnTo>
+                  <a:lnTo>
+                    <a:pt x="7235830" y="3270999"/>
+                  </a:lnTo>
+                  <a:lnTo>
+                    <a:pt x="7235830" y="3411047"/>
+                  </a:lnTo>
+                  <a:lnTo>
+                    <a:pt x="7162070" y="3407514"/>
+                  </a:lnTo>
+                  <a:lnTo>
+                    <a:pt x="7088310" y="3403810"/>
+                  </a:lnTo>
+                  <a:lnTo>
+                    <a:pt x="7014550" y="3399925"/>
+                  </a:lnTo>
+                  <a:lnTo>
+                    <a:pt x="6940789" y="3395852"/>
+                  </a:lnTo>
+                  <a:lnTo>
+                    <a:pt x="6867029" y="3391581"/>
+                  </a:lnTo>
+                  <a:lnTo>
+                    <a:pt x="6793269" y="3387102"/>
+                  </a:lnTo>
+                  <a:lnTo>
+                    <a:pt x="6719509" y="3382406"/>
+                  </a:lnTo>
+                  <a:lnTo>
+                    <a:pt x="6645749" y="3377481"/>
+                  </a:lnTo>
+                  <a:lnTo>
+                    <a:pt x="6571989" y="3372317"/>
+                  </a:lnTo>
+                  <a:lnTo>
+                    <a:pt x="6498229" y="3366902"/>
+                  </a:lnTo>
+                  <a:lnTo>
+                    <a:pt x="6424469" y="3361224"/>
+                  </a:lnTo>
+                  <a:lnTo>
+                    <a:pt x="6350709" y="3355270"/>
+                  </a:lnTo>
+                  <a:lnTo>
+                    <a:pt x="6276949" y="3349027"/>
+                  </a:lnTo>
+                  <a:lnTo>
+                    <a:pt x="6203189" y="3342480"/>
+                  </a:lnTo>
+                  <a:lnTo>
+                    <a:pt x="6129429" y="3335615"/>
+                  </a:lnTo>
+                  <a:lnTo>
+                    <a:pt x="6055669" y="3328416"/>
+                  </a:lnTo>
+                  <a:lnTo>
+                    <a:pt x="5981909" y="3320868"/>
+                  </a:lnTo>
+                  <a:lnTo>
+                    <a:pt x="5908149" y="3312953"/>
+                  </a:lnTo>
+                  <a:lnTo>
+                    <a:pt x="5834389" y="3304653"/>
+                  </a:lnTo>
+                  <a:lnTo>
+                    <a:pt x="5760629" y="3295950"/>
+                  </a:lnTo>
+                  <a:lnTo>
+                    <a:pt x="5686869" y="3286824"/>
+                  </a:lnTo>
+                  <a:lnTo>
+                    <a:pt x="5613109" y="3277255"/>
+                  </a:lnTo>
+                  <a:lnTo>
+                    <a:pt x="5539349" y="3267220"/>
+                  </a:lnTo>
+                  <a:lnTo>
+                    <a:pt x="5465589" y="3256698"/>
+                  </a:lnTo>
+                  <a:lnTo>
+                    <a:pt x="5391829" y="3245665"/>
+                  </a:lnTo>
+                  <a:lnTo>
+                    <a:pt x="5318069" y="3234095"/>
+                  </a:lnTo>
+                  <a:lnTo>
+                    <a:pt x="5244309" y="3221963"/>
+                  </a:lnTo>
+                  <a:lnTo>
+                    <a:pt x="5170549" y="3209242"/>
+                  </a:lnTo>
+                  <a:lnTo>
+                    <a:pt x="5096789" y="3195902"/>
+                  </a:lnTo>
+                  <a:lnTo>
+                    <a:pt x="5023029" y="3181914"/>
+                  </a:lnTo>
+                  <a:lnTo>
+                    <a:pt x="4949269" y="3167247"/>
+                  </a:lnTo>
+                  <a:lnTo>
+                    <a:pt x="4875509" y="3151866"/>
+                  </a:lnTo>
+                  <a:lnTo>
+                    <a:pt x="4801749" y="3135738"/>
+                  </a:lnTo>
+                  <a:lnTo>
+                    <a:pt x="4727989" y="3118827"/>
+                  </a:lnTo>
+                  <a:lnTo>
+                    <a:pt x="4654229" y="3101094"/>
+                  </a:lnTo>
+                  <a:lnTo>
+                    <a:pt x="4580469" y="3082499"/>
+                  </a:lnTo>
+                  <a:lnTo>
+                    <a:pt x="4506709" y="3063000"/>
+                  </a:lnTo>
+                  <a:lnTo>
+                    <a:pt x="4432949" y="3042553"/>
+                  </a:lnTo>
+                  <a:lnTo>
+                    <a:pt x="4359189" y="3021114"/>
+                  </a:lnTo>
+                  <a:lnTo>
+                    <a:pt x="4285429" y="2998632"/>
+                  </a:lnTo>
+                  <a:lnTo>
+                    <a:pt x="4211669" y="2975058"/>
+                  </a:lnTo>
+                  <a:lnTo>
+                    <a:pt x="4137909" y="2950338"/>
+                  </a:lnTo>
+                  <a:lnTo>
+                    <a:pt x="4064149" y="2924417"/>
+                  </a:lnTo>
+                  <a:lnTo>
+                    <a:pt x="3990388" y="2897236"/>
+                  </a:lnTo>
+                  <a:lnTo>
+                    <a:pt x="3916628" y="2868734"/>
+                  </a:lnTo>
+                  <a:lnTo>
+                    <a:pt x="3842868" y="2838848"/>
+                  </a:lnTo>
+                  <a:lnTo>
+                    <a:pt x="3769108" y="2807509"/>
+                  </a:lnTo>
+                  <a:lnTo>
+                    <a:pt x="3695348" y="2774647"/>
+                  </a:lnTo>
+                  <a:lnTo>
+                    <a:pt x="3621588" y="2740188"/>
+                  </a:lnTo>
+                  <a:lnTo>
+                    <a:pt x="3547828" y="2704055"/>
+                  </a:lnTo>
+                  <a:lnTo>
+                    <a:pt x="3474068" y="2666165"/>
+                  </a:lnTo>
+                  <a:lnTo>
+                    <a:pt x="3400308" y="2638831"/>
+                  </a:lnTo>
+                  <a:lnTo>
+                    <a:pt x="3326548" y="2616123"/>
+                  </a:lnTo>
+                  <a:lnTo>
+                    <a:pt x="3252788" y="2592804"/>
+                  </a:lnTo>
+                  <a:lnTo>
+                    <a:pt x="3179028" y="2568859"/>
+                  </a:lnTo>
+                  <a:lnTo>
+                    <a:pt x="3105268" y="2544270"/>
+                  </a:lnTo>
+                  <a:lnTo>
+                    <a:pt x="3031508" y="2519020"/>
+                  </a:lnTo>
+                  <a:lnTo>
+                    <a:pt x="2957748" y="2493091"/>
+                  </a:lnTo>
+                  <a:lnTo>
+                    <a:pt x="2883988" y="2466466"/>
+                  </a:lnTo>
+                  <a:lnTo>
+                    <a:pt x="2810228" y="2439125"/>
+                  </a:lnTo>
+                  <a:lnTo>
+                    <a:pt x="2736468" y="2411049"/>
+                  </a:lnTo>
+                  <a:lnTo>
+                    <a:pt x="2662708" y="2382218"/>
+                  </a:lnTo>
+                  <a:lnTo>
+                    <a:pt x="2588948" y="2352613"/>
+                  </a:lnTo>
+                  <a:lnTo>
+                    <a:pt x="2515188" y="2322212"/>
+                  </a:lnTo>
+                  <a:lnTo>
+                    <a:pt x="2441428" y="2290994"/>
+                  </a:lnTo>
+                  <a:lnTo>
+                    <a:pt x="2367668" y="2258937"/>
+                  </a:lnTo>
+                  <a:lnTo>
+                    <a:pt x="2293908" y="2226018"/>
+                  </a:lnTo>
+                  <a:lnTo>
+                    <a:pt x="2220148" y="2192215"/>
+                  </a:lnTo>
+                  <a:lnTo>
+                    <a:pt x="2146388" y="2157503"/>
+                  </a:lnTo>
+                  <a:lnTo>
+                    <a:pt x="2072628" y="2121858"/>
+                  </a:lnTo>
+                  <a:lnTo>
+                    <a:pt x="1998868" y="2085255"/>
+                  </a:lnTo>
+                  <a:lnTo>
+                    <a:pt x="1925108" y="2047668"/>
+                  </a:lnTo>
+                  <a:lnTo>
+                    <a:pt x="1851348" y="2009071"/>
+                  </a:lnTo>
+                  <a:lnTo>
+                    <a:pt x="1777588" y="1969437"/>
+                  </a:lnTo>
+                  <a:lnTo>
+                    <a:pt x="1703828" y="1928738"/>
+                  </a:lnTo>
+                  <a:lnTo>
+                    <a:pt x="1630068" y="1886944"/>
+                  </a:lnTo>
+                  <a:lnTo>
+                    <a:pt x="1556308" y="1844028"/>
+                  </a:lnTo>
+                  <a:lnTo>
+                    <a:pt x="1482548" y="1799958"/>
+                  </a:lnTo>
+                  <a:lnTo>
+                    <a:pt x="1408788" y="1754703"/>
+                  </a:lnTo>
+                  <a:lnTo>
+                    <a:pt x="1335028" y="1708233"/>
+                  </a:lnTo>
+                  <a:lnTo>
+                    <a:pt x="1261268" y="1660513"/>
+                  </a:lnTo>
+                  <a:lnTo>
+                    <a:pt x="1187508" y="1611511"/>
+                  </a:lnTo>
+                  <a:lnTo>
+                    <a:pt x="1113747" y="1561191"/>
+                  </a:lnTo>
+                  <a:lnTo>
+                    <a:pt x="1039987" y="1509520"/>
+                  </a:lnTo>
+                  <a:lnTo>
+                    <a:pt x="966227" y="1456459"/>
+                  </a:lnTo>
+                  <a:lnTo>
+                    <a:pt x="892467" y="1401973"/>
+                  </a:lnTo>
+                  <a:lnTo>
+                    <a:pt x="818707" y="1346022"/>
+                  </a:lnTo>
+                  <a:lnTo>
+                    <a:pt x="744947" y="1288567"/>
+                  </a:lnTo>
+                  <a:lnTo>
+                    <a:pt x="671187" y="1229568"/>
+                  </a:lnTo>
+                  <a:lnTo>
+                    <a:pt x="597427" y="1168983"/>
+                  </a:lnTo>
+                  <a:lnTo>
+                    <a:pt x="523667" y="1106770"/>
+                  </a:lnTo>
+                  <a:lnTo>
+                    <a:pt x="449907" y="1042885"/>
+                  </a:lnTo>
+                  <a:lnTo>
+                    <a:pt x="376147" y="977283"/>
+                  </a:lnTo>
+                  <a:lnTo>
+                    <a:pt x="302387" y="909918"/>
+                  </a:lnTo>
+                  <a:lnTo>
+                    <a:pt x="228627" y="840743"/>
+                  </a:lnTo>
+                  <a:lnTo>
+                    <a:pt x="154867" y="769708"/>
+                  </a:lnTo>
+                  <a:lnTo>
+                    <a:pt x="81107" y="696764"/>
+                  </a:lnTo>
+                  <a:lnTo>
+                    <a:pt x="7347" y="621859"/>
+                  </a:lnTo>
+                  <a:lnTo>
+                    <a:pt x="0" y="614197"/>
                   </a:lnTo>
                   <a:close/>
                 </a:path>
@@ -3582,261 +3582,261 @@
           </p:nvSpPr>
           <p:spPr>
             <a:xfrm>
-              <a:off x="2038847" y="1896563"/>
-              <a:ext cx="6014500" cy="3429582"/>
+              <a:off x="2038847" y="2073503"/>
+              <a:ext cx="6014500" cy="3270999"/>
             </a:xfrm>
             <a:custGeom>
               <a:avLst/>
               <a:pathLst>
-                <a:path w="6014500" h="3429582">
+                <a:path w="6014500" h="3270999">
                   <a:moveTo>
                     <a:pt x="0" y="0"/>
                   </a:moveTo>
                   <a:lnTo>
-                    <a:pt x="39938" y="93645"/>
-                  </a:lnTo>
-                  <a:lnTo>
-                    <a:pt x="113698" y="258580"/>
-                  </a:lnTo>
-                  <a:lnTo>
-                    <a:pt x="187458" y="415872"/>
-                  </a:lnTo>
-                  <a:lnTo>
-                    <a:pt x="261218" y="565874"/>
-                  </a:lnTo>
-                  <a:lnTo>
-                    <a:pt x="334978" y="708925"/>
-                  </a:lnTo>
-                  <a:lnTo>
-                    <a:pt x="408738" y="845346"/>
-                  </a:lnTo>
-                  <a:lnTo>
-                    <a:pt x="482498" y="975445"/>
-                  </a:lnTo>
-                  <a:lnTo>
-                    <a:pt x="556258" y="1099515"/>
-                  </a:lnTo>
-                  <a:lnTo>
-                    <a:pt x="630018" y="1217835"/>
-                  </a:lnTo>
-                  <a:lnTo>
-                    <a:pt x="703778" y="1330672"/>
-                  </a:lnTo>
-                  <a:lnTo>
-                    <a:pt x="777538" y="1438279"/>
-                  </a:lnTo>
-                  <a:lnTo>
-                    <a:pt x="851298" y="1540900"/>
-                  </a:lnTo>
-                  <a:lnTo>
-                    <a:pt x="925058" y="1638765"/>
-                  </a:lnTo>
-                  <a:lnTo>
-                    <a:pt x="998818" y="1732094"/>
-                  </a:lnTo>
-                  <a:lnTo>
-                    <a:pt x="1072578" y="1821099"/>
-                  </a:lnTo>
-                  <a:lnTo>
-                    <a:pt x="1146338" y="1905978"/>
-                  </a:lnTo>
-                  <a:lnTo>
-                    <a:pt x="1220098" y="1986924"/>
-                  </a:lnTo>
-                  <a:lnTo>
-                    <a:pt x="1293858" y="2064119"/>
-                  </a:lnTo>
-                  <a:lnTo>
-                    <a:pt x="1367618" y="2137736"/>
-                  </a:lnTo>
-                  <a:lnTo>
-                    <a:pt x="1441378" y="2207942"/>
-                  </a:lnTo>
-                  <a:lnTo>
-                    <a:pt x="1515138" y="2274894"/>
-                  </a:lnTo>
-                  <a:lnTo>
-                    <a:pt x="1588898" y="2338743"/>
-                  </a:lnTo>
-                  <a:lnTo>
-                    <a:pt x="1662658" y="2399633"/>
-                  </a:lnTo>
-                  <a:lnTo>
-                    <a:pt x="1736418" y="2457702"/>
-                  </a:lnTo>
-                  <a:lnTo>
-                    <a:pt x="1810178" y="2513079"/>
-                  </a:lnTo>
-                  <a:lnTo>
-                    <a:pt x="1883938" y="2565890"/>
-                  </a:lnTo>
-                  <a:lnTo>
-                    <a:pt x="1957698" y="2616254"/>
-                  </a:lnTo>
-                  <a:lnTo>
-                    <a:pt x="2031458" y="2664283"/>
-                  </a:lnTo>
-                  <a:lnTo>
-                    <a:pt x="2105218" y="2710087"/>
-                  </a:lnTo>
-                  <a:lnTo>
-                    <a:pt x="2178978" y="2753768"/>
-                  </a:lnTo>
-                  <a:lnTo>
-                    <a:pt x="2252738" y="2789952"/>
-                  </a:lnTo>
-                  <a:lnTo>
-                    <a:pt x="2326498" y="2812531"/>
-                  </a:lnTo>
-                  <a:lnTo>
-                    <a:pt x="2400258" y="2834519"/>
-                  </a:lnTo>
-                  <a:lnTo>
-                    <a:pt x="2474018" y="2855932"/>
-                  </a:lnTo>
-                  <a:lnTo>
-                    <a:pt x="2547779" y="2876785"/>
-                  </a:lnTo>
-                  <a:lnTo>
-                    <a:pt x="2621539" y="2897091"/>
-                  </a:lnTo>
-                  <a:lnTo>
-                    <a:pt x="2695299" y="2916867"/>
-                  </a:lnTo>
-                  <a:lnTo>
-                    <a:pt x="2769059" y="2936124"/>
-                  </a:lnTo>
-                  <a:lnTo>
-                    <a:pt x="2842819" y="2954878"/>
-                  </a:lnTo>
-                  <a:lnTo>
-                    <a:pt x="2916579" y="2973140"/>
-                  </a:lnTo>
-                  <a:lnTo>
-                    <a:pt x="2990339" y="2990925"/>
-                  </a:lnTo>
-                  <a:lnTo>
-                    <a:pt x="3064099" y="3008244"/>
-                  </a:lnTo>
-                  <a:lnTo>
-                    <a:pt x="3137859" y="3025110"/>
-                  </a:lnTo>
-                  <a:lnTo>
-                    <a:pt x="3211619" y="3041535"/>
-                  </a:lnTo>
-                  <a:lnTo>
-                    <a:pt x="3285379" y="3057529"/>
-                  </a:lnTo>
-                  <a:lnTo>
-                    <a:pt x="3359139" y="3073105"/>
-                  </a:lnTo>
-                  <a:lnTo>
-                    <a:pt x="3432899" y="3088274"/>
-                  </a:lnTo>
-                  <a:lnTo>
-                    <a:pt x="3506659" y="3103045"/>
-                  </a:lnTo>
-                  <a:lnTo>
-                    <a:pt x="3580419" y="3117430"/>
-                  </a:lnTo>
-                  <a:lnTo>
-                    <a:pt x="3654179" y="3131438"/>
-                  </a:lnTo>
-                  <a:lnTo>
-                    <a:pt x="3727939" y="3145080"/>
-                  </a:lnTo>
-                  <a:lnTo>
-                    <a:pt x="3801699" y="3158364"/>
-                  </a:lnTo>
-                  <a:lnTo>
-                    <a:pt x="3875459" y="3171301"/>
-                  </a:lnTo>
-                  <a:lnTo>
-                    <a:pt x="3949219" y="3183899"/>
-                  </a:lnTo>
-                  <a:lnTo>
-                    <a:pt x="4022979" y="3196168"/>
-                  </a:lnTo>
-                  <a:lnTo>
-                    <a:pt x="4096739" y="3208115"/>
-                  </a:lnTo>
-                  <a:lnTo>
-                    <a:pt x="4170499" y="3219750"/>
-                  </a:lnTo>
-                  <a:lnTo>
-                    <a:pt x="4244259" y="3231080"/>
-                  </a:lnTo>
-                  <a:lnTo>
-                    <a:pt x="4318019" y="3242114"/>
-                  </a:lnTo>
-                  <a:lnTo>
-                    <a:pt x="4391779" y="3252858"/>
-                  </a:lnTo>
-                  <a:lnTo>
-                    <a:pt x="4465539" y="3263322"/>
-                  </a:lnTo>
-                  <a:lnTo>
-                    <a:pt x="4539299" y="3273512"/>
-                  </a:lnTo>
-                  <a:lnTo>
-                    <a:pt x="4613059" y="3283435"/>
-                  </a:lnTo>
-                  <a:lnTo>
-                    <a:pt x="4686819" y="3293098"/>
-                  </a:lnTo>
-                  <a:lnTo>
-                    <a:pt x="4760579" y="3302509"/>
-                  </a:lnTo>
-                  <a:lnTo>
-                    <a:pt x="4834339" y="3311673"/>
-                  </a:lnTo>
-                  <a:lnTo>
-                    <a:pt x="4908099" y="3320597"/>
-                  </a:lnTo>
-                  <a:lnTo>
-                    <a:pt x="4981859" y="3329288"/>
-                  </a:lnTo>
-                  <a:lnTo>
-                    <a:pt x="5055619" y="3337751"/>
-                  </a:lnTo>
-                  <a:lnTo>
-                    <a:pt x="5129379" y="3345993"/>
-                  </a:lnTo>
-                  <a:lnTo>
-                    <a:pt x="5203139" y="3354019"/>
-                  </a:lnTo>
-                  <a:lnTo>
-                    <a:pt x="5276899" y="3361835"/>
-                  </a:lnTo>
-                  <a:lnTo>
-                    <a:pt x="5350659" y="3369446"/>
-                  </a:lnTo>
-                  <a:lnTo>
-                    <a:pt x="5424419" y="3376858"/>
-                  </a:lnTo>
-                  <a:lnTo>
-                    <a:pt x="5498180" y="3384076"/>
-                  </a:lnTo>
-                  <a:lnTo>
-                    <a:pt x="5571940" y="3391106"/>
-                  </a:lnTo>
-                  <a:lnTo>
-                    <a:pt x="5645700" y="3397951"/>
-                  </a:lnTo>
-                  <a:lnTo>
-                    <a:pt x="5719460" y="3404617"/>
-                  </a:lnTo>
-                  <a:lnTo>
-                    <a:pt x="5793220" y="3411109"/>
-                  </a:lnTo>
-                  <a:lnTo>
-                    <a:pt x="5866980" y="3417430"/>
-                  </a:lnTo>
-                  <a:lnTo>
-                    <a:pt x="5940740" y="3423587"/>
-                  </a:lnTo>
-                  <a:lnTo>
-                    <a:pt x="6014500" y="3429582"/>
+                    <a:pt x="39938" y="89315"/>
+                  </a:lnTo>
+                  <a:lnTo>
+                    <a:pt x="113698" y="246624"/>
+                  </a:lnTo>
+                  <a:lnTo>
+                    <a:pt x="187458" y="396642"/>
+                  </a:lnTo>
+                  <a:lnTo>
+                    <a:pt x="261218" y="539708"/>
+                  </a:lnTo>
+                  <a:lnTo>
+                    <a:pt x="334978" y="676144"/>
+                  </a:lnTo>
+                  <a:lnTo>
+                    <a:pt x="408738" y="806258"/>
+                  </a:lnTo>
+                  <a:lnTo>
+                    <a:pt x="482498" y="930341"/>
+                  </a:lnTo>
+                  <a:lnTo>
+                    <a:pt x="556258" y="1048674"/>
+                  </a:lnTo>
+                  <a:lnTo>
+                    <a:pt x="630018" y="1161523"/>
+                  </a:lnTo>
+                  <a:lnTo>
+                    <a:pt x="703778" y="1269142"/>
+                  </a:lnTo>
+                  <a:lnTo>
+                    <a:pt x="777538" y="1371774"/>
+                  </a:lnTo>
+                  <a:lnTo>
+                    <a:pt x="851298" y="1469649"/>
+                  </a:lnTo>
+                  <a:lnTo>
+                    <a:pt x="925058" y="1562989"/>
+                  </a:lnTo>
+                  <a:lnTo>
+                    <a:pt x="998818" y="1652003"/>
+                  </a:lnTo>
+                  <a:lnTo>
+                    <a:pt x="1072578" y="1736892"/>
+                  </a:lnTo>
+                  <a:lnTo>
+                    <a:pt x="1146338" y="1817846"/>
+                  </a:lnTo>
+                  <a:lnTo>
+                    <a:pt x="1220098" y="1895049"/>
+                  </a:lnTo>
+                  <a:lnTo>
+                    <a:pt x="1293858" y="1968675"/>
+                  </a:lnTo>
+                  <a:lnTo>
+                    <a:pt x="1367618" y="2038888"/>
+                  </a:lnTo>
+                  <a:lnTo>
+                    <a:pt x="1441378" y="2105847"/>
+                  </a:lnTo>
+                  <a:lnTo>
+                    <a:pt x="1515138" y="2169703"/>
+                  </a:lnTo>
+                  <a:lnTo>
+                    <a:pt x="1588898" y="2230600"/>
+                  </a:lnTo>
+                  <a:lnTo>
+                    <a:pt x="1662658" y="2288675"/>
+                  </a:lnTo>
+                  <a:lnTo>
+                    <a:pt x="1736418" y="2344058"/>
+                  </a:lnTo>
+                  <a:lnTo>
+                    <a:pt x="1810178" y="2396875"/>
+                  </a:lnTo>
+                  <a:lnTo>
+                    <a:pt x="1883938" y="2447244"/>
+                  </a:lnTo>
+                  <a:lnTo>
+                    <a:pt x="1957698" y="2495279"/>
+                  </a:lnTo>
+                  <a:lnTo>
+                    <a:pt x="2031458" y="2541088"/>
+                  </a:lnTo>
+                  <a:lnTo>
+                    <a:pt x="2105218" y="2584773"/>
+                  </a:lnTo>
+                  <a:lnTo>
+                    <a:pt x="2178978" y="2626435"/>
+                  </a:lnTo>
+                  <a:lnTo>
+                    <a:pt x="2252738" y="2660945"/>
+                  </a:lnTo>
+                  <a:lnTo>
+                    <a:pt x="2326498" y="2682481"/>
+                  </a:lnTo>
+                  <a:lnTo>
+                    <a:pt x="2400258" y="2703452"/>
+                  </a:lnTo>
+                  <a:lnTo>
+                    <a:pt x="2474018" y="2723875"/>
+                  </a:lnTo>
+                  <a:lnTo>
+                    <a:pt x="2547779" y="2743763"/>
+                  </a:lnTo>
+                  <a:lnTo>
+                    <a:pt x="2621539" y="2763131"/>
+                  </a:lnTo>
+                  <a:lnTo>
+                    <a:pt x="2695299" y="2781992"/>
+                  </a:lnTo>
+                  <a:lnTo>
+                    <a:pt x="2769059" y="2800359"/>
+                  </a:lnTo>
+                  <a:lnTo>
+                    <a:pt x="2842819" y="2818245"/>
+                  </a:lnTo>
+                  <a:lnTo>
+                    <a:pt x="2916579" y="2835663"/>
+                  </a:lnTo>
+                  <a:lnTo>
+                    <a:pt x="2990339" y="2852626"/>
+                  </a:lnTo>
+                  <a:lnTo>
+                    <a:pt x="3064099" y="2869144"/>
+                  </a:lnTo>
+                  <a:lnTo>
+                    <a:pt x="3137859" y="2885230"/>
+                  </a:lnTo>
+                  <a:lnTo>
+                    <a:pt x="3211619" y="2900895"/>
+                  </a:lnTo>
+                  <a:lnTo>
+                    <a:pt x="3285379" y="2916150"/>
+                  </a:lnTo>
+                  <a:lnTo>
+                    <a:pt x="3359139" y="2931006"/>
+                  </a:lnTo>
+                  <a:lnTo>
+                    <a:pt x="3432899" y="2945473"/>
+                  </a:lnTo>
+                  <a:lnTo>
+                    <a:pt x="3506659" y="2959561"/>
+                  </a:lnTo>
+                  <a:lnTo>
+                    <a:pt x="3580419" y="2973281"/>
+                  </a:lnTo>
+                  <a:lnTo>
+                    <a:pt x="3654179" y="2986641"/>
+                  </a:lnTo>
+                  <a:lnTo>
+                    <a:pt x="3727939" y="2999652"/>
+                  </a:lnTo>
+                  <a:lnTo>
+                    <a:pt x="3801699" y="3012322"/>
+                  </a:lnTo>
+                  <a:lnTo>
+                    <a:pt x="3875459" y="3024661"/>
+                  </a:lnTo>
+                  <a:lnTo>
+                    <a:pt x="3949219" y="3036677"/>
+                  </a:lnTo>
+                  <a:lnTo>
+                    <a:pt x="4022979" y="3048378"/>
+                  </a:lnTo>
+                  <a:lnTo>
+                    <a:pt x="4096739" y="3059773"/>
+                  </a:lnTo>
+                  <a:lnTo>
+                    <a:pt x="4170499" y="3070870"/>
+                  </a:lnTo>
+                  <a:lnTo>
+                    <a:pt x="4244259" y="3081676"/>
+                  </a:lnTo>
+                  <a:lnTo>
+                    <a:pt x="4318019" y="3092199"/>
+                  </a:lnTo>
+                  <a:lnTo>
+                    <a:pt x="4391779" y="3102447"/>
+                  </a:lnTo>
+                  <a:lnTo>
+                    <a:pt x="4465539" y="3112427"/>
+                  </a:lnTo>
+                  <a:lnTo>
+                    <a:pt x="4539299" y="3122146"/>
+                  </a:lnTo>
+                  <a:lnTo>
+                    <a:pt x="4613059" y="3131610"/>
+                  </a:lnTo>
+                  <a:lnTo>
+                    <a:pt x="4686819" y="3140827"/>
+                  </a:lnTo>
+                  <a:lnTo>
+                    <a:pt x="4760579" y="3149802"/>
+                  </a:lnTo>
+                  <a:lnTo>
+                    <a:pt x="4834339" y="3158542"/>
+                  </a:lnTo>
+                  <a:lnTo>
+                    <a:pt x="4908099" y="3167054"/>
+                  </a:lnTo>
+                  <a:lnTo>
+                    <a:pt x="4981859" y="3175343"/>
+                  </a:lnTo>
+                  <a:lnTo>
+                    <a:pt x="5055619" y="3183415"/>
+                  </a:lnTo>
+                  <a:lnTo>
+                    <a:pt x="5129379" y="3191275"/>
+                  </a:lnTo>
+                  <a:lnTo>
+                    <a:pt x="5203139" y="3198930"/>
+                  </a:lnTo>
+                  <a:lnTo>
+                    <a:pt x="5276899" y="3206385"/>
+                  </a:lnTo>
+                  <a:lnTo>
+                    <a:pt x="5350659" y="3213644"/>
+                  </a:lnTo>
+                  <a:lnTo>
+                    <a:pt x="5424419" y="3220713"/>
+                  </a:lnTo>
+                  <a:lnTo>
+                    <a:pt x="5498180" y="3227598"/>
+                  </a:lnTo>
+                  <a:lnTo>
+                    <a:pt x="5571940" y="3234302"/>
+                  </a:lnTo>
+                  <a:lnTo>
+                    <a:pt x="5645700" y="3240831"/>
+                  </a:lnTo>
+                  <a:lnTo>
+                    <a:pt x="5719460" y="3247189"/>
+                  </a:lnTo>
+                  <a:lnTo>
+                    <a:pt x="5793220" y="3253380"/>
+                  </a:lnTo>
+                  <a:lnTo>
+                    <a:pt x="5866980" y="3259410"/>
+                  </a:lnTo>
+                  <a:lnTo>
+                    <a:pt x="5940740" y="3265281"/>
+                  </a:lnTo>
+                  <a:lnTo>
+                    <a:pt x="6014500" y="3270999"/>
                   </a:lnTo>
                 </a:path>
               </a:pathLst>
@@ -3856,309 +3856,309 @@
           </p:nvSpPr>
           <p:spPr>
             <a:xfrm>
-              <a:off x="817517" y="2540538"/>
-              <a:ext cx="7235830" cy="2932445"/>
+              <a:off x="817517" y="2687700"/>
+              <a:ext cx="7235830" cy="2796850"/>
             </a:xfrm>
             <a:custGeom>
               <a:avLst/>
               <a:pathLst>
-                <a:path w="7235830" h="2932445">
+                <a:path w="7235830" h="2796850">
                   <a:moveTo>
-                    <a:pt x="7235830" y="2932445"/>
+                    <a:pt x="7235830" y="2796850"/>
                   </a:moveTo>
                   <a:lnTo>
-                    <a:pt x="7162070" y="2928741"/>
-                  </a:lnTo>
-                  <a:lnTo>
-                    <a:pt x="7088310" y="2924857"/>
-                  </a:lnTo>
-                  <a:lnTo>
-                    <a:pt x="7014550" y="2920784"/>
-                  </a:lnTo>
-                  <a:lnTo>
-                    <a:pt x="6940789" y="2916513"/>
-                  </a:lnTo>
-                  <a:lnTo>
-                    <a:pt x="6867029" y="2912035"/>
-                  </a:lnTo>
-                  <a:lnTo>
-                    <a:pt x="6793269" y="2907339"/>
-                  </a:lnTo>
-                  <a:lnTo>
-                    <a:pt x="6719509" y="2902415"/>
-                  </a:lnTo>
-                  <a:lnTo>
-                    <a:pt x="6645749" y="2897251"/>
-                  </a:lnTo>
-                  <a:lnTo>
-                    <a:pt x="6571989" y="2891837"/>
-                  </a:lnTo>
-                  <a:lnTo>
-                    <a:pt x="6498229" y="2886159"/>
-                  </a:lnTo>
-                  <a:lnTo>
-                    <a:pt x="6424469" y="2880206"/>
-                  </a:lnTo>
-                  <a:lnTo>
-                    <a:pt x="6350709" y="2873963"/>
-                  </a:lnTo>
-                  <a:lnTo>
-                    <a:pt x="6276949" y="2867417"/>
-                  </a:lnTo>
-                  <a:lnTo>
-                    <a:pt x="6203189" y="2860553"/>
-                  </a:lnTo>
-                  <a:lnTo>
-                    <a:pt x="6129429" y="2853356"/>
-                  </a:lnTo>
-                  <a:lnTo>
-                    <a:pt x="6055669" y="2845808"/>
-                  </a:lnTo>
-                  <a:lnTo>
-                    <a:pt x="5981909" y="2837894"/>
-                  </a:lnTo>
-                  <a:lnTo>
-                    <a:pt x="5908149" y="2829595"/>
-                  </a:lnTo>
-                  <a:lnTo>
-                    <a:pt x="5834389" y="2820893"/>
-                  </a:lnTo>
-                  <a:lnTo>
-                    <a:pt x="5760629" y="2811768"/>
-                  </a:lnTo>
-                  <a:lnTo>
-                    <a:pt x="5686869" y="2802199"/>
-                  </a:lnTo>
-                  <a:lnTo>
-                    <a:pt x="5613109" y="2792166"/>
-                  </a:lnTo>
-                  <a:lnTo>
-                    <a:pt x="5539349" y="2781645"/>
-                  </a:lnTo>
-                  <a:lnTo>
-                    <a:pt x="5465589" y="2770613"/>
-                  </a:lnTo>
-                  <a:lnTo>
-                    <a:pt x="5391829" y="2759044"/>
-                  </a:lnTo>
-                  <a:lnTo>
-                    <a:pt x="5318069" y="2746914"/>
-                  </a:lnTo>
-                  <a:lnTo>
-                    <a:pt x="5244309" y="2734194"/>
-                  </a:lnTo>
-                  <a:lnTo>
-                    <a:pt x="5170549" y="2720856"/>
-                  </a:lnTo>
-                  <a:lnTo>
-                    <a:pt x="5096789" y="2706869"/>
-                  </a:lnTo>
-                  <a:lnTo>
-                    <a:pt x="5023029" y="2692203"/>
-                  </a:lnTo>
-                  <a:lnTo>
-                    <a:pt x="4949269" y="2676825"/>
-                  </a:lnTo>
-                  <a:lnTo>
-                    <a:pt x="4875509" y="2660699"/>
-                  </a:lnTo>
-                  <a:lnTo>
-                    <a:pt x="4801749" y="2643789"/>
-                  </a:lnTo>
-                  <a:lnTo>
-                    <a:pt x="4727989" y="2626057"/>
-                  </a:lnTo>
-                  <a:lnTo>
-                    <a:pt x="4654229" y="2607464"/>
-                  </a:lnTo>
-                  <a:lnTo>
-                    <a:pt x="4580469" y="2587968"/>
-                  </a:lnTo>
-                  <a:lnTo>
-                    <a:pt x="4506709" y="2567524"/>
-                  </a:lnTo>
-                  <a:lnTo>
-                    <a:pt x="4432949" y="2546086"/>
-                  </a:lnTo>
-                  <a:lnTo>
-                    <a:pt x="4359189" y="2523607"/>
-                  </a:lnTo>
-                  <a:lnTo>
-                    <a:pt x="4285429" y="2500035"/>
-                  </a:lnTo>
-                  <a:lnTo>
-                    <a:pt x="4211669" y="2475318"/>
-                  </a:lnTo>
-                  <a:lnTo>
-                    <a:pt x="4137909" y="2449400"/>
-                  </a:lnTo>
-                  <a:lnTo>
-                    <a:pt x="4064149" y="2422222"/>
-                  </a:lnTo>
-                  <a:lnTo>
-                    <a:pt x="3990388" y="2393723"/>
-                  </a:lnTo>
-                  <a:lnTo>
-                    <a:pt x="3916628" y="2363840"/>
-                  </a:lnTo>
-                  <a:lnTo>
-                    <a:pt x="3842868" y="2332504"/>
-                  </a:lnTo>
-                  <a:lnTo>
-                    <a:pt x="3769108" y="2299646"/>
-                  </a:lnTo>
-                  <a:lnTo>
-                    <a:pt x="3695348" y="2265191"/>
-                  </a:lnTo>
-                  <a:lnTo>
-                    <a:pt x="3621588" y="2229062"/>
-                  </a:lnTo>
-                  <a:lnTo>
-                    <a:pt x="3547828" y="2191176"/>
-                  </a:lnTo>
-                  <a:lnTo>
-                    <a:pt x="3474068" y="2151450"/>
-                  </a:lnTo>
-                  <a:lnTo>
-                    <a:pt x="3400308" y="2122791"/>
-                  </a:lnTo>
-                  <a:lnTo>
-                    <a:pt x="3326548" y="2098982"/>
-                  </a:lnTo>
-                  <a:lnTo>
-                    <a:pt x="3252788" y="2074532"/>
-                  </a:lnTo>
-                  <a:lnTo>
-                    <a:pt x="3179028" y="2049426"/>
-                  </a:lnTo>
-                  <a:lnTo>
-                    <a:pt x="3105268" y="2023645"/>
-                  </a:lnTo>
-                  <a:lnTo>
-                    <a:pt x="3031508" y="1997171"/>
-                  </a:lnTo>
-                  <a:lnTo>
-                    <a:pt x="2957748" y="1969985"/>
-                  </a:lnTo>
-                  <a:lnTo>
-                    <a:pt x="2883988" y="1942069"/>
-                  </a:lnTo>
-                  <a:lnTo>
-                    <a:pt x="2810228" y="1913402"/>
-                  </a:lnTo>
-                  <a:lnTo>
-                    <a:pt x="2736468" y="1883965"/>
-                  </a:lnTo>
-                  <a:lnTo>
-                    <a:pt x="2662708" y="1853737"/>
-                  </a:lnTo>
-                  <a:lnTo>
-                    <a:pt x="2588948" y="1822696"/>
-                  </a:lnTo>
-                  <a:lnTo>
-                    <a:pt x="2515188" y="1790822"/>
-                  </a:lnTo>
-                  <a:lnTo>
-                    <a:pt x="2441428" y="1758090"/>
-                  </a:lnTo>
-                  <a:lnTo>
-                    <a:pt x="2367668" y="1724479"/>
-                  </a:lnTo>
-                  <a:lnTo>
-                    <a:pt x="2293908" y="1689964"/>
-                  </a:lnTo>
-                  <a:lnTo>
-                    <a:pt x="2220148" y="1654522"/>
-                  </a:lnTo>
-                  <a:lnTo>
-                    <a:pt x="2146388" y="1618127"/>
-                  </a:lnTo>
-                  <a:lnTo>
-                    <a:pt x="2072628" y="1580754"/>
-                  </a:lnTo>
-                  <a:lnTo>
-                    <a:pt x="1998868" y="1542376"/>
-                  </a:lnTo>
-                  <a:lnTo>
-                    <a:pt x="1925108" y="1502968"/>
-                  </a:lnTo>
-                  <a:lnTo>
-                    <a:pt x="1851348" y="1462499"/>
-                  </a:lnTo>
-                  <a:lnTo>
-                    <a:pt x="1777588" y="1420944"/>
-                  </a:lnTo>
-                  <a:lnTo>
-                    <a:pt x="1703828" y="1378271"/>
-                  </a:lnTo>
-                  <a:lnTo>
-                    <a:pt x="1630068" y="1334452"/>
-                  </a:lnTo>
-                  <a:lnTo>
-                    <a:pt x="1556308" y="1289454"/>
-                  </a:lnTo>
-                  <a:lnTo>
-                    <a:pt x="1482548" y="1243248"/>
-                  </a:lnTo>
-                  <a:lnTo>
-                    <a:pt x="1408788" y="1195799"/>
-                  </a:lnTo>
-                  <a:lnTo>
-                    <a:pt x="1335028" y="1147076"/>
-                  </a:lnTo>
-                  <a:lnTo>
-                    <a:pt x="1261268" y="1097042"/>
-                  </a:lnTo>
-                  <a:lnTo>
-                    <a:pt x="1187508" y="1045664"/>
-                  </a:lnTo>
-                  <a:lnTo>
-                    <a:pt x="1113747" y="992905"/>
-                  </a:lnTo>
-                  <a:lnTo>
-                    <a:pt x="1039987" y="938729"/>
-                  </a:lnTo>
-                  <a:lnTo>
-                    <a:pt x="966227" y="883096"/>
-                  </a:lnTo>
-                  <a:lnTo>
-                    <a:pt x="892467" y="825968"/>
-                  </a:lnTo>
-                  <a:lnTo>
-                    <a:pt x="818707" y="767304"/>
-                  </a:lnTo>
-                  <a:lnTo>
-                    <a:pt x="744947" y="707064"/>
-                  </a:lnTo>
-                  <a:lnTo>
-                    <a:pt x="671187" y="645205"/>
-                  </a:lnTo>
-                  <a:lnTo>
-                    <a:pt x="597427" y="581683"/>
-                  </a:lnTo>
-                  <a:lnTo>
-                    <a:pt x="523667" y="516454"/>
-                  </a:lnTo>
-                  <a:lnTo>
-                    <a:pt x="449907" y="449471"/>
-                  </a:lnTo>
-                  <a:lnTo>
-                    <a:pt x="376147" y="380689"/>
-                  </a:lnTo>
-                  <a:lnTo>
-                    <a:pt x="302387" y="310058"/>
-                  </a:lnTo>
-                  <a:lnTo>
-                    <a:pt x="228627" y="237528"/>
-                  </a:lnTo>
-                  <a:lnTo>
-                    <a:pt x="154867" y="163050"/>
-                  </a:lnTo>
-                  <a:lnTo>
-                    <a:pt x="81107" y="86569"/>
-                  </a:lnTo>
-                  <a:lnTo>
-                    <a:pt x="7347" y="8033"/>
+                    <a:pt x="7162070" y="2793317"/>
+                  </a:lnTo>
+                  <a:lnTo>
+                    <a:pt x="7088310" y="2789612"/>
+                  </a:lnTo>
+                  <a:lnTo>
+                    <a:pt x="7014550" y="2785728"/>
+                  </a:lnTo>
+                  <a:lnTo>
+                    <a:pt x="6940789" y="2781655"/>
+                  </a:lnTo>
+                  <a:lnTo>
+                    <a:pt x="6867029" y="2777383"/>
+                  </a:lnTo>
+                  <a:lnTo>
+                    <a:pt x="6793269" y="2772905"/>
+                  </a:lnTo>
+                  <a:lnTo>
+                    <a:pt x="6719509" y="2768208"/>
+                  </a:lnTo>
+                  <a:lnTo>
+                    <a:pt x="6645749" y="2763283"/>
+                  </a:lnTo>
+                  <a:lnTo>
+                    <a:pt x="6571989" y="2758119"/>
+                  </a:lnTo>
+                  <a:lnTo>
+                    <a:pt x="6498229" y="2752705"/>
+                  </a:lnTo>
+                  <a:lnTo>
+                    <a:pt x="6424469" y="2747026"/>
+                  </a:lnTo>
+                  <a:lnTo>
+                    <a:pt x="6350709" y="2741072"/>
+                  </a:lnTo>
+                  <a:lnTo>
+                    <a:pt x="6276949" y="2734829"/>
+                  </a:lnTo>
+                  <a:lnTo>
+                    <a:pt x="6203189" y="2728282"/>
+                  </a:lnTo>
+                  <a:lnTo>
+                    <a:pt x="6129429" y="2721417"/>
+                  </a:lnTo>
+                  <a:lnTo>
+                    <a:pt x="6055669" y="2714219"/>
+                  </a:lnTo>
+                  <a:lnTo>
+                    <a:pt x="5981909" y="2706671"/>
+                  </a:lnTo>
+                  <a:lnTo>
+                    <a:pt x="5908149" y="2698756"/>
+                  </a:lnTo>
+                  <a:lnTo>
+                    <a:pt x="5834389" y="2690456"/>
+                  </a:lnTo>
+                  <a:lnTo>
+                    <a:pt x="5760629" y="2681753"/>
+                  </a:lnTo>
+                  <a:lnTo>
+                    <a:pt x="5686869" y="2672627"/>
+                  </a:lnTo>
+                  <a:lnTo>
+                    <a:pt x="5613109" y="2663057"/>
+                  </a:lnTo>
+                  <a:lnTo>
+                    <a:pt x="5539349" y="2653023"/>
+                  </a:lnTo>
+                  <a:lnTo>
+                    <a:pt x="5465589" y="2642501"/>
+                  </a:lnTo>
+                  <a:lnTo>
+                    <a:pt x="5391829" y="2631467"/>
+                  </a:lnTo>
+                  <a:lnTo>
+                    <a:pt x="5318069" y="2619898"/>
+                  </a:lnTo>
+                  <a:lnTo>
+                    <a:pt x="5244309" y="2607766"/>
+                  </a:lnTo>
+                  <a:lnTo>
+                    <a:pt x="5170549" y="2595044"/>
+                  </a:lnTo>
+                  <a:lnTo>
+                    <a:pt x="5096789" y="2581705"/>
+                  </a:lnTo>
+                  <a:lnTo>
+                    <a:pt x="5023029" y="2567717"/>
+                  </a:lnTo>
+                  <a:lnTo>
+                    <a:pt x="4949269" y="2553049"/>
+                  </a:lnTo>
+                  <a:lnTo>
+                    <a:pt x="4875509" y="2537669"/>
+                  </a:lnTo>
+                  <a:lnTo>
+                    <a:pt x="4801749" y="2521541"/>
+                  </a:lnTo>
+                  <a:lnTo>
+                    <a:pt x="4727989" y="2504630"/>
+                  </a:lnTo>
+                  <a:lnTo>
+                    <a:pt x="4654229" y="2486896"/>
+                  </a:lnTo>
+                  <a:lnTo>
+                    <a:pt x="4580469" y="2468301"/>
+                  </a:lnTo>
+                  <a:lnTo>
+                    <a:pt x="4506709" y="2448802"/>
+                  </a:lnTo>
+                  <a:lnTo>
+                    <a:pt x="4432949" y="2428356"/>
+                  </a:lnTo>
+                  <a:lnTo>
+                    <a:pt x="4359189" y="2406916"/>
+                  </a:lnTo>
+                  <a:lnTo>
+                    <a:pt x="4285429" y="2384434"/>
+                  </a:lnTo>
+                  <a:lnTo>
+                    <a:pt x="4211669" y="2360860"/>
+                  </a:lnTo>
+                  <a:lnTo>
+                    <a:pt x="4137909" y="2336140"/>
+                  </a:lnTo>
+                  <a:lnTo>
+                    <a:pt x="4064149" y="2310219"/>
+                  </a:lnTo>
+                  <a:lnTo>
+                    <a:pt x="3990388" y="2283039"/>
+                  </a:lnTo>
+                  <a:lnTo>
+                    <a:pt x="3916628" y="2254537"/>
+                  </a:lnTo>
+                  <a:lnTo>
+                    <a:pt x="3842868" y="2224650"/>
+                  </a:lnTo>
+                  <a:lnTo>
+                    <a:pt x="3769108" y="2193311"/>
+                  </a:lnTo>
+                  <a:lnTo>
+                    <a:pt x="3695348" y="2160449"/>
+                  </a:lnTo>
+                  <a:lnTo>
+                    <a:pt x="3621588" y="2125991"/>
+                  </a:lnTo>
+                  <a:lnTo>
+                    <a:pt x="3547828" y="2089857"/>
+                  </a:lnTo>
+                  <a:lnTo>
+                    <a:pt x="3474068" y="2051968"/>
+                  </a:lnTo>
+                  <a:lnTo>
+                    <a:pt x="3400308" y="2024634"/>
+                  </a:lnTo>
+                  <a:lnTo>
+                    <a:pt x="3326548" y="2001925"/>
+                  </a:lnTo>
+                  <a:lnTo>
+                    <a:pt x="3252788" y="1978607"/>
+                  </a:lnTo>
+                  <a:lnTo>
+                    <a:pt x="3179028" y="1954661"/>
+                  </a:lnTo>
+                  <a:lnTo>
+                    <a:pt x="3105268" y="1930072"/>
+                  </a:lnTo>
+                  <a:lnTo>
+                    <a:pt x="3031508" y="1904822"/>
+                  </a:lnTo>
+                  <a:lnTo>
+                    <a:pt x="2957748" y="1878894"/>
+                  </a:lnTo>
+                  <a:lnTo>
+                    <a:pt x="2883988" y="1852268"/>
+                  </a:lnTo>
+                  <a:lnTo>
+                    <a:pt x="2810228" y="1824927"/>
+                  </a:lnTo>
+                  <a:lnTo>
+                    <a:pt x="2736468" y="1796851"/>
+                  </a:lnTo>
+                  <a:lnTo>
+                    <a:pt x="2662708" y="1768021"/>
+                  </a:lnTo>
+                  <a:lnTo>
+                    <a:pt x="2588948" y="1738416"/>
+                  </a:lnTo>
+                  <a:lnTo>
+                    <a:pt x="2515188" y="1708015"/>
+                  </a:lnTo>
+                  <a:lnTo>
+                    <a:pt x="2441428" y="1676797"/>
+                  </a:lnTo>
+                  <a:lnTo>
+                    <a:pt x="2367668" y="1644739"/>
+                  </a:lnTo>
+                  <a:lnTo>
+                    <a:pt x="2293908" y="1611821"/>
+                  </a:lnTo>
+                  <a:lnTo>
+                    <a:pt x="2220148" y="1578017"/>
+                  </a:lnTo>
+                  <a:lnTo>
+                    <a:pt x="2146388" y="1543305"/>
+                  </a:lnTo>
+                  <a:lnTo>
+                    <a:pt x="2072628" y="1507660"/>
+                  </a:lnTo>
+                  <a:lnTo>
+                    <a:pt x="1998868" y="1471058"/>
+                  </a:lnTo>
+                  <a:lnTo>
+                    <a:pt x="1925108" y="1433471"/>
+                  </a:lnTo>
+                  <a:lnTo>
+                    <a:pt x="1851348" y="1394874"/>
+                  </a:lnTo>
+                  <a:lnTo>
+                    <a:pt x="1777588" y="1355240"/>
+                  </a:lnTo>
+                  <a:lnTo>
+                    <a:pt x="1703828" y="1314540"/>
+                  </a:lnTo>
+                  <a:lnTo>
+                    <a:pt x="1630068" y="1272747"/>
+                  </a:lnTo>
+                  <a:lnTo>
+                    <a:pt x="1556308" y="1229830"/>
+                  </a:lnTo>
+                  <a:lnTo>
+                    <a:pt x="1482548" y="1185760"/>
+                  </a:lnTo>
+                  <a:lnTo>
+                    <a:pt x="1408788" y="1140506"/>
+                  </a:lnTo>
+                  <a:lnTo>
+                    <a:pt x="1335028" y="1094035"/>
+                  </a:lnTo>
+                  <a:lnTo>
+                    <a:pt x="1261268" y="1046315"/>
+                  </a:lnTo>
+                  <a:lnTo>
+                    <a:pt x="1187508" y="997313"/>
+                  </a:lnTo>
+                  <a:lnTo>
+                    <a:pt x="1113747" y="946994"/>
+                  </a:lnTo>
+                  <a:lnTo>
+                    <a:pt x="1039987" y="895322"/>
+                  </a:lnTo>
+                  <a:lnTo>
+                    <a:pt x="966227" y="842262"/>
+                  </a:lnTo>
+                  <a:lnTo>
+                    <a:pt x="892467" y="787775"/>
+                  </a:lnTo>
+                  <a:lnTo>
+                    <a:pt x="818707" y="731824"/>
+                  </a:lnTo>
+                  <a:lnTo>
+                    <a:pt x="744947" y="674369"/>
+                  </a:lnTo>
+                  <a:lnTo>
+                    <a:pt x="671187" y="615371"/>
+                  </a:lnTo>
+                  <a:lnTo>
+                    <a:pt x="597427" y="554786"/>
+                  </a:lnTo>
+                  <a:lnTo>
+                    <a:pt x="523667" y="492573"/>
+                  </a:lnTo>
+                  <a:lnTo>
+                    <a:pt x="449907" y="428688"/>
+                  </a:lnTo>
+                  <a:lnTo>
+                    <a:pt x="376147" y="363086"/>
+                  </a:lnTo>
+                  <a:lnTo>
+                    <a:pt x="302387" y="295721"/>
+                  </a:lnTo>
+                  <a:lnTo>
+                    <a:pt x="228627" y="226545"/>
+                  </a:lnTo>
+                  <a:lnTo>
+                    <a:pt x="154867" y="155510"/>
+                  </a:lnTo>
+                  <a:lnTo>
+                    <a:pt x="81107" y="82566"/>
+                  </a:lnTo>
+                  <a:lnTo>
+                    <a:pt x="7347" y="7662"/>
                   </a:lnTo>
                   <a:lnTo>
                     <a:pt x="0" y="0"/>
@@ -4181,288 +4181,288 @@
           </p:nvSpPr>
           <p:spPr>
             <a:xfrm>
-              <a:off x="1407383" y="1896563"/>
-              <a:ext cx="6645964" cy="3522249"/>
+              <a:off x="1407383" y="2073503"/>
+              <a:ext cx="6645964" cy="3359382"/>
             </a:xfrm>
             <a:custGeom>
               <a:avLst/>
               <a:pathLst>
-                <a:path w="6645964" h="3522249">
+                <a:path w="6645964" h="3359382">
                   <a:moveTo>
                     <a:pt x="0" y="0"/>
                   </a:moveTo>
                   <a:lnTo>
-                    <a:pt x="7561" y="14055"/>
-                  </a:lnTo>
-                  <a:lnTo>
-                    <a:pt x="81321" y="146175"/>
-                  </a:lnTo>
-                  <a:lnTo>
-                    <a:pt x="155081" y="273498"/>
-                  </a:lnTo>
-                  <a:lnTo>
-                    <a:pt x="228841" y="396198"/>
-                  </a:lnTo>
-                  <a:lnTo>
-                    <a:pt x="302602" y="514443"/>
-                  </a:lnTo>
-                  <a:lnTo>
-                    <a:pt x="376362" y="628394"/>
-                  </a:lnTo>
-                  <a:lnTo>
-                    <a:pt x="450122" y="738207"/>
-                  </a:lnTo>
-                  <a:lnTo>
-                    <a:pt x="523882" y="844033"/>
-                  </a:lnTo>
-                  <a:lnTo>
-                    <a:pt x="597642" y="946016"/>
-                  </a:lnTo>
-                  <a:lnTo>
-                    <a:pt x="671402" y="1044296"/>
-                  </a:lnTo>
-                  <a:lnTo>
-                    <a:pt x="745162" y="1139008"/>
-                  </a:lnTo>
-                  <a:lnTo>
-                    <a:pt x="818922" y="1230280"/>
-                  </a:lnTo>
-                  <a:lnTo>
-                    <a:pt x="892682" y="1318238"/>
-                  </a:lnTo>
-                  <a:lnTo>
-                    <a:pt x="966442" y="1403003"/>
-                  </a:lnTo>
-                  <a:lnTo>
-                    <a:pt x="1040202" y="1484689"/>
-                  </a:lnTo>
-                  <a:lnTo>
-                    <a:pt x="1113962" y="1563410"/>
-                  </a:lnTo>
-                  <a:lnTo>
-                    <a:pt x="1187722" y="1639272"/>
-                  </a:lnTo>
-                  <a:lnTo>
-                    <a:pt x="1261482" y="1712379"/>
-                  </a:lnTo>
-                  <a:lnTo>
-                    <a:pt x="1335242" y="1782832"/>
-                  </a:lnTo>
-                  <a:lnTo>
-                    <a:pt x="1409002" y="1850726"/>
-                  </a:lnTo>
-                  <a:lnTo>
-                    <a:pt x="1482762" y="1916156"/>
-                  </a:lnTo>
-                  <a:lnTo>
-                    <a:pt x="1556522" y="1979209"/>
-                  </a:lnTo>
-                  <a:lnTo>
-                    <a:pt x="1630282" y="2039973"/>
-                  </a:lnTo>
-                  <a:lnTo>
-                    <a:pt x="1704042" y="2098530"/>
-                  </a:lnTo>
-                  <a:lnTo>
-                    <a:pt x="1777802" y="2154962"/>
-                  </a:lnTo>
-                  <a:lnTo>
-                    <a:pt x="1851562" y="2209344"/>
-                  </a:lnTo>
-                  <a:lnTo>
-                    <a:pt x="1925322" y="2261751"/>
-                  </a:lnTo>
-                  <a:lnTo>
-                    <a:pt x="1999082" y="2312256"/>
-                  </a:lnTo>
-                  <a:lnTo>
-                    <a:pt x="2072842" y="2360927"/>
-                  </a:lnTo>
-                  <a:lnTo>
-                    <a:pt x="2146602" y="2407830"/>
-                  </a:lnTo>
-                  <a:lnTo>
-                    <a:pt x="2220362" y="2453030"/>
-                  </a:lnTo>
-                  <a:lnTo>
-                    <a:pt x="2294122" y="2496589"/>
-                  </a:lnTo>
-                  <a:lnTo>
-                    <a:pt x="2367882" y="2538567"/>
-                  </a:lnTo>
-                  <a:lnTo>
-                    <a:pt x="2441642" y="2579020"/>
-                  </a:lnTo>
-                  <a:lnTo>
-                    <a:pt x="2515402" y="2618004"/>
-                  </a:lnTo>
-                  <a:lnTo>
-                    <a:pt x="2589162" y="2655573"/>
-                  </a:lnTo>
-                  <a:lnTo>
-                    <a:pt x="2662922" y="2691777"/>
-                  </a:lnTo>
-                  <a:lnTo>
-                    <a:pt x="2736682" y="2726667"/>
-                  </a:lnTo>
-                  <a:lnTo>
-                    <a:pt x="2810442" y="2760290"/>
-                  </a:lnTo>
-                  <a:lnTo>
-                    <a:pt x="2884202" y="2792693"/>
-                  </a:lnTo>
-                  <a:lnTo>
-                    <a:pt x="2957962" y="2823918"/>
-                  </a:lnTo>
-                  <a:lnTo>
-                    <a:pt x="3031722" y="2854010"/>
-                  </a:lnTo>
-                  <a:lnTo>
-                    <a:pt x="3105482" y="2883009"/>
-                  </a:lnTo>
-                  <a:lnTo>
-                    <a:pt x="3179242" y="2910955"/>
-                  </a:lnTo>
-                  <a:lnTo>
-                    <a:pt x="3253003" y="2937887"/>
-                  </a:lnTo>
-                  <a:lnTo>
-                    <a:pt x="3326763" y="2963840"/>
-                  </a:lnTo>
-                  <a:lnTo>
-                    <a:pt x="3400523" y="2988851"/>
-                  </a:lnTo>
-                  <a:lnTo>
-                    <a:pt x="3474283" y="3012954"/>
-                  </a:lnTo>
-                  <a:lnTo>
-                    <a:pt x="3548043" y="3036182"/>
-                  </a:lnTo>
-                  <a:lnTo>
-                    <a:pt x="3621803" y="3058566"/>
-                  </a:lnTo>
-                  <a:lnTo>
-                    <a:pt x="3695563" y="3080137"/>
-                  </a:lnTo>
-                  <a:lnTo>
-                    <a:pt x="3769323" y="3100926"/>
-                  </a:lnTo>
-                  <a:lnTo>
-                    <a:pt x="3843083" y="3120959"/>
-                  </a:lnTo>
-                  <a:lnTo>
-                    <a:pt x="3916843" y="3140265"/>
-                  </a:lnTo>
-                  <a:lnTo>
-                    <a:pt x="3990603" y="3158870"/>
-                  </a:lnTo>
-                  <a:lnTo>
-                    <a:pt x="4064363" y="3176799"/>
-                  </a:lnTo>
-                  <a:lnTo>
-                    <a:pt x="4138123" y="3194078"/>
-                  </a:lnTo>
-                  <a:lnTo>
-                    <a:pt x="4211883" y="3210729"/>
-                  </a:lnTo>
-                  <a:lnTo>
-                    <a:pt x="4285643" y="3226775"/>
-                  </a:lnTo>
-                  <a:lnTo>
-                    <a:pt x="4359403" y="3242239"/>
-                  </a:lnTo>
-                  <a:lnTo>
-                    <a:pt x="4433163" y="3257141"/>
-                  </a:lnTo>
-                  <a:lnTo>
-                    <a:pt x="4506923" y="3271502"/>
-                  </a:lnTo>
-                  <a:lnTo>
-                    <a:pt x="4580683" y="3285341"/>
-                  </a:lnTo>
-                  <a:lnTo>
-                    <a:pt x="4654443" y="3298678"/>
-                  </a:lnTo>
-                  <a:lnTo>
-                    <a:pt x="4728203" y="3311531"/>
-                  </a:lnTo>
-                  <a:lnTo>
-                    <a:pt x="4801963" y="3323917"/>
-                  </a:lnTo>
-                  <a:lnTo>
-                    <a:pt x="4875723" y="3335854"/>
-                  </a:lnTo>
-                  <a:lnTo>
-                    <a:pt x="4949483" y="3347357"/>
-                  </a:lnTo>
-                  <a:lnTo>
-                    <a:pt x="5023243" y="3358442"/>
-                  </a:lnTo>
-                  <a:lnTo>
-                    <a:pt x="5097003" y="3369125"/>
-                  </a:lnTo>
-                  <a:lnTo>
-                    <a:pt x="5170763" y="3379419"/>
-                  </a:lnTo>
-                  <a:lnTo>
-                    <a:pt x="5244523" y="3389340"/>
-                  </a:lnTo>
-                  <a:lnTo>
-                    <a:pt x="5318283" y="3398901"/>
-                  </a:lnTo>
-                  <a:lnTo>
-                    <a:pt x="5392043" y="3408115"/>
-                  </a:lnTo>
-                  <a:lnTo>
-                    <a:pt x="5465803" y="3416994"/>
-                  </a:lnTo>
-                  <a:lnTo>
-                    <a:pt x="5539563" y="3425550"/>
-                  </a:lnTo>
-                  <a:lnTo>
-                    <a:pt x="5613323" y="3433796"/>
-                  </a:lnTo>
-                  <a:lnTo>
-                    <a:pt x="5687083" y="3441743"/>
-                  </a:lnTo>
-                  <a:lnTo>
-                    <a:pt x="5760843" y="3449401"/>
-                  </a:lnTo>
-                  <a:lnTo>
-                    <a:pt x="5834603" y="3456781"/>
-                  </a:lnTo>
-                  <a:lnTo>
-                    <a:pt x="5908363" y="3463893"/>
-                  </a:lnTo>
-                  <a:lnTo>
-                    <a:pt x="5982123" y="3470747"/>
-                  </a:lnTo>
-                  <a:lnTo>
-                    <a:pt x="6055883" y="3477351"/>
-                  </a:lnTo>
-                  <a:lnTo>
-                    <a:pt x="6129643" y="3483716"/>
-                  </a:lnTo>
-                  <a:lnTo>
-                    <a:pt x="6203404" y="3489850"/>
-                  </a:lnTo>
-                  <a:lnTo>
-                    <a:pt x="6277164" y="3495761"/>
-                  </a:lnTo>
-                  <a:lnTo>
-                    <a:pt x="6350924" y="3501458"/>
-                  </a:lnTo>
-                  <a:lnTo>
-                    <a:pt x="6424684" y="3506948"/>
-                  </a:lnTo>
-                  <a:lnTo>
-                    <a:pt x="6498444" y="3512238"/>
-                  </a:lnTo>
-                  <a:lnTo>
-                    <a:pt x="6572204" y="3517336"/>
-                  </a:lnTo>
-                  <a:lnTo>
-                    <a:pt x="6645964" y="3522249"/>
+                    <a:pt x="7561" y="13405"/>
+                  </a:lnTo>
+                  <a:lnTo>
+                    <a:pt x="81321" y="139416"/>
+                  </a:lnTo>
+                  <a:lnTo>
+                    <a:pt x="155081" y="260852"/>
+                  </a:lnTo>
+                  <a:lnTo>
+                    <a:pt x="228841" y="377878"/>
+                  </a:lnTo>
+                  <a:lnTo>
+                    <a:pt x="302602" y="490655"/>
+                  </a:lnTo>
+                  <a:lnTo>
+                    <a:pt x="376362" y="599337"/>
+                  </a:lnTo>
+                  <a:lnTo>
+                    <a:pt x="450122" y="704073"/>
+                  </a:lnTo>
+                  <a:lnTo>
+                    <a:pt x="523882" y="805005"/>
+                  </a:lnTo>
+                  <a:lnTo>
+                    <a:pt x="597642" y="902273"/>
+                  </a:lnTo>
+                  <a:lnTo>
+                    <a:pt x="671402" y="996008"/>
+                  </a:lnTo>
+                  <a:lnTo>
+                    <a:pt x="745162" y="1086340"/>
+                  </a:lnTo>
+                  <a:lnTo>
+                    <a:pt x="818922" y="1173392"/>
+                  </a:lnTo>
+                  <a:lnTo>
+                    <a:pt x="892682" y="1257283"/>
+                  </a:lnTo>
+                  <a:lnTo>
+                    <a:pt x="966442" y="1338128"/>
+                  </a:lnTo>
+                  <a:lnTo>
+                    <a:pt x="1040202" y="1416038"/>
+                  </a:lnTo>
+                  <a:lnTo>
+                    <a:pt x="1113962" y="1491118"/>
+                  </a:lnTo>
+                  <a:lnTo>
+                    <a:pt x="1187722" y="1563472"/>
+                  </a:lnTo>
+                  <a:lnTo>
+                    <a:pt x="1261482" y="1633199"/>
+                  </a:lnTo>
+                  <a:lnTo>
+                    <a:pt x="1335242" y="1700394"/>
+                  </a:lnTo>
+                  <a:lnTo>
+                    <a:pt x="1409002" y="1765149"/>
+                  </a:lnTo>
+                  <a:lnTo>
+                    <a:pt x="1482762" y="1827553"/>
+                  </a:lnTo>
+                  <a:lnTo>
+                    <a:pt x="1556522" y="1887691"/>
+                  </a:lnTo>
+                  <a:lnTo>
+                    <a:pt x="1630282" y="1945645"/>
+                  </a:lnTo>
+                  <a:lnTo>
+                    <a:pt x="1704042" y="2001495"/>
+                  </a:lnTo>
+                  <a:lnTo>
+                    <a:pt x="1777802" y="2055317"/>
+                  </a:lnTo>
+                  <a:lnTo>
+                    <a:pt x="1851562" y="2107185"/>
+                  </a:lnTo>
+                  <a:lnTo>
+                    <a:pt x="1925322" y="2157169"/>
+                  </a:lnTo>
+                  <a:lnTo>
+                    <a:pt x="1999082" y="2205338"/>
+                  </a:lnTo>
+                  <a:lnTo>
+                    <a:pt x="2072842" y="2251758"/>
+                  </a:lnTo>
+                  <a:lnTo>
+                    <a:pt x="2146602" y="2296493"/>
+                  </a:lnTo>
+                  <a:lnTo>
+                    <a:pt x="2220362" y="2339603"/>
+                  </a:lnTo>
+                  <a:lnTo>
+                    <a:pt x="2294122" y="2381148"/>
+                  </a:lnTo>
+                  <a:lnTo>
+                    <a:pt x="2367882" y="2421184"/>
+                  </a:lnTo>
+                  <a:lnTo>
+                    <a:pt x="2441642" y="2459767"/>
+                  </a:lnTo>
+                  <a:lnTo>
+                    <a:pt x="2515402" y="2496949"/>
+                  </a:lnTo>
+                  <a:lnTo>
+                    <a:pt x="2589162" y="2532780"/>
+                  </a:lnTo>
+                  <a:lnTo>
+                    <a:pt x="2662922" y="2567311"/>
+                  </a:lnTo>
+                  <a:lnTo>
+                    <a:pt x="2736682" y="2600587"/>
+                  </a:lnTo>
+                  <a:lnTo>
+                    <a:pt x="2810442" y="2632656"/>
+                  </a:lnTo>
+                  <a:lnTo>
+                    <a:pt x="2884202" y="2663559"/>
+                  </a:lnTo>
+                  <a:lnTo>
+                    <a:pt x="2957962" y="2693341"/>
+                  </a:lnTo>
+                  <a:lnTo>
+                    <a:pt x="3031722" y="2722042"/>
+                  </a:lnTo>
+                  <a:lnTo>
+                    <a:pt x="3105482" y="2749700"/>
+                  </a:lnTo>
+                  <a:lnTo>
+                    <a:pt x="3179242" y="2776354"/>
+                  </a:lnTo>
+                  <a:lnTo>
+                    <a:pt x="3253003" y="2802040"/>
+                  </a:lnTo>
+                  <a:lnTo>
+                    <a:pt x="3326763" y="2826793"/>
+                  </a:lnTo>
+                  <a:lnTo>
+                    <a:pt x="3400523" y="2850648"/>
+                  </a:lnTo>
+                  <a:lnTo>
+                    <a:pt x="3474283" y="2873636"/>
+                  </a:lnTo>
+                  <a:lnTo>
+                    <a:pt x="3548043" y="2895790"/>
+                  </a:lnTo>
+                  <a:lnTo>
+                    <a:pt x="3621803" y="2917139"/>
+                  </a:lnTo>
+                  <a:lnTo>
+                    <a:pt x="3695563" y="2937713"/>
+                  </a:lnTo>
+                  <a:lnTo>
+                    <a:pt x="3769323" y="2957540"/>
+                  </a:lnTo>
+                  <a:lnTo>
+                    <a:pt x="3843083" y="2976647"/>
+                  </a:lnTo>
+                  <a:lnTo>
+                    <a:pt x="3916843" y="2995060"/>
+                  </a:lnTo>
+                  <a:lnTo>
+                    <a:pt x="3990603" y="3012805"/>
+                  </a:lnTo>
+                  <a:lnTo>
+                    <a:pt x="4064363" y="3029905"/>
+                  </a:lnTo>
+                  <a:lnTo>
+                    <a:pt x="4138123" y="3046385"/>
+                  </a:lnTo>
+                  <a:lnTo>
+                    <a:pt x="4211883" y="3062266"/>
+                  </a:lnTo>
+                  <a:lnTo>
+                    <a:pt x="4285643" y="3077570"/>
+                  </a:lnTo>
+                  <a:lnTo>
+                    <a:pt x="4359403" y="3092319"/>
+                  </a:lnTo>
+                  <a:lnTo>
+                    <a:pt x="4433163" y="3106532"/>
+                  </a:lnTo>
+                  <a:lnTo>
+                    <a:pt x="4506923" y="3120229"/>
+                  </a:lnTo>
+                  <a:lnTo>
+                    <a:pt x="4580683" y="3133428"/>
+                  </a:lnTo>
+                  <a:lnTo>
+                    <a:pt x="4654443" y="3146149"/>
+                  </a:lnTo>
+                  <a:lnTo>
+                    <a:pt x="4728203" y="3158407"/>
+                  </a:lnTo>
+                  <a:lnTo>
+                    <a:pt x="4801963" y="3170221"/>
+                  </a:lnTo>
+                  <a:lnTo>
+                    <a:pt x="4875723" y="3181605"/>
+                  </a:lnTo>
+                  <a:lnTo>
+                    <a:pt x="4949483" y="3192576"/>
+                  </a:lnTo>
+                  <a:lnTo>
+                    <a:pt x="5023243" y="3203149"/>
+                  </a:lnTo>
+                  <a:lnTo>
+                    <a:pt x="5097003" y="3213337"/>
+                  </a:lnTo>
+                  <a:lnTo>
+                    <a:pt x="5170763" y="3223156"/>
+                  </a:lnTo>
+                  <a:lnTo>
+                    <a:pt x="5244523" y="3232619"/>
+                  </a:lnTo>
+                  <a:lnTo>
+                    <a:pt x="5318283" y="3241737"/>
+                  </a:lnTo>
+                  <a:lnTo>
+                    <a:pt x="5392043" y="3250525"/>
+                  </a:lnTo>
+                  <a:lnTo>
+                    <a:pt x="5465803" y="3258993"/>
+                  </a:lnTo>
+                  <a:lnTo>
+                    <a:pt x="5539563" y="3267154"/>
+                  </a:lnTo>
+                  <a:lnTo>
+                    <a:pt x="5613323" y="3275019"/>
+                  </a:lnTo>
+                  <a:lnTo>
+                    <a:pt x="5687083" y="3282598"/>
+                  </a:lnTo>
+                  <a:lnTo>
+                    <a:pt x="5760843" y="3289902"/>
+                  </a:lnTo>
+                  <a:lnTo>
+                    <a:pt x="5834603" y="3296941"/>
+                  </a:lnTo>
+                  <a:lnTo>
+                    <a:pt x="5908363" y="3303724"/>
+                  </a:lnTo>
+                  <a:lnTo>
+                    <a:pt x="5982123" y="3310260"/>
+                  </a:lnTo>
+                  <a:lnTo>
+                    <a:pt x="6055883" y="3316560"/>
+                  </a:lnTo>
+                  <a:lnTo>
+                    <a:pt x="6129643" y="3322631"/>
+                  </a:lnTo>
+                  <a:lnTo>
+                    <a:pt x="6203404" y="3328481"/>
+                  </a:lnTo>
+                  <a:lnTo>
+                    <a:pt x="6277164" y="3334119"/>
+                  </a:lnTo>
+                  <a:lnTo>
+                    <a:pt x="6350924" y="3339552"/>
+                  </a:lnTo>
+                  <a:lnTo>
+                    <a:pt x="6424684" y="3344788"/>
+                  </a:lnTo>
+                  <a:lnTo>
+                    <a:pt x="6498444" y="3349833"/>
+                  </a:lnTo>
+                  <a:lnTo>
+                    <a:pt x="6572204" y="3354696"/>
+                  </a:lnTo>
+                  <a:lnTo>
+                    <a:pt x="6645964" y="3359382"/>
                   </a:lnTo>
                 </a:path>
               </a:pathLst>
@@ -4491,7 +4491,7 @@
           </p:nvSpPr>
           <p:spPr>
             <a:xfrm>
-              <a:off x="817517" y="4679530"/>
+              <a:off x="817517" y="4727786"/>
               <a:ext cx="7799693" cy="0"/>
             </a:xfrm>
             <a:custGeom>
@@ -4534,15 +4534,15 @@
           </p:nvSpPr>
           <p:spPr>
             <a:xfrm>
-              <a:off x="4269157" y="1896563"/>
-              <a:ext cx="0" cy="3826579"/>
+              <a:off x="4269157" y="2073503"/>
+              <a:ext cx="0" cy="3649639"/>
             </a:xfrm>
             <a:custGeom>
               <a:avLst/>
               <a:pathLst>
-                <a:path w="0" h="3826579">
+                <a:path w="0" h="3649639">
                   <a:moveTo>
-                    <a:pt x="0" y="3826579"/>
+                    <a:pt x="0" y="3649639"/>
                   </a:moveTo>
                   <a:lnTo>
                     <a:pt x="0" y="0"/>
@@ -4577,7 +4577,7 @@
           </p:nvSpPr>
           <p:spPr>
             <a:xfrm>
-              <a:off x="692708" y="5509156"/>
+              <a:off x="692708" y="5517199"/>
               <a:ext cx="62179" cy="80101"/>
             </a:xfrm>
             <a:prstGeom prst="rect">
@@ -4623,7 +4623,7 @@
           </p:nvSpPr>
           <p:spPr>
             <a:xfrm>
-              <a:off x="692708" y="4639479"/>
+              <a:off x="692708" y="4687735"/>
               <a:ext cx="62179" cy="80101"/>
             </a:xfrm>
             <a:prstGeom prst="rect">
@@ -4669,7 +4669,7 @@
           </p:nvSpPr>
           <p:spPr>
             <a:xfrm>
-              <a:off x="692708" y="3769802"/>
+              <a:off x="692708" y="3858272"/>
               <a:ext cx="62179" cy="80101"/>
             </a:xfrm>
             <a:prstGeom prst="rect">
@@ -4715,7 +4715,7 @@
           </p:nvSpPr>
           <p:spPr>
             <a:xfrm>
-              <a:off x="692708" y="2900125"/>
+              <a:off x="692708" y="3028808"/>
               <a:ext cx="62179" cy="80101"/>
             </a:xfrm>
             <a:prstGeom prst="rect">
@@ -4761,7 +4761,7 @@
           </p:nvSpPr>
           <p:spPr>
             <a:xfrm>
-              <a:off x="692708" y="2030448"/>
+              <a:off x="692708" y="2199345"/>
               <a:ext cx="62179" cy="80101"/>
             </a:xfrm>
             <a:prstGeom prst="rect">
@@ -5037,7 +5037,7 @@
           </p:nvSpPr>
           <p:spPr>
             <a:xfrm rot="-5400000">
-              <a:off x="68446" y="3759743"/>
+              <a:off x="68446" y="3848213"/>
               <a:ext cx="1016904" cy="100218"/>
             </a:xfrm>
             <a:prstGeom prst="rect">
@@ -5078,6 +5078,52 @@
         <p:sp>
           <p:nvSpPr>
             <p:cNvPr id="38" name="tx38"/>
+            <p:cNvSpPr/>
+            <p:nvPr/>
+          </p:nvSpPr>
+          <p:spPr>
+            <a:xfrm>
+              <a:off x="817517" y="1896563"/>
+              <a:ext cx="5626211" cy="82021"/>
+            </a:xfrm>
+            <a:prstGeom prst="rect">
+              <a:avLst/>
+            </a:prstGeom>
+            <a:noFill/>
+          </p:spPr>
+          <p:txBody>
+            <a:bodyPr lIns="0" rIns="0" tIns="0" bIns="0" anchorCtr="1" anchor="ctr" wrap="none"/>
+            <a:lstStyle/>
+            <a:p>
+              <a:pPr algn="l" marL="0" marR="0" indent="0">
+                <a:lnSpc>
+                  <a:spcPts val="900"/>
+                </a:lnSpc>
+                <a:spcBef>
+                  <a:spcPts val="0"/>
+                </a:spcBef>
+                <a:spcAft>
+                  <a:spcPts val="0"/>
+                </a:spcAft>
+              </a:pPr>
+              <a:r>
+                <a:rPr sz="900">
+                  <a:solidFill>
+                    <a:srgbClr val="404040">
+                      <a:alpha val="100000"/>
+                    </a:srgbClr>
+                  </a:solidFill>
+                  <a:latin typeface="Helvetica"/>
+                  <a:cs typeface="Helvetica"/>
+                </a:rPr>
+                <a:t>subHR per 0.1 ratio decline: 1.56 (1.38-1.77)  |  per IQR decline (Δ = 0.29): 3.67 (2.54-5.31)  |  IQR: [0.85, 1.15]</a:t>
+              </a:r>
+            </a:p>
+          </p:txBody>
+        </p:sp>
+        <p:sp>
+          <p:nvSpPr>
+            <p:cNvPr id="39" name="tx39"/>
             <p:cNvSpPr/>
             <p:nvPr/>
           </p:nvSpPr>

--- a/docs/pptx/whole/jx-linsubhr-ratio-grade3.pptx
+++ b/docs/pptx/whole/jx-linsubhr-ratio-grade3.pptx
@@ -5084,7 +5084,7 @@
           <p:spPr>
             <a:xfrm>
               <a:off x="817517" y="1896563"/>
-              <a:ext cx="5626211" cy="82021"/>
+              <a:ext cx="6236116" cy="82021"/>
             </a:xfrm>
             <a:prstGeom prst="rect">
               <a:avLst/>
@@ -5116,7 +5116,7 @@
                   <a:latin typeface="Helvetica"/>
                   <a:cs typeface="Helvetica"/>
                 </a:rPr>
-                <a:t>subHR per 0.1 ratio decline: 1.56 (1.38-1.77)  |  per IQR decline (Δ = 0.29): 3.67 (2.54-5.31)  |  IQR: [0.85, 1.15]</a:t>
+                <a:t>subHR per 0.1 ratio decline: 1.56 (1.38-1.77), p = &lt;0.001  |  per IQR decline (Δ = 0.29): 3.67 (2.54-5.31)  |  IQR: [0.85, 1.15]</a:t>
               </a:r>
             </a:p>
           </p:txBody>

--- a/docs/pptx/whole/jx-linsubhr-ratio-grade3.pptx
+++ b/docs/pptx/whole/jx-linsubhr-ratio-grade3.pptx
@@ -5084,7 +5084,7 @@
           <p:spPr>
             <a:xfrm>
               <a:off x="817517" y="1896563"/>
-              <a:ext cx="6236116" cy="82021"/>
+              <a:ext cx="6899879" cy="82021"/>
             </a:xfrm>
             <a:prstGeom prst="rect">
               <a:avLst/>
@@ -5116,7 +5116,7 @@
                   <a:latin typeface="Helvetica"/>
                   <a:cs typeface="Helvetica"/>
                 </a:rPr>
-                <a:t>subHR per 0.1 ratio decline: 1.56 (1.38-1.77), p = &lt;0.001  |  per IQR decline (Δ = 0.29): 3.67 (2.54-5.31)  |  IQR: [0.85, 1.15]</a:t>
+                <a:t>subHR per 0.1 ratio decline: 1.56 (1.38-1.77), p_Bonf = &lt;0.001 (n = 6)  |  per IQR decline (Δ = 0.29): 3.67 (2.54-5.31)  |  IQR: [0.85, 1.15]</a:t>
               </a:r>
             </a:p>
           </p:txBody>

--- a/docs/pptx/whole/jx-linsubhr-ratio-grade3.pptx
+++ b/docs/pptx/whole/jx-linsubhr-ratio-grade3.pptx
@@ -2443,7 +2443,7 @@
           </p:nvSpPr>
           <p:spPr>
             <a:xfrm>
-              <a:off x="1615213" y="2073503"/>
+              <a:off x="1365633" y="2073503"/>
               <a:ext cx="0" cy="3649639"/>
             </a:xfrm>
             <a:custGeom>
@@ -2486,7 +2486,7 @@
           </p:nvSpPr>
           <p:spPr>
             <a:xfrm>
-              <a:off x="3387871" y="2073503"/>
+              <a:off x="3517243" y="2073503"/>
               <a:ext cx="0" cy="3649639"/>
             </a:xfrm>
             <a:custGeom>
@@ -2529,7 +2529,7 @@
           </p:nvSpPr>
           <p:spPr>
             <a:xfrm>
-              <a:off x="5160528" y="2073503"/>
+              <a:off x="5668852" y="2073503"/>
               <a:ext cx="0" cy="3649639"/>
             </a:xfrm>
             <a:custGeom>
@@ -2572,7 +2572,7 @@
           </p:nvSpPr>
           <p:spPr>
             <a:xfrm>
-              <a:off x="6933186" y="2073503"/>
+              <a:off x="7820461" y="2073503"/>
               <a:ext cx="0" cy="3649639"/>
             </a:xfrm>
             <a:custGeom>
@@ -2830,7 +2830,7 @@
           </p:nvSpPr>
           <p:spPr>
             <a:xfrm>
-              <a:off x="2501542" y="2073503"/>
+              <a:off x="2441438" y="2073503"/>
               <a:ext cx="0" cy="3649639"/>
             </a:xfrm>
             <a:custGeom>
@@ -2873,7 +2873,7 @@
           </p:nvSpPr>
           <p:spPr>
             <a:xfrm>
-              <a:off x="4274200" y="2073503"/>
+              <a:off x="4593047" y="2073503"/>
               <a:ext cx="0" cy="3649639"/>
             </a:xfrm>
             <a:custGeom>
@@ -2916,7 +2916,7 @@
           </p:nvSpPr>
           <p:spPr>
             <a:xfrm>
-              <a:off x="6046857" y="2073503"/>
+              <a:off x="6744657" y="2073503"/>
               <a:ext cx="0" cy="3649639"/>
             </a:xfrm>
             <a:custGeom>
@@ -2953,610 +2953,567 @@
         </p:sp>
         <p:sp>
           <p:nvSpPr>
-            <p:cNvPr id="20" name="pl20"/>
+            <p:cNvPr id="20" name="pg20"/>
             <p:cNvSpPr/>
             <p:nvPr/>
           </p:nvSpPr>
           <p:spPr>
             <a:xfrm>
-              <a:off x="7819515" y="2073503"/>
-              <a:ext cx="0" cy="3649639"/>
+              <a:off x="1172049" y="2073503"/>
+              <a:ext cx="7090630" cy="3411047"/>
             </a:xfrm>
             <a:custGeom>
               <a:avLst/>
               <a:pathLst>
-                <a:path w="0" h="3649639">
+                <a:path w="7090630" h="3411047">
                   <a:moveTo>
-                    <a:pt x="0" y="3649639"/>
+                    <a:pt x="1250424" y="0"/>
                   </a:moveTo>
                   <a:lnTo>
-                    <a:pt x="0" y="0"/>
-                  </a:lnTo>
-                  <a:lnTo>
-                    <a:pt x="0" y="0"/>
-                  </a:lnTo>
-                </a:path>
-              </a:pathLst>
-            </a:custGeom>
-            <a:ln w="13550" cap="flat">
-              <a:solidFill>
-                <a:srgbClr val="EBEBEB">
-                  <a:alpha val="100000"/>
-                </a:srgbClr>
-              </a:solidFill>
-              <a:prstDash val="solid"/>
-              <a:round/>
-            </a:ln>
-          </p:spPr>
-          <p:txBody>
-            <a:bodyPr/>
-            <a:lstStyle/>
-            <a:p/>
-          </p:txBody>
-        </p:sp>
-        <p:sp>
-          <p:nvSpPr>
-            <p:cNvPr id="21" name="pg21"/>
-            <p:cNvSpPr/>
-            <p:nvPr/>
-          </p:nvSpPr>
-          <p:spPr>
-            <a:xfrm>
-              <a:off x="817517" y="2073503"/>
-              <a:ext cx="7235830" cy="3411047"/>
-            </a:xfrm>
-            <a:custGeom>
-              <a:avLst/>
-              <a:pathLst>
-                <a:path w="7235830" h="3411047">
-                  <a:moveTo>
-                    <a:pt x="1221329" y="0"/>
-                  </a:moveTo>
-                  <a:lnTo>
-                    <a:pt x="1261268" y="89315"/>
-                  </a:lnTo>
-                  <a:lnTo>
-                    <a:pt x="1335028" y="246624"/>
-                  </a:lnTo>
-                  <a:lnTo>
-                    <a:pt x="1408788" y="396642"/>
-                  </a:lnTo>
-                  <a:lnTo>
-                    <a:pt x="1482548" y="539708"/>
-                  </a:lnTo>
-                  <a:lnTo>
-                    <a:pt x="1556308" y="676144"/>
-                  </a:lnTo>
-                  <a:lnTo>
-                    <a:pt x="1630068" y="806258"/>
-                  </a:lnTo>
-                  <a:lnTo>
-                    <a:pt x="1703828" y="930341"/>
-                  </a:lnTo>
-                  <a:lnTo>
-                    <a:pt x="1777588" y="1048674"/>
-                  </a:lnTo>
-                  <a:lnTo>
-                    <a:pt x="1851348" y="1161523"/>
-                  </a:lnTo>
-                  <a:lnTo>
-                    <a:pt x="1925108" y="1269142"/>
-                  </a:lnTo>
-                  <a:lnTo>
-                    <a:pt x="1998868" y="1371774"/>
-                  </a:lnTo>
-                  <a:lnTo>
-                    <a:pt x="2072628" y="1469649"/>
-                  </a:lnTo>
-                  <a:lnTo>
-                    <a:pt x="2146388" y="1562989"/>
-                  </a:lnTo>
-                  <a:lnTo>
-                    <a:pt x="2220148" y="1652003"/>
-                  </a:lnTo>
-                  <a:lnTo>
-                    <a:pt x="2293908" y="1736892"/>
-                  </a:lnTo>
-                  <a:lnTo>
-                    <a:pt x="2367668" y="1817846"/>
-                  </a:lnTo>
-                  <a:lnTo>
-                    <a:pt x="2441428" y="1895049"/>
-                  </a:lnTo>
-                  <a:lnTo>
-                    <a:pt x="2515188" y="1968675"/>
-                  </a:lnTo>
-                  <a:lnTo>
-                    <a:pt x="2588948" y="2038888"/>
-                  </a:lnTo>
-                  <a:lnTo>
-                    <a:pt x="2662708" y="2105847"/>
-                  </a:lnTo>
-                  <a:lnTo>
-                    <a:pt x="2736468" y="2169703"/>
-                  </a:lnTo>
-                  <a:lnTo>
-                    <a:pt x="2810228" y="2230600"/>
-                  </a:lnTo>
-                  <a:lnTo>
-                    <a:pt x="2883988" y="2288675"/>
-                  </a:lnTo>
-                  <a:lnTo>
-                    <a:pt x="2957748" y="2344058"/>
-                  </a:lnTo>
-                  <a:lnTo>
-                    <a:pt x="3031508" y="2396875"/>
-                  </a:lnTo>
-                  <a:lnTo>
-                    <a:pt x="3105268" y="2447244"/>
-                  </a:lnTo>
-                  <a:lnTo>
-                    <a:pt x="3179028" y="2495279"/>
-                  </a:lnTo>
-                  <a:lnTo>
-                    <a:pt x="3252788" y="2541088"/>
-                  </a:lnTo>
-                  <a:lnTo>
-                    <a:pt x="3326548" y="2584773"/>
-                  </a:lnTo>
-                  <a:lnTo>
-                    <a:pt x="3400308" y="2626435"/>
-                  </a:lnTo>
-                  <a:lnTo>
-                    <a:pt x="3474068" y="2660945"/>
-                  </a:lnTo>
-                  <a:lnTo>
-                    <a:pt x="3547828" y="2682481"/>
-                  </a:lnTo>
-                  <a:lnTo>
-                    <a:pt x="3621588" y="2703452"/>
-                  </a:lnTo>
-                  <a:lnTo>
-                    <a:pt x="3695348" y="2723875"/>
-                  </a:lnTo>
-                  <a:lnTo>
-                    <a:pt x="3769108" y="2743763"/>
-                  </a:lnTo>
-                  <a:lnTo>
-                    <a:pt x="3842868" y="2763131"/>
-                  </a:lnTo>
-                  <a:lnTo>
-                    <a:pt x="3916628" y="2781992"/>
-                  </a:lnTo>
-                  <a:lnTo>
-                    <a:pt x="3990388" y="2800359"/>
-                  </a:lnTo>
-                  <a:lnTo>
-                    <a:pt x="4064149" y="2818245"/>
-                  </a:lnTo>
-                  <a:lnTo>
-                    <a:pt x="4137909" y="2835663"/>
-                  </a:lnTo>
-                  <a:lnTo>
-                    <a:pt x="4211669" y="2852626"/>
-                  </a:lnTo>
-                  <a:lnTo>
-                    <a:pt x="4285429" y="2869144"/>
-                  </a:lnTo>
-                  <a:lnTo>
-                    <a:pt x="4359189" y="2885230"/>
-                  </a:lnTo>
-                  <a:lnTo>
-                    <a:pt x="4432949" y="2900895"/>
-                  </a:lnTo>
-                  <a:lnTo>
-                    <a:pt x="4506709" y="2916150"/>
-                  </a:lnTo>
-                  <a:lnTo>
-                    <a:pt x="4580469" y="2931006"/>
-                  </a:lnTo>
-                  <a:lnTo>
-                    <a:pt x="4654229" y="2945473"/>
-                  </a:lnTo>
-                  <a:lnTo>
-                    <a:pt x="4727989" y="2959561"/>
-                  </a:lnTo>
-                  <a:lnTo>
-                    <a:pt x="4801749" y="2973281"/>
-                  </a:lnTo>
-                  <a:lnTo>
-                    <a:pt x="4875509" y="2986641"/>
-                  </a:lnTo>
-                  <a:lnTo>
-                    <a:pt x="4949269" y="2999652"/>
-                  </a:lnTo>
-                  <a:lnTo>
-                    <a:pt x="5023029" y="3012322"/>
-                  </a:lnTo>
-                  <a:lnTo>
-                    <a:pt x="5096789" y="3024661"/>
-                  </a:lnTo>
-                  <a:lnTo>
-                    <a:pt x="5170549" y="3036677"/>
-                  </a:lnTo>
-                  <a:lnTo>
-                    <a:pt x="5244309" y="3048378"/>
-                  </a:lnTo>
-                  <a:lnTo>
-                    <a:pt x="5318069" y="3059773"/>
-                  </a:lnTo>
-                  <a:lnTo>
-                    <a:pt x="5391829" y="3070870"/>
-                  </a:lnTo>
-                  <a:lnTo>
-                    <a:pt x="5465589" y="3081676"/>
-                  </a:lnTo>
-                  <a:lnTo>
-                    <a:pt x="5539349" y="3092199"/>
-                  </a:lnTo>
-                  <a:lnTo>
-                    <a:pt x="5613109" y="3102447"/>
-                  </a:lnTo>
-                  <a:lnTo>
-                    <a:pt x="5686869" y="3112427"/>
-                  </a:lnTo>
-                  <a:lnTo>
-                    <a:pt x="5760629" y="3122146"/>
-                  </a:lnTo>
-                  <a:lnTo>
-                    <a:pt x="5834389" y="3131610"/>
-                  </a:lnTo>
-                  <a:lnTo>
-                    <a:pt x="5908149" y="3140827"/>
-                  </a:lnTo>
-                  <a:lnTo>
-                    <a:pt x="5981909" y="3149802"/>
-                  </a:lnTo>
-                  <a:lnTo>
-                    <a:pt x="6055669" y="3158542"/>
-                  </a:lnTo>
-                  <a:lnTo>
-                    <a:pt x="6129429" y="3167054"/>
-                  </a:lnTo>
-                  <a:lnTo>
-                    <a:pt x="6203189" y="3175343"/>
-                  </a:lnTo>
-                  <a:lnTo>
-                    <a:pt x="6276949" y="3183415"/>
-                  </a:lnTo>
-                  <a:lnTo>
-                    <a:pt x="6350709" y="3191275"/>
-                  </a:lnTo>
-                  <a:lnTo>
-                    <a:pt x="6424469" y="3198930"/>
-                  </a:lnTo>
-                  <a:lnTo>
-                    <a:pt x="6498229" y="3206385"/>
-                  </a:lnTo>
-                  <a:lnTo>
-                    <a:pt x="6571989" y="3213644"/>
-                  </a:lnTo>
-                  <a:lnTo>
-                    <a:pt x="6645749" y="3220713"/>
-                  </a:lnTo>
-                  <a:lnTo>
-                    <a:pt x="6719509" y="3227598"/>
-                  </a:lnTo>
-                  <a:lnTo>
-                    <a:pt x="6793269" y="3234302"/>
-                  </a:lnTo>
-                  <a:lnTo>
-                    <a:pt x="6867029" y="3240831"/>
-                  </a:lnTo>
-                  <a:lnTo>
-                    <a:pt x="6940789" y="3247189"/>
-                  </a:lnTo>
-                  <a:lnTo>
-                    <a:pt x="7014550" y="3253380"/>
-                  </a:lnTo>
-                  <a:lnTo>
-                    <a:pt x="7088310" y="3259410"/>
-                  </a:lnTo>
-                  <a:lnTo>
-                    <a:pt x="7162070" y="3265281"/>
-                  </a:lnTo>
-                  <a:lnTo>
-                    <a:pt x="7235830" y="3270999"/>
-                  </a:lnTo>
-                  <a:lnTo>
-                    <a:pt x="7235830" y="3411047"/>
-                  </a:lnTo>
-                  <a:lnTo>
-                    <a:pt x="7162070" y="3407514"/>
-                  </a:lnTo>
-                  <a:lnTo>
-                    <a:pt x="7088310" y="3403810"/>
-                  </a:lnTo>
-                  <a:lnTo>
-                    <a:pt x="7014550" y="3399925"/>
-                  </a:lnTo>
-                  <a:lnTo>
-                    <a:pt x="6940789" y="3395852"/>
-                  </a:lnTo>
-                  <a:lnTo>
-                    <a:pt x="6867029" y="3391581"/>
-                  </a:lnTo>
-                  <a:lnTo>
-                    <a:pt x="6793269" y="3387102"/>
-                  </a:lnTo>
-                  <a:lnTo>
-                    <a:pt x="6719509" y="3382406"/>
-                  </a:lnTo>
-                  <a:lnTo>
-                    <a:pt x="6645749" y="3377481"/>
-                  </a:lnTo>
-                  <a:lnTo>
-                    <a:pt x="6571989" y="3372317"/>
-                  </a:lnTo>
-                  <a:lnTo>
-                    <a:pt x="6498229" y="3366902"/>
-                  </a:lnTo>
-                  <a:lnTo>
-                    <a:pt x="6424469" y="3361224"/>
-                  </a:lnTo>
-                  <a:lnTo>
-                    <a:pt x="6350709" y="3355270"/>
-                  </a:lnTo>
-                  <a:lnTo>
-                    <a:pt x="6276949" y="3349027"/>
-                  </a:lnTo>
-                  <a:lnTo>
-                    <a:pt x="6203189" y="3342480"/>
-                  </a:lnTo>
-                  <a:lnTo>
-                    <a:pt x="6129429" y="3335615"/>
-                  </a:lnTo>
-                  <a:lnTo>
-                    <a:pt x="6055669" y="3328416"/>
-                  </a:lnTo>
-                  <a:lnTo>
-                    <a:pt x="5981909" y="3320868"/>
-                  </a:lnTo>
-                  <a:lnTo>
-                    <a:pt x="5908149" y="3312953"/>
-                  </a:lnTo>
-                  <a:lnTo>
-                    <a:pt x="5834389" y="3304653"/>
-                  </a:lnTo>
-                  <a:lnTo>
-                    <a:pt x="5760629" y="3295950"/>
-                  </a:lnTo>
-                  <a:lnTo>
-                    <a:pt x="5686869" y="3286824"/>
-                  </a:lnTo>
-                  <a:lnTo>
-                    <a:pt x="5613109" y="3277255"/>
-                  </a:lnTo>
-                  <a:lnTo>
-                    <a:pt x="5539349" y="3267220"/>
-                  </a:lnTo>
-                  <a:lnTo>
-                    <a:pt x="5465589" y="3256698"/>
-                  </a:lnTo>
-                  <a:lnTo>
-                    <a:pt x="5391829" y="3245665"/>
-                  </a:lnTo>
-                  <a:lnTo>
-                    <a:pt x="5318069" y="3234095"/>
-                  </a:lnTo>
-                  <a:lnTo>
-                    <a:pt x="5244309" y="3221963"/>
-                  </a:lnTo>
-                  <a:lnTo>
-                    <a:pt x="5170549" y="3209242"/>
-                  </a:lnTo>
-                  <a:lnTo>
-                    <a:pt x="5096789" y="3195902"/>
-                  </a:lnTo>
-                  <a:lnTo>
-                    <a:pt x="5023029" y="3181914"/>
-                  </a:lnTo>
-                  <a:lnTo>
-                    <a:pt x="4949269" y="3167247"/>
-                  </a:lnTo>
-                  <a:lnTo>
-                    <a:pt x="4875509" y="3151866"/>
-                  </a:lnTo>
-                  <a:lnTo>
-                    <a:pt x="4801749" y="3135738"/>
-                  </a:lnTo>
-                  <a:lnTo>
-                    <a:pt x="4727989" y="3118827"/>
-                  </a:lnTo>
-                  <a:lnTo>
-                    <a:pt x="4654229" y="3101094"/>
-                  </a:lnTo>
-                  <a:lnTo>
-                    <a:pt x="4580469" y="3082499"/>
-                  </a:lnTo>
-                  <a:lnTo>
-                    <a:pt x="4506709" y="3063000"/>
-                  </a:lnTo>
-                  <a:lnTo>
-                    <a:pt x="4432949" y="3042553"/>
-                  </a:lnTo>
-                  <a:lnTo>
-                    <a:pt x="4359189" y="3021114"/>
-                  </a:lnTo>
-                  <a:lnTo>
-                    <a:pt x="4285429" y="2998632"/>
-                  </a:lnTo>
-                  <a:lnTo>
-                    <a:pt x="4211669" y="2975058"/>
-                  </a:lnTo>
-                  <a:lnTo>
-                    <a:pt x="4137909" y="2950338"/>
-                  </a:lnTo>
-                  <a:lnTo>
-                    <a:pt x="4064149" y="2924417"/>
-                  </a:lnTo>
-                  <a:lnTo>
-                    <a:pt x="3990388" y="2897236"/>
-                  </a:lnTo>
-                  <a:lnTo>
-                    <a:pt x="3916628" y="2868734"/>
-                  </a:lnTo>
-                  <a:lnTo>
-                    <a:pt x="3842868" y="2838848"/>
-                  </a:lnTo>
-                  <a:lnTo>
-                    <a:pt x="3769108" y="2807509"/>
-                  </a:lnTo>
-                  <a:lnTo>
-                    <a:pt x="3695348" y="2774647"/>
-                  </a:lnTo>
-                  <a:lnTo>
-                    <a:pt x="3621588" y="2740188"/>
-                  </a:lnTo>
-                  <a:lnTo>
-                    <a:pt x="3547828" y="2704055"/>
-                  </a:lnTo>
-                  <a:lnTo>
-                    <a:pt x="3474068" y="2666165"/>
-                  </a:lnTo>
-                  <a:lnTo>
-                    <a:pt x="3400308" y="2638831"/>
-                  </a:lnTo>
-                  <a:lnTo>
-                    <a:pt x="3326548" y="2616123"/>
-                  </a:lnTo>
-                  <a:lnTo>
-                    <a:pt x="3252788" y="2592804"/>
-                  </a:lnTo>
-                  <a:lnTo>
-                    <a:pt x="3179028" y="2568859"/>
-                  </a:lnTo>
-                  <a:lnTo>
-                    <a:pt x="3105268" y="2544270"/>
-                  </a:lnTo>
-                  <a:lnTo>
-                    <a:pt x="3031508" y="2519020"/>
-                  </a:lnTo>
-                  <a:lnTo>
-                    <a:pt x="2957748" y="2493091"/>
-                  </a:lnTo>
-                  <a:lnTo>
-                    <a:pt x="2883988" y="2466466"/>
-                  </a:lnTo>
-                  <a:lnTo>
-                    <a:pt x="2810228" y="2439125"/>
-                  </a:lnTo>
-                  <a:lnTo>
-                    <a:pt x="2736468" y="2411049"/>
-                  </a:lnTo>
-                  <a:lnTo>
-                    <a:pt x="2662708" y="2382218"/>
-                  </a:lnTo>
-                  <a:lnTo>
-                    <a:pt x="2588948" y="2352613"/>
-                  </a:lnTo>
-                  <a:lnTo>
-                    <a:pt x="2515188" y="2322212"/>
-                  </a:lnTo>
-                  <a:lnTo>
-                    <a:pt x="2441428" y="2290994"/>
-                  </a:lnTo>
-                  <a:lnTo>
-                    <a:pt x="2367668" y="2258937"/>
-                  </a:lnTo>
-                  <a:lnTo>
-                    <a:pt x="2293908" y="2226018"/>
-                  </a:lnTo>
-                  <a:lnTo>
-                    <a:pt x="2220148" y="2192215"/>
-                  </a:lnTo>
-                  <a:lnTo>
-                    <a:pt x="2146388" y="2157503"/>
-                  </a:lnTo>
-                  <a:lnTo>
-                    <a:pt x="2072628" y="2121858"/>
-                  </a:lnTo>
-                  <a:lnTo>
-                    <a:pt x="1998868" y="2085255"/>
-                  </a:lnTo>
-                  <a:lnTo>
-                    <a:pt x="1925108" y="2047668"/>
-                  </a:lnTo>
-                  <a:lnTo>
-                    <a:pt x="1851348" y="2009071"/>
-                  </a:lnTo>
-                  <a:lnTo>
-                    <a:pt x="1777588" y="1969437"/>
-                  </a:lnTo>
-                  <a:lnTo>
-                    <a:pt x="1703828" y="1928738"/>
-                  </a:lnTo>
-                  <a:lnTo>
-                    <a:pt x="1630068" y="1886944"/>
-                  </a:lnTo>
-                  <a:lnTo>
-                    <a:pt x="1556308" y="1844028"/>
-                  </a:lnTo>
-                  <a:lnTo>
-                    <a:pt x="1482548" y="1799958"/>
-                  </a:lnTo>
-                  <a:lnTo>
-                    <a:pt x="1408788" y="1754703"/>
-                  </a:lnTo>
-                  <a:lnTo>
-                    <a:pt x="1335028" y="1708233"/>
-                  </a:lnTo>
-                  <a:lnTo>
-                    <a:pt x="1261268" y="1660513"/>
-                  </a:lnTo>
-                  <a:lnTo>
-                    <a:pt x="1187508" y="1611511"/>
-                  </a:lnTo>
-                  <a:lnTo>
-                    <a:pt x="1113747" y="1561191"/>
-                  </a:lnTo>
-                  <a:lnTo>
-                    <a:pt x="1039987" y="1509520"/>
-                  </a:lnTo>
-                  <a:lnTo>
-                    <a:pt x="966227" y="1456459"/>
-                  </a:lnTo>
-                  <a:lnTo>
-                    <a:pt x="892467" y="1401973"/>
-                  </a:lnTo>
-                  <a:lnTo>
-                    <a:pt x="818707" y="1346022"/>
-                  </a:lnTo>
-                  <a:lnTo>
-                    <a:pt x="744947" y="1288567"/>
-                  </a:lnTo>
-                  <a:lnTo>
-                    <a:pt x="671187" y="1229568"/>
-                  </a:lnTo>
-                  <a:lnTo>
-                    <a:pt x="597427" y="1168983"/>
-                  </a:lnTo>
-                  <a:lnTo>
-                    <a:pt x="523667" y="1106770"/>
-                  </a:lnTo>
-                  <a:lnTo>
-                    <a:pt x="449907" y="1042885"/>
-                  </a:lnTo>
-                  <a:lnTo>
-                    <a:pt x="376147" y="977283"/>
-                  </a:lnTo>
-                  <a:lnTo>
-                    <a:pt x="302387" y="909918"/>
-                  </a:lnTo>
-                  <a:lnTo>
-                    <a:pt x="228627" y="840743"/>
-                  </a:lnTo>
-                  <a:lnTo>
-                    <a:pt x="154867" y="769708"/>
-                  </a:lnTo>
-                  <a:lnTo>
-                    <a:pt x="81107" y="696764"/>
-                  </a:lnTo>
-                  <a:lnTo>
-                    <a:pt x="7347" y="621859"/>
-                  </a:lnTo>
-                  <a:lnTo>
-                    <a:pt x="0" y="614197"/>
+                    <a:pt x="1289205" y="89315"/>
+                  </a:lnTo>
+                  <a:lnTo>
+                    <a:pt x="1360827" y="246624"/>
+                  </a:lnTo>
+                  <a:lnTo>
+                    <a:pt x="1432450" y="396642"/>
+                  </a:lnTo>
+                  <a:lnTo>
+                    <a:pt x="1504073" y="539708"/>
+                  </a:lnTo>
+                  <a:lnTo>
+                    <a:pt x="1575695" y="676144"/>
+                  </a:lnTo>
+                  <a:lnTo>
+                    <a:pt x="1647318" y="806258"/>
+                  </a:lnTo>
+                  <a:lnTo>
+                    <a:pt x="1718940" y="930341"/>
+                  </a:lnTo>
+                  <a:lnTo>
+                    <a:pt x="1790563" y="1048674"/>
+                  </a:lnTo>
+                  <a:lnTo>
+                    <a:pt x="1862185" y="1161523"/>
+                  </a:lnTo>
+                  <a:lnTo>
+                    <a:pt x="1933808" y="1269142"/>
+                  </a:lnTo>
+                  <a:lnTo>
+                    <a:pt x="2005430" y="1371774"/>
+                  </a:lnTo>
+                  <a:lnTo>
+                    <a:pt x="2077053" y="1469649"/>
+                  </a:lnTo>
+                  <a:lnTo>
+                    <a:pt x="2148675" y="1562989"/>
+                  </a:lnTo>
+                  <a:lnTo>
+                    <a:pt x="2220298" y="1652003"/>
+                  </a:lnTo>
+                  <a:lnTo>
+                    <a:pt x="2291920" y="1736892"/>
+                  </a:lnTo>
+                  <a:lnTo>
+                    <a:pt x="2363543" y="1817846"/>
+                  </a:lnTo>
+                  <a:lnTo>
+                    <a:pt x="2435165" y="1895049"/>
+                  </a:lnTo>
+                  <a:lnTo>
+                    <a:pt x="2506788" y="1968675"/>
+                  </a:lnTo>
+                  <a:lnTo>
+                    <a:pt x="2578410" y="2038888"/>
+                  </a:lnTo>
+                  <a:lnTo>
+                    <a:pt x="2650033" y="2105847"/>
+                  </a:lnTo>
+                  <a:lnTo>
+                    <a:pt x="2721655" y="2169703"/>
+                  </a:lnTo>
+                  <a:lnTo>
+                    <a:pt x="2793278" y="2230600"/>
+                  </a:lnTo>
+                  <a:lnTo>
+                    <a:pt x="2864901" y="2288675"/>
+                  </a:lnTo>
+                  <a:lnTo>
+                    <a:pt x="2936523" y="2344058"/>
+                  </a:lnTo>
+                  <a:lnTo>
+                    <a:pt x="3008146" y="2396875"/>
+                  </a:lnTo>
+                  <a:lnTo>
+                    <a:pt x="3079768" y="2447244"/>
+                  </a:lnTo>
+                  <a:lnTo>
+                    <a:pt x="3151391" y="2495279"/>
+                  </a:lnTo>
+                  <a:lnTo>
+                    <a:pt x="3223013" y="2541088"/>
+                  </a:lnTo>
+                  <a:lnTo>
+                    <a:pt x="3294636" y="2584773"/>
+                  </a:lnTo>
+                  <a:lnTo>
+                    <a:pt x="3366258" y="2626435"/>
+                  </a:lnTo>
+                  <a:lnTo>
+                    <a:pt x="3437881" y="2660945"/>
+                  </a:lnTo>
+                  <a:lnTo>
+                    <a:pt x="3509503" y="2682481"/>
+                  </a:lnTo>
+                  <a:lnTo>
+                    <a:pt x="3581126" y="2703452"/>
+                  </a:lnTo>
+                  <a:lnTo>
+                    <a:pt x="3652748" y="2723875"/>
+                  </a:lnTo>
+                  <a:lnTo>
+                    <a:pt x="3724371" y="2743763"/>
+                  </a:lnTo>
+                  <a:lnTo>
+                    <a:pt x="3795993" y="2763131"/>
+                  </a:lnTo>
+                  <a:lnTo>
+                    <a:pt x="3867616" y="2781992"/>
+                  </a:lnTo>
+                  <a:lnTo>
+                    <a:pt x="3939238" y="2800359"/>
+                  </a:lnTo>
+                  <a:lnTo>
+                    <a:pt x="4010861" y="2818245"/>
+                  </a:lnTo>
+                  <a:lnTo>
+                    <a:pt x="4082483" y="2835663"/>
+                  </a:lnTo>
+                  <a:lnTo>
+                    <a:pt x="4154106" y="2852626"/>
+                  </a:lnTo>
+                  <a:lnTo>
+                    <a:pt x="4225729" y="2869144"/>
+                  </a:lnTo>
+                  <a:lnTo>
+                    <a:pt x="4297351" y="2885230"/>
+                  </a:lnTo>
+                  <a:lnTo>
+                    <a:pt x="4368974" y="2900895"/>
+                  </a:lnTo>
+                  <a:lnTo>
+                    <a:pt x="4440596" y="2916150"/>
+                  </a:lnTo>
+                  <a:lnTo>
+                    <a:pt x="4512219" y="2931006"/>
+                  </a:lnTo>
+                  <a:lnTo>
+                    <a:pt x="4583841" y="2945473"/>
+                  </a:lnTo>
+                  <a:lnTo>
+                    <a:pt x="4655464" y="2959561"/>
+                  </a:lnTo>
+                  <a:lnTo>
+                    <a:pt x="4727086" y="2973281"/>
+                  </a:lnTo>
+                  <a:lnTo>
+                    <a:pt x="4798709" y="2986641"/>
+                  </a:lnTo>
+                  <a:lnTo>
+                    <a:pt x="4870331" y="2999652"/>
+                  </a:lnTo>
+                  <a:lnTo>
+                    <a:pt x="4941954" y="3012322"/>
+                  </a:lnTo>
+                  <a:lnTo>
+                    <a:pt x="5013576" y="3024661"/>
+                  </a:lnTo>
+                  <a:lnTo>
+                    <a:pt x="5085199" y="3036677"/>
+                  </a:lnTo>
+                  <a:lnTo>
+                    <a:pt x="5156821" y="3048378"/>
+                  </a:lnTo>
+                  <a:lnTo>
+                    <a:pt x="5228444" y="3059773"/>
+                  </a:lnTo>
+                  <a:lnTo>
+                    <a:pt x="5300066" y="3070870"/>
+                  </a:lnTo>
+                  <a:lnTo>
+                    <a:pt x="5371689" y="3081676"/>
+                  </a:lnTo>
+                  <a:lnTo>
+                    <a:pt x="5443311" y="3092199"/>
+                  </a:lnTo>
+                  <a:lnTo>
+                    <a:pt x="5514934" y="3102447"/>
+                  </a:lnTo>
+                  <a:lnTo>
+                    <a:pt x="5586557" y="3112427"/>
+                  </a:lnTo>
+                  <a:lnTo>
+                    <a:pt x="5658179" y="3122146"/>
+                  </a:lnTo>
+                  <a:lnTo>
+                    <a:pt x="5729802" y="3131610"/>
+                  </a:lnTo>
+                  <a:lnTo>
+                    <a:pt x="5801424" y="3140827"/>
+                  </a:lnTo>
+                  <a:lnTo>
+                    <a:pt x="5873047" y="3149802"/>
+                  </a:lnTo>
+                  <a:lnTo>
+                    <a:pt x="5944669" y="3158542"/>
+                  </a:lnTo>
+                  <a:lnTo>
+                    <a:pt x="6016292" y="3167054"/>
+                  </a:lnTo>
+                  <a:lnTo>
+                    <a:pt x="6087914" y="3175343"/>
+                  </a:lnTo>
+                  <a:lnTo>
+                    <a:pt x="6159537" y="3183415"/>
+                  </a:lnTo>
+                  <a:lnTo>
+                    <a:pt x="6231159" y="3191275"/>
+                  </a:lnTo>
+                  <a:lnTo>
+                    <a:pt x="6302782" y="3198930"/>
+                  </a:lnTo>
+                  <a:lnTo>
+                    <a:pt x="6374404" y="3206385"/>
+                  </a:lnTo>
+                  <a:lnTo>
+                    <a:pt x="6446027" y="3213644"/>
+                  </a:lnTo>
+                  <a:lnTo>
+                    <a:pt x="6517649" y="3220713"/>
+                  </a:lnTo>
+                  <a:lnTo>
+                    <a:pt x="6589272" y="3227598"/>
+                  </a:lnTo>
+                  <a:lnTo>
+                    <a:pt x="6660894" y="3234302"/>
+                  </a:lnTo>
+                  <a:lnTo>
+                    <a:pt x="6732517" y="3240831"/>
+                  </a:lnTo>
+                  <a:lnTo>
+                    <a:pt x="6804139" y="3247189"/>
+                  </a:lnTo>
+                  <a:lnTo>
+                    <a:pt x="6875762" y="3253380"/>
+                  </a:lnTo>
+                  <a:lnTo>
+                    <a:pt x="6947385" y="3259410"/>
+                  </a:lnTo>
+                  <a:lnTo>
+                    <a:pt x="7019007" y="3265281"/>
+                  </a:lnTo>
+                  <a:lnTo>
+                    <a:pt x="7090630" y="3270999"/>
+                  </a:lnTo>
+                  <a:lnTo>
+                    <a:pt x="7090630" y="3411047"/>
+                  </a:lnTo>
+                  <a:lnTo>
+                    <a:pt x="7019007" y="3407514"/>
+                  </a:lnTo>
+                  <a:lnTo>
+                    <a:pt x="6947385" y="3403810"/>
+                  </a:lnTo>
+                  <a:lnTo>
+                    <a:pt x="6875762" y="3399925"/>
+                  </a:lnTo>
+                  <a:lnTo>
+                    <a:pt x="6804139" y="3395852"/>
+                  </a:lnTo>
+                  <a:lnTo>
+                    <a:pt x="6732517" y="3391581"/>
+                  </a:lnTo>
+                  <a:lnTo>
+                    <a:pt x="6660894" y="3387102"/>
+                  </a:lnTo>
+                  <a:lnTo>
+                    <a:pt x="6589272" y="3382406"/>
+                  </a:lnTo>
+                  <a:lnTo>
+                    <a:pt x="6517649" y="3377481"/>
+                  </a:lnTo>
+                  <a:lnTo>
+                    <a:pt x="6446027" y="3372317"/>
+                  </a:lnTo>
+                  <a:lnTo>
+                    <a:pt x="6374404" y="3366902"/>
+                  </a:lnTo>
+                  <a:lnTo>
+                    <a:pt x="6302782" y="3361224"/>
+                  </a:lnTo>
+                  <a:lnTo>
+                    <a:pt x="6231159" y="3355270"/>
+                  </a:lnTo>
+                  <a:lnTo>
+                    <a:pt x="6159537" y="3349027"/>
+                  </a:lnTo>
+                  <a:lnTo>
+                    <a:pt x="6087914" y="3342480"/>
+                  </a:lnTo>
+                  <a:lnTo>
+                    <a:pt x="6016292" y="3335615"/>
+                  </a:lnTo>
+                  <a:lnTo>
+                    <a:pt x="5944669" y="3328416"/>
+                  </a:lnTo>
+                  <a:lnTo>
+                    <a:pt x="5873047" y="3320868"/>
+                  </a:lnTo>
+                  <a:lnTo>
+                    <a:pt x="5801424" y="3312953"/>
+                  </a:lnTo>
+                  <a:lnTo>
+                    <a:pt x="5729802" y="3304653"/>
+                  </a:lnTo>
+                  <a:lnTo>
+                    <a:pt x="5658179" y="3295950"/>
+                  </a:lnTo>
+                  <a:lnTo>
+                    <a:pt x="5586557" y="3286824"/>
+                  </a:lnTo>
+                  <a:lnTo>
+                    <a:pt x="5514934" y="3277255"/>
+                  </a:lnTo>
+                  <a:lnTo>
+                    <a:pt x="5443311" y="3267220"/>
+                  </a:lnTo>
+                  <a:lnTo>
+                    <a:pt x="5371689" y="3256698"/>
+                  </a:lnTo>
+                  <a:lnTo>
+                    <a:pt x="5300066" y="3245665"/>
+                  </a:lnTo>
+                  <a:lnTo>
+                    <a:pt x="5228444" y="3234095"/>
+                  </a:lnTo>
+                  <a:lnTo>
+                    <a:pt x="5156821" y="3221963"/>
+                  </a:lnTo>
+                  <a:lnTo>
+                    <a:pt x="5085199" y="3209242"/>
+                  </a:lnTo>
+                  <a:lnTo>
+                    <a:pt x="5013576" y="3195902"/>
+                  </a:lnTo>
+                  <a:lnTo>
+                    <a:pt x="4941954" y="3181914"/>
+                  </a:lnTo>
+                  <a:lnTo>
+                    <a:pt x="4870331" y="3167247"/>
+                  </a:lnTo>
+                  <a:lnTo>
+                    <a:pt x="4798709" y="3151866"/>
+                  </a:lnTo>
+                  <a:lnTo>
+                    <a:pt x="4727086" y="3135738"/>
+                  </a:lnTo>
+                  <a:lnTo>
+                    <a:pt x="4655464" y="3118827"/>
+                  </a:lnTo>
+                  <a:lnTo>
+                    <a:pt x="4583841" y="3101094"/>
+                  </a:lnTo>
+                  <a:lnTo>
+                    <a:pt x="4512219" y="3082499"/>
+                  </a:lnTo>
+                  <a:lnTo>
+                    <a:pt x="4440596" y="3063000"/>
+                  </a:lnTo>
+                  <a:lnTo>
+                    <a:pt x="4368974" y="3042553"/>
+                  </a:lnTo>
+                  <a:lnTo>
+                    <a:pt x="4297351" y="3021114"/>
+                  </a:lnTo>
+                  <a:lnTo>
+                    <a:pt x="4225729" y="2998632"/>
+                  </a:lnTo>
+                  <a:lnTo>
+                    <a:pt x="4154106" y="2975058"/>
+                  </a:lnTo>
+                  <a:lnTo>
+                    <a:pt x="4082483" y="2950338"/>
+                  </a:lnTo>
+                  <a:lnTo>
+                    <a:pt x="4010861" y="2924417"/>
+                  </a:lnTo>
+                  <a:lnTo>
+                    <a:pt x="3939238" y="2897236"/>
+                  </a:lnTo>
+                  <a:lnTo>
+                    <a:pt x="3867616" y="2868734"/>
+                  </a:lnTo>
+                  <a:lnTo>
+                    <a:pt x="3795993" y="2838848"/>
+                  </a:lnTo>
+                  <a:lnTo>
+                    <a:pt x="3724371" y="2807509"/>
+                  </a:lnTo>
+                  <a:lnTo>
+                    <a:pt x="3652748" y="2774647"/>
+                  </a:lnTo>
+                  <a:lnTo>
+                    <a:pt x="3581126" y="2740188"/>
+                  </a:lnTo>
+                  <a:lnTo>
+                    <a:pt x="3509503" y="2704055"/>
+                  </a:lnTo>
+                  <a:lnTo>
+                    <a:pt x="3437881" y="2666165"/>
+                  </a:lnTo>
+                  <a:lnTo>
+                    <a:pt x="3366258" y="2638831"/>
+                  </a:lnTo>
+                  <a:lnTo>
+                    <a:pt x="3294636" y="2616123"/>
+                  </a:lnTo>
+                  <a:lnTo>
+                    <a:pt x="3223013" y="2592804"/>
+                  </a:lnTo>
+                  <a:lnTo>
+                    <a:pt x="3151391" y="2568859"/>
+                  </a:lnTo>
+                  <a:lnTo>
+                    <a:pt x="3079768" y="2544270"/>
+                  </a:lnTo>
+                  <a:lnTo>
+                    <a:pt x="3008146" y="2519020"/>
+                  </a:lnTo>
+                  <a:lnTo>
+                    <a:pt x="2936523" y="2493091"/>
+                  </a:lnTo>
+                  <a:lnTo>
+                    <a:pt x="2864901" y="2466466"/>
+                  </a:lnTo>
+                  <a:lnTo>
+                    <a:pt x="2793278" y="2439125"/>
+                  </a:lnTo>
+                  <a:lnTo>
+                    <a:pt x="2721655" y="2411049"/>
+                  </a:lnTo>
+                  <a:lnTo>
+                    <a:pt x="2650033" y="2382218"/>
+                  </a:lnTo>
+                  <a:lnTo>
+                    <a:pt x="2578410" y="2352613"/>
+                  </a:lnTo>
+                  <a:lnTo>
+                    <a:pt x="2506788" y="2322212"/>
+                  </a:lnTo>
+                  <a:lnTo>
+                    <a:pt x="2435165" y="2290994"/>
+                  </a:lnTo>
+                  <a:lnTo>
+                    <a:pt x="2363543" y="2258937"/>
+                  </a:lnTo>
+                  <a:lnTo>
+                    <a:pt x="2291920" y="2226018"/>
+                  </a:lnTo>
+                  <a:lnTo>
+                    <a:pt x="2220298" y="2192215"/>
+                  </a:lnTo>
+                  <a:lnTo>
+                    <a:pt x="2148675" y="2157503"/>
+                  </a:lnTo>
+                  <a:lnTo>
+                    <a:pt x="2077053" y="2121858"/>
+                  </a:lnTo>
+                  <a:lnTo>
+                    <a:pt x="2005430" y="2085255"/>
+                  </a:lnTo>
+                  <a:lnTo>
+                    <a:pt x="1933808" y="2047668"/>
+                  </a:lnTo>
+                  <a:lnTo>
+                    <a:pt x="1862185" y="2009071"/>
+                  </a:lnTo>
+                  <a:lnTo>
+                    <a:pt x="1790563" y="1969437"/>
+                  </a:lnTo>
+                  <a:lnTo>
+                    <a:pt x="1718940" y="1928738"/>
+                  </a:lnTo>
+                  <a:lnTo>
+                    <a:pt x="1647318" y="1886944"/>
+                  </a:lnTo>
+                  <a:lnTo>
+                    <a:pt x="1575695" y="1844028"/>
+                  </a:lnTo>
+                  <a:lnTo>
+                    <a:pt x="1504073" y="1799958"/>
+                  </a:lnTo>
+                  <a:lnTo>
+                    <a:pt x="1432450" y="1754703"/>
+                  </a:lnTo>
+                  <a:lnTo>
+                    <a:pt x="1360827" y="1708233"/>
+                  </a:lnTo>
+                  <a:lnTo>
+                    <a:pt x="1289205" y="1660513"/>
+                  </a:lnTo>
+                  <a:lnTo>
+                    <a:pt x="1217582" y="1611511"/>
+                  </a:lnTo>
+                  <a:lnTo>
+                    <a:pt x="1145960" y="1561191"/>
+                  </a:lnTo>
+                  <a:lnTo>
+                    <a:pt x="1074337" y="1509520"/>
+                  </a:lnTo>
+                  <a:lnTo>
+                    <a:pt x="1002715" y="1456459"/>
+                  </a:lnTo>
+                  <a:lnTo>
+                    <a:pt x="931092" y="1401973"/>
+                  </a:lnTo>
+                  <a:lnTo>
+                    <a:pt x="859470" y="1346022"/>
+                  </a:lnTo>
+                  <a:lnTo>
+                    <a:pt x="787847" y="1288567"/>
+                  </a:lnTo>
+                  <a:lnTo>
+                    <a:pt x="716225" y="1229568"/>
+                  </a:lnTo>
+                  <a:lnTo>
+                    <a:pt x="644602" y="1168983"/>
+                  </a:lnTo>
+                  <a:lnTo>
+                    <a:pt x="572980" y="1106770"/>
+                  </a:lnTo>
+                  <a:lnTo>
+                    <a:pt x="501357" y="1042885"/>
+                  </a:lnTo>
+                  <a:lnTo>
+                    <a:pt x="429735" y="977283"/>
+                  </a:lnTo>
+                  <a:lnTo>
+                    <a:pt x="358112" y="909918"/>
+                  </a:lnTo>
+                  <a:lnTo>
+                    <a:pt x="286490" y="840743"/>
+                  </a:lnTo>
+                  <a:lnTo>
+                    <a:pt x="214867" y="769708"/>
+                  </a:lnTo>
+                  <a:lnTo>
+                    <a:pt x="143245" y="696764"/>
+                  </a:lnTo>
+                  <a:lnTo>
+                    <a:pt x="71622" y="621859"/>
+                  </a:lnTo>
+                  <a:lnTo>
+                    <a:pt x="0" y="544941"/>
                   </a:lnTo>
                   <a:close/>
                 </a:path>
@@ -3576,267 +3533,592 @@
         </p:sp>
         <p:sp>
           <p:nvSpPr>
+            <p:cNvPr id="21" name="pl21"/>
+            <p:cNvSpPr/>
+            <p:nvPr/>
+          </p:nvSpPr>
+          <p:spPr>
+            <a:xfrm>
+              <a:off x="2422474" y="2073503"/>
+              <a:ext cx="5840205" cy="3270999"/>
+            </a:xfrm>
+            <a:custGeom>
+              <a:avLst/>
+              <a:pathLst>
+                <a:path w="5840205" h="3270999">
+                  <a:moveTo>
+                    <a:pt x="0" y="0"/>
+                  </a:moveTo>
+                  <a:lnTo>
+                    <a:pt x="38780" y="89315"/>
+                  </a:lnTo>
+                  <a:lnTo>
+                    <a:pt x="110403" y="246624"/>
+                  </a:lnTo>
+                  <a:lnTo>
+                    <a:pt x="182025" y="396642"/>
+                  </a:lnTo>
+                  <a:lnTo>
+                    <a:pt x="253648" y="539708"/>
+                  </a:lnTo>
+                  <a:lnTo>
+                    <a:pt x="325270" y="676144"/>
+                  </a:lnTo>
+                  <a:lnTo>
+                    <a:pt x="396893" y="806258"/>
+                  </a:lnTo>
+                  <a:lnTo>
+                    <a:pt x="468515" y="930341"/>
+                  </a:lnTo>
+                  <a:lnTo>
+                    <a:pt x="540138" y="1048674"/>
+                  </a:lnTo>
+                  <a:lnTo>
+                    <a:pt x="611760" y="1161523"/>
+                  </a:lnTo>
+                  <a:lnTo>
+                    <a:pt x="683383" y="1269142"/>
+                  </a:lnTo>
+                  <a:lnTo>
+                    <a:pt x="755006" y="1371774"/>
+                  </a:lnTo>
+                  <a:lnTo>
+                    <a:pt x="826628" y="1469649"/>
+                  </a:lnTo>
+                  <a:lnTo>
+                    <a:pt x="898251" y="1562989"/>
+                  </a:lnTo>
+                  <a:lnTo>
+                    <a:pt x="969873" y="1652003"/>
+                  </a:lnTo>
+                  <a:lnTo>
+                    <a:pt x="1041496" y="1736892"/>
+                  </a:lnTo>
+                  <a:lnTo>
+                    <a:pt x="1113118" y="1817846"/>
+                  </a:lnTo>
+                  <a:lnTo>
+                    <a:pt x="1184741" y="1895049"/>
+                  </a:lnTo>
+                  <a:lnTo>
+                    <a:pt x="1256363" y="1968675"/>
+                  </a:lnTo>
+                  <a:lnTo>
+                    <a:pt x="1327986" y="2038888"/>
+                  </a:lnTo>
+                  <a:lnTo>
+                    <a:pt x="1399608" y="2105847"/>
+                  </a:lnTo>
+                  <a:lnTo>
+                    <a:pt x="1471231" y="2169703"/>
+                  </a:lnTo>
+                  <a:lnTo>
+                    <a:pt x="1542853" y="2230600"/>
+                  </a:lnTo>
+                  <a:lnTo>
+                    <a:pt x="1614476" y="2288675"/>
+                  </a:lnTo>
+                  <a:lnTo>
+                    <a:pt x="1686098" y="2344058"/>
+                  </a:lnTo>
+                  <a:lnTo>
+                    <a:pt x="1757721" y="2396875"/>
+                  </a:lnTo>
+                  <a:lnTo>
+                    <a:pt x="1829343" y="2447244"/>
+                  </a:lnTo>
+                  <a:lnTo>
+                    <a:pt x="1900966" y="2495279"/>
+                  </a:lnTo>
+                  <a:lnTo>
+                    <a:pt x="1972588" y="2541088"/>
+                  </a:lnTo>
+                  <a:lnTo>
+                    <a:pt x="2044211" y="2584773"/>
+                  </a:lnTo>
+                  <a:lnTo>
+                    <a:pt x="2115834" y="2626435"/>
+                  </a:lnTo>
+                  <a:lnTo>
+                    <a:pt x="2187456" y="2660945"/>
+                  </a:lnTo>
+                  <a:lnTo>
+                    <a:pt x="2259079" y="2682481"/>
+                  </a:lnTo>
+                  <a:lnTo>
+                    <a:pt x="2330701" y="2703452"/>
+                  </a:lnTo>
+                  <a:lnTo>
+                    <a:pt x="2402324" y="2723875"/>
+                  </a:lnTo>
+                  <a:lnTo>
+                    <a:pt x="2473946" y="2743763"/>
+                  </a:lnTo>
+                  <a:lnTo>
+                    <a:pt x="2545569" y="2763131"/>
+                  </a:lnTo>
+                  <a:lnTo>
+                    <a:pt x="2617191" y="2781992"/>
+                  </a:lnTo>
+                  <a:lnTo>
+                    <a:pt x="2688814" y="2800359"/>
+                  </a:lnTo>
+                  <a:lnTo>
+                    <a:pt x="2760436" y="2818245"/>
+                  </a:lnTo>
+                  <a:lnTo>
+                    <a:pt x="2832059" y="2835663"/>
+                  </a:lnTo>
+                  <a:lnTo>
+                    <a:pt x="2903681" y="2852626"/>
+                  </a:lnTo>
+                  <a:lnTo>
+                    <a:pt x="2975304" y="2869144"/>
+                  </a:lnTo>
+                  <a:lnTo>
+                    <a:pt x="3046926" y="2885230"/>
+                  </a:lnTo>
+                  <a:lnTo>
+                    <a:pt x="3118549" y="2900895"/>
+                  </a:lnTo>
+                  <a:lnTo>
+                    <a:pt x="3190171" y="2916150"/>
+                  </a:lnTo>
+                  <a:lnTo>
+                    <a:pt x="3261794" y="2931006"/>
+                  </a:lnTo>
+                  <a:lnTo>
+                    <a:pt x="3333416" y="2945473"/>
+                  </a:lnTo>
+                  <a:lnTo>
+                    <a:pt x="3405039" y="2959561"/>
+                  </a:lnTo>
+                  <a:lnTo>
+                    <a:pt x="3476662" y="2973281"/>
+                  </a:lnTo>
+                  <a:lnTo>
+                    <a:pt x="3548284" y="2986641"/>
+                  </a:lnTo>
+                  <a:lnTo>
+                    <a:pt x="3619907" y="2999652"/>
+                  </a:lnTo>
+                  <a:lnTo>
+                    <a:pt x="3691529" y="3012322"/>
+                  </a:lnTo>
+                  <a:lnTo>
+                    <a:pt x="3763152" y="3024661"/>
+                  </a:lnTo>
+                  <a:lnTo>
+                    <a:pt x="3834774" y="3036677"/>
+                  </a:lnTo>
+                  <a:lnTo>
+                    <a:pt x="3906397" y="3048378"/>
+                  </a:lnTo>
+                  <a:lnTo>
+                    <a:pt x="3978019" y="3059773"/>
+                  </a:lnTo>
+                  <a:lnTo>
+                    <a:pt x="4049642" y="3070870"/>
+                  </a:lnTo>
+                  <a:lnTo>
+                    <a:pt x="4121264" y="3081676"/>
+                  </a:lnTo>
+                  <a:lnTo>
+                    <a:pt x="4192887" y="3092199"/>
+                  </a:lnTo>
+                  <a:lnTo>
+                    <a:pt x="4264509" y="3102447"/>
+                  </a:lnTo>
+                  <a:lnTo>
+                    <a:pt x="4336132" y="3112427"/>
+                  </a:lnTo>
+                  <a:lnTo>
+                    <a:pt x="4407754" y="3122146"/>
+                  </a:lnTo>
+                  <a:lnTo>
+                    <a:pt x="4479377" y="3131610"/>
+                  </a:lnTo>
+                  <a:lnTo>
+                    <a:pt x="4550999" y="3140827"/>
+                  </a:lnTo>
+                  <a:lnTo>
+                    <a:pt x="4622622" y="3149802"/>
+                  </a:lnTo>
+                  <a:lnTo>
+                    <a:pt x="4694244" y="3158542"/>
+                  </a:lnTo>
+                  <a:lnTo>
+                    <a:pt x="4765867" y="3167054"/>
+                  </a:lnTo>
+                  <a:lnTo>
+                    <a:pt x="4837490" y="3175343"/>
+                  </a:lnTo>
+                  <a:lnTo>
+                    <a:pt x="4909112" y="3183415"/>
+                  </a:lnTo>
+                  <a:lnTo>
+                    <a:pt x="4980735" y="3191275"/>
+                  </a:lnTo>
+                  <a:lnTo>
+                    <a:pt x="5052357" y="3198930"/>
+                  </a:lnTo>
+                  <a:lnTo>
+                    <a:pt x="5123980" y="3206385"/>
+                  </a:lnTo>
+                  <a:lnTo>
+                    <a:pt x="5195602" y="3213644"/>
+                  </a:lnTo>
+                  <a:lnTo>
+                    <a:pt x="5267225" y="3220713"/>
+                  </a:lnTo>
+                  <a:lnTo>
+                    <a:pt x="5338847" y="3227598"/>
+                  </a:lnTo>
+                  <a:lnTo>
+                    <a:pt x="5410470" y="3234302"/>
+                  </a:lnTo>
+                  <a:lnTo>
+                    <a:pt x="5482092" y="3240831"/>
+                  </a:lnTo>
+                  <a:lnTo>
+                    <a:pt x="5553715" y="3247189"/>
+                  </a:lnTo>
+                  <a:lnTo>
+                    <a:pt x="5625337" y="3253380"/>
+                  </a:lnTo>
+                  <a:lnTo>
+                    <a:pt x="5696960" y="3259410"/>
+                  </a:lnTo>
+                  <a:lnTo>
+                    <a:pt x="5768582" y="3265281"/>
+                  </a:lnTo>
+                  <a:lnTo>
+                    <a:pt x="5840205" y="3270999"/>
+                  </a:lnTo>
+                </a:path>
+              </a:pathLst>
+            </a:custGeom>
+          </p:spPr>
+          <p:txBody>
+            <a:bodyPr/>
+            <a:lstStyle/>
+            <a:p/>
+          </p:txBody>
+        </p:sp>
+        <p:sp>
+          <p:nvSpPr>
             <p:cNvPr id="22" name="pl22"/>
             <p:cNvSpPr/>
             <p:nvPr/>
           </p:nvSpPr>
           <p:spPr>
             <a:xfrm>
-              <a:off x="2038847" y="2073503"/>
-              <a:ext cx="6014500" cy="3270999"/>
+              <a:off x="1172049" y="2618444"/>
+              <a:ext cx="7090630" cy="2866105"/>
             </a:xfrm>
             <a:custGeom>
               <a:avLst/>
               <a:pathLst>
-                <a:path w="6014500" h="3270999">
+                <a:path w="7090630" h="2866105">
                   <a:moveTo>
+                    <a:pt x="7090630" y="2866105"/>
+                  </a:moveTo>
+                  <a:lnTo>
+                    <a:pt x="7019007" y="2862573"/>
+                  </a:lnTo>
+                  <a:lnTo>
+                    <a:pt x="6947385" y="2858868"/>
+                  </a:lnTo>
+                  <a:lnTo>
+                    <a:pt x="6875762" y="2854984"/>
+                  </a:lnTo>
+                  <a:lnTo>
+                    <a:pt x="6804139" y="2850910"/>
+                  </a:lnTo>
+                  <a:lnTo>
+                    <a:pt x="6732517" y="2846639"/>
+                  </a:lnTo>
+                  <a:lnTo>
+                    <a:pt x="6660894" y="2842160"/>
+                  </a:lnTo>
+                  <a:lnTo>
+                    <a:pt x="6589272" y="2837464"/>
+                  </a:lnTo>
+                  <a:lnTo>
+                    <a:pt x="6517649" y="2832539"/>
+                  </a:lnTo>
+                  <a:lnTo>
+                    <a:pt x="6446027" y="2827375"/>
+                  </a:lnTo>
+                  <a:lnTo>
+                    <a:pt x="6374404" y="2821960"/>
+                  </a:lnTo>
+                  <a:lnTo>
+                    <a:pt x="6302782" y="2816282"/>
+                  </a:lnTo>
+                  <a:lnTo>
+                    <a:pt x="6231159" y="2810328"/>
+                  </a:lnTo>
+                  <a:lnTo>
+                    <a:pt x="6159537" y="2804085"/>
+                  </a:lnTo>
+                  <a:lnTo>
+                    <a:pt x="6087914" y="2797538"/>
+                  </a:lnTo>
+                  <a:lnTo>
+                    <a:pt x="6016292" y="2790673"/>
+                  </a:lnTo>
+                  <a:lnTo>
+                    <a:pt x="5944669" y="2783475"/>
+                  </a:lnTo>
+                  <a:lnTo>
+                    <a:pt x="5873047" y="2775926"/>
+                  </a:lnTo>
+                  <a:lnTo>
+                    <a:pt x="5801424" y="2768011"/>
+                  </a:lnTo>
+                  <a:lnTo>
+                    <a:pt x="5729802" y="2759711"/>
+                  </a:lnTo>
+                  <a:lnTo>
+                    <a:pt x="5658179" y="2751008"/>
+                  </a:lnTo>
+                  <a:lnTo>
+                    <a:pt x="5586557" y="2741882"/>
+                  </a:lnTo>
+                  <a:lnTo>
+                    <a:pt x="5514934" y="2732313"/>
+                  </a:lnTo>
+                  <a:lnTo>
+                    <a:pt x="5443311" y="2722278"/>
+                  </a:lnTo>
+                  <a:lnTo>
+                    <a:pt x="5371689" y="2711756"/>
+                  </a:lnTo>
+                  <a:lnTo>
+                    <a:pt x="5300066" y="2700723"/>
+                  </a:lnTo>
+                  <a:lnTo>
+                    <a:pt x="5228444" y="2689153"/>
+                  </a:lnTo>
+                  <a:lnTo>
+                    <a:pt x="5156821" y="2677021"/>
+                  </a:lnTo>
+                  <a:lnTo>
+                    <a:pt x="5085199" y="2664300"/>
+                  </a:lnTo>
+                  <a:lnTo>
+                    <a:pt x="5013576" y="2650960"/>
+                  </a:lnTo>
+                  <a:lnTo>
+                    <a:pt x="4941954" y="2636972"/>
+                  </a:lnTo>
+                  <a:lnTo>
+                    <a:pt x="4870331" y="2622305"/>
+                  </a:lnTo>
+                  <a:lnTo>
+                    <a:pt x="4798709" y="2606924"/>
+                  </a:lnTo>
+                  <a:lnTo>
+                    <a:pt x="4727086" y="2590797"/>
+                  </a:lnTo>
+                  <a:lnTo>
+                    <a:pt x="4655464" y="2573885"/>
+                  </a:lnTo>
+                  <a:lnTo>
+                    <a:pt x="4583841" y="2556152"/>
+                  </a:lnTo>
+                  <a:lnTo>
+                    <a:pt x="4512219" y="2537557"/>
+                  </a:lnTo>
+                  <a:lnTo>
+                    <a:pt x="4440596" y="2518058"/>
+                  </a:lnTo>
+                  <a:lnTo>
+                    <a:pt x="4368974" y="2497612"/>
+                  </a:lnTo>
+                  <a:lnTo>
+                    <a:pt x="4297351" y="2476172"/>
+                  </a:lnTo>
+                  <a:lnTo>
+                    <a:pt x="4225729" y="2453690"/>
+                  </a:lnTo>
+                  <a:lnTo>
+                    <a:pt x="4154106" y="2430116"/>
+                  </a:lnTo>
+                  <a:lnTo>
+                    <a:pt x="4082483" y="2405396"/>
+                  </a:lnTo>
+                  <a:lnTo>
+                    <a:pt x="4010861" y="2379475"/>
+                  </a:lnTo>
+                  <a:lnTo>
+                    <a:pt x="3939238" y="2352294"/>
+                  </a:lnTo>
+                  <a:lnTo>
+                    <a:pt x="3867616" y="2323793"/>
+                  </a:lnTo>
+                  <a:lnTo>
+                    <a:pt x="3795993" y="2293906"/>
+                  </a:lnTo>
+                  <a:lnTo>
+                    <a:pt x="3724371" y="2262567"/>
+                  </a:lnTo>
+                  <a:lnTo>
+                    <a:pt x="3652748" y="2229705"/>
+                  </a:lnTo>
+                  <a:lnTo>
+                    <a:pt x="3581126" y="2195246"/>
+                  </a:lnTo>
+                  <a:lnTo>
+                    <a:pt x="3509503" y="2159113"/>
+                  </a:lnTo>
+                  <a:lnTo>
+                    <a:pt x="3437881" y="2121223"/>
+                  </a:lnTo>
+                  <a:lnTo>
+                    <a:pt x="3366258" y="2093889"/>
+                  </a:lnTo>
+                  <a:lnTo>
+                    <a:pt x="3294636" y="2071181"/>
+                  </a:lnTo>
+                  <a:lnTo>
+                    <a:pt x="3223013" y="2047862"/>
+                  </a:lnTo>
+                  <a:lnTo>
+                    <a:pt x="3151391" y="2023917"/>
+                  </a:lnTo>
+                  <a:lnTo>
+                    <a:pt x="3079768" y="1999328"/>
+                  </a:lnTo>
+                  <a:lnTo>
+                    <a:pt x="3008146" y="1974078"/>
+                  </a:lnTo>
+                  <a:lnTo>
+                    <a:pt x="2936523" y="1948149"/>
+                  </a:lnTo>
+                  <a:lnTo>
+                    <a:pt x="2864901" y="1921524"/>
+                  </a:lnTo>
+                  <a:lnTo>
+                    <a:pt x="2793278" y="1894183"/>
+                  </a:lnTo>
+                  <a:lnTo>
+                    <a:pt x="2721655" y="1866107"/>
+                  </a:lnTo>
+                  <a:lnTo>
+                    <a:pt x="2650033" y="1837276"/>
+                  </a:lnTo>
+                  <a:lnTo>
+                    <a:pt x="2578410" y="1807671"/>
+                  </a:lnTo>
+                  <a:lnTo>
+                    <a:pt x="2506788" y="1777270"/>
+                  </a:lnTo>
+                  <a:lnTo>
+                    <a:pt x="2435165" y="1746052"/>
+                  </a:lnTo>
+                  <a:lnTo>
+                    <a:pt x="2363543" y="1713995"/>
+                  </a:lnTo>
+                  <a:lnTo>
+                    <a:pt x="2291920" y="1681076"/>
+                  </a:lnTo>
+                  <a:lnTo>
+                    <a:pt x="2220298" y="1647273"/>
+                  </a:lnTo>
+                  <a:lnTo>
+                    <a:pt x="2148675" y="1612561"/>
+                  </a:lnTo>
+                  <a:lnTo>
+                    <a:pt x="2077053" y="1576916"/>
+                  </a:lnTo>
+                  <a:lnTo>
+                    <a:pt x="2005430" y="1540313"/>
+                  </a:lnTo>
+                  <a:lnTo>
+                    <a:pt x="1933808" y="1502726"/>
+                  </a:lnTo>
+                  <a:lnTo>
+                    <a:pt x="1862185" y="1464130"/>
+                  </a:lnTo>
+                  <a:lnTo>
+                    <a:pt x="1790563" y="1424495"/>
+                  </a:lnTo>
+                  <a:lnTo>
+                    <a:pt x="1718940" y="1383796"/>
+                  </a:lnTo>
+                  <a:lnTo>
+                    <a:pt x="1647318" y="1342003"/>
+                  </a:lnTo>
+                  <a:lnTo>
+                    <a:pt x="1575695" y="1299086"/>
+                  </a:lnTo>
+                  <a:lnTo>
+                    <a:pt x="1504073" y="1255016"/>
+                  </a:lnTo>
+                  <a:lnTo>
+                    <a:pt x="1432450" y="1209762"/>
+                  </a:lnTo>
+                  <a:lnTo>
+                    <a:pt x="1360827" y="1163291"/>
+                  </a:lnTo>
+                  <a:lnTo>
+                    <a:pt x="1289205" y="1115571"/>
+                  </a:lnTo>
+                  <a:lnTo>
+                    <a:pt x="1217582" y="1066569"/>
+                  </a:lnTo>
+                  <a:lnTo>
+                    <a:pt x="1145960" y="1016249"/>
+                  </a:lnTo>
+                  <a:lnTo>
+                    <a:pt x="1074337" y="964578"/>
+                  </a:lnTo>
+                  <a:lnTo>
+                    <a:pt x="1002715" y="911517"/>
+                  </a:lnTo>
+                  <a:lnTo>
+                    <a:pt x="931092" y="857031"/>
+                  </a:lnTo>
+                  <a:lnTo>
+                    <a:pt x="859470" y="801080"/>
+                  </a:lnTo>
+                  <a:lnTo>
+                    <a:pt x="787847" y="743625"/>
+                  </a:lnTo>
+                  <a:lnTo>
+                    <a:pt x="716225" y="684626"/>
+                  </a:lnTo>
+                  <a:lnTo>
+                    <a:pt x="644602" y="624042"/>
+                  </a:lnTo>
+                  <a:lnTo>
+                    <a:pt x="572980" y="561829"/>
+                  </a:lnTo>
+                  <a:lnTo>
+                    <a:pt x="501357" y="497944"/>
+                  </a:lnTo>
+                  <a:lnTo>
+                    <a:pt x="429735" y="432342"/>
+                  </a:lnTo>
+                  <a:lnTo>
+                    <a:pt x="358112" y="364976"/>
+                  </a:lnTo>
+                  <a:lnTo>
+                    <a:pt x="286490" y="295801"/>
+                  </a:lnTo>
+                  <a:lnTo>
+                    <a:pt x="214867" y="224766"/>
+                  </a:lnTo>
+                  <a:lnTo>
+                    <a:pt x="143245" y="151822"/>
+                  </a:lnTo>
+                  <a:lnTo>
+                    <a:pt x="71622" y="76917"/>
+                  </a:lnTo>
+                  <a:lnTo>
                     <a:pt x="0" y="0"/>
-                  </a:moveTo>
-                  <a:lnTo>
-                    <a:pt x="39938" y="89315"/>
-                  </a:lnTo>
-                  <a:lnTo>
-                    <a:pt x="113698" y="246624"/>
-                  </a:lnTo>
-                  <a:lnTo>
-                    <a:pt x="187458" y="396642"/>
-                  </a:lnTo>
-                  <a:lnTo>
-                    <a:pt x="261218" y="539708"/>
-                  </a:lnTo>
-                  <a:lnTo>
-                    <a:pt x="334978" y="676144"/>
-                  </a:lnTo>
-                  <a:lnTo>
-                    <a:pt x="408738" y="806258"/>
-                  </a:lnTo>
-                  <a:lnTo>
-                    <a:pt x="482498" y="930341"/>
-                  </a:lnTo>
-                  <a:lnTo>
-                    <a:pt x="556258" y="1048674"/>
-                  </a:lnTo>
-                  <a:lnTo>
-                    <a:pt x="630018" y="1161523"/>
-                  </a:lnTo>
-                  <a:lnTo>
-                    <a:pt x="703778" y="1269142"/>
-                  </a:lnTo>
-                  <a:lnTo>
-                    <a:pt x="777538" y="1371774"/>
-                  </a:lnTo>
-                  <a:lnTo>
-                    <a:pt x="851298" y="1469649"/>
-                  </a:lnTo>
-                  <a:lnTo>
-                    <a:pt x="925058" y="1562989"/>
-                  </a:lnTo>
-                  <a:lnTo>
-                    <a:pt x="998818" y="1652003"/>
-                  </a:lnTo>
-                  <a:lnTo>
-                    <a:pt x="1072578" y="1736892"/>
-                  </a:lnTo>
-                  <a:lnTo>
-                    <a:pt x="1146338" y="1817846"/>
-                  </a:lnTo>
-                  <a:lnTo>
-                    <a:pt x="1220098" y="1895049"/>
-                  </a:lnTo>
-                  <a:lnTo>
-                    <a:pt x="1293858" y="1968675"/>
-                  </a:lnTo>
-                  <a:lnTo>
-                    <a:pt x="1367618" y="2038888"/>
-                  </a:lnTo>
-                  <a:lnTo>
-                    <a:pt x="1441378" y="2105847"/>
-                  </a:lnTo>
-                  <a:lnTo>
-                    <a:pt x="1515138" y="2169703"/>
-                  </a:lnTo>
-                  <a:lnTo>
-                    <a:pt x="1588898" y="2230600"/>
-                  </a:lnTo>
-                  <a:lnTo>
-                    <a:pt x="1662658" y="2288675"/>
-                  </a:lnTo>
-                  <a:lnTo>
-                    <a:pt x="1736418" y="2344058"/>
-                  </a:lnTo>
-                  <a:lnTo>
-                    <a:pt x="1810178" y="2396875"/>
-                  </a:lnTo>
-                  <a:lnTo>
-                    <a:pt x="1883938" y="2447244"/>
-                  </a:lnTo>
-                  <a:lnTo>
-                    <a:pt x="1957698" y="2495279"/>
-                  </a:lnTo>
-                  <a:lnTo>
-                    <a:pt x="2031458" y="2541088"/>
-                  </a:lnTo>
-                  <a:lnTo>
-                    <a:pt x="2105218" y="2584773"/>
-                  </a:lnTo>
-                  <a:lnTo>
-                    <a:pt x="2178978" y="2626435"/>
-                  </a:lnTo>
-                  <a:lnTo>
-                    <a:pt x="2252738" y="2660945"/>
-                  </a:lnTo>
-                  <a:lnTo>
-                    <a:pt x="2326498" y="2682481"/>
-                  </a:lnTo>
-                  <a:lnTo>
-                    <a:pt x="2400258" y="2703452"/>
-                  </a:lnTo>
-                  <a:lnTo>
-                    <a:pt x="2474018" y="2723875"/>
-                  </a:lnTo>
-                  <a:lnTo>
-                    <a:pt x="2547779" y="2743763"/>
-                  </a:lnTo>
-                  <a:lnTo>
-                    <a:pt x="2621539" y="2763131"/>
-                  </a:lnTo>
-                  <a:lnTo>
-                    <a:pt x="2695299" y="2781992"/>
-                  </a:lnTo>
-                  <a:lnTo>
-                    <a:pt x="2769059" y="2800359"/>
-                  </a:lnTo>
-                  <a:lnTo>
-                    <a:pt x="2842819" y="2818245"/>
-                  </a:lnTo>
-                  <a:lnTo>
-                    <a:pt x="2916579" y="2835663"/>
-                  </a:lnTo>
-                  <a:lnTo>
-                    <a:pt x="2990339" y="2852626"/>
-                  </a:lnTo>
-                  <a:lnTo>
-                    <a:pt x="3064099" y="2869144"/>
-                  </a:lnTo>
-                  <a:lnTo>
-                    <a:pt x="3137859" y="2885230"/>
-                  </a:lnTo>
-                  <a:lnTo>
-                    <a:pt x="3211619" y="2900895"/>
-                  </a:lnTo>
-                  <a:lnTo>
-                    <a:pt x="3285379" y="2916150"/>
-                  </a:lnTo>
-                  <a:lnTo>
-                    <a:pt x="3359139" y="2931006"/>
-                  </a:lnTo>
-                  <a:lnTo>
-                    <a:pt x="3432899" y="2945473"/>
-                  </a:lnTo>
-                  <a:lnTo>
-                    <a:pt x="3506659" y="2959561"/>
-                  </a:lnTo>
-                  <a:lnTo>
-                    <a:pt x="3580419" y="2973281"/>
-                  </a:lnTo>
-                  <a:lnTo>
-                    <a:pt x="3654179" y="2986641"/>
-                  </a:lnTo>
-                  <a:lnTo>
-                    <a:pt x="3727939" y="2999652"/>
-                  </a:lnTo>
-                  <a:lnTo>
-                    <a:pt x="3801699" y="3012322"/>
-                  </a:lnTo>
-                  <a:lnTo>
-                    <a:pt x="3875459" y="3024661"/>
-                  </a:lnTo>
-                  <a:lnTo>
-                    <a:pt x="3949219" y="3036677"/>
-                  </a:lnTo>
-                  <a:lnTo>
-                    <a:pt x="4022979" y="3048378"/>
-                  </a:lnTo>
-                  <a:lnTo>
-                    <a:pt x="4096739" y="3059773"/>
-                  </a:lnTo>
-                  <a:lnTo>
-                    <a:pt x="4170499" y="3070870"/>
-                  </a:lnTo>
-                  <a:lnTo>
-                    <a:pt x="4244259" y="3081676"/>
-                  </a:lnTo>
-                  <a:lnTo>
-                    <a:pt x="4318019" y="3092199"/>
-                  </a:lnTo>
-                  <a:lnTo>
-                    <a:pt x="4391779" y="3102447"/>
-                  </a:lnTo>
-                  <a:lnTo>
-                    <a:pt x="4465539" y="3112427"/>
-                  </a:lnTo>
-                  <a:lnTo>
-                    <a:pt x="4539299" y="3122146"/>
-                  </a:lnTo>
-                  <a:lnTo>
-                    <a:pt x="4613059" y="3131610"/>
-                  </a:lnTo>
-                  <a:lnTo>
-                    <a:pt x="4686819" y="3140827"/>
-                  </a:lnTo>
-                  <a:lnTo>
-                    <a:pt x="4760579" y="3149802"/>
-                  </a:lnTo>
-                  <a:lnTo>
-                    <a:pt x="4834339" y="3158542"/>
-                  </a:lnTo>
-                  <a:lnTo>
-                    <a:pt x="4908099" y="3167054"/>
-                  </a:lnTo>
-                  <a:lnTo>
-                    <a:pt x="4981859" y="3175343"/>
-                  </a:lnTo>
-                  <a:lnTo>
-                    <a:pt x="5055619" y="3183415"/>
-                  </a:lnTo>
-                  <a:lnTo>
-                    <a:pt x="5129379" y="3191275"/>
-                  </a:lnTo>
-                  <a:lnTo>
-                    <a:pt x="5203139" y="3198930"/>
-                  </a:lnTo>
-                  <a:lnTo>
-                    <a:pt x="5276899" y="3206385"/>
-                  </a:lnTo>
-                  <a:lnTo>
-                    <a:pt x="5350659" y="3213644"/>
-                  </a:lnTo>
-                  <a:lnTo>
-                    <a:pt x="5424419" y="3220713"/>
-                  </a:lnTo>
-                  <a:lnTo>
-                    <a:pt x="5498180" y="3227598"/>
-                  </a:lnTo>
-                  <a:lnTo>
-                    <a:pt x="5571940" y="3234302"/>
-                  </a:lnTo>
-                  <a:lnTo>
-                    <a:pt x="5645700" y="3240831"/>
-                  </a:lnTo>
-                  <a:lnTo>
-                    <a:pt x="5719460" y="3247189"/>
-                  </a:lnTo>
-                  <a:lnTo>
-                    <a:pt x="5793220" y="3253380"/>
-                  </a:lnTo>
-                  <a:lnTo>
-                    <a:pt x="5866980" y="3259410"/>
-                  </a:lnTo>
-                  <a:lnTo>
-                    <a:pt x="5940740" y="3265281"/>
-                  </a:lnTo>
-                  <a:lnTo>
-                    <a:pt x="6014500" y="3270999"/>
                   </a:lnTo>
                 </a:path>
               </a:pathLst>
@@ -3856,613 +4138,288 @@
           </p:nvSpPr>
           <p:spPr>
             <a:xfrm>
-              <a:off x="817517" y="2687700"/>
-              <a:ext cx="7235830" cy="2796850"/>
+              <a:off x="1809309" y="2073503"/>
+              <a:ext cx="6453370" cy="3359382"/>
             </a:xfrm>
             <a:custGeom>
               <a:avLst/>
               <a:pathLst>
-                <a:path w="7235830" h="2796850">
-                  <a:moveTo>
-                    <a:pt x="7235830" y="2796850"/>
-                  </a:moveTo>
-                  <a:lnTo>
-                    <a:pt x="7162070" y="2793317"/>
-                  </a:lnTo>
-                  <a:lnTo>
-                    <a:pt x="7088310" y="2789612"/>
-                  </a:lnTo>
-                  <a:lnTo>
-                    <a:pt x="7014550" y="2785728"/>
-                  </a:lnTo>
-                  <a:lnTo>
-                    <a:pt x="6940789" y="2781655"/>
-                  </a:lnTo>
-                  <a:lnTo>
-                    <a:pt x="6867029" y="2777383"/>
-                  </a:lnTo>
-                  <a:lnTo>
-                    <a:pt x="6793269" y="2772905"/>
-                  </a:lnTo>
-                  <a:lnTo>
-                    <a:pt x="6719509" y="2768208"/>
-                  </a:lnTo>
-                  <a:lnTo>
-                    <a:pt x="6645749" y="2763283"/>
-                  </a:lnTo>
-                  <a:lnTo>
-                    <a:pt x="6571989" y="2758119"/>
-                  </a:lnTo>
-                  <a:lnTo>
-                    <a:pt x="6498229" y="2752705"/>
-                  </a:lnTo>
-                  <a:lnTo>
-                    <a:pt x="6424469" y="2747026"/>
-                  </a:lnTo>
-                  <a:lnTo>
-                    <a:pt x="6350709" y="2741072"/>
-                  </a:lnTo>
-                  <a:lnTo>
-                    <a:pt x="6276949" y="2734829"/>
-                  </a:lnTo>
-                  <a:lnTo>
-                    <a:pt x="6203189" y="2728282"/>
-                  </a:lnTo>
-                  <a:lnTo>
-                    <a:pt x="6129429" y="2721417"/>
-                  </a:lnTo>
-                  <a:lnTo>
-                    <a:pt x="6055669" y="2714219"/>
-                  </a:lnTo>
-                  <a:lnTo>
-                    <a:pt x="5981909" y="2706671"/>
-                  </a:lnTo>
-                  <a:lnTo>
-                    <a:pt x="5908149" y="2698756"/>
-                  </a:lnTo>
-                  <a:lnTo>
-                    <a:pt x="5834389" y="2690456"/>
-                  </a:lnTo>
-                  <a:lnTo>
-                    <a:pt x="5760629" y="2681753"/>
-                  </a:lnTo>
-                  <a:lnTo>
-                    <a:pt x="5686869" y="2672627"/>
-                  </a:lnTo>
-                  <a:lnTo>
-                    <a:pt x="5613109" y="2663057"/>
-                  </a:lnTo>
-                  <a:lnTo>
-                    <a:pt x="5539349" y="2653023"/>
-                  </a:lnTo>
-                  <a:lnTo>
-                    <a:pt x="5465589" y="2642501"/>
-                  </a:lnTo>
-                  <a:lnTo>
-                    <a:pt x="5391829" y="2631467"/>
-                  </a:lnTo>
-                  <a:lnTo>
-                    <a:pt x="5318069" y="2619898"/>
-                  </a:lnTo>
-                  <a:lnTo>
-                    <a:pt x="5244309" y="2607766"/>
-                  </a:lnTo>
-                  <a:lnTo>
-                    <a:pt x="5170549" y="2595044"/>
-                  </a:lnTo>
-                  <a:lnTo>
-                    <a:pt x="5096789" y="2581705"/>
-                  </a:lnTo>
-                  <a:lnTo>
-                    <a:pt x="5023029" y="2567717"/>
-                  </a:lnTo>
-                  <a:lnTo>
-                    <a:pt x="4949269" y="2553049"/>
-                  </a:lnTo>
-                  <a:lnTo>
-                    <a:pt x="4875509" y="2537669"/>
-                  </a:lnTo>
-                  <a:lnTo>
-                    <a:pt x="4801749" y="2521541"/>
-                  </a:lnTo>
-                  <a:lnTo>
-                    <a:pt x="4727989" y="2504630"/>
-                  </a:lnTo>
-                  <a:lnTo>
-                    <a:pt x="4654229" y="2486896"/>
-                  </a:lnTo>
-                  <a:lnTo>
-                    <a:pt x="4580469" y="2468301"/>
-                  </a:lnTo>
-                  <a:lnTo>
-                    <a:pt x="4506709" y="2448802"/>
-                  </a:lnTo>
-                  <a:lnTo>
-                    <a:pt x="4432949" y="2428356"/>
-                  </a:lnTo>
-                  <a:lnTo>
-                    <a:pt x="4359189" y="2406916"/>
-                  </a:lnTo>
-                  <a:lnTo>
-                    <a:pt x="4285429" y="2384434"/>
-                  </a:lnTo>
-                  <a:lnTo>
-                    <a:pt x="4211669" y="2360860"/>
-                  </a:lnTo>
-                  <a:lnTo>
-                    <a:pt x="4137909" y="2336140"/>
-                  </a:lnTo>
-                  <a:lnTo>
-                    <a:pt x="4064149" y="2310219"/>
-                  </a:lnTo>
-                  <a:lnTo>
-                    <a:pt x="3990388" y="2283039"/>
-                  </a:lnTo>
-                  <a:lnTo>
-                    <a:pt x="3916628" y="2254537"/>
-                  </a:lnTo>
-                  <a:lnTo>
-                    <a:pt x="3842868" y="2224650"/>
-                  </a:lnTo>
-                  <a:lnTo>
-                    <a:pt x="3769108" y="2193311"/>
-                  </a:lnTo>
-                  <a:lnTo>
-                    <a:pt x="3695348" y="2160449"/>
-                  </a:lnTo>
-                  <a:lnTo>
-                    <a:pt x="3621588" y="2125991"/>
-                  </a:lnTo>
-                  <a:lnTo>
-                    <a:pt x="3547828" y="2089857"/>
-                  </a:lnTo>
-                  <a:lnTo>
-                    <a:pt x="3474068" y="2051968"/>
-                  </a:lnTo>
-                  <a:lnTo>
-                    <a:pt x="3400308" y="2024634"/>
-                  </a:lnTo>
-                  <a:lnTo>
-                    <a:pt x="3326548" y="2001925"/>
-                  </a:lnTo>
-                  <a:lnTo>
-                    <a:pt x="3252788" y="1978607"/>
-                  </a:lnTo>
-                  <a:lnTo>
-                    <a:pt x="3179028" y="1954661"/>
-                  </a:lnTo>
-                  <a:lnTo>
-                    <a:pt x="3105268" y="1930072"/>
-                  </a:lnTo>
-                  <a:lnTo>
-                    <a:pt x="3031508" y="1904822"/>
-                  </a:lnTo>
-                  <a:lnTo>
-                    <a:pt x="2957748" y="1878894"/>
-                  </a:lnTo>
-                  <a:lnTo>
-                    <a:pt x="2883988" y="1852268"/>
-                  </a:lnTo>
-                  <a:lnTo>
-                    <a:pt x="2810228" y="1824927"/>
-                  </a:lnTo>
-                  <a:lnTo>
-                    <a:pt x="2736468" y="1796851"/>
-                  </a:lnTo>
-                  <a:lnTo>
-                    <a:pt x="2662708" y="1768021"/>
-                  </a:lnTo>
-                  <a:lnTo>
-                    <a:pt x="2588948" y="1738416"/>
-                  </a:lnTo>
-                  <a:lnTo>
-                    <a:pt x="2515188" y="1708015"/>
-                  </a:lnTo>
-                  <a:lnTo>
-                    <a:pt x="2441428" y="1676797"/>
-                  </a:lnTo>
-                  <a:lnTo>
-                    <a:pt x="2367668" y="1644739"/>
-                  </a:lnTo>
-                  <a:lnTo>
-                    <a:pt x="2293908" y="1611821"/>
-                  </a:lnTo>
-                  <a:lnTo>
-                    <a:pt x="2220148" y="1578017"/>
-                  </a:lnTo>
-                  <a:lnTo>
-                    <a:pt x="2146388" y="1543305"/>
-                  </a:lnTo>
-                  <a:lnTo>
-                    <a:pt x="2072628" y="1507660"/>
-                  </a:lnTo>
-                  <a:lnTo>
-                    <a:pt x="1998868" y="1471058"/>
-                  </a:lnTo>
-                  <a:lnTo>
-                    <a:pt x="1925108" y="1433471"/>
-                  </a:lnTo>
-                  <a:lnTo>
-                    <a:pt x="1851348" y="1394874"/>
-                  </a:lnTo>
-                  <a:lnTo>
-                    <a:pt x="1777588" y="1355240"/>
-                  </a:lnTo>
-                  <a:lnTo>
-                    <a:pt x="1703828" y="1314540"/>
-                  </a:lnTo>
-                  <a:lnTo>
-                    <a:pt x="1630068" y="1272747"/>
-                  </a:lnTo>
-                  <a:lnTo>
-                    <a:pt x="1556308" y="1229830"/>
-                  </a:lnTo>
-                  <a:lnTo>
-                    <a:pt x="1482548" y="1185760"/>
-                  </a:lnTo>
-                  <a:lnTo>
-                    <a:pt x="1408788" y="1140506"/>
-                  </a:lnTo>
-                  <a:lnTo>
-                    <a:pt x="1335028" y="1094035"/>
-                  </a:lnTo>
-                  <a:lnTo>
-                    <a:pt x="1261268" y="1046315"/>
-                  </a:lnTo>
-                  <a:lnTo>
-                    <a:pt x="1187508" y="997313"/>
-                  </a:lnTo>
-                  <a:lnTo>
-                    <a:pt x="1113747" y="946994"/>
-                  </a:lnTo>
-                  <a:lnTo>
-                    <a:pt x="1039987" y="895322"/>
-                  </a:lnTo>
-                  <a:lnTo>
-                    <a:pt x="966227" y="842262"/>
-                  </a:lnTo>
-                  <a:lnTo>
-                    <a:pt x="892467" y="787775"/>
-                  </a:lnTo>
-                  <a:lnTo>
-                    <a:pt x="818707" y="731824"/>
-                  </a:lnTo>
-                  <a:lnTo>
-                    <a:pt x="744947" y="674369"/>
-                  </a:lnTo>
-                  <a:lnTo>
-                    <a:pt x="671187" y="615371"/>
-                  </a:lnTo>
-                  <a:lnTo>
-                    <a:pt x="597427" y="554786"/>
-                  </a:lnTo>
-                  <a:lnTo>
-                    <a:pt x="523667" y="492573"/>
-                  </a:lnTo>
-                  <a:lnTo>
-                    <a:pt x="449907" y="428688"/>
-                  </a:lnTo>
-                  <a:lnTo>
-                    <a:pt x="376147" y="363086"/>
-                  </a:lnTo>
-                  <a:lnTo>
-                    <a:pt x="302387" y="295721"/>
-                  </a:lnTo>
-                  <a:lnTo>
-                    <a:pt x="228627" y="226545"/>
-                  </a:lnTo>
-                  <a:lnTo>
-                    <a:pt x="154867" y="155510"/>
-                  </a:lnTo>
-                  <a:lnTo>
-                    <a:pt x="81107" y="82566"/>
-                  </a:lnTo>
-                  <a:lnTo>
-                    <a:pt x="7347" y="7662"/>
-                  </a:lnTo>
-                  <a:lnTo>
-                    <a:pt x="0" y="0"/>
-                  </a:lnTo>
-                </a:path>
-              </a:pathLst>
-            </a:custGeom>
-          </p:spPr>
-          <p:txBody>
-            <a:bodyPr/>
-            <a:lstStyle/>
-            <a:p/>
-          </p:txBody>
-        </p:sp>
-        <p:sp>
-          <p:nvSpPr>
-            <p:cNvPr id="24" name="pl24"/>
-            <p:cNvSpPr/>
-            <p:nvPr/>
-          </p:nvSpPr>
-          <p:spPr>
-            <a:xfrm>
-              <a:off x="1407383" y="2073503"/>
-              <a:ext cx="6645964" cy="3359382"/>
-            </a:xfrm>
-            <a:custGeom>
-              <a:avLst/>
-              <a:pathLst>
-                <a:path w="6645964" h="3359382">
+                <a:path w="6453370" h="3359382">
                   <a:moveTo>
                     <a:pt x="0" y="0"/>
                   </a:moveTo>
                   <a:lnTo>
-                    <a:pt x="7561" y="13405"/>
-                  </a:lnTo>
-                  <a:lnTo>
-                    <a:pt x="81321" y="139416"/>
-                  </a:lnTo>
-                  <a:lnTo>
-                    <a:pt x="155081" y="260852"/>
-                  </a:lnTo>
-                  <a:lnTo>
-                    <a:pt x="228841" y="377878"/>
-                  </a:lnTo>
-                  <a:lnTo>
-                    <a:pt x="302602" y="490655"/>
-                  </a:lnTo>
-                  <a:lnTo>
-                    <a:pt x="376362" y="599337"/>
-                  </a:lnTo>
-                  <a:lnTo>
-                    <a:pt x="450122" y="704073"/>
-                  </a:lnTo>
-                  <a:lnTo>
-                    <a:pt x="523882" y="805005"/>
-                  </a:lnTo>
-                  <a:lnTo>
-                    <a:pt x="597642" y="902273"/>
-                  </a:lnTo>
-                  <a:lnTo>
-                    <a:pt x="671402" y="996008"/>
-                  </a:lnTo>
-                  <a:lnTo>
-                    <a:pt x="745162" y="1086340"/>
-                  </a:lnTo>
-                  <a:lnTo>
-                    <a:pt x="818922" y="1173392"/>
-                  </a:lnTo>
-                  <a:lnTo>
-                    <a:pt x="892682" y="1257283"/>
-                  </a:lnTo>
-                  <a:lnTo>
-                    <a:pt x="966442" y="1338128"/>
-                  </a:lnTo>
-                  <a:lnTo>
-                    <a:pt x="1040202" y="1416038"/>
-                  </a:lnTo>
-                  <a:lnTo>
-                    <a:pt x="1113962" y="1491118"/>
-                  </a:lnTo>
-                  <a:lnTo>
-                    <a:pt x="1187722" y="1563472"/>
-                  </a:lnTo>
-                  <a:lnTo>
-                    <a:pt x="1261482" y="1633199"/>
-                  </a:lnTo>
-                  <a:lnTo>
-                    <a:pt x="1335242" y="1700394"/>
-                  </a:lnTo>
-                  <a:lnTo>
-                    <a:pt x="1409002" y="1765149"/>
-                  </a:lnTo>
-                  <a:lnTo>
-                    <a:pt x="1482762" y="1827553"/>
-                  </a:lnTo>
-                  <a:lnTo>
-                    <a:pt x="1556522" y="1887691"/>
-                  </a:lnTo>
-                  <a:lnTo>
-                    <a:pt x="1630282" y="1945645"/>
-                  </a:lnTo>
-                  <a:lnTo>
-                    <a:pt x="1704042" y="2001495"/>
-                  </a:lnTo>
-                  <a:lnTo>
-                    <a:pt x="1777802" y="2055317"/>
-                  </a:lnTo>
-                  <a:lnTo>
-                    <a:pt x="1851562" y="2107185"/>
-                  </a:lnTo>
-                  <a:lnTo>
-                    <a:pt x="1925322" y="2157169"/>
-                  </a:lnTo>
-                  <a:lnTo>
-                    <a:pt x="1999082" y="2205338"/>
-                  </a:lnTo>
-                  <a:lnTo>
-                    <a:pt x="2072842" y="2251758"/>
-                  </a:lnTo>
-                  <a:lnTo>
-                    <a:pt x="2146602" y="2296493"/>
-                  </a:lnTo>
-                  <a:lnTo>
-                    <a:pt x="2220362" y="2339603"/>
-                  </a:lnTo>
-                  <a:lnTo>
-                    <a:pt x="2294122" y="2381148"/>
-                  </a:lnTo>
-                  <a:lnTo>
-                    <a:pt x="2367882" y="2421184"/>
-                  </a:lnTo>
-                  <a:lnTo>
-                    <a:pt x="2441642" y="2459767"/>
-                  </a:lnTo>
-                  <a:lnTo>
-                    <a:pt x="2515402" y="2496949"/>
-                  </a:lnTo>
-                  <a:lnTo>
-                    <a:pt x="2589162" y="2532780"/>
-                  </a:lnTo>
-                  <a:lnTo>
-                    <a:pt x="2662922" y="2567311"/>
-                  </a:lnTo>
-                  <a:lnTo>
-                    <a:pt x="2736682" y="2600587"/>
-                  </a:lnTo>
-                  <a:lnTo>
-                    <a:pt x="2810442" y="2632656"/>
-                  </a:lnTo>
-                  <a:lnTo>
-                    <a:pt x="2884202" y="2663559"/>
-                  </a:lnTo>
-                  <a:lnTo>
-                    <a:pt x="2957962" y="2693341"/>
-                  </a:lnTo>
-                  <a:lnTo>
-                    <a:pt x="3031722" y="2722042"/>
-                  </a:lnTo>
-                  <a:lnTo>
-                    <a:pt x="3105482" y="2749700"/>
-                  </a:lnTo>
-                  <a:lnTo>
-                    <a:pt x="3179242" y="2776354"/>
-                  </a:lnTo>
-                  <a:lnTo>
-                    <a:pt x="3253003" y="2802040"/>
-                  </a:lnTo>
-                  <a:lnTo>
-                    <a:pt x="3326763" y="2826793"/>
-                  </a:lnTo>
-                  <a:lnTo>
-                    <a:pt x="3400523" y="2850648"/>
-                  </a:lnTo>
-                  <a:lnTo>
-                    <a:pt x="3474283" y="2873636"/>
-                  </a:lnTo>
-                  <a:lnTo>
-                    <a:pt x="3548043" y="2895790"/>
-                  </a:lnTo>
-                  <a:lnTo>
-                    <a:pt x="3621803" y="2917139"/>
-                  </a:lnTo>
-                  <a:lnTo>
-                    <a:pt x="3695563" y="2937713"/>
-                  </a:lnTo>
-                  <a:lnTo>
-                    <a:pt x="3769323" y="2957540"/>
-                  </a:lnTo>
-                  <a:lnTo>
-                    <a:pt x="3843083" y="2976647"/>
-                  </a:lnTo>
-                  <a:lnTo>
-                    <a:pt x="3916843" y="2995060"/>
-                  </a:lnTo>
-                  <a:lnTo>
-                    <a:pt x="3990603" y="3012805"/>
-                  </a:lnTo>
-                  <a:lnTo>
-                    <a:pt x="4064363" y="3029905"/>
-                  </a:lnTo>
-                  <a:lnTo>
-                    <a:pt x="4138123" y="3046385"/>
-                  </a:lnTo>
-                  <a:lnTo>
-                    <a:pt x="4211883" y="3062266"/>
-                  </a:lnTo>
-                  <a:lnTo>
-                    <a:pt x="4285643" y="3077570"/>
-                  </a:lnTo>
-                  <a:lnTo>
-                    <a:pt x="4359403" y="3092319"/>
-                  </a:lnTo>
-                  <a:lnTo>
-                    <a:pt x="4433163" y="3106532"/>
-                  </a:lnTo>
-                  <a:lnTo>
-                    <a:pt x="4506923" y="3120229"/>
-                  </a:lnTo>
-                  <a:lnTo>
-                    <a:pt x="4580683" y="3133428"/>
-                  </a:lnTo>
-                  <a:lnTo>
-                    <a:pt x="4654443" y="3146149"/>
-                  </a:lnTo>
-                  <a:lnTo>
-                    <a:pt x="4728203" y="3158407"/>
-                  </a:lnTo>
-                  <a:lnTo>
-                    <a:pt x="4801963" y="3170221"/>
-                  </a:lnTo>
-                  <a:lnTo>
-                    <a:pt x="4875723" y="3181605"/>
-                  </a:lnTo>
-                  <a:lnTo>
-                    <a:pt x="4949483" y="3192576"/>
-                  </a:lnTo>
-                  <a:lnTo>
-                    <a:pt x="5023243" y="3203149"/>
-                  </a:lnTo>
-                  <a:lnTo>
-                    <a:pt x="5097003" y="3213337"/>
-                  </a:lnTo>
-                  <a:lnTo>
-                    <a:pt x="5170763" y="3223156"/>
-                  </a:lnTo>
-                  <a:lnTo>
-                    <a:pt x="5244523" y="3232619"/>
-                  </a:lnTo>
-                  <a:lnTo>
-                    <a:pt x="5318283" y="3241737"/>
-                  </a:lnTo>
-                  <a:lnTo>
-                    <a:pt x="5392043" y="3250525"/>
-                  </a:lnTo>
-                  <a:lnTo>
-                    <a:pt x="5465803" y="3258993"/>
-                  </a:lnTo>
-                  <a:lnTo>
-                    <a:pt x="5539563" y="3267154"/>
-                  </a:lnTo>
-                  <a:lnTo>
-                    <a:pt x="5613323" y="3275019"/>
-                  </a:lnTo>
-                  <a:lnTo>
-                    <a:pt x="5687083" y="3282598"/>
-                  </a:lnTo>
-                  <a:lnTo>
-                    <a:pt x="5760843" y="3289902"/>
-                  </a:lnTo>
-                  <a:lnTo>
-                    <a:pt x="5834603" y="3296941"/>
-                  </a:lnTo>
-                  <a:lnTo>
-                    <a:pt x="5908363" y="3303724"/>
-                  </a:lnTo>
-                  <a:lnTo>
-                    <a:pt x="5982123" y="3310260"/>
-                  </a:lnTo>
-                  <a:lnTo>
-                    <a:pt x="6055883" y="3316560"/>
-                  </a:lnTo>
-                  <a:lnTo>
-                    <a:pt x="6129643" y="3322631"/>
-                  </a:lnTo>
-                  <a:lnTo>
-                    <a:pt x="6203404" y="3328481"/>
-                  </a:lnTo>
-                  <a:lnTo>
-                    <a:pt x="6277164" y="3334119"/>
-                  </a:lnTo>
-                  <a:lnTo>
-                    <a:pt x="6350924" y="3339552"/>
-                  </a:lnTo>
-                  <a:lnTo>
-                    <a:pt x="6424684" y="3344788"/>
-                  </a:lnTo>
-                  <a:lnTo>
-                    <a:pt x="6498444" y="3349833"/>
-                  </a:lnTo>
-                  <a:lnTo>
-                    <a:pt x="6572204" y="3354696"/>
-                  </a:lnTo>
-                  <a:lnTo>
-                    <a:pt x="6645964" y="3359382"/>
+                    <a:pt x="7342" y="13405"/>
+                  </a:lnTo>
+                  <a:lnTo>
+                    <a:pt x="78965" y="139416"/>
+                  </a:lnTo>
+                  <a:lnTo>
+                    <a:pt x="150587" y="260852"/>
+                  </a:lnTo>
+                  <a:lnTo>
+                    <a:pt x="222210" y="377878"/>
+                  </a:lnTo>
+                  <a:lnTo>
+                    <a:pt x="293832" y="490655"/>
+                  </a:lnTo>
+                  <a:lnTo>
+                    <a:pt x="365455" y="599337"/>
+                  </a:lnTo>
+                  <a:lnTo>
+                    <a:pt x="437077" y="704073"/>
+                  </a:lnTo>
+                  <a:lnTo>
+                    <a:pt x="508700" y="805005"/>
+                  </a:lnTo>
+                  <a:lnTo>
+                    <a:pt x="580322" y="902273"/>
+                  </a:lnTo>
+                  <a:lnTo>
+                    <a:pt x="651945" y="996008"/>
+                  </a:lnTo>
+                  <a:lnTo>
+                    <a:pt x="723568" y="1086340"/>
+                  </a:lnTo>
+                  <a:lnTo>
+                    <a:pt x="795190" y="1173392"/>
+                  </a:lnTo>
+                  <a:lnTo>
+                    <a:pt x="866813" y="1257283"/>
+                  </a:lnTo>
+                  <a:lnTo>
+                    <a:pt x="938435" y="1338128"/>
+                  </a:lnTo>
+                  <a:lnTo>
+                    <a:pt x="1010058" y="1416038"/>
+                  </a:lnTo>
+                  <a:lnTo>
+                    <a:pt x="1081680" y="1491118"/>
+                  </a:lnTo>
+                  <a:lnTo>
+                    <a:pt x="1153303" y="1563472"/>
+                  </a:lnTo>
+                  <a:lnTo>
+                    <a:pt x="1224925" y="1633199"/>
+                  </a:lnTo>
+                  <a:lnTo>
+                    <a:pt x="1296548" y="1700394"/>
+                  </a:lnTo>
+                  <a:lnTo>
+                    <a:pt x="1368170" y="1765149"/>
+                  </a:lnTo>
+                  <a:lnTo>
+                    <a:pt x="1439793" y="1827553"/>
+                  </a:lnTo>
+                  <a:lnTo>
+                    <a:pt x="1511415" y="1887691"/>
+                  </a:lnTo>
+                  <a:lnTo>
+                    <a:pt x="1583038" y="1945645"/>
+                  </a:lnTo>
+                  <a:lnTo>
+                    <a:pt x="1654660" y="2001495"/>
+                  </a:lnTo>
+                  <a:lnTo>
+                    <a:pt x="1726283" y="2055317"/>
+                  </a:lnTo>
+                  <a:lnTo>
+                    <a:pt x="1797905" y="2107185"/>
+                  </a:lnTo>
+                  <a:lnTo>
+                    <a:pt x="1869528" y="2157169"/>
+                  </a:lnTo>
+                  <a:lnTo>
+                    <a:pt x="1941150" y="2205338"/>
+                  </a:lnTo>
+                  <a:lnTo>
+                    <a:pt x="2012773" y="2251758"/>
+                  </a:lnTo>
+                  <a:lnTo>
+                    <a:pt x="2084396" y="2296493"/>
+                  </a:lnTo>
+                  <a:lnTo>
+                    <a:pt x="2156018" y="2339603"/>
+                  </a:lnTo>
+                  <a:lnTo>
+                    <a:pt x="2227641" y="2381148"/>
+                  </a:lnTo>
+                  <a:lnTo>
+                    <a:pt x="2299263" y="2421184"/>
+                  </a:lnTo>
+                  <a:lnTo>
+                    <a:pt x="2370886" y="2459767"/>
+                  </a:lnTo>
+                  <a:lnTo>
+                    <a:pt x="2442508" y="2496949"/>
+                  </a:lnTo>
+                  <a:lnTo>
+                    <a:pt x="2514131" y="2532780"/>
+                  </a:lnTo>
+                  <a:lnTo>
+                    <a:pt x="2585753" y="2567311"/>
+                  </a:lnTo>
+                  <a:lnTo>
+                    <a:pt x="2657376" y="2600587"/>
+                  </a:lnTo>
+                  <a:lnTo>
+                    <a:pt x="2728998" y="2632656"/>
+                  </a:lnTo>
+                  <a:lnTo>
+                    <a:pt x="2800621" y="2663559"/>
+                  </a:lnTo>
+                  <a:lnTo>
+                    <a:pt x="2872243" y="2693341"/>
+                  </a:lnTo>
+                  <a:lnTo>
+                    <a:pt x="2943866" y="2722042"/>
+                  </a:lnTo>
+                  <a:lnTo>
+                    <a:pt x="3015488" y="2749700"/>
+                  </a:lnTo>
+                  <a:lnTo>
+                    <a:pt x="3087111" y="2776354"/>
+                  </a:lnTo>
+                  <a:lnTo>
+                    <a:pt x="3158733" y="2802040"/>
+                  </a:lnTo>
+                  <a:lnTo>
+                    <a:pt x="3230356" y="2826793"/>
+                  </a:lnTo>
+                  <a:lnTo>
+                    <a:pt x="3301978" y="2850648"/>
+                  </a:lnTo>
+                  <a:lnTo>
+                    <a:pt x="3373601" y="2873636"/>
+                  </a:lnTo>
+                  <a:lnTo>
+                    <a:pt x="3445224" y="2895790"/>
+                  </a:lnTo>
+                  <a:lnTo>
+                    <a:pt x="3516846" y="2917139"/>
+                  </a:lnTo>
+                  <a:lnTo>
+                    <a:pt x="3588469" y="2937713"/>
+                  </a:lnTo>
+                  <a:lnTo>
+                    <a:pt x="3660091" y="2957540"/>
+                  </a:lnTo>
+                  <a:lnTo>
+                    <a:pt x="3731714" y="2976647"/>
+                  </a:lnTo>
+                  <a:lnTo>
+                    <a:pt x="3803336" y="2995060"/>
+                  </a:lnTo>
+                  <a:lnTo>
+                    <a:pt x="3874959" y="3012805"/>
+                  </a:lnTo>
+                  <a:lnTo>
+                    <a:pt x="3946581" y="3029905"/>
+                  </a:lnTo>
+                  <a:lnTo>
+                    <a:pt x="4018204" y="3046385"/>
+                  </a:lnTo>
+                  <a:lnTo>
+                    <a:pt x="4089826" y="3062266"/>
+                  </a:lnTo>
+                  <a:lnTo>
+                    <a:pt x="4161449" y="3077570"/>
+                  </a:lnTo>
+                  <a:lnTo>
+                    <a:pt x="4233071" y="3092319"/>
+                  </a:lnTo>
+                  <a:lnTo>
+                    <a:pt x="4304694" y="3106532"/>
+                  </a:lnTo>
+                  <a:lnTo>
+                    <a:pt x="4376316" y="3120229"/>
+                  </a:lnTo>
+                  <a:lnTo>
+                    <a:pt x="4447939" y="3133428"/>
+                  </a:lnTo>
+                  <a:lnTo>
+                    <a:pt x="4519561" y="3146149"/>
+                  </a:lnTo>
+                  <a:lnTo>
+                    <a:pt x="4591184" y="3158407"/>
+                  </a:lnTo>
+                  <a:lnTo>
+                    <a:pt x="4662806" y="3170221"/>
+                  </a:lnTo>
+                  <a:lnTo>
+                    <a:pt x="4734429" y="3181605"/>
+                  </a:lnTo>
+                  <a:lnTo>
+                    <a:pt x="4806052" y="3192576"/>
+                  </a:lnTo>
+                  <a:lnTo>
+                    <a:pt x="4877674" y="3203149"/>
+                  </a:lnTo>
+                  <a:lnTo>
+                    <a:pt x="4949297" y="3213337"/>
+                  </a:lnTo>
+                  <a:lnTo>
+                    <a:pt x="5020919" y="3223156"/>
+                  </a:lnTo>
+                  <a:lnTo>
+                    <a:pt x="5092542" y="3232619"/>
+                  </a:lnTo>
+                  <a:lnTo>
+                    <a:pt x="5164164" y="3241737"/>
+                  </a:lnTo>
+                  <a:lnTo>
+                    <a:pt x="5235787" y="3250525"/>
+                  </a:lnTo>
+                  <a:lnTo>
+                    <a:pt x="5307409" y="3258993"/>
+                  </a:lnTo>
+                  <a:lnTo>
+                    <a:pt x="5379032" y="3267154"/>
+                  </a:lnTo>
+                  <a:lnTo>
+                    <a:pt x="5450654" y="3275019"/>
+                  </a:lnTo>
+                  <a:lnTo>
+                    <a:pt x="5522277" y="3282598"/>
+                  </a:lnTo>
+                  <a:lnTo>
+                    <a:pt x="5593899" y="3289902"/>
+                  </a:lnTo>
+                  <a:lnTo>
+                    <a:pt x="5665522" y="3296941"/>
+                  </a:lnTo>
+                  <a:lnTo>
+                    <a:pt x="5737144" y="3303724"/>
+                  </a:lnTo>
+                  <a:lnTo>
+                    <a:pt x="5808767" y="3310260"/>
+                  </a:lnTo>
+                  <a:lnTo>
+                    <a:pt x="5880389" y="3316560"/>
+                  </a:lnTo>
+                  <a:lnTo>
+                    <a:pt x="5952012" y="3322631"/>
+                  </a:lnTo>
+                  <a:lnTo>
+                    <a:pt x="6023634" y="3328481"/>
+                  </a:lnTo>
+                  <a:lnTo>
+                    <a:pt x="6095257" y="3334119"/>
+                  </a:lnTo>
+                  <a:lnTo>
+                    <a:pt x="6166880" y="3339552"/>
+                  </a:lnTo>
+                  <a:lnTo>
+                    <a:pt x="6238502" y="3344788"/>
+                  </a:lnTo>
+                  <a:lnTo>
+                    <a:pt x="6310125" y="3349833"/>
+                  </a:lnTo>
+                  <a:lnTo>
+                    <a:pt x="6381747" y="3354696"/>
+                  </a:lnTo>
+                  <a:lnTo>
+                    <a:pt x="6453370" y="3359382"/>
                   </a:lnTo>
                 </a:path>
               </a:pathLst>
@@ -4485,7 +4442,7 @@
         </p:sp>
         <p:sp>
           <p:nvSpPr>
-            <p:cNvPr id="25" name="pl25"/>
+            <p:cNvPr id="24" name="pl24"/>
             <p:cNvSpPr/>
             <p:nvPr/>
           </p:nvSpPr>
@@ -4528,13 +4485,13 @@
         </p:sp>
         <p:sp>
           <p:nvSpPr>
-            <p:cNvPr id="26" name="pl26"/>
+            <p:cNvPr id="25" name="pl25"/>
             <p:cNvSpPr/>
             <p:nvPr/>
           </p:nvSpPr>
           <p:spPr>
             <a:xfrm>
-              <a:off x="4269157" y="2073503"/>
+              <a:off x="4588151" y="2073503"/>
               <a:ext cx="0" cy="3649639"/>
             </a:xfrm>
             <a:custGeom>
@@ -4571,7 +4528,7 @@
         </p:sp>
         <p:sp>
           <p:nvSpPr>
-            <p:cNvPr id="27" name="tx27"/>
+            <p:cNvPr id="26" name="tx26"/>
             <p:cNvSpPr/>
             <p:nvPr/>
           </p:nvSpPr>
@@ -4617,7 +4574,7 @@
         </p:sp>
         <p:sp>
           <p:nvSpPr>
-            <p:cNvPr id="28" name="tx28"/>
+            <p:cNvPr id="27" name="tx27"/>
             <p:cNvSpPr/>
             <p:nvPr/>
           </p:nvSpPr>
@@ -4663,7 +4620,7 @@
         </p:sp>
         <p:sp>
           <p:nvSpPr>
-            <p:cNvPr id="29" name="tx29"/>
+            <p:cNvPr id="28" name="tx28"/>
             <p:cNvSpPr/>
             <p:nvPr/>
           </p:nvSpPr>
@@ -4709,7 +4666,7 @@
         </p:sp>
         <p:sp>
           <p:nvSpPr>
-            <p:cNvPr id="30" name="tx30"/>
+            <p:cNvPr id="29" name="tx29"/>
             <p:cNvSpPr/>
             <p:nvPr/>
           </p:nvSpPr>
@@ -4755,7 +4712,7 @@
         </p:sp>
         <p:sp>
           <p:nvSpPr>
-            <p:cNvPr id="31" name="tx31"/>
+            <p:cNvPr id="30" name="tx30"/>
             <p:cNvSpPr/>
             <p:nvPr/>
           </p:nvSpPr>
@@ -4801,14 +4758,14 @@
         </p:sp>
         <p:sp>
           <p:nvSpPr>
-            <p:cNvPr id="32" name="tx32"/>
+            <p:cNvPr id="31" name="tx31"/>
             <p:cNvSpPr/>
             <p:nvPr/>
           </p:nvSpPr>
           <p:spPr>
             <a:xfrm>
-              <a:off x="2423864" y="5785772"/>
-              <a:ext cx="155356" cy="80101"/>
+              <a:off x="2360651" y="5785772"/>
+              <a:ext cx="161574" cy="80101"/>
             </a:xfrm>
             <a:prstGeom prst="rect">
               <a:avLst/>
@@ -4840,21 +4797,21 @@
                   <a:latin typeface="Helvetica"/>
                   <a:cs typeface="Helvetica"/>
                 </a:rPr>
-                <a:t>0.8</a:t>
+                <a:t>-25</a:t>
               </a:r>
             </a:p>
           </p:txBody>
         </p:sp>
         <p:sp>
           <p:nvSpPr>
-            <p:cNvPr id="33" name="tx33"/>
+            <p:cNvPr id="32" name="tx32"/>
             <p:cNvSpPr/>
             <p:nvPr/>
           </p:nvSpPr>
           <p:spPr>
             <a:xfrm>
-              <a:off x="4196521" y="5785772"/>
-              <a:ext cx="155356" cy="80101"/>
+              <a:off x="4561958" y="5785772"/>
+              <a:ext cx="62179" cy="80101"/>
             </a:xfrm>
             <a:prstGeom prst="rect">
               <a:avLst/>
@@ -4886,21 +4843,21 @@
                   <a:latin typeface="Helvetica"/>
                   <a:cs typeface="Helvetica"/>
                 </a:rPr>
-                <a:t>1.0</a:t>
+                <a:t>0</a:t>
               </a:r>
             </a:p>
           </p:txBody>
         </p:sp>
         <p:sp>
           <p:nvSpPr>
-            <p:cNvPr id="34" name="tx34"/>
+            <p:cNvPr id="33" name="tx33"/>
             <p:cNvSpPr/>
             <p:nvPr/>
           </p:nvSpPr>
           <p:spPr>
             <a:xfrm>
-              <a:off x="5969179" y="5785772"/>
-              <a:ext cx="155356" cy="80101"/>
+              <a:off x="6682478" y="5785772"/>
+              <a:ext cx="124358" cy="80101"/>
             </a:xfrm>
             <a:prstGeom prst="rect">
               <a:avLst/>
@@ -4932,67 +4889,21 @@
                   <a:latin typeface="Helvetica"/>
                   <a:cs typeface="Helvetica"/>
                 </a:rPr>
-                <a:t>1.2</a:t>
+                <a:t>25</a:t>
               </a:r>
             </a:p>
           </p:txBody>
         </p:sp>
         <p:sp>
           <p:nvSpPr>
-            <p:cNvPr id="35" name="tx35"/>
+            <p:cNvPr id="34" name="tx34"/>
             <p:cNvSpPr/>
             <p:nvPr/>
           </p:nvSpPr>
           <p:spPr>
             <a:xfrm>
-              <a:off x="7741836" y="5785772"/>
-              <a:ext cx="155356" cy="80101"/>
-            </a:xfrm>
-            <a:prstGeom prst="rect">
-              <a:avLst/>
-            </a:prstGeom>
-            <a:noFill/>
-          </p:spPr>
-          <p:txBody>
-            <a:bodyPr lIns="0" rIns="0" tIns="0" bIns="0" anchorCtr="1" anchor="ctr" wrap="none"/>
-            <a:lstStyle/>
-            <a:p>
-              <a:pPr algn="l" marL="0" marR="0" indent="0">
-                <a:lnSpc>
-                  <a:spcPts val="880"/>
-                </a:lnSpc>
-                <a:spcBef>
-                  <a:spcPts val="0"/>
-                </a:spcBef>
-                <a:spcAft>
-                  <a:spcPts val="0"/>
-                </a:spcAft>
-              </a:pPr>
-              <a:r>
-                <a:rPr sz="880">
-                  <a:solidFill>
-                    <a:srgbClr val="4D4D4D">
-                      <a:alpha val="100000"/>
-                    </a:srgbClr>
-                  </a:solidFill>
-                  <a:latin typeface="Helvetica"/>
-                  <a:cs typeface="Helvetica"/>
-                </a:rPr>
-                <a:t>1.4</a:t>
-              </a:r>
-            </a:p>
-          </p:txBody>
-        </p:sp>
-        <p:sp>
-          <p:nvSpPr>
-            <p:cNvPr id="36" name="tx36"/>
-            <p:cNvSpPr/>
-            <p:nvPr/>
-          </p:nvSpPr>
-          <p:spPr>
-            <a:xfrm>
-              <a:off x="3879271" y="5925448"/>
-              <a:ext cx="1676186" cy="100218"/>
+              <a:off x="2928340" y="5925448"/>
+              <a:ext cx="3578047" cy="100218"/>
             </a:xfrm>
             <a:prstGeom prst="rect">
               <a:avLst/>
@@ -5024,14 +4935,14 @@
                   <a:latin typeface="Helvetica"/>
                   <a:cs typeface="Helvetica"/>
                 </a:rPr>
-                <a:t>CKD-EPI Cr-Cys / CG ratio</a:t>
+                <a:t>eGFR difference (%): 100 × (CKD-EPI Cr-Cys − CG) / CG</a:t>
               </a:r>
             </a:p>
           </p:txBody>
         </p:sp>
         <p:sp>
           <p:nvSpPr>
-            <p:cNvPr id="37" name="tx37"/>
+            <p:cNvPr id="35" name="tx35"/>
             <p:cNvSpPr/>
             <p:nvPr/>
           </p:nvSpPr>
@@ -5077,14 +4988,14 @@
         </p:sp>
         <p:sp>
           <p:nvSpPr>
-            <p:cNvPr id="38" name="tx38"/>
+            <p:cNvPr id="36" name="tx36"/>
             <p:cNvSpPr/>
             <p:nvPr/>
           </p:nvSpPr>
           <p:spPr>
             <a:xfrm>
               <a:off x="817517" y="1896563"/>
-              <a:ext cx="6899879" cy="82021"/>
+              <a:ext cx="7052127" cy="82021"/>
             </a:xfrm>
             <a:prstGeom prst="rect">
               <a:avLst/>
@@ -5116,14 +5027,14 @@
                   <a:latin typeface="Helvetica"/>
                   <a:cs typeface="Helvetica"/>
                 </a:rPr>
-                <a:t>subHR per 0.1 ratio decline: 1.56 (1.38-1.77), p_Bonf = &lt;0.001 (n = 6)  |  per IQR decline (Δ = 0.29): 3.67 (2.54-5.31)  |  IQR: [0.85, 1.15]</a:t>
+                <a:t>subHR per 10 % decline: 1.56 (1.38-1.77), p_Bonf = &lt;0.001 (n = 6)  |  per IQR decline (Δ = 29.3 %): 3.67 (2.54-5.31)  |  IQR: [-14.6, 14.7] %</a:t>
               </a:r>
             </a:p>
           </p:txBody>
         </p:sp>
         <p:sp>
           <p:nvSpPr>
-            <p:cNvPr id="39" name="tx39"/>
+            <p:cNvPr id="37" name="tx37"/>
             <p:cNvSpPr/>
             <p:nvPr/>
           </p:nvSpPr>

--- a/docs/pptx/whole/jx-linsubhr-ratio-grade3.pptx
+++ b/docs/pptx/whole/jx-linsubhr-ratio-grade3.pptx
@@ -2265,34 +2265,26 @@
         </p:sp>
         <p:sp>
           <p:nvSpPr>
-            <p:cNvPr id="4" name="pl4"/>
+            <p:cNvPr id="4" name="rc4"/>
             <p:cNvSpPr/>
             <p:nvPr/>
           </p:nvSpPr>
           <p:spPr>
             <a:xfrm>
-              <a:off x="817517" y="5142518"/>
-              <a:ext cx="7799693" cy="0"/>
+              <a:off x="457200" y="1600200"/>
+              <a:ext cx="8229600" cy="4525962"/>
             </a:xfrm>
-            <a:custGeom>
+            <a:prstGeom prst="rect">
               <a:avLst/>
-              <a:pathLst>
-                <a:path w="7799693" h="0">
-                  <a:moveTo>
-                    <a:pt x="0" y="0"/>
-                  </a:moveTo>
-                  <a:lnTo>
-                    <a:pt x="7799693" y="0"/>
-                  </a:lnTo>
-                  <a:lnTo>
-                    <a:pt x="7799693" y="0"/>
-                  </a:lnTo>
-                </a:path>
-              </a:pathLst>
-            </a:custGeom>
-            <a:ln w="6775" cap="flat">
+            </a:prstGeom>
+            <a:solidFill>
+              <a:srgbClr val="FFFFFF">
+                <a:alpha val="100000"/>
+              </a:srgbClr>
+            </a:solidFill>
+            <a:ln w="13550" cap="rnd">
               <a:solidFill>
-                <a:srgbClr val="EBEBEB">
+                <a:srgbClr val="FFFFFF">
                   <a:alpha val="100000"/>
                 </a:srgbClr>
               </a:solidFill>
@@ -2314,21 +2306,21 @@
           </p:nvSpPr>
           <p:spPr>
             <a:xfrm>
-              <a:off x="817517" y="4313054"/>
-              <a:ext cx="7799693" cy="0"/>
+              <a:off x="887106" y="3250627"/>
+              <a:ext cx="7660515" cy="0"/>
             </a:xfrm>
             <a:custGeom>
               <a:avLst/>
               <a:pathLst>
-                <a:path w="7799693" h="0">
+                <a:path w="7660515" h="0">
                   <a:moveTo>
                     <a:pt x="0" y="0"/>
                   </a:moveTo>
                   <a:lnTo>
-                    <a:pt x="7799693" y="0"/>
-                  </a:lnTo>
-                  <a:lnTo>
-                    <a:pt x="7799693" y="0"/>
+                    <a:pt x="7660515" y="0"/>
+                  </a:lnTo>
+                  <a:lnTo>
+                    <a:pt x="7660515" y="0"/>
                   </a:lnTo>
                 </a:path>
               </a:pathLst>
@@ -2357,21 +2349,21 @@
           </p:nvSpPr>
           <p:spPr>
             <a:xfrm>
-              <a:off x="817517" y="3483591"/>
-              <a:ext cx="7799693" cy="0"/>
+              <a:off x="887106" y="2951293"/>
+              <a:ext cx="7660515" cy="0"/>
             </a:xfrm>
             <a:custGeom>
               <a:avLst/>
               <a:pathLst>
-                <a:path w="7799693" h="0">
+                <a:path w="7660515" h="0">
                   <a:moveTo>
                     <a:pt x="0" y="0"/>
                   </a:moveTo>
                   <a:lnTo>
-                    <a:pt x="7799693" y="0"/>
-                  </a:lnTo>
-                  <a:lnTo>
-                    <a:pt x="7799693" y="0"/>
+                    <a:pt x="7660515" y="0"/>
+                  </a:lnTo>
+                  <a:lnTo>
+                    <a:pt x="7660515" y="0"/>
                   </a:lnTo>
                 </a:path>
               </a:pathLst>
@@ -2400,21 +2392,21 @@
           </p:nvSpPr>
           <p:spPr>
             <a:xfrm>
-              <a:off x="817517" y="2654127"/>
-              <a:ext cx="7799693" cy="0"/>
+              <a:off x="887106" y="2651959"/>
+              <a:ext cx="7660515" cy="0"/>
             </a:xfrm>
             <a:custGeom>
               <a:avLst/>
               <a:pathLst>
-                <a:path w="7799693" h="0">
+                <a:path w="7660515" h="0">
                   <a:moveTo>
                     <a:pt x="0" y="0"/>
                   </a:moveTo>
                   <a:lnTo>
-                    <a:pt x="7799693" y="0"/>
-                  </a:lnTo>
-                  <a:lnTo>
-                    <a:pt x="7799693" y="0"/>
+                    <a:pt x="7660515" y="0"/>
+                  </a:lnTo>
+                  <a:lnTo>
+                    <a:pt x="7660515" y="0"/>
                   </a:lnTo>
                 </a:path>
               </a:pathLst>
@@ -2443,21 +2435,21 @@
           </p:nvSpPr>
           <p:spPr>
             <a:xfrm>
-              <a:off x="1365633" y="2073503"/>
-              <a:ext cx="0" cy="3649639"/>
+              <a:off x="887106" y="2352625"/>
+              <a:ext cx="7660515" cy="0"/>
             </a:xfrm>
             <a:custGeom>
               <a:avLst/>
               <a:pathLst>
-                <a:path w="0" h="3649639">
+                <a:path w="7660515" h="0">
                   <a:moveTo>
-                    <a:pt x="0" y="3649639"/>
+                    <a:pt x="0" y="0"/>
                   </a:moveTo>
                   <a:lnTo>
-                    <a:pt x="0" y="0"/>
-                  </a:lnTo>
-                  <a:lnTo>
-                    <a:pt x="0" y="0"/>
+                    <a:pt x="7660515" y="0"/>
+                  </a:lnTo>
+                  <a:lnTo>
+                    <a:pt x="7660515" y="0"/>
                   </a:lnTo>
                 </a:path>
               </a:pathLst>
@@ -2486,15 +2478,15 @@
           </p:nvSpPr>
           <p:spPr>
             <a:xfrm>
-              <a:off x="3517243" y="2073503"/>
-              <a:ext cx="0" cy="3649639"/>
+              <a:off x="1425442" y="2143092"/>
+              <a:ext cx="0" cy="1317069"/>
             </a:xfrm>
             <a:custGeom>
               <a:avLst/>
               <a:pathLst>
-                <a:path w="0" h="3649639">
+                <a:path w="0" h="1317069">
                   <a:moveTo>
-                    <a:pt x="0" y="3649639"/>
+                    <a:pt x="0" y="1317069"/>
                   </a:moveTo>
                   <a:lnTo>
                     <a:pt x="0" y="0"/>
@@ -2529,15 +2521,15 @@
           </p:nvSpPr>
           <p:spPr>
             <a:xfrm>
-              <a:off x="5668852" y="2073503"/>
-              <a:ext cx="0" cy="3649639"/>
+              <a:off x="3538658" y="2143092"/>
+              <a:ext cx="0" cy="1317069"/>
             </a:xfrm>
             <a:custGeom>
               <a:avLst/>
               <a:pathLst>
-                <a:path w="0" h="3649639">
+                <a:path w="0" h="1317069">
                   <a:moveTo>
-                    <a:pt x="0" y="3649639"/>
+                    <a:pt x="0" y="1317069"/>
                   </a:moveTo>
                   <a:lnTo>
                     <a:pt x="0" y="0"/>
@@ -2572,15 +2564,15 @@
           </p:nvSpPr>
           <p:spPr>
             <a:xfrm>
-              <a:off x="7820461" y="2073503"/>
-              <a:ext cx="0" cy="3649639"/>
+              <a:off x="5651874" y="2143092"/>
+              <a:ext cx="0" cy="1317069"/>
             </a:xfrm>
             <a:custGeom>
               <a:avLst/>
               <a:pathLst>
-                <a:path w="0" h="3649639">
+                <a:path w="0" h="1317069">
                   <a:moveTo>
-                    <a:pt x="0" y="3649639"/>
+                    <a:pt x="0" y="1317069"/>
                   </a:moveTo>
                   <a:lnTo>
                     <a:pt x="0" y="0"/>
@@ -2615,26 +2607,26 @@
           </p:nvSpPr>
           <p:spPr>
             <a:xfrm>
-              <a:off x="817517" y="5557249"/>
-              <a:ext cx="7799693" cy="0"/>
+              <a:off x="7765090" y="2143092"/>
+              <a:ext cx="0" cy="1317069"/>
             </a:xfrm>
             <a:custGeom>
               <a:avLst/>
               <a:pathLst>
-                <a:path w="7799693" h="0">
+                <a:path w="0" h="1317069">
                   <a:moveTo>
+                    <a:pt x="0" y="1317069"/>
+                  </a:moveTo>
+                  <a:lnTo>
                     <a:pt x="0" y="0"/>
-                  </a:moveTo>
-                  <a:lnTo>
-                    <a:pt x="7799693" y="0"/>
-                  </a:lnTo>
-                  <a:lnTo>
-                    <a:pt x="7799693" y="0"/>
+                  </a:lnTo>
+                  <a:lnTo>
+                    <a:pt x="0" y="0"/>
                   </a:lnTo>
                 </a:path>
               </a:pathLst>
             </a:custGeom>
-            <a:ln w="13550" cap="flat">
+            <a:ln w="6775" cap="flat">
               <a:solidFill>
                 <a:srgbClr val="EBEBEB">
                   <a:alpha val="100000"/>
@@ -2658,21 +2650,21 @@
           </p:nvSpPr>
           <p:spPr>
             <a:xfrm>
-              <a:off x="817517" y="4727786"/>
-              <a:ext cx="7799693" cy="0"/>
+              <a:off x="887106" y="3400294"/>
+              <a:ext cx="7660515" cy="0"/>
             </a:xfrm>
             <a:custGeom>
               <a:avLst/>
               <a:pathLst>
-                <a:path w="7799693" h="0">
+                <a:path w="7660515" h="0">
                   <a:moveTo>
                     <a:pt x="0" y="0"/>
                   </a:moveTo>
                   <a:lnTo>
-                    <a:pt x="7799693" y="0"/>
-                  </a:lnTo>
-                  <a:lnTo>
-                    <a:pt x="7799693" y="0"/>
+                    <a:pt x="7660515" y="0"/>
+                  </a:lnTo>
+                  <a:lnTo>
+                    <a:pt x="7660515" y="0"/>
                   </a:lnTo>
                 </a:path>
               </a:pathLst>
@@ -2701,21 +2693,21 @@
           </p:nvSpPr>
           <p:spPr>
             <a:xfrm>
-              <a:off x="817517" y="3898322"/>
-              <a:ext cx="7799693" cy="0"/>
+              <a:off x="887106" y="3100960"/>
+              <a:ext cx="7660515" cy="0"/>
             </a:xfrm>
             <a:custGeom>
               <a:avLst/>
               <a:pathLst>
-                <a:path w="7799693" h="0">
+                <a:path w="7660515" h="0">
                   <a:moveTo>
                     <a:pt x="0" y="0"/>
                   </a:moveTo>
                   <a:lnTo>
-                    <a:pt x="7799693" y="0"/>
-                  </a:lnTo>
-                  <a:lnTo>
-                    <a:pt x="7799693" y="0"/>
+                    <a:pt x="7660515" y="0"/>
+                  </a:lnTo>
+                  <a:lnTo>
+                    <a:pt x="7660515" y="0"/>
                   </a:lnTo>
                 </a:path>
               </a:pathLst>
@@ -2744,21 +2736,21 @@
           </p:nvSpPr>
           <p:spPr>
             <a:xfrm>
-              <a:off x="817517" y="3068859"/>
-              <a:ext cx="7799693" cy="0"/>
+              <a:off x="887106" y="2801626"/>
+              <a:ext cx="7660515" cy="0"/>
             </a:xfrm>
             <a:custGeom>
               <a:avLst/>
               <a:pathLst>
-                <a:path w="7799693" h="0">
+                <a:path w="7660515" h="0">
                   <a:moveTo>
                     <a:pt x="0" y="0"/>
                   </a:moveTo>
                   <a:lnTo>
-                    <a:pt x="7799693" y="0"/>
-                  </a:lnTo>
-                  <a:lnTo>
-                    <a:pt x="7799693" y="0"/>
+                    <a:pt x="7660515" y="0"/>
+                  </a:lnTo>
+                  <a:lnTo>
+                    <a:pt x="7660515" y="0"/>
                   </a:lnTo>
                 </a:path>
               </a:pathLst>
@@ -2787,21 +2779,21 @@
           </p:nvSpPr>
           <p:spPr>
             <a:xfrm>
-              <a:off x="817517" y="2239395"/>
-              <a:ext cx="7799693" cy="0"/>
+              <a:off x="887106" y="2502292"/>
+              <a:ext cx="7660515" cy="0"/>
             </a:xfrm>
             <a:custGeom>
               <a:avLst/>
               <a:pathLst>
-                <a:path w="7799693" h="0">
+                <a:path w="7660515" h="0">
                   <a:moveTo>
                     <a:pt x="0" y="0"/>
                   </a:moveTo>
                   <a:lnTo>
-                    <a:pt x="7799693" y="0"/>
-                  </a:lnTo>
-                  <a:lnTo>
-                    <a:pt x="7799693" y="0"/>
+                    <a:pt x="7660515" y="0"/>
+                  </a:lnTo>
+                  <a:lnTo>
+                    <a:pt x="7660515" y="0"/>
                   </a:lnTo>
                 </a:path>
               </a:pathLst>
@@ -2830,21 +2822,21 @@
           </p:nvSpPr>
           <p:spPr>
             <a:xfrm>
-              <a:off x="2441438" y="2073503"/>
-              <a:ext cx="0" cy="3649639"/>
+              <a:off x="887106" y="2202958"/>
+              <a:ext cx="7660515" cy="0"/>
             </a:xfrm>
             <a:custGeom>
               <a:avLst/>
               <a:pathLst>
-                <a:path w="0" h="3649639">
+                <a:path w="7660515" h="0">
                   <a:moveTo>
-                    <a:pt x="0" y="3649639"/>
+                    <a:pt x="0" y="0"/>
                   </a:moveTo>
                   <a:lnTo>
-                    <a:pt x="0" y="0"/>
-                  </a:lnTo>
-                  <a:lnTo>
-                    <a:pt x="0" y="0"/>
+                    <a:pt x="7660515" y="0"/>
+                  </a:lnTo>
+                  <a:lnTo>
+                    <a:pt x="7660515" y="0"/>
                   </a:lnTo>
                 </a:path>
               </a:pathLst>
@@ -2873,15 +2865,15 @@
           </p:nvSpPr>
           <p:spPr>
             <a:xfrm>
-              <a:off x="4593047" y="2073503"/>
-              <a:ext cx="0" cy="3649639"/>
+              <a:off x="2482050" y="2143092"/>
+              <a:ext cx="0" cy="1317069"/>
             </a:xfrm>
             <a:custGeom>
               <a:avLst/>
               <a:pathLst>
-                <a:path w="0" h="3649639">
+                <a:path w="0" h="1317069">
                   <a:moveTo>
-                    <a:pt x="0" y="3649639"/>
+                    <a:pt x="0" y="1317069"/>
                   </a:moveTo>
                   <a:lnTo>
                     <a:pt x="0" y="0"/>
@@ -2916,15 +2908,15 @@
           </p:nvSpPr>
           <p:spPr>
             <a:xfrm>
-              <a:off x="6744657" y="2073503"/>
-              <a:ext cx="0" cy="3649639"/>
+              <a:off x="4595266" y="2143092"/>
+              <a:ext cx="0" cy="1317069"/>
             </a:xfrm>
             <a:custGeom>
               <a:avLst/>
               <a:pathLst>
-                <a:path w="0" h="3649639">
+                <a:path w="0" h="1317069">
                   <a:moveTo>
-                    <a:pt x="0" y="3649639"/>
+                    <a:pt x="0" y="1317069"/>
                   </a:moveTo>
                   <a:lnTo>
                     <a:pt x="0" y="0"/>
@@ -2953,567 +2945,610 @@
         </p:sp>
         <p:sp>
           <p:nvSpPr>
-            <p:cNvPr id="20" name="pg20"/>
+            <p:cNvPr id="20" name="pl20"/>
             <p:cNvSpPr/>
             <p:nvPr/>
           </p:nvSpPr>
           <p:spPr>
             <a:xfrm>
-              <a:off x="1172049" y="2073503"/>
-              <a:ext cx="7090630" cy="3411047"/>
+              <a:off x="6708482" y="2143092"/>
+              <a:ext cx="0" cy="1317069"/>
             </a:xfrm>
             <a:custGeom>
               <a:avLst/>
               <a:pathLst>
-                <a:path w="7090630" h="3411047">
+                <a:path w="0" h="1317069">
                   <a:moveTo>
-                    <a:pt x="1250424" y="0"/>
+                    <a:pt x="0" y="1317069"/>
                   </a:moveTo>
                   <a:lnTo>
-                    <a:pt x="1289205" y="89315"/>
-                  </a:lnTo>
-                  <a:lnTo>
-                    <a:pt x="1360827" y="246624"/>
-                  </a:lnTo>
-                  <a:lnTo>
-                    <a:pt x="1432450" y="396642"/>
-                  </a:lnTo>
-                  <a:lnTo>
-                    <a:pt x="1504073" y="539708"/>
-                  </a:lnTo>
-                  <a:lnTo>
-                    <a:pt x="1575695" y="676144"/>
-                  </a:lnTo>
-                  <a:lnTo>
-                    <a:pt x="1647318" y="806258"/>
-                  </a:lnTo>
-                  <a:lnTo>
-                    <a:pt x="1718940" y="930341"/>
-                  </a:lnTo>
-                  <a:lnTo>
-                    <a:pt x="1790563" y="1048674"/>
-                  </a:lnTo>
-                  <a:lnTo>
-                    <a:pt x="1862185" y="1161523"/>
-                  </a:lnTo>
-                  <a:lnTo>
-                    <a:pt x="1933808" y="1269142"/>
-                  </a:lnTo>
-                  <a:lnTo>
-                    <a:pt x="2005430" y="1371774"/>
-                  </a:lnTo>
-                  <a:lnTo>
-                    <a:pt x="2077053" y="1469649"/>
-                  </a:lnTo>
-                  <a:lnTo>
-                    <a:pt x="2148675" y="1562989"/>
-                  </a:lnTo>
-                  <a:lnTo>
-                    <a:pt x="2220298" y="1652003"/>
-                  </a:lnTo>
-                  <a:lnTo>
-                    <a:pt x="2291920" y="1736892"/>
-                  </a:lnTo>
-                  <a:lnTo>
-                    <a:pt x="2363543" y="1817846"/>
-                  </a:lnTo>
-                  <a:lnTo>
-                    <a:pt x="2435165" y="1895049"/>
-                  </a:lnTo>
-                  <a:lnTo>
-                    <a:pt x="2506788" y="1968675"/>
-                  </a:lnTo>
-                  <a:lnTo>
-                    <a:pt x="2578410" y="2038888"/>
-                  </a:lnTo>
-                  <a:lnTo>
-                    <a:pt x="2650033" y="2105847"/>
-                  </a:lnTo>
-                  <a:lnTo>
-                    <a:pt x="2721655" y="2169703"/>
-                  </a:lnTo>
-                  <a:lnTo>
-                    <a:pt x="2793278" y="2230600"/>
-                  </a:lnTo>
-                  <a:lnTo>
-                    <a:pt x="2864901" y="2288675"/>
-                  </a:lnTo>
-                  <a:lnTo>
-                    <a:pt x="2936523" y="2344058"/>
-                  </a:lnTo>
-                  <a:lnTo>
-                    <a:pt x="3008146" y="2396875"/>
-                  </a:lnTo>
-                  <a:lnTo>
-                    <a:pt x="3079768" y="2447244"/>
-                  </a:lnTo>
-                  <a:lnTo>
-                    <a:pt x="3151391" y="2495279"/>
-                  </a:lnTo>
-                  <a:lnTo>
-                    <a:pt x="3223013" y="2541088"/>
-                  </a:lnTo>
-                  <a:lnTo>
-                    <a:pt x="3294636" y="2584773"/>
-                  </a:lnTo>
-                  <a:lnTo>
-                    <a:pt x="3366258" y="2626435"/>
-                  </a:lnTo>
-                  <a:lnTo>
-                    <a:pt x="3437881" y="2660945"/>
-                  </a:lnTo>
-                  <a:lnTo>
-                    <a:pt x="3509503" y="2682481"/>
-                  </a:lnTo>
-                  <a:lnTo>
-                    <a:pt x="3581126" y="2703452"/>
-                  </a:lnTo>
-                  <a:lnTo>
-                    <a:pt x="3652748" y="2723875"/>
-                  </a:lnTo>
-                  <a:lnTo>
-                    <a:pt x="3724371" y="2743763"/>
-                  </a:lnTo>
-                  <a:lnTo>
-                    <a:pt x="3795993" y="2763131"/>
-                  </a:lnTo>
-                  <a:lnTo>
-                    <a:pt x="3867616" y="2781992"/>
-                  </a:lnTo>
-                  <a:lnTo>
-                    <a:pt x="3939238" y="2800359"/>
-                  </a:lnTo>
-                  <a:lnTo>
-                    <a:pt x="4010861" y="2818245"/>
-                  </a:lnTo>
-                  <a:lnTo>
-                    <a:pt x="4082483" y="2835663"/>
-                  </a:lnTo>
-                  <a:lnTo>
-                    <a:pt x="4154106" y="2852626"/>
-                  </a:lnTo>
-                  <a:lnTo>
-                    <a:pt x="4225729" y="2869144"/>
-                  </a:lnTo>
-                  <a:lnTo>
-                    <a:pt x="4297351" y="2885230"/>
-                  </a:lnTo>
-                  <a:lnTo>
-                    <a:pt x="4368974" y="2900895"/>
-                  </a:lnTo>
-                  <a:lnTo>
-                    <a:pt x="4440596" y="2916150"/>
-                  </a:lnTo>
-                  <a:lnTo>
-                    <a:pt x="4512219" y="2931006"/>
-                  </a:lnTo>
-                  <a:lnTo>
-                    <a:pt x="4583841" y="2945473"/>
-                  </a:lnTo>
-                  <a:lnTo>
-                    <a:pt x="4655464" y="2959561"/>
-                  </a:lnTo>
-                  <a:lnTo>
-                    <a:pt x="4727086" y="2973281"/>
-                  </a:lnTo>
-                  <a:lnTo>
-                    <a:pt x="4798709" y="2986641"/>
-                  </a:lnTo>
-                  <a:lnTo>
-                    <a:pt x="4870331" y="2999652"/>
-                  </a:lnTo>
-                  <a:lnTo>
-                    <a:pt x="4941954" y="3012322"/>
-                  </a:lnTo>
-                  <a:lnTo>
-                    <a:pt x="5013576" y="3024661"/>
-                  </a:lnTo>
-                  <a:lnTo>
-                    <a:pt x="5085199" y="3036677"/>
-                  </a:lnTo>
-                  <a:lnTo>
-                    <a:pt x="5156821" y="3048378"/>
-                  </a:lnTo>
-                  <a:lnTo>
-                    <a:pt x="5228444" y="3059773"/>
-                  </a:lnTo>
-                  <a:lnTo>
-                    <a:pt x="5300066" y="3070870"/>
-                  </a:lnTo>
-                  <a:lnTo>
-                    <a:pt x="5371689" y="3081676"/>
-                  </a:lnTo>
-                  <a:lnTo>
-                    <a:pt x="5443311" y="3092199"/>
-                  </a:lnTo>
-                  <a:lnTo>
-                    <a:pt x="5514934" y="3102447"/>
-                  </a:lnTo>
-                  <a:lnTo>
-                    <a:pt x="5586557" y="3112427"/>
-                  </a:lnTo>
-                  <a:lnTo>
-                    <a:pt x="5658179" y="3122146"/>
-                  </a:lnTo>
-                  <a:lnTo>
-                    <a:pt x="5729802" y="3131610"/>
-                  </a:lnTo>
-                  <a:lnTo>
-                    <a:pt x="5801424" y="3140827"/>
-                  </a:lnTo>
-                  <a:lnTo>
-                    <a:pt x="5873047" y="3149802"/>
-                  </a:lnTo>
-                  <a:lnTo>
-                    <a:pt x="5944669" y="3158542"/>
-                  </a:lnTo>
-                  <a:lnTo>
-                    <a:pt x="6016292" y="3167054"/>
-                  </a:lnTo>
-                  <a:lnTo>
-                    <a:pt x="6087914" y="3175343"/>
-                  </a:lnTo>
-                  <a:lnTo>
-                    <a:pt x="6159537" y="3183415"/>
-                  </a:lnTo>
-                  <a:lnTo>
-                    <a:pt x="6231159" y="3191275"/>
-                  </a:lnTo>
-                  <a:lnTo>
-                    <a:pt x="6302782" y="3198930"/>
-                  </a:lnTo>
-                  <a:lnTo>
-                    <a:pt x="6374404" y="3206385"/>
-                  </a:lnTo>
-                  <a:lnTo>
-                    <a:pt x="6446027" y="3213644"/>
-                  </a:lnTo>
-                  <a:lnTo>
-                    <a:pt x="6517649" y="3220713"/>
-                  </a:lnTo>
-                  <a:lnTo>
-                    <a:pt x="6589272" y="3227598"/>
-                  </a:lnTo>
-                  <a:lnTo>
-                    <a:pt x="6660894" y="3234302"/>
-                  </a:lnTo>
-                  <a:lnTo>
-                    <a:pt x="6732517" y="3240831"/>
-                  </a:lnTo>
-                  <a:lnTo>
-                    <a:pt x="6804139" y="3247189"/>
-                  </a:lnTo>
-                  <a:lnTo>
-                    <a:pt x="6875762" y="3253380"/>
-                  </a:lnTo>
-                  <a:lnTo>
-                    <a:pt x="6947385" y="3259410"/>
-                  </a:lnTo>
-                  <a:lnTo>
-                    <a:pt x="7019007" y="3265281"/>
-                  </a:lnTo>
-                  <a:lnTo>
-                    <a:pt x="7090630" y="3270999"/>
-                  </a:lnTo>
-                  <a:lnTo>
-                    <a:pt x="7090630" y="3411047"/>
-                  </a:lnTo>
-                  <a:lnTo>
-                    <a:pt x="7019007" y="3407514"/>
-                  </a:lnTo>
-                  <a:lnTo>
-                    <a:pt x="6947385" y="3403810"/>
-                  </a:lnTo>
-                  <a:lnTo>
-                    <a:pt x="6875762" y="3399925"/>
-                  </a:lnTo>
-                  <a:lnTo>
-                    <a:pt x="6804139" y="3395852"/>
-                  </a:lnTo>
-                  <a:lnTo>
-                    <a:pt x="6732517" y="3391581"/>
-                  </a:lnTo>
-                  <a:lnTo>
-                    <a:pt x="6660894" y="3387102"/>
-                  </a:lnTo>
-                  <a:lnTo>
-                    <a:pt x="6589272" y="3382406"/>
-                  </a:lnTo>
-                  <a:lnTo>
-                    <a:pt x="6517649" y="3377481"/>
-                  </a:lnTo>
-                  <a:lnTo>
-                    <a:pt x="6446027" y="3372317"/>
-                  </a:lnTo>
-                  <a:lnTo>
-                    <a:pt x="6374404" y="3366902"/>
-                  </a:lnTo>
-                  <a:lnTo>
-                    <a:pt x="6302782" y="3361224"/>
-                  </a:lnTo>
-                  <a:lnTo>
-                    <a:pt x="6231159" y="3355270"/>
-                  </a:lnTo>
-                  <a:lnTo>
-                    <a:pt x="6159537" y="3349027"/>
-                  </a:lnTo>
-                  <a:lnTo>
-                    <a:pt x="6087914" y="3342480"/>
-                  </a:lnTo>
-                  <a:lnTo>
-                    <a:pt x="6016292" y="3335615"/>
-                  </a:lnTo>
-                  <a:lnTo>
-                    <a:pt x="5944669" y="3328416"/>
-                  </a:lnTo>
-                  <a:lnTo>
-                    <a:pt x="5873047" y="3320868"/>
-                  </a:lnTo>
-                  <a:lnTo>
-                    <a:pt x="5801424" y="3312953"/>
-                  </a:lnTo>
-                  <a:lnTo>
-                    <a:pt x="5729802" y="3304653"/>
-                  </a:lnTo>
-                  <a:lnTo>
-                    <a:pt x="5658179" y="3295950"/>
-                  </a:lnTo>
-                  <a:lnTo>
-                    <a:pt x="5586557" y="3286824"/>
-                  </a:lnTo>
-                  <a:lnTo>
-                    <a:pt x="5514934" y="3277255"/>
-                  </a:lnTo>
-                  <a:lnTo>
-                    <a:pt x="5443311" y="3267220"/>
-                  </a:lnTo>
-                  <a:lnTo>
-                    <a:pt x="5371689" y="3256698"/>
-                  </a:lnTo>
-                  <a:lnTo>
-                    <a:pt x="5300066" y="3245665"/>
-                  </a:lnTo>
-                  <a:lnTo>
-                    <a:pt x="5228444" y="3234095"/>
-                  </a:lnTo>
-                  <a:lnTo>
-                    <a:pt x="5156821" y="3221963"/>
-                  </a:lnTo>
-                  <a:lnTo>
-                    <a:pt x="5085199" y="3209242"/>
-                  </a:lnTo>
-                  <a:lnTo>
-                    <a:pt x="5013576" y="3195902"/>
-                  </a:lnTo>
-                  <a:lnTo>
-                    <a:pt x="4941954" y="3181914"/>
-                  </a:lnTo>
-                  <a:lnTo>
-                    <a:pt x="4870331" y="3167247"/>
-                  </a:lnTo>
-                  <a:lnTo>
-                    <a:pt x="4798709" y="3151866"/>
-                  </a:lnTo>
-                  <a:lnTo>
-                    <a:pt x="4727086" y="3135738"/>
-                  </a:lnTo>
-                  <a:lnTo>
-                    <a:pt x="4655464" y="3118827"/>
-                  </a:lnTo>
-                  <a:lnTo>
-                    <a:pt x="4583841" y="3101094"/>
-                  </a:lnTo>
-                  <a:lnTo>
-                    <a:pt x="4512219" y="3082499"/>
-                  </a:lnTo>
-                  <a:lnTo>
-                    <a:pt x="4440596" y="3063000"/>
-                  </a:lnTo>
-                  <a:lnTo>
-                    <a:pt x="4368974" y="3042553"/>
-                  </a:lnTo>
-                  <a:lnTo>
-                    <a:pt x="4297351" y="3021114"/>
-                  </a:lnTo>
-                  <a:lnTo>
-                    <a:pt x="4225729" y="2998632"/>
-                  </a:lnTo>
-                  <a:lnTo>
-                    <a:pt x="4154106" y="2975058"/>
-                  </a:lnTo>
-                  <a:lnTo>
-                    <a:pt x="4082483" y="2950338"/>
-                  </a:lnTo>
-                  <a:lnTo>
-                    <a:pt x="4010861" y="2924417"/>
-                  </a:lnTo>
-                  <a:lnTo>
-                    <a:pt x="3939238" y="2897236"/>
-                  </a:lnTo>
-                  <a:lnTo>
-                    <a:pt x="3867616" y="2868734"/>
-                  </a:lnTo>
-                  <a:lnTo>
-                    <a:pt x="3795993" y="2838848"/>
-                  </a:lnTo>
-                  <a:lnTo>
-                    <a:pt x="3724371" y="2807509"/>
-                  </a:lnTo>
-                  <a:lnTo>
-                    <a:pt x="3652748" y="2774647"/>
-                  </a:lnTo>
-                  <a:lnTo>
-                    <a:pt x="3581126" y="2740188"/>
-                  </a:lnTo>
-                  <a:lnTo>
-                    <a:pt x="3509503" y="2704055"/>
-                  </a:lnTo>
-                  <a:lnTo>
-                    <a:pt x="3437881" y="2666165"/>
-                  </a:lnTo>
-                  <a:lnTo>
-                    <a:pt x="3366258" y="2638831"/>
-                  </a:lnTo>
-                  <a:lnTo>
-                    <a:pt x="3294636" y="2616123"/>
-                  </a:lnTo>
-                  <a:lnTo>
-                    <a:pt x="3223013" y="2592804"/>
-                  </a:lnTo>
-                  <a:lnTo>
-                    <a:pt x="3151391" y="2568859"/>
-                  </a:lnTo>
-                  <a:lnTo>
-                    <a:pt x="3079768" y="2544270"/>
-                  </a:lnTo>
-                  <a:lnTo>
-                    <a:pt x="3008146" y="2519020"/>
-                  </a:lnTo>
-                  <a:lnTo>
-                    <a:pt x="2936523" y="2493091"/>
-                  </a:lnTo>
-                  <a:lnTo>
-                    <a:pt x="2864901" y="2466466"/>
-                  </a:lnTo>
-                  <a:lnTo>
-                    <a:pt x="2793278" y="2439125"/>
-                  </a:lnTo>
-                  <a:lnTo>
-                    <a:pt x="2721655" y="2411049"/>
-                  </a:lnTo>
-                  <a:lnTo>
-                    <a:pt x="2650033" y="2382218"/>
-                  </a:lnTo>
-                  <a:lnTo>
-                    <a:pt x="2578410" y="2352613"/>
-                  </a:lnTo>
-                  <a:lnTo>
-                    <a:pt x="2506788" y="2322212"/>
-                  </a:lnTo>
-                  <a:lnTo>
-                    <a:pt x="2435165" y="2290994"/>
-                  </a:lnTo>
-                  <a:lnTo>
-                    <a:pt x="2363543" y="2258937"/>
-                  </a:lnTo>
-                  <a:lnTo>
-                    <a:pt x="2291920" y="2226018"/>
-                  </a:lnTo>
-                  <a:lnTo>
-                    <a:pt x="2220298" y="2192215"/>
-                  </a:lnTo>
-                  <a:lnTo>
-                    <a:pt x="2148675" y="2157503"/>
-                  </a:lnTo>
-                  <a:lnTo>
-                    <a:pt x="2077053" y="2121858"/>
-                  </a:lnTo>
-                  <a:lnTo>
-                    <a:pt x="2005430" y="2085255"/>
-                  </a:lnTo>
-                  <a:lnTo>
-                    <a:pt x="1933808" y="2047668"/>
-                  </a:lnTo>
-                  <a:lnTo>
-                    <a:pt x="1862185" y="2009071"/>
-                  </a:lnTo>
-                  <a:lnTo>
-                    <a:pt x="1790563" y="1969437"/>
-                  </a:lnTo>
-                  <a:lnTo>
-                    <a:pt x="1718940" y="1928738"/>
-                  </a:lnTo>
-                  <a:lnTo>
-                    <a:pt x="1647318" y="1886944"/>
-                  </a:lnTo>
-                  <a:lnTo>
-                    <a:pt x="1575695" y="1844028"/>
-                  </a:lnTo>
-                  <a:lnTo>
-                    <a:pt x="1504073" y="1799958"/>
-                  </a:lnTo>
-                  <a:lnTo>
-                    <a:pt x="1432450" y="1754703"/>
-                  </a:lnTo>
-                  <a:lnTo>
-                    <a:pt x="1360827" y="1708233"/>
-                  </a:lnTo>
-                  <a:lnTo>
-                    <a:pt x="1289205" y="1660513"/>
-                  </a:lnTo>
-                  <a:lnTo>
-                    <a:pt x="1217582" y="1611511"/>
-                  </a:lnTo>
-                  <a:lnTo>
-                    <a:pt x="1145960" y="1561191"/>
-                  </a:lnTo>
-                  <a:lnTo>
-                    <a:pt x="1074337" y="1509520"/>
-                  </a:lnTo>
-                  <a:lnTo>
-                    <a:pt x="1002715" y="1456459"/>
-                  </a:lnTo>
-                  <a:lnTo>
-                    <a:pt x="931092" y="1401973"/>
-                  </a:lnTo>
-                  <a:lnTo>
-                    <a:pt x="859470" y="1346022"/>
-                  </a:lnTo>
-                  <a:lnTo>
-                    <a:pt x="787847" y="1288567"/>
-                  </a:lnTo>
-                  <a:lnTo>
-                    <a:pt x="716225" y="1229568"/>
-                  </a:lnTo>
-                  <a:lnTo>
-                    <a:pt x="644602" y="1168983"/>
-                  </a:lnTo>
-                  <a:lnTo>
-                    <a:pt x="572980" y="1106770"/>
-                  </a:lnTo>
-                  <a:lnTo>
-                    <a:pt x="501357" y="1042885"/>
-                  </a:lnTo>
-                  <a:lnTo>
-                    <a:pt x="429735" y="977283"/>
-                  </a:lnTo>
-                  <a:lnTo>
-                    <a:pt x="358112" y="909918"/>
-                  </a:lnTo>
-                  <a:lnTo>
-                    <a:pt x="286490" y="840743"/>
-                  </a:lnTo>
-                  <a:lnTo>
-                    <a:pt x="214867" y="769708"/>
-                  </a:lnTo>
-                  <a:lnTo>
-                    <a:pt x="143245" y="696764"/>
-                  </a:lnTo>
-                  <a:lnTo>
-                    <a:pt x="71622" y="621859"/>
-                  </a:lnTo>
-                  <a:lnTo>
-                    <a:pt x="0" y="544941"/>
+                    <a:pt x="0" y="0"/>
+                  </a:lnTo>
+                  <a:lnTo>
+                    <a:pt x="0" y="0"/>
+                  </a:lnTo>
+                </a:path>
+              </a:pathLst>
+            </a:custGeom>
+            <a:ln w="13550" cap="flat">
+              <a:solidFill>
+                <a:srgbClr val="EBEBEB">
+                  <a:alpha val="100000"/>
+                </a:srgbClr>
+              </a:solidFill>
+              <a:prstDash val="solid"/>
+              <a:round/>
+            </a:ln>
+          </p:spPr>
+          <p:txBody>
+            <a:bodyPr/>
+            <a:lstStyle/>
+            <a:p/>
+          </p:txBody>
+        </p:sp>
+        <p:sp>
+          <p:nvSpPr>
+            <p:cNvPr id="21" name="pg21"/>
+            <p:cNvSpPr/>
+            <p:nvPr/>
+          </p:nvSpPr>
+          <p:spPr>
+            <a:xfrm>
+              <a:off x="1235312" y="2143092"/>
+              <a:ext cx="6964104" cy="1230966"/>
+            </a:xfrm>
+            <a:custGeom>
+              <a:avLst/>
+              <a:pathLst>
+                <a:path w="6964104" h="1230966">
+                  <a:moveTo>
+                    <a:pt x="1228112" y="0"/>
+                  </a:moveTo>
+                  <a:lnTo>
+                    <a:pt x="1266200" y="32231"/>
+                  </a:lnTo>
+                  <a:lnTo>
+                    <a:pt x="1336545" y="89000"/>
+                  </a:lnTo>
+                  <a:lnTo>
+                    <a:pt x="1406889" y="143139"/>
+                  </a:lnTo>
+                  <a:lnTo>
+                    <a:pt x="1477234" y="194768"/>
+                  </a:lnTo>
+                  <a:lnTo>
+                    <a:pt x="1547578" y="244004"/>
+                  </a:lnTo>
+                  <a:lnTo>
+                    <a:pt x="1617923" y="290959"/>
+                  </a:lnTo>
+                  <a:lnTo>
+                    <a:pt x="1688267" y="335738"/>
+                  </a:lnTo>
+                  <a:lnTo>
+                    <a:pt x="1758612" y="378441"/>
+                  </a:lnTo>
+                  <a:lnTo>
+                    <a:pt x="1828956" y="419166"/>
+                  </a:lnTo>
+                  <a:lnTo>
+                    <a:pt x="1899301" y="458003"/>
+                  </a:lnTo>
+                  <a:lnTo>
+                    <a:pt x="1969645" y="495041"/>
+                  </a:lnTo>
+                  <a:lnTo>
+                    <a:pt x="2039990" y="530361"/>
+                  </a:lnTo>
+                  <a:lnTo>
+                    <a:pt x="2110334" y="564046"/>
+                  </a:lnTo>
+                  <a:lnTo>
+                    <a:pt x="2180679" y="596169"/>
+                  </a:lnTo>
+                  <a:lnTo>
+                    <a:pt x="2251023" y="626803"/>
+                  </a:lnTo>
+                  <a:lnTo>
+                    <a:pt x="2321368" y="656018"/>
+                  </a:lnTo>
+                  <a:lnTo>
+                    <a:pt x="2391712" y="683878"/>
+                  </a:lnTo>
+                  <a:lnTo>
+                    <a:pt x="2462057" y="710448"/>
+                  </a:lnTo>
+                  <a:lnTo>
+                    <a:pt x="2532401" y="735786"/>
+                  </a:lnTo>
+                  <a:lnTo>
+                    <a:pt x="2602746" y="759950"/>
+                  </a:lnTo>
+                  <a:lnTo>
+                    <a:pt x="2673090" y="782995"/>
+                  </a:lnTo>
+                  <a:lnTo>
+                    <a:pt x="2743435" y="804971"/>
+                  </a:lnTo>
+                  <a:lnTo>
+                    <a:pt x="2813779" y="825929"/>
+                  </a:lnTo>
+                  <a:lnTo>
+                    <a:pt x="2884124" y="845915"/>
+                  </a:lnTo>
+                  <a:lnTo>
+                    <a:pt x="2954468" y="864976"/>
+                  </a:lnTo>
+                  <a:lnTo>
+                    <a:pt x="3024813" y="883153"/>
+                  </a:lnTo>
+                  <a:lnTo>
+                    <a:pt x="3095157" y="900487"/>
+                  </a:lnTo>
+                  <a:lnTo>
+                    <a:pt x="3165502" y="917018"/>
+                  </a:lnTo>
+                  <a:lnTo>
+                    <a:pt x="3235846" y="932784"/>
+                  </a:lnTo>
+                  <a:lnTo>
+                    <a:pt x="3306191" y="947818"/>
+                  </a:lnTo>
+                  <a:lnTo>
+                    <a:pt x="3376535" y="960272"/>
+                  </a:lnTo>
+                  <a:lnTo>
+                    <a:pt x="3446880" y="968044"/>
+                  </a:lnTo>
+                  <a:lnTo>
+                    <a:pt x="3517224" y="975612"/>
+                  </a:lnTo>
+                  <a:lnTo>
+                    <a:pt x="3587569" y="982982"/>
+                  </a:lnTo>
+                  <a:lnTo>
+                    <a:pt x="3657913" y="990159"/>
+                  </a:lnTo>
+                  <a:lnTo>
+                    <a:pt x="3728257" y="997149"/>
+                  </a:lnTo>
+                  <a:lnTo>
+                    <a:pt x="3798602" y="1003955"/>
+                  </a:lnTo>
+                  <a:lnTo>
+                    <a:pt x="3868946" y="1010583"/>
+                  </a:lnTo>
+                  <a:lnTo>
+                    <a:pt x="3939291" y="1017038"/>
+                  </a:lnTo>
+                  <a:lnTo>
+                    <a:pt x="4009635" y="1023324"/>
+                  </a:lnTo>
+                  <a:lnTo>
+                    <a:pt x="4079980" y="1029445"/>
+                  </a:lnTo>
+                  <a:lnTo>
+                    <a:pt x="4150324" y="1035406"/>
+                  </a:lnTo>
+                  <a:lnTo>
+                    <a:pt x="4220669" y="1041211"/>
+                  </a:lnTo>
+                  <a:lnTo>
+                    <a:pt x="4291013" y="1046865"/>
+                  </a:lnTo>
+                  <a:lnTo>
+                    <a:pt x="4361358" y="1052370"/>
+                  </a:lnTo>
+                  <a:lnTo>
+                    <a:pt x="4431702" y="1057731"/>
+                  </a:lnTo>
+                  <a:lnTo>
+                    <a:pt x="4502047" y="1062952"/>
+                  </a:lnTo>
+                  <a:lnTo>
+                    <a:pt x="4572391" y="1068036"/>
+                  </a:lnTo>
+                  <a:lnTo>
+                    <a:pt x="4642736" y="1072987"/>
+                  </a:lnTo>
+                  <a:lnTo>
+                    <a:pt x="4713080" y="1077808"/>
+                  </a:lnTo>
+                  <a:lnTo>
+                    <a:pt x="4783425" y="1082504"/>
+                  </a:lnTo>
+                  <a:lnTo>
+                    <a:pt x="4853769" y="1087076"/>
+                  </a:lnTo>
+                  <a:lnTo>
+                    <a:pt x="4924114" y="1091529"/>
+                  </a:lnTo>
+                  <a:lnTo>
+                    <a:pt x="4994458" y="1095865"/>
+                  </a:lnTo>
+                  <a:lnTo>
+                    <a:pt x="5064803" y="1100088"/>
+                  </a:lnTo>
+                  <a:lnTo>
+                    <a:pt x="5135147" y="1104200"/>
+                  </a:lnTo>
+                  <a:lnTo>
+                    <a:pt x="5205492" y="1108204"/>
+                  </a:lnTo>
+                  <a:lnTo>
+                    <a:pt x="5275836" y="1112104"/>
+                  </a:lnTo>
+                  <a:lnTo>
+                    <a:pt x="5346181" y="1115902"/>
+                  </a:lnTo>
+                  <a:lnTo>
+                    <a:pt x="5416525" y="1119600"/>
+                  </a:lnTo>
+                  <a:lnTo>
+                    <a:pt x="5486870" y="1123201"/>
+                  </a:lnTo>
+                  <a:lnTo>
+                    <a:pt x="5557214" y="1126709"/>
+                  </a:lnTo>
+                  <a:lnTo>
+                    <a:pt x="5627559" y="1130124"/>
+                  </a:lnTo>
+                  <a:lnTo>
+                    <a:pt x="5697903" y="1133450"/>
+                  </a:lnTo>
+                  <a:lnTo>
+                    <a:pt x="5768248" y="1136689"/>
+                  </a:lnTo>
+                  <a:lnTo>
+                    <a:pt x="5838592" y="1139843"/>
+                  </a:lnTo>
+                  <a:lnTo>
+                    <a:pt x="5908937" y="1142915"/>
+                  </a:lnTo>
+                  <a:lnTo>
+                    <a:pt x="5979281" y="1145906"/>
+                  </a:lnTo>
+                  <a:lnTo>
+                    <a:pt x="6049626" y="1148819"/>
+                  </a:lnTo>
+                  <a:lnTo>
+                    <a:pt x="6119970" y="1151656"/>
+                  </a:lnTo>
+                  <a:lnTo>
+                    <a:pt x="6190315" y="1154418"/>
+                  </a:lnTo>
+                  <a:lnTo>
+                    <a:pt x="6260659" y="1157108"/>
+                  </a:lnTo>
+                  <a:lnTo>
+                    <a:pt x="6331004" y="1159728"/>
+                  </a:lnTo>
+                  <a:lnTo>
+                    <a:pt x="6401348" y="1162279"/>
+                  </a:lnTo>
+                  <a:lnTo>
+                    <a:pt x="6471693" y="1164764"/>
+                  </a:lnTo>
+                  <a:lnTo>
+                    <a:pt x="6542037" y="1167183"/>
+                  </a:lnTo>
+                  <a:lnTo>
+                    <a:pt x="6612382" y="1169539"/>
+                  </a:lnTo>
+                  <a:lnTo>
+                    <a:pt x="6682726" y="1171834"/>
+                  </a:lnTo>
+                  <a:lnTo>
+                    <a:pt x="6753071" y="1174068"/>
+                  </a:lnTo>
+                  <a:lnTo>
+                    <a:pt x="6823415" y="1176244"/>
+                  </a:lnTo>
+                  <a:lnTo>
+                    <a:pt x="6893760" y="1178363"/>
+                  </a:lnTo>
+                  <a:lnTo>
+                    <a:pt x="6964104" y="1180426"/>
+                  </a:lnTo>
+                  <a:lnTo>
+                    <a:pt x="6964104" y="1230966"/>
+                  </a:lnTo>
+                  <a:lnTo>
+                    <a:pt x="6893760" y="1229691"/>
+                  </a:lnTo>
+                  <a:lnTo>
+                    <a:pt x="6823415" y="1228355"/>
+                  </a:lnTo>
+                  <a:lnTo>
+                    <a:pt x="6753071" y="1226953"/>
+                  </a:lnTo>
+                  <a:lnTo>
+                    <a:pt x="6682726" y="1225483"/>
+                  </a:lnTo>
+                  <a:lnTo>
+                    <a:pt x="6612382" y="1223941"/>
+                  </a:lnTo>
+                  <a:lnTo>
+                    <a:pt x="6542037" y="1222325"/>
+                  </a:lnTo>
+                  <a:lnTo>
+                    <a:pt x="6471693" y="1220630"/>
+                  </a:lnTo>
+                  <a:lnTo>
+                    <a:pt x="6401348" y="1218853"/>
+                  </a:lnTo>
+                  <a:lnTo>
+                    <a:pt x="6331004" y="1216990"/>
+                  </a:lnTo>
+                  <a:lnTo>
+                    <a:pt x="6260659" y="1215035"/>
+                  </a:lnTo>
+                  <a:lnTo>
+                    <a:pt x="6190315" y="1212986"/>
+                  </a:lnTo>
+                  <a:lnTo>
+                    <a:pt x="6119970" y="1210838"/>
+                  </a:lnTo>
+                  <a:lnTo>
+                    <a:pt x="6049626" y="1208585"/>
+                  </a:lnTo>
+                  <a:lnTo>
+                    <a:pt x="5979281" y="1206222"/>
+                  </a:lnTo>
+                  <a:lnTo>
+                    <a:pt x="5908937" y="1203745"/>
+                  </a:lnTo>
+                  <a:lnTo>
+                    <a:pt x="5838592" y="1201147"/>
+                  </a:lnTo>
+                  <a:lnTo>
+                    <a:pt x="5768248" y="1198423"/>
+                  </a:lnTo>
+                  <a:lnTo>
+                    <a:pt x="5697903" y="1195566"/>
+                  </a:lnTo>
+                  <a:lnTo>
+                    <a:pt x="5627559" y="1192571"/>
+                  </a:lnTo>
+                  <a:lnTo>
+                    <a:pt x="5557214" y="1189431"/>
+                  </a:lnTo>
+                  <a:lnTo>
+                    <a:pt x="5486870" y="1186137"/>
+                  </a:lnTo>
+                  <a:lnTo>
+                    <a:pt x="5416525" y="1182684"/>
+                  </a:lnTo>
+                  <a:lnTo>
+                    <a:pt x="5346181" y="1179063"/>
+                  </a:lnTo>
+                  <a:lnTo>
+                    <a:pt x="5275836" y="1175265"/>
+                  </a:lnTo>
+                  <a:lnTo>
+                    <a:pt x="5205492" y="1171284"/>
+                  </a:lnTo>
+                  <a:lnTo>
+                    <a:pt x="5135147" y="1167108"/>
+                  </a:lnTo>
+                  <a:lnTo>
+                    <a:pt x="5064803" y="1162730"/>
+                  </a:lnTo>
+                  <a:lnTo>
+                    <a:pt x="4994458" y="1158140"/>
+                  </a:lnTo>
+                  <a:lnTo>
+                    <a:pt x="4924114" y="1153326"/>
+                  </a:lnTo>
+                  <a:lnTo>
+                    <a:pt x="4853769" y="1148278"/>
+                  </a:lnTo>
+                  <a:lnTo>
+                    <a:pt x="4783425" y="1142984"/>
+                  </a:lnTo>
+                  <a:lnTo>
+                    <a:pt x="4713080" y="1137434"/>
+                  </a:lnTo>
+                  <a:lnTo>
+                    <a:pt x="4642736" y="1131614"/>
+                  </a:lnTo>
+                  <a:lnTo>
+                    <a:pt x="4572391" y="1125511"/>
+                  </a:lnTo>
+                  <a:lnTo>
+                    <a:pt x="4502047" y="1119111"/>
+                  </a:lnTo>
+                  <a:lnTo>
+                    <a:pt x="4431702" y="1112401"/>
+                  </a:lnTo>
+                  <a:lnTo>
+                    <a:pt x="4361358" y="1105364"/>
+                  </a:lnTo>
+                  <a:lnTo>
+                    <a:pt x="4291013" y="1097986"/>
+                  </a:lnTo>
+                  <a:lnTo>
+                    <a:pt x="4220669" y="1090249"/>
+                  </a:lnTo>
+                  <a:lnTo>
+                    <a:pt x="4150324" y="1082135"/>
+                  </a:lnTo>
+                  <a:lnTo>
+                    <a:pt x="4079980" y="1073628"/>
+                  </a:lnTo>
+                  <a:lnTo>
+                    <a:pt x="4009635" y="1064707"/>
+                  </a:lnTo>
+                  <a:lnTo>
+                    <a:pt x="3939291" y="1055353"/>
+                  </a:lnTo>
+                  <a:lnTo>
+                    <a:pt x="3868946" y="1045544"/>
+                  </a:lnTo>
+                  <a:lnTo>
+                    <a:pt x="3798602" y="1035258"/>
+                  </a:lnTo>
+                  <a:lnTo>
+                    <a:pt x="3728257" y="1024473"/>
+                  </a:lnTo>
+                  <a:lnTo>
+                    <a:pt x="3657913" y="1013164"/>
+                  </a:lnTo>
+                  <a:lnTo>
+                    <a:pt x="3587569" y="1001304"/>
+                  </a:lnTo>
+                  <a:lnTo>
+                    <a:pt x="3517224" y="988869"/>
+                  </a:lnTo>
+                  <a:lnTo>
+                    <a:pt x="3446880" y="975829"/>
+                  </a:lnTo>
+                  <a:lnTo>
+                    <a:pt x="3376535" y="962156"/>
+                  </a:lnTo>
+                  <a:lnTo>
+                    <a:pt x="3306191" y="952292"/>
+                  </a:lnTo>
+                  <a:lnTo>
+                    <a:pt x="3235846" y="944097"/>
+                  </a:lnTo>
+                  <a:lnTo>
+                    <a:pt x="3165502" y="935682"/>
+                  </a:lnTo>
+                  <a:lnTo>
+                    <a:pt x="3095157" y="927040"/>
+                  </a:lnTo>
+                  <a:lnTo>
+                    <a:pt x="3024813" y="918167"/>
+                  </a:lnTo>
+                  <a:lnTo>
+                    <a:pt x="2954468" y="909055"/>
+                  </a:lnTo>
+                  <a:lnTo>
+                    <a:pt x="2884124" y="899698"/>
+                  </a:lnTo>
+                  <a:lnTo>
+                    <a:pt x="2813779" y="890089"/>
+                  </a:lnTo>
+                  <a:lnTo>
+                    <a:pt x="2743435" y="880222"/>
+                  </a:lnTo>
+                  <a:lnTo>
+                    <a:pt x="2673090" y="870090"/>
+                  </a:lnTo>
+                  <a:lnTo>
+                    <a:pt x="2602746" y="859686"/>
+                  </a:lnTo>
+                  <a:lnTo>
+                    <a:pt x="2532401" y="849002"/>
+                  </a:lnTo>
+                  <a:lnTo>
+                    <a:pt x="2462057" y="838031"/>
+                  </a:lnTo>
+                  <a:lnTo>
+                    <a:pt x="2391712" y="826766"/>
+                  </a:lnTo>
+                  <a:lnTo>
+                    <a:pt x="2321368" y="815197"/>
+                  </a:lnTo>
+                  <a:lnTo>
+                    <a:pt x="2251023" y="803317"/>
+                  </a:lnTo>
+                  <a:lnTo>
+                    <a:pt x="2180679" y="791118"/>
+                  </a:lnTo>
+                  <a:lnTo>
+                    <a:pt x="2110334" y="778592"/>
+                  </a:lnTo>
+                  <a:lnTo>
+                    <a:pt x="2039990" y="765728"/>
+                  </a:lnTo>
+                  <a:lnTo>
+                    <a:pt x="1969645" y="752519"/>
+                  </a:lnTo>
+                  <a:lnTo>
+                    <a:pt x="1899301" y="738955"/>
+                  </a:lnTo>
+                  <a:lnTo>
+                    <a:pt x="1828956" y="725026"/>
+                  </a:lnTo>
+                  <a:lnTo>
+                    <a:pt x="1758612" y="710723"/>
+                  </a:lnTo>
+                  <a:lnTo>
+                    <a:pt x="1688267" y="696036"/>
+                  </a:lnTo>
+                  <a:lnTo>
+                    <a:pt x="1617923" y="680954"/>
+                  </a:lnTo>
+                  <a:lnTo>
+                    <a:pt x="1547578" y="665466"/>
+                  </a:lnTo>
+                  <a:lnTo>
+                    <a:pt x="1477234" y="649562"/>
+                  </a:lnTo>
+                  <a:lnTo>
+                    <a:pt x="1406889" y="633231"/>
+                  </a:lnTo>
+                  <a:lnTo>
+                    <a:pt x="1336545" y="616461"/>
+                  </a:lnTo>
+                  <a:lnTo>
+                    <a:pt x="1266200" y="599240"/>
+                  </a:lnTo>
+                  <a:lnTo>
+                    <a:pt x="1195856" y="581556"/>
+                  </a:lnTo>
+                  <a:lnTo>
+                    <a:pt x="1125511" y="563397"/>
+                  </a:lnTo>
+                  <a:lnTo>
+                    <a:pt x="1055167" y="544750"/>
+                  </a:lnTo>
+                  <a:lnTo>
+                    <a:pt x="984822" y="525602"/>
+                  </a:lnTo>
+                  <a:lnTo>
+                    <a:pt x="914478" y="505939"/>
+                  </a:lnTo>
+                  <a:lnTo>
+                    <a:pt x="844133" y="485747"/>
+                  </a:lnTo>
+                  <a:lnTo>
+                    <a:pt x="773789" y="465013"/>
+                  </a:lnTo>
+                  <a:lnTo>
+                    <a:pt x="703444" y="443722"/>
+                  </a:lnTo>
+                  <a:lnTo>
+                    <a:pt x="633100" y="421858"/>
+                  </a:lnTo>
+                  <a:lnTo>
+                    <a:pt x="562755" y="399407"/>
+                  </a:lnTo>
+                  <a:lnTo>
+                    <a:pt x="492411" y="376353"/>
+                  </a:lnTo>
+                  <a:lnTo>
+                    <a:pt x="422066" y="352678"/>
+                  </a:lnTo>
+                  <a:lnTo>
+                    <a:pt x="351722" y="328368"/>
+                  </a:lnTo>
+                  <a:lnTo>
+                    <a:pt x="281377" y="303404"/>
+                  </a:lnTo>
+                  <a:lnTo>
+                    <a:pt x="211033" y="277769"/>
+                  </a:lnTo>
+                  <a:lnTo>
+                    <a:pt x="140688" y="251445"/>
+                  </a:lnTo>
+                  <a:lnTo>
+                    <a:pt x="70344" y="224414"/>
+                  </a:lnTo>
+                  <a:lnTo>
+                    <a:pt x="0" y="196656"/>
                   </a:lnTo>
                   <a:close/>
                 </a:path>
@@ -3533,592 +3568,267 @@
         </p:sp>
         <p:sp>
           <p:nvSpPr>
-            <p:cNvPr id="21" name="pl21"/>
-            <p:cNvSpPr/>
-            <p:nvPr/>
-          </p:nvSpPr>
-          <p:spPr>
-            <a:xfrm>
-              <a:off x="2422474" y="2073503"/>
-              <a:ext cx="5840205" cy="3270999"/>
-            </a:xfrm>
-            <a:custGeom>
-              <a:avLst/>
-              <a:pathLst>
-                <a:path w="5840205" h="3270999">
-                  <a:moveTo>
-                    <a:pt x="0" y="0"/>
-                  </a:moveTo>
-                  <a:lnTo>
-                    <a:pt x="38780" y="89315"/>
-                  </a:lnTo>
-                  <a:lnTo>
-                    <a:pt x="110403" y="246624"/>
-                  </a:lnTo>
-                  <a:lnTo>
-                    <a:pt x="182025" y="396642"/>
-                  </a:lnTo>
-                  <a:lnTo>
-                    <a:pt x="253648" y="539708"/>
-                  </a:lnTo>
-                  <a:lnTo>
-                    <a:pt x="325270" y="676144"/>
-                  </a:lnTo>
-                  <a:lnTo>
-                    <a:pt x="396893" y="806258"/>
-                  </a:lnTo>
-                  <a:lnTo>
-                    <a:pt x="468515" y="930341"/>
-                  </a:lnTo>
-                  <a:lnTo>
-                    <a:pt x="540138" y="1048674"/>
-                  </a:lnTo>
-                  <a:lnTo>
-                    <a:pt x="611760" y="1161523"/>
-                  </a:lnTo>
-                  <a:lnTo>
-                    <a:pt x="683383" y="1269142"/>
-                  </a:lnTo>
-                  <a:lnTo>
-                    <a:pt x="755006" y="1371774"/>
-                  </a:lnTo>
-                  <a:lnTo>
-                    <a:pt x="826628" y="1469649"/>
-                  </a:lnTo>
-                  <a:lnTo>
-                    <a:pt x="898251" y="1562989"/>
-                  </a:lnTo>
-                  <a:lnTo>
-                    <a:pt x="969873" y="1652003"/>
-                  </a:lnTo>
-                  <a:lnTo>
-                    <a:pt x="1041496" y="1736892"/>
-                  </a:lnTo>
-                  <a:lnTo>
-                    <a:pt x="1113118" y="1817846"/>
-                  </a:lnTo>
-                  <a:lnTo>
-                    <a:pt x="1184741" y="1895049"/>
-                  </a:lnTo>
-                  <a:lnTo>
-                    <a:pt x="1256363" y="1968675"/>
-                  </a:lnTo>
-                  <a:lnTo>
-                    <a:pt x="1327986" y="2038888"/>
-                  </a:lnTo>
-                  <a:lnTo>
-                    <a:pt x="1399608" y="2105847"/>
-                  </a:lnTo>
-                  <a:lnTo>
-                    <a:pt x="1471231" y="2169703"/>
-                  </a:lnTo>
-                  <a:lnTo>
-                    <a:pt x="1542853" y="2230600"/>
-                  </a:lnTo>
-                  <a:lnTo>
-                    <a:pt x="1614476" y="2288675"/>
-                  </a:lnTo>
-                  <a:lnTo>
-                    <a:pt x="1686098" y="2344058"/>
-                  </a:lnTo>
-                  <a:lnTo>
-                    <a:pt x="1757721" y="2396875"/>
-                  </a:lnTo>
-                  <a:lnTo>
-                    <a:pt x="1829343" y="2447244"/>
-                  </a:lnTo>
-                  <a:lnTo>
-                    <a:pt x="1900966" y="2495279"/>
-                  </a:lnTo>
-                  <a:lnTo>
-                    <a:pt x="1972588" y="2541088"/>
-                  </a:lnTo>
-                  <a:lnTo>
-                    <a:pt x="2044211" y="2584773"/>
-                  </a:lnTo>
-                  <a:lnTo>
-                    <a:pt x="2115834" y="2626435"/>
-                  </a:lnTo>
-                  <a:lnTo>
-                    <a:pt x="2187456" y="2660945"/>
-                  </a:lnTo>
-                  <a:lnTo>
-                    <a:pt x="2259079" y="2682481"/>
-                  </a:lnTo>
-                  <a:lnTo>
-                    <a:pt x="2330701" y="2703452"/>
-                  </a:lnTo>
-                  <a:lnTo>
-                    <a:pt x="2402324" y="2723875"/>
-                  </a:lnTo>
-                  <a:lnTo>
-                    <a:pt x="2473946" y="2743763"/>
-                  </a:lnTo>
-                  <a:lnTo>
-                    <a:pt x="2545569" y="2763131"/>
-                  </a:lnTo>
-                  <a:lnTo>
-                    <a:pt x="2617191" y="2781992"/>
-                  </a:lnTo>
-                  <a:lnTo>
-                    <a:pt x="2688814" y="2800359"/>
-                  </a:lnTo>
-                  <a:lnTo>
-                    <a:pt x="2760436" y="2818245"/>
-                  </a:lnTo>
-                  <a:lnTo>
-                    <a:pt x="2832059" y="2835663"/>
-                  </a:lnTo>
-                  <a:lnTo>
-                    <a:pt x="2903681" y="2852626"/>
-                  </a:lnTo>
-                  <a:lnTo>
-                    <a:pt x="2975304" y="2869144"/>
-                  </a:lnTo>
-                  <a:lnTo>
-                    <a:pt x="3046926" y="2885230"/>
-                  </a:lnTo>
-                  <a:lnTo>
-                    <a:pt x="3118549" y="2900895"/>
-                  </a:lnTo>
-                  <a:lnTo>
-                    <a:pt x="3190171" y="2916150"/>
-                  </a:lnTo>
-                  <a:lnTo>
-                    <a:pt x="3261794" y="2931006"/>
-                  </a:lnTo>
-                  <a:lnTo>
-                    <a:pt x="3333416" y="2945473"/>
-                  </a:lnTo>
-                  <a:lnTo>
-                    <a:pt x="3405039" y="2959561"/>
-                  </a:lnTo>
-                  <a:lnTo>
-                    <a:pt x="3476662" y="2973281"/>
-                  </a:lnTo>
-                  <a:lnTo>
-                    <a:pt x="3548284" y="2986641"/>
-                  </a:lnTo>
-                  <a:lnTo>
-                    <a:pt x="3619907" y="2999652"/>
-                  </a:lnTo>
-                  <a:lnTo>
-                    <a:pt x="3691529" y="3012322"/>
-                  </a:lnTo>
-                  <a:lnTo>
-                    <a:pt x="3763152" y="3024661"/>
-                  </a:lnTo>
-                  <a:lnTo>
-                    <a:pt x="3834774" y="3036677"/>
-                  </a:lnTo>
-                  <a:lnTo>
-                    <a:pt x="3906397" y="3048378"/>
-                  </a:lnTo>
-                  <a:lnTo>
-                    <a:pt x="3978019" y="3059773"/>
-                  </a:lnTo>
-                  <a:lnTo>
-                    <a:pt x="4049642" y="3070870"/>
-                  </a:lnTo>
-                  <a:lnTo>
-                    <a:pt x="4121264" y="3081676"/>
-                  </a:lnTo>
-                  <a:lnTo>
-                    <a:pt x="4192887" y="3092199"/>
-                  </a:lnTo>
-                  <a:lnTo>
-                    <a:pt x="4264509" y="3102447"/>
-                  </a:lnTo>
-                  <a:lnTo>
-                    <a:pt x="4336132" y="3112427"/>
-                  </a:lnTo>
-                  <a:lnTo>
-                    <a:pt x="4407754" y="3122146"/>
-                  </a:lnTo>
-                  <a:lnTo>
-                    <a:pt x="4479377" y="3131610"/>
-                  </a:lnTo>
-                  <a:lnTo>
-                    <a:pt x="4550999" y="3140827"/>
-                  </a:lnTo>
-                  <a:lnTo>
-                    <a:pt x="4622622" y="3149802"/>
-                  </a:lnTo>
-                  <a:lnTo>
-                    <a:pt x="4694244" y="3158542"/>
-                  </a:lnTo>
-                  <a:lnTo>
-                    <a:pt x="4765867" y="3167054"/>
-                  </a:lnTo>
-                  <a:lnTo>
-                    <a:pt x="4837490" y="3175343"/>
-                  </a:lnTo>
-                  <a:lnTo>
-                    <a:pt x="4909112" y="3183415"/>
-                  </a:lnTo>
-                  <a:lnTo>
-                    <a:pt x="4980735" y="3191275"/>
-                  </a:lnTo>
-                  <a:lnTo>
-                    <a:pt x="5052357" y="3198930"/>
-                  </a:lnTo>
-                  <a:lnTo>
-                    <a:pt x="5123980" y="3206385"/>
-                  </a:lnTo>
-                  <a:lnTo>
-                    <a:pt x="5195602" y="3213644"/>
-                  </a:lnTo>
-                  <a:lnTo>
-                    <a:pt x="5267225" y="3220713"/>
-                  </a:lnTo>
-                  <a:lnTo>
-                    <a:pt x="5338847" y="3227598"/>
-                  </a:lnTo>
-                  <a:lnTo>
-                    <a:pt x="5410470" y="3234302"/>
-                  </a:lnTo>
-                  <a:lnTo>
-                    <a:pt x="5482092" y="3240831"/>
-                  </a:lnTo>
-                  <a:lnTo>
-                    <a:pt x="5553715" y="3247189"/>
-                  </a:lnTo>
-                  <a:lnTo>
-                    <a:pt x="5625337" y="3253380"/>
-                  </a:lnTo>
-                  <a:lnTo>
-                    <a:pt x="5696960" y="3259410"/>
-                  </a:lnTo>
-                  <a:lnTo>
-                    <a:pt x="5768582" y="3265281"/>
-                  </a:lnTo>
-                  <a:lnTo>
-                    <a:pt x="5840205" y="3270999"/>
-                  </a:lnTo>
-                </a:path>
-              </a:pathLst>
-            </a:custGeom>
-          </p:spPr>
-          <p:txBody>
-            <a:bodyPr/>
-            <a:lstStyle/>
-            <a:p/>
-          </p:txBody>
-        </p:sp>
-        <p:sp>
-          <p:nvSpPr>
             <p:cNvPr id="22" name="pl22"/>
             <p:cNvSpPr/>
             <p:nvPr/>
           </p:nvSpPr>
           <p:spPr>
             <a:xfrm>
-              <a:off x="1172049" y="2618444"/>
-              <a:ext cx="7090630" cy="2866105"/>
+              <a:off x="2463424" y="2143092"/>
+              <a:ext cx="5735992" cy="1180426"/>
             </a:xfrm>
             <a:custGeom>
               <a:avLst/>
               <a:pathLst>
-                <a:path w="7090630" h="2866105">
+                <a:path w="5735992" h="1180426">
                   <a:moveTo>
-                    <a:pt x="7090630" y="2866105"/>
+                    <a:pt x="0" y="0"/>
                   </a:moveTo>
                   <a:lnTo>
-                    <a:pt x="7019007" y="2862573"/>
-                  </a:lnTo>
-                  <a:lnTo>
-                    <a:pt x="6947385" y="2858868"/>
-                  </a:lnTo>
-                  <a:lnTo>
-                    <a:pt x="6875762" y="2854984"/>
-                  </a:lnTo>
-                  <a:lnTo>
-                    <a:pt x="6804139" y="2850910"/>
-                  </a:lnTo>
-                  <a:lnTo>
-                    <a:pt x="6732517" y="2846639"/>
-                  </a:lnTo>
-                  <a:lnTo>
-                    <a:pt x="6660894" y="2842160"/>
-                  </a:lnTo>
-                  <a:lnTo>
-                    <a:pt x="6589272" y="2837464"/>
-                  </a:lnTo>
-                  <a:lnTo>
-                    <a:pt x="6517649" y="2832539"/>
-                  </a:lnTo>
-                  <a:lnTo>
-                    <a:pt x="6446027" y="2827375"/>
-                  </a:lnTo>
-                  <a:lnTo>
-                    <a:pt x="6374404" y="2821960"/>
-                  </a:lnTo>
-                  <a:lnTo>
-                    <a:pt x="6302782" y="2816282"/>
-                  </a:lnTo>
-                  <a:lnTo>
-                    <a:pt x="6231159" y="2810328"/>
-                  </a:lnTo>
-                  <a:lnTo>
-                    <a:pt x="6159537" y="2804085"/>
-                  </a:lnTo>
-                  <a:lnTo>
-                    <a:pt x="6087914" y="2797538"/>
-                  </a:lnTo>
-                  <a:lnTo>
-                    <a:pt x="6016292" y="2790673"/>
-                  </a:lnTo>
-                  <a:lnTo>
-                    <a:pt x="5944669" y="2783475"/>
-                  </a:lnTo>
-                  <a:lnTo>
-                    <a:pt x="5873047" y="2775926"/>
-                  </a:lnTo>
-                  <a:lnTo>
-                    <a:pt x="5801424" y="2768011"/>
-                  </a:lnTo>
-                  <a:lnTo>
-                    <a:pt x="5729802" y="2759711"/>
-                  </a:lnTo>
-                  <a:lnTo>
-                    <a:pt x="5658179" y="2751008"/>
-                  </a:lnTo>
-                  <a:lnTo>
-                    <a:pt x="5586557" y="2741882"/>
-                  </a:lnTo>
-                  <a:lnTo>
-                    <a:pt x="5514934" y="2732313"/>
-                  </a:lnTo>
-                  <a:lnTo>
-                    <a:pt x="5443311" y="2722278"/>
-                  </a:lnTo>
-                  <a:lnTo>
-                    <a:pt x="5371689" y="2711756"/>
-                  </a:lnTo>
-                  <a:lnTo>
-                    <a:pt x="5300066" y="2700723"/>
-                  </a:lnTo>
-                  <a:lnTo>
-                    <a:pt x="5228444" y="2689153"/>
-                  </a:lnTo>
-                  <a:lnTo>
-                    <a:pt x="5156821" y="2677021"/>
-                  </a:lnTo>
-                  <a:lnTo>
-                    <a:pt x="5085199" y="2664300"/>
-                  </a:lnTo>
-                  <a:lnTo>
-                    <a:pt x="5013576" y="2650960"/>
-                  </a:lnTo>
-                  <a:lnTo>
-                    <a:pt x="4941954" y="2636972"/>
-                  </a:lnTo>
-                  <a:lnTo>
-                    <a:pt x="4870331" y="2622305"/>
-                  </a:lnTo>
-                  <a:lnTo>
-                    <a:pt x="4798709" y="2606924"/>
-                  </a:lnTo>
-                  <a:lnTo>
-                    <a:pt x="4727086" y="2590797"/>
-                  </a:lnTo>
-                  <a:lnTo>
-                    <a:pt x="4655464" y="2573885"/>
-                  </a:lnTo>
-                  <a:lnTo>
-                    <a:pt x="4583841" y="2556152"/>
-                  </a:lnTo>
-                  <a:lnTo>
-                    <a:pt x="4512219" y="2537557"/>
-                  </a:lnTo>
-                  <a:lnTo>
-                    <a:pt x="4440596" y="2518058"/>
-                  </a:lnTo>
-                  <a:lnTo>
-                    <a:pt x="4368974" y="2497612"/>
-                  </a:lnTo>
-                  <a:lnTo>
-                    <a:pt x="4297351" y="2476172"/>
-                  </a:lnTo>
-                  <a:lnTo>
-                    <a:pt x="4225729" y="2453690"/>
-                  </a:lnTo>
-                  <a:lnTo>
-                    <a:pt x="4154106" y="2430116"/>
-                  </a:lnTo>
-                  <a:lnTo>
-                    <a:pt x="4082483" y="2405396"/>
-                  </a:lnTo>
-                  <a:lnTo>
-                    <a:pt x="4010861" y="2379475"/>
-                  </a:lnTo>
-                  <a:lnTo>
-                    <a:pt x="3939238" y="2352294"/>
-                  </a:lnTo>
-                  <a:lnTo>
-                    <a:pt x="3867616" y="2323793"/>
-                  </a:lnTo>
-                  <a:lnTo>
-                    <a:pt x="3795993" y="2293906"/>
-                  </a:lnTo>
-                  <a:lnTo>
-                    <a:pt x="3724371" y="2262567"/>
-                  </a:lnTo>
-                  <a:lnTo>
-                    <a:pt x="3652748" y="2229705"/>
-                  </a:lnTo>
-                  <a:lnTo>
-                    <a:pt x="3581126" y="2195246"/>
-                  </a:lnTo>
-                  <a:lnTo>
-                    <a:pt x="3509503" y="2159113"/>
-                  </a:lnTo>
-                  <a:lnTo>
-                    <a:pt x="3437881" y="2121223"/>
-                  </a:lnTo>
-                  <a:lnTo>
-                    <a:pt x="3366258" y="2093889"/>
-                  </a:lnTo>
-                  <a:lnTo>
-                    <a:pt x="3294636" y="2071181"/>
-                  </a:lnTo>
-                  <a:lnTo>
-                    <a:pt x="3223013" y="2047862"/>
-                  </a:lnTo>
-                  <a:lnTo>
-                    <a:pt x="3151391" y="2023917"/>
-                  </a:lnTo>
-                  <a:lnTo>
-                    <a:pt x="3079768" y="1999328"/>
-                  </a:lnTo>
-                  <a:lnTo>
-                    <a:pt x="3008146" y="1974078"/>
-                  </a:lnTo>
-                  <a:lnTo>
-                    <a:pt x="2936523" y="1948149"/>
-                  </a:lnTo>
-                  <a:lnTo>
-                    <a:pt x="2864901" y="1921524"/>
-                  </a:lnTo>
-                  <a:lnTo>
-                    <a:pt x="2793278" y="1894183"/>
-                  </a:lnTo>
-                  <a:lnTo>
-                    <a:pt x="2721655" y="1866107"/>
-                  </a:lnTo>
-                  <a:lnTo>
-                    <a:pt x="2650033" y="1837276"/>
-                  </a:lnTo>
-                  <a:lnTo>
-                    <a:pt x="2578410" y="1807671"/>
-                  </a:lnTo>
-                  <a:lnTo>
-                    <a:pt x="2506788" y="1777270"/>
-                  </a:lnTo>
-                  <a:lnTo>
-                    <a:pt x="2435165" y="1746052"/>
-                  </a:lnTo>
-                  <a:lnTo>
-                    <a:pt x="2363543" y="1713995"/>
-                  </a:lnTo>
-                  <a:lnTo>
-                    <a:pt x="2291920" y="1681076"/>
-                  </a:lnTo>
-                  <a:lnTo>
-                    <a:pt x="2220298" y="1647273"/>
-                  </a:lnTo>
-                  <a:lnTo>
-                    <a:pt x="2148675" y="1612561"/>
-                  </a:lnTo>
-                  <a:lnTo>
-                    <a:pt x="2077053" y="1576916"/>
-                  </a:lnTo>
-                  <a:lnTo>
-                    <a:pt x="2005430" y="1540313"/>
-                  </a:lnTo>
-                  <a:lnTo>
-                    <a:pt x="1933808" y="1502726"/>
-                  </a:lnTo>
-                  <a:lnTo>
-                    <a:pt x="1862185" y="1464130"/>
-                  </a:lnTo>
-                  <a:lnTo>
-                    <a:pt x="1790563" y="1424495"/>
-                  </a:lnTo>
-                  <a:lnTo>
-                    <a:pt x="1718940" y="1383796"/>
-                  </a:lnTo>
-                  <a:lnTo>
-                    <a:pt x="1647318" y="1342003"/>
-                  </a:lnTo>
-                  <a:lnTo>
-                    <a:pt x="1575695" y="1299086"/>
-                  </a:lnTo>
-                  <a:lnTo>
-                    <a:pt x="1504073" y="1255016"/>
-                  </a:lnTo>
-                  <a:lnTo>
-                    <a:pt x="1432450" y="1209762"/>
-                  </a:lnTo>
-                  <a:lnTo>
-                    <a:pt x="1360827" y="1163291"/>
-                  </a:lnTo>
-                  <a:lnTo>
-                    <a:pt x="1289205" y="1115571"/>
-                  </a:lnTo>
-                  <a:lnTo>
-                    <a:pt x="1217582" y="1066569"/>
-                  </a:lnTo>
-                  <a:lnTo>
-                    <a:pt x="1145960" y="1016249"/>
-                  </a:lnTo>
-                  <a:lnTo>
-                    <a:pt x="1074337" y="964578"/>
-                  </a:lnTo>
-                  <a:lnTo>
-                    <a:pt x="1002715" y="911517"/>
-                  </a:lnTo>
-                  <a:lnTo>
-                    <a:pt x="931092" y="857031"/>
-                  </a:lnTo>
-                  <a:lnTo>
-                    <a:pt x="859470" y="801080"/>
-                  </a:lnTo>
-                  <a:lnTo>
-                    <a:pt x="787847" y="743625"/>
-                  </a:lnTo>
-                  <a:lnTo>
-                    <a:pt x="716225" y="684626"/>
-                  </a:lnTo>
-                  <a:lnTo>
-                    <a:pt x="644602" y="624042"/>
-                  </a:lnTo>
-                  <a:lnTo>
-                    <a:pt x="572980" y="561829"/>
-                  </a:lnTo>
-                  <a:lnTo>
-                    <a:pt x="501357" y="497944"/>
-                  </a:lnTo>
-                  <a:lnTo>
-                    <a:pt x="429735" y="432342"/>
-                  </a:lnTo>
-                  <a:lnTo>
-                    <a:pt x="358112" y="364976"/>
-                  </a:lnTo>
-                  <a:lnTo>
-                    <a:pt x="286490" y="295801"/>
-                  </a:lnTo>
-                  <a:lnTo>
-                    <a:pt x="214867" y="224766"/>
-                  </a:lnTo>
-                  <a:lnTo>
-                    <a:pt x="143245" y="151822"/>
-                  </a:lnTo>
-                  <a:lnTo>
-                    <a:pt x="71622" y="76917"/>
-                  </a:lnTo>
-                  <a:lnTo>
-                    <a:pt x="0" y="0"/>
+                    <a:pt x="38088" y="32231"/>
+                  </a:lnTo>
+                  <a:lnTo>
+                    <a:pt x="108433" y="89000"/>
+                  </a:lnTo>
+                  <a:lnTo>
+                    <a:pt x="178777" y="143139"/>
+                  </a:lnTo>
+                  <a:lnTo>
+                    <a:pt x="249122" y="194768"/>
+                  </a:lnTo>
+                  <a:lnTo>
+                    <a:pt x="319466" y="244004"/>
+                  </a:lnTo>
+                  <a:lnTo>
+                    <a:pt x="389811" y="290959"/>
+                  </a:lnTo>
+                  <a:lnTo>
+                    <a:pt x="460155" y="335738"/>
+                  </a:lnTo>
+                  <a:lnTo>
+                    <a:pt x="530500" y="378441"/>
+                  </a:lnTo>
+                  <a:lnTo>
+                    <a:pt x="600844" y="419166"/>
+                  </a:lnTo>
+                  <a:lnTo>
+                    <a:pt x="671189" y="458003"/>
+                  </a:lnTo>
+                  <a:lnTo>
+                    <a:pt x="741533" y="495041"/>
+                  </a:lnTo>
+                  <a:lnTo>
+                    <a:pt x="811878" y="530361"/>
+                  </a:lnTo>
+                  <a:lnTo>
+                    <a:pt x="882222" y="564046"/>
+                  </a:lnTo>
+                  <a:lnTo>
+                    <a:pt x="952567" y="596169"/>
+                  </a:lnTo>
+                  <a:lnTo>
+                    <a:pt x="1022911" y="626803"/>
+                  </a:lnTo>
+                  <a:lnTo>
+                    <a:pt x="1093256" y="656018"/>
+                  </a:lnTo>
+                  <a:lnTo>
+                    <a:pt x="1163600" y="683878"/>
+                  </a:lnTo>
+                  <a:lnTo>
+                    <a:pt x="1233945" y="710448"/>
+                  </a:lnTo>
+                  <a:lnTo>
+                    <a:pt x="1304289" y="735786"/>
+                  </a:lnTo>
+                  <a:lnTo>
+                    <a:pt x="1374634" y="759950"/>
+                  </a:lnTo>
+                  <a:lnTo>
+                    <a:pt x="1444978" y="782995"/>
+                  </a:lnTo>
+                  <a:lnTo>
+                    <a:pt x="1515323" y="804971"/>
+                  </a:lnTo>
+                  <a:lnTo>
+                    <a:pt x="1585667" y="825929"/>
+                  </a:lnTo>
+                  <a:lnTo>
+                    <a:pt x="1656012" y="845915"/>
+                  </a:lnTo>
+                  <a:lnTo>
+                    <a:pt x="1726356" y="864976"/>
+                  </a:lnTo>
+                  <a:lnTo>
+                    <a:pt x="1796701" y="883153"/>
+                  </a:lnTo>
+                  <a:lnTo>
+                    <a:pt x="1867045" y="900487"/>
+                  </a:lnTo>
+                  <a:lnTo>
+                    <a:pt x="1937390" y="917018"/>
+                  </a:lnTo>
+                  <a:lnTo>
+                    <a:pt x="2007734" y="932784"/>
+                  </a:lnTo>
+                  <a:lnTo>
+                    <a:pt x="2078078" y="947818"/>
+                  </a:lnTo>
+                  <a:lnTo>
+                    <a:pt x="2148423" y="960272"/>
+                  </a:lnTo>
+                  <a:lnTo>
+                    <a:pt x="2218767" y="968044"/>
+                  </a:lnTo>
+                  <a:lnTo>
+                    <a:pt x="2289112" y="975612"/>
+                  </a:lnTo>
+                  <a:lnTo>
+                    <a:pt x="2359456" y="982982"/>
+                  </a:lnTo>
+                  <a:lnTo>
+                    <a:pt x="2429801" y="990159"/>
+                  </a:lnTo>
+                  <a:lnTo>
+                    <a:pt x="2500145" y="997149"/>
+                  </a:lnTo>
+                  <a:lnTo>
+                    <a:pt x="2570490" y="1003955"/>
+                  </a:lnTo>
+                  <a:lnTo>
+                    <a:pt x="2640834" y="1010583"/>
+                  </a:lnTo>
+                  <a:lnTo>
+                    <a:pt x="2711179" y="1017038"/>
+                  </a:lnTo>
+                  <a:lnTo>
+                    <a:pt x="2781523" y="1023324"/>
+                  </a:lnTo>
+                  <a:lnTo>
+                    <a:pt x="2851868" y="1029445"/>
+                  </a:lnTo>
+                  <a:lnTo>
+                    <a:pt x="2922212" y="1035406"/>
+                  </a:lnTo>
+                  <a:lnTo>
+                    <a:pt x="2992557" y="1041211"/>
+                  </a:lnTo>
+                  <a:lnTo>
+                    <a:pt x="3062901" y="1046865"/>
+                  </a:lnTo>
+                  <a:lnTo>
+                    <a:pt x="3133246" y="1052370"/>
+                  </a:lnTo>
+                  <a:lnTo>
+                    <a:pt x="3203590" y="1057731"/>
+                  </a:lnTo>
+                  <a:lnTo>
+                    <a:pt x="3273935" y="1062952"/>
+                  </a:lnTo>
+                  <a:lnTo>
+                    <a:pt x="3344279" y="1068036"/>
+                  </a:lnTo>
+                  <a:lnTo>
+                    <a:pt x="3414624" y="1072987"/>
+                  </a:lnTo>
+                  <a:lnTo>
+                    <a:pt x="3484968" y="1077808"/>
+                  </a:lnTo>
+                  <a:lnTo>
+                    <a:pt x="3555313" y="1082504"/>
+                  </a:lnTo>
+                  <a:lnTo>
+                    <a:pt x="3625657" y="1087076"/>
+                  </a:lnTo>
+                  <a:lnTo>
+                    <a:pt x="3696002" y="1091529"/>
+                  </a:lnTo>
+                  <a:lnTo>
+                    <a:pt x="3766346" y="1095865"/>
+                  </a:lnTo>
+                  <a:lnTo>
+                    <a:pt x="3836691" y="1100088"/>
+                  </a:lnTo>
+                  <a:lnTo>
+                    <a:pt x="3907035" y="1104200"/>
+                  </a:lnTo>
+                  <a:lnTo>
+                    <a:pt x="3977380" y="1108204"/>
+                  </a:lnTo>
+                  <a:lnTo>
+                    <a:pt x="4047724" y="1112104"/>
+                  </a:lnTo>
+                  <a:lnTo>
+                    <a:pt x="4118069" y="1115902"/>
+                  </a:lnTo>
+                  <a:lnTo>
+                    <a:pt x="4188413" y="1119600"/>
+                  </a:lnTo>
+                  <a:lnTo>
+                    <a:pt x="4258758" y="1123201"/>
+                  </a:lnTo>
+                  <a:lnTo>
+                    <a:pt x="4329102" y="1126709"/>
+                  </a:lnTo>
+                  <a:lnTo>
+                    <a:pt x="4399447" y="1130124"/>
+                  </a:lnTo>
+                  <a:lnTo>
+                    <a:pt x="4469791" y="1133450"/>
+                  </a:lnTo>
+                  <a:lnTo>
+                    <a:pt x="4540136" y="1136689"/>
+                  </a:lnTo>
+                  <a:lnTo>
+                    <a:pt x="4610480" y="1139843"/>
+                  </a:lnTo>
+                  <a:lnTo>
+                    <a:pt x="4680825" y="1142915"/>
+                  </a:lnTo>
+                  <a:lnTo>
+                    <a:pt x="4751169" y="1145906"/>
+                  </a:lnTo>
+                  <a:lnTo>
+                    <a:pt x="4821514" y="1148819"/>
+                  </a:lnTo>
+                  <a:lnTo>
+                    <a:pt x="4891858" y="1151656"/>
+                  </a:lnTo>
+                  <a:lnTo>
+                    <a:pt x="4962203" y="1154418"/>
+                  </a:lnTo>
+                  <a:lnTo>
+                    <a:pt x="5032547" y="1157108"/>
+                  </a:lnTo>
+                  <a:lnTo>
+                    <a:pt x="5102892" y="1159728"/>
+                  </a:lnTo>
+                  <a:lnTo>
+                    <a:pt x="5173236" y="1162279"/>
+                  </a:lnTo>
+                  <a:lnTo>
+                    <a:pt x="5243581" y="1164764"/>
+                  </a:lnTo>
+                  <a:lnTo>
+                    <a:pt x="5313925" y="1167183"/>
+                  </a:lnTo>
+                  <a:lnTo>
+                    <a:pt x="5384270" y="1169539"/>
+                  </a:lnTo>
+                  <a:lnTo>
+                    <a:pt x="5454614" y="1171834"/>
+                  </a:lnTo>
+                  <a:lnTo>
+                    <a:pt x="5524959" y="1174068"/>
+                  </a:lnTo>
+                  <a:lnTo>
+                    <a:pt x="5595303" y="1176244"/>
+                  </a:lnTo>
+                  <a:lnTo>
+                    <a:pt x="5665648" y="1178363"/>
+                  </a:lnTo>
+                  <a:lnTo>
+                    <a:pt x="5735992" y="1180426"/>
                   </a:lnTo>
                 </a:path>
               </a:pathLst>
@@ -4138,288 +3848,613 @@
           </p:nvSpPr>
           <p:spPr>
             <a:xfrm>
-              <a:off x="1809309" y="2073503"/>
-              <a:ext cx="6453370" cy="3359382"/>
+              <a:off x="1235312" y="2339748"/>
+              <a:ext cx="6964104" cy="1034310"/>
             </a:xfrm>
             <a:custGeom>
               <a:avLst/>
               <a:pathLst>
-                <a:path w="6453370" h="3359382">
+                <a:path w="6964104" h="1034310">
+                  <a:moveTo>
+                    <a:pt x="6964104" y="1034310"/>
+                  </a:moveTo>
+                  <a:lnTo>
+                    <a:pt x="6893760" y="1033035"/>
+                  </a:lnTo>
+                  <a:lnTo>
+                    <a:pt x="6823415" y="1031698"/>
+                  </a:lnTo>
+                  <a:lnTo>
+                    <a:pt x="6753071" y="1030296"/>
+                  </a:lnTo>
+                  <a:lnTo>
+                    <a:pt x="6682726" y="1028826"/>
+                  </a:lnTo>
+                  <a:lnTo>
+                    <a:pt x="6612382" y="1027285"/>
+                  </a:lnTo>
+                  <a:lnTo>
+                    <a:pt x="6542037" y="1025668"/>
+                  </a:lnTo>
+                  <a:lnTo>
+                    <a:pt x="6471693" y="1023974"/>
+                  </a:lnTo>
+                  <a:lnTo>
+                    <a:pt x="6401348" y="1022196"/>
+                  </a:lnTo>
+                  <a:lnTo>
+                    <a:pt x="6331004" y="1020333"/>
+                  </a:lnTo>
+                  <a:lnTo>
+                    <a:pt x="6260659" y="1018379"/>
+                  </a:lnTo>
+                  <a:lnTo>
+                    <a:pt x="6190315" y="1016330"/>
+                  </a:lnTo>
+                  <a:lnTo>
+                    <a:pt x="6119970" y="1014181"/>
+                  </a:lnTo>
+                  <a:lnTo>
+                    <a:pt x="6049626" y="1011928"/>
+                  </a:lnTo>
+                  <a:lnTo>
+                    <a:pt x="5979281" y="1009565"/>
+                  </a:lnTo>
+                  <a:lnTo>
+                    <a:pt x="5908937" y="1007088"/>
+                  </a:lnTo>
+                  <a:lnTo>
+                    <a:pt x="5838592" y="1004490"/>
+                  </a:lnTo>
+                  <a:lnTo>
+                    <a:pt x="5768248" y="1001766"/>
+                  </a:lnTo>
+                  <a:lnTo>
+                    <a:pt x="5697903" y="998910"/>
+                  </a:lnTo>
+                  <a:lnTo>
+                    <a:pt x="5627559" y="995915"/>
+                  </a:lnTo>
+                  <a:lnTo>
+                    <a:pt x="5557214" y="992774"/>
+                  </a:lnTo>
+                  <a:lnTo>
+                    <a:pt x="5486870" y="989481"/>
+                  </a:lnTo>
+                  <a:lnTo>
+                    <a:pt x="5416525" y="986027"/>
+                  </a:lnTo>
+                  <a:lnTo>
+                    <a:pt x="5346181" y="982406"/>
+                  </a:lnTo>
+                  <a:lnTo>
+                    <a:pt x="5275836" y="978609"/>
+                  </a:lnTo>
+                  <a:lnTo>
+                    <a:pt x="5205492" y="974627"/>
+                  </a:lnTo>
+                  <a:lnTo>
+                    <a:pt x="5135147" y="970452"/>
+                  </a:lnTo>
+                  <a:lnTo>
+                    <a:pt x="5064803" y="966074"/>
+                  </a:lnTo>
+                  <a:lnTo>
+                    <a:pt x="4994458" y="961483"/>
+                  </a:lnTo>
+                  <a:lnTo>
+                    <a:pt x="4924114" y="956669"/>
+                  </a:lnTo>
+                  <a:lnTo>
+                    <a:pt x="4853769" y="951621"/>
+                  </a:lnTo>
+                  <a:lnTo>
+                    <a:pt x="4783425" y="946328"/>
+                  </a:lnTo>
+                  <a:lnTo>
+                    <a:pt x="4713080" y="940777"/>
+                  </a:lnTo>
+                  <a:lnTo>
+                    <a:pt x="4642736" y="934957"/>
+                  </a:lnTo>
+                  <a:lnTo>
+                    <a:pt x="4572391" y="928854"/>
+                  </a:lnTo>
+                  <a:lnTo>
+                    <a:pt x="4502047" y="922455"/>
+                  </a:lnTo>
+                  <a:lnTo>
+                    <a:pt x="4431702" y="915744"/>
+                  </a:lnTo>
+                  <a:lnTo>
+                    <a:pt x="4361358" y="908708"/>
+                  </a:lnTo>
+                  <a:lnTo>
+                    <a:pt x="4291013" y="901329"/>
+                  </a:lnTo>
+                  <a:lnTo>
+                    <a:pt x="4220669" y="893592"/>
+                  </a:lnTo>
+                  <a:lnTo>
+                    <a:pt x="4150324" y="885479"/>
+                  </a:lnTo>
+                  <a:lnTo>
+                    <a:pt x="4079980" y="876971"/>
+                  </a:lnTo>
+                  <a:lnTo>
+                    <a:pt x="4009635" y="868050"/>
+                  </a:lnTo>
+                  <a:lnTo>
+                    <a:pt x="3939291" y="858696"/>
+                  </a:lnTo>
+                  <a:lnTo>
+                    <a:pt x="3868946" y="848887"/>
+                  </a:lnTo>
+                  <a:lnTo>
+                    <a:pt x="3798602" y="838602"/>
+                  </a:lnTo>
+                  <a:lnTo>
+                    <a:pt x="3728257" y="827816"/>
+                  </a:lnTo>
+                  <a:lnTo>
+                    <a:pt x="3657913" y="816507"/>
+                  </a:lnTo>
+                  <a:lnTo>
+                    <a:pt x="3587569" y="804648"/>
+                  </a:lnTo>
+                  <a:lnTo>
+                    <a:pt x="3517224" y="792212"/>
+                  </a:lnTo>
+                  <a:lnTo>
+                    <a:pt x="3446880" y="779173"/>
+                  </a:lnTo>
+                  <a:lnTo>
+                    <a:pt x="3376535" y="765499"/>
+                  </a:lnTo>
+                  <a:lnTo>
+                    <a:pt x="3306191" y="755635"/>
+                  </a:lnTo>
+                  <a:lnTo>
+                    <a:pt x="3235846" y="747440"/>
+                  </a:lnTo>
+                  <a:lnTo>
+                    <a:pt x="3165502" y="739025"/>
+                  </a:lnTo>
+                  <a:lnTo>
+                    <a:pt x="3095157" y="730384"/>
+                  </a:lnTo>
+                  <a:lnTo>
+                    <a:pt x="3024813" y="721510"/>
+                  </a:lnTo>
+                  <a:lnTo>
+                    <a:pt x="2954468" y="712398"/>
+                  </a:lnTo>
+                  <a:lnTo>
+                    <a:pt x="2884124" y="703041"/>
+                  </a:lnTo>
+                  <a:lnTo>
+                    <a:pt x="2813779" y="693432"/>
+                  </a:lnTo>
+                  <a:lnTo>
+                    <a:pt x="2743435" y="683566"/>
+                  </a:lnTo>
+                  <a:lnTo>
+                    <a:pt x="2673090" y="673434"/>
+                  </a:lnTo>
+                  <a:lnTo>
+                    <a:pt x="2602746" y="663030"/>
+                  </a:lnTo>
+                  <a:lnTo>
+                    <a:pt x="2532401" y="652346"/>
+                  </a:lnTo>
+                  <a:lnTo>
+                    <a:pt x="2462057" y="641375"/>
+                  </a:lnTo>
+                  <a:lnTo>
+                    <a:pt x="2391712" y="630109"/>
+                  </a:lnTo>
+                  <a:lnTo>
+                    <a:pt x="2321368" y="618540"/>
+                  </a:lnTo>
+                  <a:lnTo>
+                    <a:pt x="2251023" y="606661"/>
+                  </a:lnTo>
+                  <a:lnTo>
+                    <a:pt x="2180679" y="594462"/>
+                  </a:lnTo>
+                  <a:lnTo>
+                    <a:pt x="2110334" y="581935"/>
+                  </a:lnTo>
+                  <a:lnTo>
+                    <a:pt x="2039990" y="569072"/>
+                  </a:lnTo>
+                  <a:lnTo>
+                    <a:pt x="1969645" y="555862"/>
+                  </a:lnTo>
+                  <a:lnTo>
+                    <a:pt x="1899301" y="542298"/>
+                  </a:lnTo>
+                  <a:lnTo>
+                    <a:pt x="1828956" y="528370"/>
+                  </a:lnTo>
+                  <a:lnTo>
+                    <a:pt x="1758612" y="514067"/>
+                  </a:lnTo>
+                  <a:lnTo>
+                    <a:pt x="1688267" y="499379"/>
+                  </a:lnTo>
+                  <a:lnTo>
+                    <a:pt x="1617923" y="484297"/>
+                  </a:lnTo>
+                  <a:lnTo>
+                    <a:pt x="1547578" y="468809"/>
+                  </a:lnTo>
+                  <a:lnTo>
+                    <a:pt x="1477234" y="452905"/>
+                  </a:lnTo>
+                  <a:lnTo>
+                    <a:pt x="1406889" y="436574"/>
+                  </a:lnTo>
+                  <a:lnTo>
+                    <a:pt x="1336545" y="419804"/>
+                  </a:lnTo>
+                  <a:lnTo>
+                    <a:pt x="1266200" y="402583"/>
+                  </a:lnTo>
+                  <a:lnTo>
+                    <a:pt x="1195856" y="384899"/>
+                  </a:lnTo>
+                  <a:lnTo>
+                    <a:pt x="1125511" y="366740"/>
+                  </a:lnTo>
+                  <a:lnTo>
+                    <a:pt x="1055167" y="348093"/>
+                  </a:lnTo>
+                  <a:lnTo>
+                    <a:pt x="984822" y="328945"/>
+                  </a:lnTo>
+                  <a:lnTo>
+                    <a:pt x="914478" y="309282"/>
+                  </a:lnTo>
+                  <a:lnTo>
+                    <a:pt x="844133" y="289091"/>
+                  </a:lnTo>
+                  <a:lnTo>
+                    <a:pt x="773789" y="268356"/>
+                  </a:lnTo>
+                  <a:lnTo>
+                    <a:pt x="703444" y="247065"/>
+                  </a:lnTo>
+                  <a:lnTo>
+                    <a:pt x="633100" y="225202"/>
+                  </a:lnTo>
+                  <a:lnTo>
+                    <a:pt x="562755" y="202750"/>
+                  </a:lnTo>
+                  <a:lnTo>
+                    <a:pt x="492411" y="179696"/>
+                  </a:lnTo>
+                  <a:lnTo>
+                    <a:pt x="422066" y="156022"/>
+                  </a:lnTo>
+                  <a:lnTo>
+                    <a:pt x="351722" y="131711"/>
+                  </a:lnTo>
+                  <a:lnTo>
+                    <a:pt x="281377" y="106747"/>
+                  </a:lnTo>
+                  <a:lnTo>
+                    <a:pt x="211033" y="81112"/>
+                  </a:lnTo>
+                  <a:lnTo>
+                    <a:pt x="140688" y="54789"/>
+                  </a:lnTo>
+                  <a:lnTo>
+                    <a:pt x="70344" y="27757"/>
+                  </a:lnTo>
+                  <a:lnTo>
+                    <a:pt x="0" y="0"/>
+                  </a:lnTo>
+                </a:path>
+              </a:pathLst>
+            </a:custGeom>
+          </p:spPr>
+          <p:txBody>
+            <a:bodyPr/>
+            <a:lstStyle/>
+            <a:p/>
+          </p:txBody>
+        </p:sp>
+        <p:sp>
+          <p:nvSpPr>
+            <p:cNvPr id="24" name="pl24"/>
+            <p:cNvSpPr/>
+            <p:nvPr/>
+          </p:nvSpPr>
+          <p:spPr>
+            <a:xfrm>
+              <a:off x="1861200" y="2143092"/>
+              <a:ext cx="6338215" cy="1212322"/>
+            </a:xfrm>
+            <a:custGeom>
+              <a:avLst/>
+              <a:pathLst>
+                <a:path w="6338215" h="1212322">
                   <a:moveTo>
                     <a:pt x="0" y="0"/>
                   </a:moveTo>
                   <a:lnTo>
-                    <a:pt x="7342" y="13405"/>
-                  </a:lnTo>
-                  <a:lnTo>
-                    <a:pt x="78965" y="139416"/>
-                  </a:lnTo>
-                  <a:lnTo>
-                    <a:pt x="150587" y="260852"/>
-                  </a:lnTo>
-                  <a:lnTo>
-                    <a:pt x="222210" y="377878"/>
-                  </a:lnTo>
-                  <a:lnTo>
-                    <a:pt x="293832" y="490655"/>
-                  </a:lnTo>
-                  <a:lnTo>
-                    <a:pt x="365455" y="599337"/>
-                  </a:lnTo>
-                  <a:lnTo>
-                    <a:pt x="437077" y="704073"/>
-                  </a:lnTo>
-                  <a:lnTo>
-                    <a:pt x="508700" y="805005"/>
-                  </a:lnTo>
-                  <a:lnTo>
-                    <a:pt x="580322" y="902273"/>
-                  </a:lnTo>
-                  <a:lnTo>
-                    <a:pt x="651945" y="996008"/>
-                  </a:lnTo>
-                  <a:lnTo>
-                    <a:pt x="723568" y="1086340"/>
-                  </a:lnTo>
-                  <a:lnTo>
-                    <a:pt x="795190" y="1173392"/>
-                  </a:lnTo>
-                  <a:lnTo>
-                    <a:pt x="866813" y="1257283"/>
-                  </a:lnTo>
-                  <a:lnTo>
-                    <a:pt x="938435" y="1338128"/>
-                  </a:lnTo>
-                  <a:lnTo>
-                    <a:pt x="1010058" y="1416038"/>
-                  </a:lnTo>
-                  <a:lnTo>
-                    <a:pt x="1081680" y="1491118"/>
-                  </a:lnTo>
-                  <a:lnTo>
-                    <a:pt x="1153303" y="1563472"/>
-                  </a:lnTo>
-                  <a:lnTo>
-                    <a:pt x="1224925" y="1633199"/>
-                  </a:lnTo>
-                  <a:lnTo>
-                    <a:pt x="1296548" y="1700394"/>
-                  </a:lnTo>
-                  <a:lnTo>
-                    <a:pt x="1368170" y="1765149"/>
-                  </a:lnTo>
-                  <a:lnTo>
-                    <a:pt x="1439793" y="1827553"/>
-                  </a:lnTo>
-                  <a:lnTo>
-                    <a:pt x="1511415" y="1887691"/>
-                  </a:lnTo>
-                  <a:lnTo>
-                    <a:pt x="1583038" y="1945645"/>
-                  </a:lnTo>
-                  <a:lnTo>
-                    <a:pt x="1654660" y="2001495"/>
-                  </a:lnTo>
-                  <a:lnTo>
-                    <a:pt x="1726283" y="2055317"/>
-                  </a:lnTo>
-                  <a:lnTo>
-                    <a:pt x="1797905" y="2107185"/>
-                  </a:lnTo>
-                  <a:lnTo>
-                    <a:pt x="1869528" y="2157169"/>
-                  </a:lnTo>
-                  <a:lnTo>
-                    <a:pt x="1941150" y="2205338"/>
-                  </a:lnTo>
-                  <a:lnTo>
-                    <a:pt x="2012773" y="2251758"/>
-                  </a:lnTo>
-                  <a:lnTo>
-                    <a:pt x="2084396" y="2296493"/>
-                  </a:lnTo>
-                  <a:lnTo>
-                    <a:pt x="2156018" y="2339603"/>
-                  </a:lnTo>
-                  <a:lnTo>
-                    <a:pt x="2227641" y="2381148"/>
-                  </a:lnTo>
-                  <a:lnTo>
-                    <a:pt x="2299263" y="2421184"/>
-                  </a:lnTo>
-                  <a:lnTo>
-                    <a:pt x="2370886" y="2459767"/>
-                  </a:lnTo>
-                  <a:lnTo>
-                    <a:pt x="2442508" y="2496949"/>
-                  </a:lnTo>
-                  <a:lnTo>
-                    <a:pt x="2514131" y="2532780"/>
-                  </a:lnTo>
-                  <a:lnTo>
-                    <a:pt x="2585753" y="2567311"/>
-                  </a:lnTo>
-                  <a:lnTo>
-                    <a:pt x="2657376" y="2600587"/>
-                  </a:lnTo>
-                  <a:lnTo>
-                    <a:pt x="2728998" y="2632656"/>
-                  </a:lnTo>
-                  <a:lnTo>
-                    <a:pt x="2800621" y="2663559"/>
-                  </a:lnTo>
-                  <a:lnTo>
-                    <a:pt x="2872243" y="2693341"/>
-                  </a:lnTo>
-                  <a:lnTo>
-                    <a:pt x="2943866" y="2722042"/>
-                  </a:lnTo>
-                  <a:lnTo>
-                    <a:pt x="3015488" y="2749700"/>
-                  </a:lnTo>
-                  <a:lnTo>
-                    <a:pt x="3087111" y="2776354"/>
-                  </a:lnTo>
-                  <a:lnTo>
-                    <a:pt x="3158733" y="2802040"/>
-                  </a:lnTo>
-                  <a:lnTo>
-                    <a:pt x="3230356" y="2826793"/>
-                  </a:lnTo>
-                  <a:lnTo>
-                    <a:pt x="3301978" y="2850648"/>
-                  </a:lnTo>
-                  <a:lnTo>
-                    <a:pt x="3373601" y="2873636"/>
-                  </a:lnTo>
-                  <a:lnTo>
-                    <a:pt x="3445224" y="2895790"/>
-                  </a:lnTo>
-                  <a:lnTo>
-                    <a:pt x="3516846" y="2917139"/>
-                  </a:lnTo>
-                  <a:lnTo>
-                    <a:pt x="3588469" y="2937713"/>
-                  </a:lnTo>
-                  <a:lnTo>
-                    <a:pt x="3660091" y="2957540"/>
-                  </a:lnTo>
-                  <a:lnTo>
-                    <a:pt x="3731714" y="2976647"/>
-                  </a:lnTo>
-                  <a:lnTo>
-                    <a:pt x="3803336" y="2995060"/>
-                  </a:lnTo>
-                  <a:lnTo>
-                    <a:pt x="3874959" y="3012805"/>
-                  </a:lnTo>
-                  <a:lnTo>
-                    <a:pt x="3946581" y="3029905"/>
-                  </a:lnTo>
-                  <a:lnTo>
-                    <a:pt x="4018204" y="3046385"/>
-                  </a:lnTo>
-                  <a:lnTo>
-                    <a:pt x="4089826" y="3062266"/>
-                  </a:lnTo>
-                  <a:lnTo>
-                    <a:pt x="4161449" y="3077570"/>
-                  </a:lnTo>
-                  <a:lnTo>
-                    <a:pt x="4233071" y="3092319"/>
-                  </a:lnTo>
-                  <a:lnTo>
-                    <a:pt x="4304694" y="3106532"/>
-                  </a:lnTo>
-                  <a:lnTo>
-                    <a:pt x="4376316" y="3120229"/>
-                  </a:lnTo>
-                  <a:lnTo>
-                    <a:pt x="4447939" y="3133428"/>
-                  </a:lnTo>
-                  <a:lnTo>
-                    <a:pt x="4519561" y="3146149"/>
-                  </a:lnTo>
-                  <a:lnTo>
-                    <a:pt x="4591184" y="3158407"/>
-                  </a:lnTo>
-                  <a:lnTo>
-                    <a:pt x="4662806" y="3170221"/>
-                  </a:lnTo>
-                  <a:lnTo>
-                    <a:pt x="4734429" y="3181605"/>
-                  </a:lnTo>
-                  <a:lnTo>
-                    <a:pt x="4806052" y="3192576"/>
-                  </a:lnTo>
-                  <a:lnTo>
-                    <a:pt x="4877674" y="3203149"/>
-                  </a:lnTo>
-                  <a:lnTo>
-                    <a:pt x="4949297" y="3213337"/>
-                  </a:lnTo>
-                  <a:lnTo>
-                    <a:pt x="5020919" y="3223156"/>
-                  </a:lnTo>
-                  <a:lnTo>
-                    <a:pt x="5092542" y="3232619"/>
-                  </a:lnTo>
-                  <a:lnTo>
-                    <a:pt x="5164164" y="3241737"/>
-                  </a:lnTo>
-                  <a:lnTo>
-                    <a:pt x="5235787" y="3250525"/>
-                  </a:lnTo>
-                  <a:lnTo>
-                    <a:pt x="5307409" y="3258993"/>
-                  </a:lnTo>
-                  <a:lnTo>
-                    <a:pt x="5379032" y="3267154"/>
-                  </a:lnTo>
-                  <a:lnTo>
-                    <a:pt x="5450654" y="3275019"/>
-                  </a:lnTo>
-                  <a:lnTo>
-                    <a:pt x="5522277" y="3282598"/>
-                  </a:lnTo>
-                  <a:lnTo>
-                    <a:pt x="5593899" y="3289902"/>
-                  </a:lnTo>
-                  <a:lnTo>
-                    <a:pt x="5665522" y="3296941"/>
-                  </a:lnTo>
-                  <a:lnTo>
-                    <a:pt x="5737144" y="3303724"/>
-                  </a:lnTo>
-                  <a:lnTo>
-                    <a:pt x="5808767" y="3310260"/>
-                  </a:lnTo>
-                  <a:lnTo>
-                    <a:pt x="5880389" y="3316560"/>
-                  </a:lnTo>
-                  <a:lnTo>
-                    <a:pt x="5952012" y="3322631"/>
-                  </a:lnTo>
-                  <a:lnTo>
-                    <a:pt x="6023634" y="3328481"/>
-                  </a:lnTo>
-                  <a:lnTo>
-                    <a:pt x="6095257" y="3334119"/>
-                  </a:lnTo>
-                  <a:lnTo>
-                    <a:pt x="6166880" y="3339552"/>
-                  </a:lnTo>
-                  <a:lnTo>
-                    <a:pt x="6238502" y="3344788"/>
-                  </a:lnTo>
-                  <a:lnTo>
-                    <a:pt x="6310125" y="3349833"/>
-                  </a:lnTo>
-                  <a:lnTo>
-                    <a:pt x="6381747" y="3354696"/>
-                  </a:lnTo>
-                  <a:lnTo>
-                    <a:pt x="6453370" y="3359382"/>
+                    <a:pt x="7211" y="4837"/>
+                  </a:lnTo>
+                  <a:lnTo>
+                    <a:pt x="77556" y="50312"/>
+                  </a:lnTo>
+                  <a:lnTo>
+                    <a:pt x="147900" y="94135"/>
+                  </a:lnTo>
+                  <a:lnTo>
+                    <a:pt x="218245" y="136367"/>
+                  </a:lnTo>
+                  <a:lnTo>
+                    <a:pt x="288589" y="177066"/>
+                  </a:lnTo>
+                  <a:lnTo>
+                    <a:pt x="358934" y="216286"/>
+                  </a:lnTo>
+                  <a:lnTo>
+                    <a:pt x="429278" y="254083"/>
+                  </a:lnTo>
+                  <a:lnTo>
+                    <a:pt x="499623" y="290507"/>
+                  </a:lnTo>
+                  <a:lnTo>
+                    <a:pt x="569967" y="325609"/>
+                  </a:lnTo>
+                  <a:lnTo>
+                    <a:pt x="640312" y="359436"/>
+                  </a:lnTo>
+                  <a:lnTo>
+                    <a:pt x="710656" y="392034"/>
+                  </a:lnTo>
+                  <a:lnTo>
+                    <a:pt x="781001" y="423449"/>
+                  </a:lnTo>
+                  <a:lnTo>
+                    <a:pt x="851345" y="453724"/>
+                  </a:lnTo>
+                  <a:lnTo>
+                    <a:pt x="921690" y="482899"/>
+                  </a:lnTo>
+                  <a:lnTo>
+                    <a:pt x="992034" y="511014"/>
+                  </a:lnTo>
+                  <a:lnTo>
+                    <a:pt x="1062379" y="538109"/>
+                  </a:lnTo>
+                  <a:lnTo>
+                    <a:pt x="1132723" y="564220"/>
+                  </a:lnTo>
+                  <a:lnTo>
+                    <a:pt x="1203068" y="589383"/>
+                  </a:lnTo>
+                  <a:lnTo>
+                    <a:pt x="1273412" y="613632"/>
+                  </a:lnTo>
+                  <a:lnTo>
+                    <a:pt x="1343757" y="637001"/>
+                  </a:lnTo>
+                  <a:lnTo>
+                    <a:pt x="1414101" y="659521"/>
+                  </a:lnTo>
+                  <a:lnTo>
+                    <a:pt x="1484446" y="681223"/>
+                  </a:lnTo>
+                  <a:lnTo>
+                    <a:pt x="1554790" y="702137"/>
+                  </a:lnTo>
+                  <a:lnTo>
+                    <a:pt x="1625135" y="722292"/>
+                  </a:lnTo>
+                  <a:lnTo>
+                    <a:pt x="1695479" y="741715"/>
+                  </a:lnTo>
+                  <a:lnTo>
+                    <a:pt x="1765824" y="760433"/>
+                  </a:lnTo>
+                  <a:lnTo>
+                    <a:pt x="1836168" y="778471"/>
+                  </a:lnTo>
+                  <a:lnTo>
+                    <a:pt x="1906512" y="795854"/>
+                  </a:lnTo>
+                  <a:lnTo>
+                    <a:pt x="1976857" y="812606"/>
+                  </a:lnTo>
+                  <a:lnTo>
+                    <a:pt x="2047201" y="828750"/>
+                  </a:lnTo>
+                  <a:lnTo>
+                    <a:pt x="2117546" y="844307"/>
+                  </a:lnTo>
+                  <a:lnTo>
+                    <a:pt x="2187890" y="859300"/>
+                  </a:lnTo>
+                  <a:lnTo>
+                    <a:pt x="2258235" y="873748"/>
+                  </a:lnTo>
+                  <a:lnTo>
+                    <a:pt x="2328579" y="887672"/>
+                  </a:lnTo>
+                  <a:lnTo>
+                    <a:pt x="2398924" y="901090"/>
+                  </a:lnTo>
+                  <a:lnTo>
+                    <a:pt x="2469268" y="914020"/>
+                  </a:lnTo>
+                  <a:lnTo>
+                    <a:pt x="2539613" y="926482"/>
+                  </a:lnTo>
+                  <a:lnTo>
+                    <a:pt x="2609957" y="938490"/>
+                  </a:lnTo>
+                  <a:lnTo>
+                    <a:pt x="2680302" y="950063"/>
+                  </a:lnTo>
+                  <a:lnTo>
+                    <a:pt x="2750646" y="961216"/>
+                  </a:lnTo>
+                  <a:lnTo>
+                    <a:pt x="2820991" y="971963"/>
+                  </a:lnTo>
+                  <a:lnTo>
+                    <a:pt x="2891335" y="982320"/>
+                  </a:lnTo>
+                  <a:lnTo>
+                    <a:pt x="2961680" y="992302"/>
+                  </a:lnTo>
+                  <a:lnTo>
+                    <a:pt x="3032024" y="1001920"/>
+                  </a:lnTo>
+                  <a:lnTo>
+                    <a:pt x="3102369" y="1011190"/>
+                  </a:lnTo>
+                  <a:lnTo>
+                    <a:pt x="3172713" y="1020123"/>
+                  </a:lnTo>
+                  <a:lnTo>
+                    <a:pt x="3243058" y="1028731"/>
+                  </a:lnTo>
+                  <a:lnTo>
+                    <a:pt x="3313402" y="1037027"/>
+                  </a:lnTo>
+                  <a:lnTo>
+                    <a:pt x="3383747" y="1045022"/>
+                  </a:lnTo>
+                  <a:lnTo>
+                    <a:pt x="3454091" y="1052727"/>
+                  </a:lnTo>
+                  <a:lnTo>
+                    <a:pt x="3524436" y="1060151"/>
+                  </a:lnTo>
+                  <a:lnTo>
+                    <a:pt x="3594780" y="1067306"/>
+                  </a:lnTo>
+                  <a:lnTo>
+                    <a:pt x="3665125" y="1074202"/>
+                  </a:lnTo>
+                  <a:lnTo>
+                    <a:pt x="3735469" y="1080846"/>
+                  </a:lnTo>
+                  <a:lnTo>
+                    <a:pt x="3805814" y="1087250"/>
+                  </a:lnTo>
+                  <a:lnTo>
+                    <a:pt x="3876158" y="1093421"/>
+                  </a:lnTo>
+                  <a:lnTo>
+                    <a:pt x="3946503" y="1099368"/>
+                  </a:lnTo>
+                  <a:lnTo>
+                    <a:pt x="4016847" y="1105099"/>
+                  </a:lnTo>
+                  <a:lnTo>
+                    <a:pt x="4087192" y="1110622"/>
+                  </a:lnTo>
+                  <a:lnTo>
+                    <a:pt x="4157536" y="1115945"/>
+                  </a:lnTo>
+                  <a:lnTo>
+                    <a:pt x="4227881" y="1121074"/>
+                  </a:lnTo>
+                  <a:lnTo>
+                    <a:pt x="4298225" y="1126017"/>
+                  </a:lnTo>
+                  <a:lnTo>
+                    <a:pt x="4368570" y="1130780"/>
+                  </a:lnTo>
+                  <a:lnTo>
+                    <a:pt x="4438914" y="1135371"/>
+                  </a:lnTo>
+                  <a:lnTo>
+                    <a:pt x="4509259" y="1139795"/>
+                  </a:lnTo>
+                  <a:lnTo>
+                    <a:pt x="4579603" y="1144058"/>
+                  </a:lnTo>
+                  <a:lnTo>
+                    <a:pt x="4649948" y="1148166"/>
+                  </a:lnTo>
+                  <a:lnTo>
+                    <a:pt x="4720292" y="1152125"/>
+                  </a:lnTo>
+                  <a:lnTo>
+                    <a:pt x="4790637" y="1155941"/>
+                  </a:lnTo>
+                  <a:lnTo>
+                    <a:pt x="4860981" y="1159618"/>
+                  </a:lnTo>
+                  <a:lnTo>
+                    <a:pt x="4931326" y="1163161"/>
+                  </a:lnTo>
+                  <a:lnTo>
+                    <a:pt x="5001670" y="1166576"/>
+                  </a:lnTo>
+                  <a:lnTo>
+                    <a:pt x="5072015" y="1169866"/>
+                  </a:lnTo>
+                  <a:lnTo>
+                    <a:pt x="5142359" y="1173038"/>
+                  </a:lnTo>
+                  <a:lnTo>
+                    <a:pt x="5212704" y="1176094"/>
+                  </a:lnTo>
+                  <a:lnTo>
+                    <a:pt x="5283048" y="1179039"/>
+                  </a:lnTo>
+                  <a:lnTo>
+                    <a:pt x="5353393" y="1181877"/>
+                  </a:lnTo>
+                  <a:lnTo>
+                    <a:pt x="5423737" y="1184612"/>
+                  </a:lnTo>
+                  <a:lnTo>
+                    <a:pt x="5494081" y="1187248"/>
+                  </a:lnTo>
+                  <a:lnTo>
+                    <a:pt x="5564426" y="1189788"/>
+                  </a:lnTo>
+                  <a:lnTo>
+                    <a:pt x="5634770" y="1192236"/>
+                  </a:lnTo>
+                  <a:lnTo>
+                    <a:pt x="5705115" y="1194595"/>
+                  </a:lnTo>
+                  <a:lnTo>
+                    <a:pt x="5775459" y="1196868"/>
+                  </a:lnTo>
+                  <a:lnTo>
+                    <a:pt x="5845804" y="1199059"/>
+                  </a:lnTo>
+                  <a:lnTo>
+                    <a:pt x="5916148" y="1201170"/>
+                  </a:lnTo>
+                  <a:lnTo>
+                    <a:pt x="5986493" y="1203205"/>
+                  </a:lnTo>
+                  <a:lnTo>
+                    <a:pt x="6056837" y="1205165"/>
+                  </a:lnTo>
+                  <a:lnTo>
+                    <a:pt x="6127182" y="1207055"/>
+                  </a:lnTo>
+                  <a:lnTo>
+                    <a:pt x="6197526" y="1208876"/>
+                  </a:lnTo>
+                  <a:lnTo>
+                    <a:pt x="6267871" y="1210630"/>
+                  </a:lnTo>
+                  <a:lnTo>
+                    <a:pt x="6338215" y="1212322"/>
                   </a:lnTo>
                 </a:path>
               </a:pathLst>
@@ -4442,27 +4477,27 @@
         </p:sp>
         <p:sp>
           <p:nvSpPr>
-            <p:cNvPr id="24" name="pl24"/>
+            <p:cNvPr id="25" name="pl25"/>
             <p:cNvSpPr/>
             <p:nvPr/>
           </p:nvSpPr>
           <p:spPr>
             <a:xfrm>
-              <a:off x="817517" y="4727786"/>
-              <a:ext cx="7799693" cy="0"/>
+              <a:off x="887106" y="3100960"/>
+              <a:ext cx="7660515" cy="0"/>
             </a:xfrm>
             <a:custGeom>
               <a:avLst/>
               <a:pathLst>
-                <a:path w="7799693" h="0">
+                <a:path w="7660515" h="0">
                   <a:moveTo>
                     <a:pt x="0" y="0"/>
                   </a:moveTo>
                   <a:lnTo>
-                    <a:pt x="7799693" y="0"/>
-                  </a:lnTo>
-                  <a:lnTo>
-                    <a:pt x="7799693" y="0"/>
+                    <a:pt x="7660515" y="0"/>
+                  </a:lnTo>
+                  <a:lnTo>
+                    <a:pt x="7660515" y="0"/>
                   </a:lnTo>
                 </a:path>
               </a:pathLst>
@@ -4485,21 +4520,21 @@
         </p:sp>
         <p:sp>
           <p:nvSpPr>
-            <p:cNvPr id="25" name="pl25"/>
+            <p:cNvPr id="26" name="pl26"/>
             <p:cNvSpPr/>
             <p:nvPr/>
           </p:nvSpPr>
           <p:spPr>
             <a:xfrm>
-              <a:off x="4588151" y="2073503"/>
-              <a:ext cx="0" cy="3649639"/>
+              <a:off x="4590457" y="2143092"/>
+              <a:ext cx="0" cy="1317069"/>
             </a:xfrm>
             <a:custGeom>
               <a:avLst/>
               <a:pathLst>
-                <a:path w="0" h="3649639">
+                <a:path w="0" h="1317069">
                   <a:moveTo>
-                    <a:pt x="0" y="3649639"/>
+                    <a:pt x="0" y="1317069"/>
                   </a:moveTo>
                   <a:lnTo>
                     <a:pt x="0" y="0"/>
@@ -4528,13 +4563,13 @@
         </p:sp>
         <p:sp>
           <p:nvSpPr>
-            <p:cNvPr id="26" name="tx26"/>
+            <p:cNvPr id="27" name="tx27"/>
             <p:cNvSpPr/>
             <p:nvPr/>
           </p:nvSpPr>
           <p:spPr>
             <a:xfrm>
-              <a:off x="692708" y="5517199"/>
+              <a:off x="762297" y="3360243"/>
               <a:ext cx="62179" cy="80101"/>
             </a:xfrm>
             <a:prstGeom prst="rect">
@@ -4574,13 +4609,13 @@
         </p:sp>
         <p:sp>
           <p:nvSpPr>
-            <p:cNvPr id="27" name="tx27"/>
+            <p:cNvPr id="28" name="tx28"/>
             <p:cNvSpPr/>
             <p:nvPr/>
           </p:nvSpPr>
           <p:spPr>
             <a:xfrm>
-              <a:off x="692708" y="4687735"/>
+              <a:off x="762297" y="3060909"/>
               <a:ext cx="62179" cy="80101"/>
             </a:xfrm>
             <a:prstGeom prst="rect">
@@ -4620,13 +4655,13 @@
         </p:sp>
         <p:sp>
           <p:nvSpPr>
-            <p:cNvPr id="28" name="tx28"/>
+            <p:cNvPr id="29" name="tx29"/>
             <p:cNvSpPr/>
             <p:nvPr/>
           </p:nvSpPr>
           <p:spPr>
             <a:xfrm>
-              <a:off x="692708" y="3858272"/>
+              <a:off x="762297" y="2761575"/>
               <a:ext cx="62179" cy="80101"/>
             </a:xfrm>
             <a:prstGeom prst="rect">
@@ -4666,13 +4701,13 @@
         </p:sp>
         <p:sp>
           <p:nvSpPr>
-            <p:cNvPr id="29" name="tx29"/>
+            <p:cNvPr id="30" name="tx30"/>
             <p:cNvSpPr/>
             <p:nvPr/>
           </p:nvSpPr>
           <p:spPr>
             <a:xfrm>
-              <a:off x="692708" y="3028808"/>
+              <a:off x="762297" y="2462242"/>
               <a:ext cx="62179" cy="80101"/>
             </a:xfrm>
             <a:prstGeom prst="rect">
@@ -4712,13 +4747,13 @@
         </p:sp>
         <p:sp>
           <p:nvSpPr>
-            <p:cNvPr id="30" name="tx30"/>
+            <p:cNvPr id="31" name="tx31"/>
             <p:cNvSpPr/>
             <p:nvPr/>
           </p:nvSpPr>
           <p:spPr>
             <a:xfrm>
-              <a:off x="692708" y="2199345"/>
+              <a:off x="762297" y="2162908"/>
               <a:ext cx="62179" cy="80101"/>
             </a:xfrm>
             <a:prstGeom prst="rect">
@@ -4758,13 +4793,13 @@
         </p:sp>
         <p:sp>
           <p:nvSpPr>
-            <p:cNvPr id="31" name="tx31"/>
+            <p:cNvPr id="32" name="tx32"/>
             <p:cNvSpPr/>
             <p:nvPr/>
           </p:nvSpPr>
           <p:spPr>
             <a:xfrm>
-              <a:off x="2360651" y="5785772"/>
+              <a:off x="2401262" y="3522791"/>
               <a:ext cx="161574" cy="80101"/>
             </a:xfrm>
             <a:prstGeom prst="rect">
@@ -4804,13 +4839,13 @@
         </p:sp>
         <p:sp>
           <p:nvSpPr>
-            <p:cNvPr id="32" name="tx32"/>
+            <p:cNvPr id="33" name="tx33"/>
             <p:cNvSpPr/>
             <p:nvPr/>
           </p:nvSpPr>
           <p:spPr>
             <a:xfrm>
-              <a:off x="4561958" y="5785772"/>
+              <a:off x="4564176" y="3522791"/>
               <a:ext cx="62179" cy="80101"/>
             </a:xfrm>
             <a:prstGeom prst="rect">
@@ -4850,13 +4885,13 @@
         </p:sp>
         <p:sp>
           <p:nvSpPr>
-            <p:cNvPr id="33" name="tx33"/>
+            <p:cNvPr id="34" name="tx34"/>
             <p:cNvSpPr/>
             <p:nvPr/>
           </p:nvSpPr>
           <p:spPr>
             <a:xfrm>
-              <a:off x="6682478" y="5785772"/>
+              <a:off x="6646302" y="3522791"/>
               <a:ext cx="124358" cy="80101"/>
             </a:xfrm>
             <a:prstGeom prst="rect">
@@ -4896,13 +4931,13 @@
         </p:sp>
         <p:sp>
           <p:nvSpPr>
-            <p:cNvPr id="34" name="tx34"/>
+            <p:cNvPr id="35" name="tx35"/>
             <p:cNvSpPr/>
             <p:nvPr/>
           </p:nvSpPr>
           <p:spPr>
             <a:xfrm>
-              <a:off x="2928340" y="5925448"/>
+              <a:off x="2928340" y="3662467"/>
               <a:ext cx="3578047" cy="100218"/>
             </a:xfrm>
             <a:prstGeom prst="rect">
@@ -4942,13 +4977,13 @@
         </p:sp>
         <p:sp>
           <p:nvSpPr>
-            <p:cNvPr id="35" name="tx35"/>
+            <p:cNvPr id="36" name="tx36"/>
             <p:cNvSpPr/>
             <p:nvPr/>
           </p:nvSpPr>
           <p:spPr>
             <a:xfrm rot="-5400000">
-              <a:off x="68446" y="3848213"/>
+              <a:off x="138035" y="2751517"/>
               <a:ext cx="1016904" cy="100218"/>
             </a:xfrm>
             <a:prstGeom prst="rect">
@@ -4988,13 +5023,13 @@
         </p:sp>
         <p:sp>
           <p:nvSpPr>
-            <p:cNvPr id="36" name="tx36"/>
+            <p:cNvPr id="37" name="tx37"/>
             <p:cNvSpPr/>
             <p:nvPr/>
           </p:nvSpPr>
           <p:spPr>
             <a:xfrm>
-              <a:off x="817517" y="1896563"/>
+              <a:off x="887106" y="1966152"/>
               <a:ext cx="7052127" cy="82021"/>
             </a:xfrm>
             <a:prstGeom prst="rect">
@@ -5034,13 +5069,3577 @@
         </p:sp>
         <p:sp>
           <p:nvSpPr>
-            <p:cNvPr id="37" name="tx37"/>
+            <p:cNvPr id="38" name="tx38"/>
             <p:cNvSpPr/>
             <p:nvPr/>
           </p:nvSpPr>
           <p:spPr>
             <a:xfrm>
-              <a:off x="817517" y="1669789"/>
+              <a:off x="887106" y="1739378"/>
+              <a:ext cx="1806397" cy="120152"/>
+            </a:xfrm>
+            <a:prstGeom prst="rect">
+              <a:avLst/>
+            </a:prstGeom>
+            <a:noFill/>
+          </p:spPr>
+          <p:txBody>
+            <a:bodyPr lIns="0" rIns="0" tIns="0" bIns="0" anchorCtr="1" anchor="ctr" wrap="none"/>
+            <a:lstStyle/>
+            <a:p>
+              <a:pPr algn="l" marL="0" marR="0" indent="0">
+                <a:lnSpc>
+                  <a:spcPts val="1320"/>
+                </a:lnSpc>
+                <a:spcBef>
+                  <a:spcPts val="0"/>
+                </a:spcBef>
+                <a:spcAft>
+                  <a:spcPts val="0"/>
+                </a:spcAft>
+              </a:pPr>
+              <a:r>
+                <a:rPr sz="1320">
+                  <a:solidFill>
+                    <a:srgbClr val="000000">
+                      <a:alpha val="100000"/>
+                    </a:srgbClr>
+                  </a:solidFill>
+                  <a:latin typeface="Helvetica"/>
+                  <a:cs typeface="Helvetica"/>
+                </a:rPr>
+                <a:t>Composite Grade 3 AEs</a:t>
+              </a:r>
+            </a:p>
+          </p:txBody>
+        </p:sp>
+        <p:sp>
+          <p:nvSpPr>
+            <p:cNvPr id="39" name="pl39"/>
+            <p:cNvSpPr/>
+            <p:nvPr/>
+          </p:nvSpPr>
+          <p:spPr>
+            <a:xfrm>
+              <a:off x="887106" y="5444019"/>
+              <a:ext cx="7660515" cy="0"/>
+            </a:xfrm>
+            <a:custGeom>
+              <a:avLst/>
+              <a:pathLst>
+                <a:path w="7660515" h="0">
+                  <a:moveTo>
+                    <a:pt x="0" y="0"/>
+                  </a:moveTo>
+                  <a:lnTo>
+                    <a:pt x="7660515" y="0"/>
+                  </a:lnTo>
+                  <a:lnTo>
+                    <a:pt x="7660515" y="0"/>
+                  </a:lnTo>
+                </a:path>
+              </a:pathLst>
+            </a:custGeom>
+            <a:ln w="6775" cap="flat">
+              <a:solidFill>
+                <a:srgbClr val="EBEBEB">
+                  <a:alpha val="100000"/>
+                </a:srgbClr>
+              </a:solidFill>
+              <a:prstDash val="solid"/>
+              <a:round/>
+            </a:ln>
+          </p:spPr>
+          <p:txBody>
+            <a:bodyPr/>
+            <a:lstStyle/>
+            <a:p/>
+          </p:txBody>
+        </p:sp>
+        <p:sp>
+          <p:nvSpPr>
+            <p:cNvPr id="40" name="pl40"/>
+            <p:cNvSpPr/>
+            <p:nvPr/>
+          </p:nvSpPr>
+          <p:spPr>
+            <a:xfrm>
+              <a:off x="887106" y="5144686"/>
+              <a:ext cx="7660515" cy="0"/>
+            </a:xfrm>
+            <a:custGeom>
+              <a:avLst/>
+              <a:pathLst>
+                <a:path w="7660515" h="0">
+                  <a:moveTo>
+                    <a:pt x="0" y="0"/>
+                  </a:moveTo>
+                  <a:lnTo>
+                    <a:pt x="7660515" y="0"/>
+                  </a:lnTo>
+                  <a:lnTo>
+                    <a:pt x="7660515" y="0"/>
+                  </a:lnTo>
+                </a:path>
+              </a:pathLst>
+            </a:custGeom>
+            <a:ln w="6775" cap="flat">
+              <a:solidFill>
+                <a:srgbClr val="EBEBEB">
+                  <a:alpha val="100000"/>
+                </a:srgbClr>
+              </a:solidFill>
+              <a:prstDash val="solid"/>
+              <a:round/>
+            </a:ln>
+          </p:spPr>
+          <p:txBody>
+            <a:bodyPr/>
+            <a:lstStyle/>
+            <a:p/>
+          </p:txBody>
+        </p:sp>
+        <p:sp>
+          <p:nvSpPr>
+            <p:cNvPr id="41" name="pl41"/>
+            <p:cNvSpPr/>
+            <p:nvPr/>
+          </p:nvSpPr>
+          <p:spPr>
+            <a:xfrm>
+              <a:off x="887106" y="4845352"/>
+              <a:ext cx="7660515" cy="0"/>
+            </a:xfrm>
+            <a:custGeom>
+              <a:avLst/>
+              <a:pathLst>
+                <a:path w="7660515" h="0">
+                  <a:moveTo>
+                    <a:pt x="0" y="0"/>
+                  </a:moveTo>
+                  <a:lnTo>
+                    <a:pt x="7660515" y="0"/>
+                  </a:lnTo>
+                  <a:lnTo>
+                    <a:pt x="7660515" y="0"/>
+                  </a:lnTo>
+                </a:path>
+              </a:pathLst>
+            </a:custGeom>
+            <a:ln w="6775" cap="flat">
+              <a:solidFill>
+                <a:srgbClr val="EBEBEB">
+                  <a:alpha val="100000"/>
+                </a:srgbClr>
+              </a:solidFill>
+              <a:prstDash val="solid"/>
+              <a:round/>
+            </a:ln>
+          </p:spPr>
+          <p:txBody>
+            <a:bodyPr/>
+            <a:lstStyle/>
+            <a:p/>
+          </p:txBody>
+        </p:sp>
+        <p:sp>
+          <p:nvSpPr>
+            <p:cNvPr id="42" name="pl42"/>
+            <p:cNvSpPr/>
+            <p:nvPr/>
+          </p:nvSpPr>
+          <p:spPr>
+            <a:xfrm>
+              <a:off x="887106" y="4546018"/>
+              <a:ext cx="7660515" cy="0"/>
+            </a:xfrm>
+            <a:custGeom>
+              <a:avLst/>
+              <a:pathLst>
+                <a:path w="7660515" h="0">
+                  <a:moveTo>
+                    <a:pt x="0" y="0"/>
+                  </a:moveTo>
+                  <a:lnTo>
+                    <a:pt x="7660515" y="0"/>
+                  </a:lnTo>
+                  <a:lnTo>
+                    <a:pt x="7660515" y="0"/>
+                  </a:lnTo>
+                </a:path>
+              </a:pathLst>
+            </a:custGeom>
+            <a:ln w="6775" cap="flat">
+              <a:solidFill>
+                <a:srgbClr val="EBEBEB">
+                  <a:alpha val="100000"/>
+                </a:srgbClr>
+              </a:solidFill>
+              <a:prstDash val="solid"/>
+              <a:round/>
+            </a:ln>
+          </p:spPr>
+          <p:txBody>
+            <a:bodyPr/>
+            <a:lstStyle/>
+            <a:p/>
+          </p:txBody>
+        </p:sp>
+        <p:sp>
+          <p:nvSpPr>
+            <p:cNvPr id="43" name="pl43"/>
+            <p:cNvSpPr/>
+            <p:nvPr/>
+          </p:nvSpPr>
+          <p:spPr>
+            <a:xfrm>
+              <a:off x="1636763" y="4336484"/>
+              <a:ext cx="0" cy="1317069"/>
+            </a:xfrm>
+            <a:custGeom>
+              <a:avLst/>
+              <a:pathLst>
+                <a:path w="0" h="1317069">
+                  <a:moveTo>
+                    <a:pt x="0" y="1317069"/>
+                  </a:moveTo>
+                  <a:lnTo>
+                    <a:pt x="0" y="0"/>
+                  </a:lnTo>
+                  <a:lnTo>
+                    <a:pt x="0" y="0"/>
+                  </a:lnTo>
+                </a:path>
+              </a:pathLst>
+            </a:custGeom>
+            <a:ln w="6775" cap="flat">
+              <a:solidFill>
+                <a:srgbClr val="EBEBEB">
+                  <a:alpha val="100000"/>
+                </a:srgbClr>
+              </a:solidFill>
+              <a:prstDash val="solid"/>
+              <a:round/>
+            </a:ln>
+          </p:spPr>
+          <p:txBody>
+            <a:bodyPr/>
+            <a:lstStyle/>
+            <a:p/>
+          </p:txBody>
+        </p:sp>
+        <p:sp>
+          <p:nvSpPr>
+            <p:cNvPr id="44" name="pl44"/>
+            <p:cNvSpPr/>
+            <p:nvPr/>
+          </p:nvSpPr>
+          <p:spPr>
+            <a:xfrm>
+              <a:off x="2482050" y="4336484"/>
+              <a:ext cx="0" cy="1317069"/>
+            </a:xfrm>
+            <a:custGeom>
+              <a:avLst/>
+              <a:pathLst>
+                <a:path w="0" h="1317069">
+                  <a:moveTo>
+                    <a:pt x="0" y="1317069"/>
+                  </a:moveTo>
+                  <a:lnTo>
+                    <a:pt x="0" y="0"/>
+                  </a:lnTo>
+                  <a:lnTo>
+                    <a:pt x="0" y="0"/>
+                  </a:lnTo>
+                </a:path>
+              </a:pathLst>
+            </a:custGeom>
+            <a:ln w="6775" cap="flat">
+              <a:solidFill>
+                <a:srgbClr val="EBEBEB">
+                  <a:alpha val="100000"/>
+                </a:srgbClr>
+              </a:solidFill>
+              <a:prstDash val="solid"/>
+              <a:round/>
+            </a:ln>
+          </p:spPr>
+          <p:txBody>
+            <a:bodyPr/>
+            <a:lstStyle/>
+            <a:p/>
+          </p:txBody>
+        </p:sp>
+        <p:sp>
+          <p:nvSpPr>
+            <p:cNvPr id="45" name="pl45"/>
+            <p:cNvSpPr/>
+            <p:nvPr/>
+          </p:nvSpPr>
+          <p:spPr>
+            <a:xfrm>
+              <a:off x="3327336" y="4336484"/>
+              <a:ext cx="0" cy="1317069"/>
+            </a:xfrm>
+            <a:custGeom>
+              <a:avLst/>
+              <a:pathLst>
+                <a:path w="0" h="1317069">
+                  <a:moveTo>
+                    <a:pt x="0" y="1317069"/>
+                  </a:moveTo>
+                  <a:lnTo>
+                    <a:pt x="0" y="0"/>
+                  </a:lnTo>
+                  <a:lnTo>
+                    <a:pt x="0" y="0"/>
+                  </a:lnTo>
+                </a:path>
+              </a:pathLst>
+            </a:custGeom>
+            <a:ln w="6775" cap="flat">
+              <a:solidFill>
+                <a:srgbClr val="EBEBEB">
+                  <a:alpha val="100000"/>
+                </a:srgbClr>
+              </a:solidFill>
+              <a:prstDash val="solid"/>
+              <a:round/>
+            </a:ln>
+          </p:spPr>
+          <p:txBody>
+            <a:bodyPr/>
+            <a:lstStyle/>
+            <a:p/>
+          </p:txBody>
+        </p:sp>
+        <p:sp>
+          <p:nvSpPr>
+            <p:cNvPr id="46" name="pl46"/>
+            <p:cNvSpPr/>
+            <p:nvPr/>
+          </p:nvSpPr>
+          <p:spPr>
+            <a:xfrm>
+              <a:off x="4172622" y="4336484"/>
+              <a:ext cx="0" cy="1317069"/>
+            </a:xfrm>
+            <a:custGeom>
+              <a:avLst/>
+              <a:pathLst>
+                <a:path w="0" h="1317069">
+                  <a:moveTo>
+                    <a:pt x="0" y="1317069"/>
+                  </a:moveTo>
+                  <a:lnTo>
+                    <a:pt x="0" y="0"/>
+                  </a:lnTo>
+                  <a:lnTo>
+                    <a:pt x="0" y="0"/>
+                  </a:lnTo>
+                </a:path>
+              </a:pathLst>
+            </a:custGeom>
+            <a:ln w="6775" cap="flat">
+              <a:solidFill>
+                <a:srgbClr val="EBEBEB">
+                  <a:alpha val="100000"/>
+                </a:srgbClr>
+              </a:solidFill>
+              <a:prstDash val="solid"/>
+              <a:round/>
+            </a:ln>
+          </p:spPr>
+          <p:txBody>
+            <a:bodyPr/>
+            <a:lstStyle/>
+            <a:p/>
+          </p:txBody>
+        </p:sp>
+        <p:sp>
+          <p:nvSpPr>
+            <p:cNvPr id="47" name="pl47"/>
+            <p:cNvSpPr/>
+            <p:nvPr/>
+          </p:nvSpPr>
+          <p:spPr>
+            <a:xfrm>
+              <a:off x="5017909" y="4336484"/>
+              <a:ext cx="0" cy="1317069"/>
+            </a:xfrm>
+            <a:custGeom>
+              <a:avLst/>
+              <a:pathLst>
+                <a:path w="0" h="1317069">
+                  <a:moveTo>
+                    <a:pt x="0" y="1317069"/>
+                  </a:moveTo>
+                  <a:lnTo>
+                    <a:pt x="0" y="0"/>
+                  </a:lnTo>
+                  <a:lnTo>
+                    <a:pt x="0" y="0"/>
+                  </a:lnTo>
+                </a:path>
+              </a:pathLst>
+            </a:custGeom>
+            <a:ln w="6775" cap="flat">
+              <a:solidFill>
+                <a:srgbClr val="EBEBEB">
+                  <a:alpha val="100000"/>
+                </a:srgbClr>
+              </a:solidFill>
+              <a:prstDash val="solid"/>
+              <a:round/>
+            </a:ln>
+          </p:spPr>
+          <p:txBody>
+            <a:bodyPr/>
+            <a:lstStyle/>
+            <a:p/>
+          </p:txBody>
+        </p:sp>
+        <p:sp>
+          <p:nvSpPr>
+            <p:cNvPr id="48" name="pl48"/>
+            <p:cNvSpPr/>
+            <p:nvPr/>
+          </p:nvSpPr>
+          <p:spPr>
+            <a:xfrm>
+              <a:off x="5863195" y="4336484"/>
+              <a:ext cx="0" cy="1317069"/>
+            </a:xfrm>
+            <a:custGeom>
+              <a:avLst/>
+              <a:pathLst>
+                <a:path w="0" h="1317069">
+                  <a:moveTo>
+                    <a:pt x="0" y="1317069"/>
+                  </a:moveTo>
+                  <a:lnTo>
+                    <a:pt x="0" y="0"/>
+                  </a:lnTo>
+                  <a:lnTo>
+                    <a:pt x="0" y="0"/>
+                  </a:lnTo>
+                </a:path>
+              </a:pathLst>
+            </a:custGeom>
+            <a:ln w="6775" cap="flat">
+              <a:solidFill>
+                <a:srgbClr val="EBEBEB">
+                  <a:alpha val="100000"/>
+                </a:srgbClr>
+              </a:solidFill>
+              <a:prstDash val="solid"/>
+              <a:round/>
+            </a:ln>
+          </p:spPr>
+          <p:txBody>
+            <a:bodyPr/>
+            <a:lstStyle/>
+            <a:p/>
+          </p:txBody>
+        </p:sp>
+        <p:sp>
+          <p:nvSpPr>
+            <p:cNvPr id="49" name="pl49"/>
+            <p:cNvSpPr/>
+            <p:nvPr/>
+          </p:nvSpPr>
+          <p:spPr>
+            <a:xfrm>
+              <a:off x="6708482" y="4336484"/>
+              <a:ext cx="0" cy="1317069"/>
+            </a:xfrm>
+            <a:custGeom>
+              <a:avLst/>
+              <a:pathLst>
+                <a:path w="0" h="1317069">
+                  <a:moveTo>
+                    <a:pt x="0" y="1317069"/>
+                  </a:moveTo>
+                  <a:lnTo>
+                    <a:pt x="0" y="0"/>
+                  </a:lnTo>
+                  <a:lnTo>
+                    <a:pt x="0" y="0"/>
+                  </a:lnTo>
+                </a:path>
+              </a:pathLst>
+            </a:custGeom>
+            <a:ln w="6775" cap="flat">
+              <a:solidFill>
+                <a:srgbClr val="EBEBEB">
+                  <a:alpha val="100000"/>
+                </a:srgbClr>
+              </a:solidFill>
+              <a:prstDash val="solid"/>
+              <a:round/>
+            </a:ln>
+          </p:spPr>
+          <p:txBody>
+            <a:bodyPr/>
+            <a:lstStyle/>
+            <a:p/>
+          </p:txBody>
+        </p:sp>
+        <p:sp>
+          <p:nvSpPr>
+            <p:cNvPr id="50" name="pl50"/>
+            <p:cNvSpPr/>
+            <p:nvPr/>
+          </p:nvSpPr>
+          <p:spPr>
+            <a:xfrm>
+              <a:off x="7553768" y="4336484"/>
+              <a:ext cx="0" cy="1317069"/>
+            </a:xfrm>
+            <a:custGeom>
+              <a:avLst/>
+              <a:pathLst>
+                <a:path w="0" h="1317069">
+                  <a:moveTo>
+                    <a:pt x="0" y="1317069"/>
+                  </a:moveTo>
+                  <a:lnTo>
+                    <a:pt x="0" y="0"/>
+                  </a:lnTo>
+                  <a:lnTo>
+                    <a:pt x="0" y="0"/>
+                  </a:lnTo>
+                </a:path>
+              </a:pathLst>
+            </a:custGeom>
+            <a:ln w="6775" cap="flat">
+              <a:solidFill>
+                <a:srgbClr val="EBEBEB">
+                  <a:alpha val="100000"/>
+                </a:srgbClr>
+              </a:solidFill>
+              <a:prstDash val="solid"/>
+              <a:round/>
+            </a:ln>
+          </p:spPr>
+          <p:txBody>
+            <a:bodyPr/>
+            <a:lstStyle/>
+            <a:p/>
+          </p:txBody>
+        </p:sp>
+        <p:sp>
+          <p:nvSpPr>
+            <p:cNvPr id="51" name="pl51"/>
+            <p:cNvSpPr/>
+            <p:nvPr/>
+          </p:nvSpPr>
+          <p:spPr>
+            <a:xfrm>
+              <a:off x="8399054" y="4336484"/>
+              <a:ext cx="0" cy="1317069"/>
+            </a:xfrm>
+            <a:custGeom>
+              <a:avLst/>
+              <a:pathLst>
+                <a:path w="0" h="1317069">
+                  <a:moveTo>
+                    <a:pt x="0" y="1317069"/>
+                  </a:moveTo>
+                  <a:lnTo>
+                    <a:pt x="0" y="0"/>
+                  </a:lnTo>
+                  <a:lnTo>
+                    <a:pt x="0" y="0"/>
+                  </a:lnTo>
+                </a:path>
+              </a:pathLst>
+            </a:custGeom>
+            <a:ln w="6775" cap="flat">
+              <a:solidFill>
+                <a:srgbClr val="EBEBEB">
+                  <a:alpha val="100000"/>
+                </a:srgbClr>
+              </a:solidFill>
+              <a:prstDash val="solid"/>
+              <a:round/>
+            </a:ln>
+          </p:spPr>
+          <p:txBody>
+            <a:bodyPr/>
+            <a:lstStyle/>
+            <a:p/>
+          </p:txBody>
+        </p:sp>
+        <p:sp>
+          <p:nvSpPr>
+            <p:cNvPr id="52" name="pl52"/>
+            <p:cNvSpPr/>
+            <p:nvPr/>
+          </p:nvSpPr>
+          <p:spPr>
+            <a:xfrm>
+              <a:off x="887106" y="5593686"/>
+              <a:ext cx="7660515" cy="0"/>
+            </a:xfrm>
+            <a:custGeom>
+              <a:avLst/>
+              <a:pathLst>
+                <a:path w="7660515" h="0">
+                  <a:moveTo>
+                    <a:pt x="0" y="0"/>
+                  </a:moveTo>
+                  <a:lnTo>
+                    <a:pt x="7660515" y="0"/>
+                  </a:lnTo>
+                  <a:lnTo>
+                    <a:pt x="7660515" y="0"/>
+                  </a:lnTo>
+                </a:path>
+              </a:pathLst>
+            </a:custGeom>
+            <a:ln w="13550" cap="flat">
+              <a:solidFill>
+                <a:srgbClr val="EBEBEB">
+                  <a:alpha val="100000"/>
+                </a:srgbClr>
+              </a:solidFill>
+              <a:prstDash val="solid"/>
+              <a:round/>
+            </a:ln>
+          </p:spPr>
+          <p:txBody>
+            <a:bodyPr/>
+            <a:lstStyle/>
+            <a:p/>
+          </p:txBody>
+        </p:sp>
+        <p:sp>
+          <p:nvSpPr>
+            <p:cNvPr id="53" name="pl53"/>
+            <p:cNvSpPr/>
+            <p:nvPr/>
+          </p:nvSpPr>
+          <p:spPr>
+            <a:xfrm>
+              <a:off x="887106" y="5294352"/>
+              <a:ext cx="7660515" cy="0"/>
+            </a:xfrm>
+            <a:custGeom>
+              <a:avLst/>
+              <a:pathLst>
+                <a:path w="7660515" h="0">
+                  <a:moveTo>
+                    <a:pt x="0" y="0"/>
+                  </a:moveTo>
+                  <a:lnTo>
+                    <a:pt x="7660515" y="0"/>
+                  </a:lnTo>
+                  <a:lnTo>
+                    <a:pt x="7660515" y="0"/>
+                  </a:lnTo>
+                </a:path>
+              </a:pathLst>
+            </a:custGeom>
+            <a:ln w="13550" cap="flat">
+              <a:solidFill>
+                <a:srgbClr val="EBEBEB">
+                  <a:alpha val="100000"/>
+                </a:srgbClr>
+              </a:solidFill>
+              <a:prstDash val="solid"/>
+              <a:round/>
+            </a:ln>
+          </p:spPr>
+          <p:txBody>
+            <a:bodyPr/>
+            <a:lstStyle/>
+            <a:p/>
+          </p:txBody>
+        </p:sp>
+        <p:sp>
+          <p:nvSpPr>
+            <p:cNvPr id="54" name="pl54"/>
+            <p:cNvSpPr/>
+            <p:nvPr/>
+          </p:nvSpPr>
+          <p:spPr>
+            <a:xfrm>
+              <a:off x="887106" y="4995019"/>
+              <a:ext cx="7660515" cy="0"/>
+            </a:xfrm>
+            <a:custGeom>
+              <a:avLst/>
+              <a:pathLst>
+                <a:path w="7660515" h="0">
+                  <a:moveTo>
+                    <a:pt x="0" y="0"/>
+                  </a:moveTo>
+                  <a:lnTo>
+                    <a:pt x="7660515" y="0"/>
+                  </a:lnTo>
+                  <a:lnTo>
+                    <a:pt x="7660515" y="0"/>
+                  </a:lnTo>
+                </a:path>
+              </a:pathLst>
+            </a:custGeom>
+            <a:ln w="13550" cap="flat">
+              <a:solidFill>
+                <a:srgbClr val="EBEBEB">
+                  <a:alpha val="100000"/>
+                </a:srgbClr>
+              </a:solidFill>
+              <a:prstDash val="solid"/>
+              <a:round/>
+            </a:ln>
+          </p:spPr>
+          <p:txBody>
+            <a:bodyPr/>
+            <a:lstStyle/>
+            <a:p/>
+          </p:txBody>
+        </p:sp>
+        <p:sp>
+          <p:nvSpPr>
+            <p:cNvPr id="55" name="pl55"/>
+            <p:cNvSpPr/>
+            <p:nvPr/>
+          </p:nvSpPr>
+          <p:spPr>
+            <a:xfrm>
+              <a:off x="887106" y="4695685"/>
+              <a:ext cx="7660515" cy="0"/>
+            </a:xfrm>
+            <a:custGeom>
+              <a:avLst/>
+              <a:pathLst>
+                <a:path w="7660515" h="0">
+                  <a:moveTo>
+                    <a:pt x="0" y="0"/>
+                  </a:moveTo>
+                  <a:lnTo>
+                    <a:pt x="7660515" y="0"/>
+                  </a:lnTo>
+                  <a:lnTo>
+                    <a:pt x="7660515" y="0"/>
+                  </a:lnTo>
+                </a:path>
+              </a:pathLst>
+            </a:custGeom>
+            <a:ln w="13550" cap="flat">
+              <a:solidFill>
+                <a:srgbClr val="EBEBEB">
+                  <a:alpha val="100000"/>
+                </a:srgbClr>
+              </a:solidFill>
+              <a:prstDash val="solid"/>
+              <a:round/>
+            </a:ln>
+          </p:spPr>
+          <p:txBody>
+            <a:bodyPr/>
+            <a:lstStyle/>
+            <a:p/>
+          </p:txBody>
+        </p:sp>
+        <p:sp>
+          <p:nvSpPr>
+            <p:cNvPr id="56" name="pl56"/>
+            <p:cNvSpPr/>
+            <p:nvPr/>
+          </p:nvSpPr>
+          <p:spPr>
+            <a:xfrm>
+              <a:off x="887106" y="4396351"/>
+              <a:ext cx="7660515" cy="0"/>
+            </a:xfrm>
+            <a:custGeom>
+              <a:avLst/>
+              <a:pathLst>
+                <a:path w="7660515" h="0">
+                  <a:moveTo>
+                    <a:pt x="0" y="0"/>
+                  </a:moveTo>
+                  <a:lnTo>
+                    <a:pt x="7660515" y="0"/>
+                  </a:lnTo>
+                  <a:lnTo>
+                    <a:pt x="7660515" y="0"/>
+                  </a:lnTo>
+                </a:path>
+              </a:pathLst>
+            </a:custGeom>
+            <a:ln w="13550" cap="flat">
+              <a:solidFill>
+                <a:srgbClr val="EBEBEB">
+                  <a:alpha val="100000"/>
+                </a:srgbClr>
+              </a:solidFill>
+              <a:prstDash val="solid"/>
+              <a:round/>
+            </a:ln>
+          </p:spPr>
+          <p:txBody>
+            <a:bodyPr/>
+            <a:lstStyle/>
+            <a:p/>
+          </p:txBody>
+        </p:sp>
+        <p:sp>
+          <p:nvSpPr>
+            <p:cNvPr id="57" name="pl57"/>
+            <p:cNvSpPr/>
+            <p:nvPr/>
+          </p:nvSpPr>
+          <p:spPr>
+            <a:xfrm>
+              <a:off x="1214120" y="4336484"/>
+              <a:ext cx="0" cy="1317069"/>
+            </a:xfrm>
+            <a:custGeom>
+              <a:avLst/>
+              <a:pathLst>
+                <a:path w="0" h="1317069">
+                  <a:moveTo>
+                    <a:pt x="0" y="1317069"/>
+                  </a:moveTo>
+                  <a:lnTo>
+                    <a:pt x="0" y="0"/>
+                  </a:lnTo>
+                  <a:lnTo>
+                    <a:pt x="0" y="0"/>
+                  </a:lnTo>
+                </a:path>
+              </a:pathLst>
+            </a:custGeom>
+            <a:ln w="13550" cap="flat">
+              <a:solidFill>
+                <a:srgbClr val="EBEBEB">
+                  <a:alpha val="100000"/>
+                </a:srgbClr>
+              </a:solidFill>
+              <a:prstDash val="solid"/>
+              <a:round/>
+            </a:ln>
+          </p:spPr>
+          <p:txBody>
+            <a:bodyPr/>
+            <a:lstStyle/>
+            <a:p/>
+          </p:txBody>
+        </p:sp>
+        <p:sp>
+          <p:nvSpPr>
+            <p:cNvPr id="58" name="pl58"/>
+            <p:cNvSpPr/>
+            <p:nvPr/>
+          </p:nvSpPr>
+          <p:spPr>
+            <a:xfrm>
+              <a:off x="2059406" y="4336484"/>
+              <a:ext cx="0" cy="1317069"/>
+            </a:xfrm>
+            <a:custGeom>
+              <a:avLst/>
+              <a:pathLst>
+                <a:path w="0" h="1317069">
+                  <a:moveTo>
+                    <a:pt x="0" y="1317069"/>
+                  </a:moveTo>
+                  <a:lnTo>
+                    <a:pt x="0" y="0"/>
+                  </a:lnTo>
+                  <a:lnTo>
+                    <a:pt x="0" y="0"/>
+                  </a:lnTo>
+                </a:path>
+              </a:pathLst>
+            </a:custGeom>
+            <a:ln w="13550" cap="flat">
+              <a:solidFill>
+                <a:srgbClr val="EBEBEB">
+                  <a:alpha val="100000"/>
+                </a:srgbClr>
+              </a:solidFill>
+              <a:prstDash val="solid"/>
+              <a:round/>
+            </a:ln>
+          </p:spPr>
+          <p:txBody>
+            <a:bodyPr/>
+            <a:lstStyle/>
+            <a:p/>
+          </p:txBody>
+        </p:sp>
+        <p:sp>
+          <p:nvSpPr>
+            <p:cNvPr id="59" name="pl59"/>
+            <p:cNvSpPr/>
+            <p:nvPr/>
+          </p:nvSpPr>
+          <p:spPr>
+            <a:xfrm>
+              <a:off x="2904693" y="4336484"/>
+              <a:ext cx="0" cy="1317069"/>
+            </a:xfrm>
+            <a:custGeom>
+              <a:avLst/>
+              <a:pathLst>
+                <a:path w="0" h="1317069">
+                  <a:moveTo>
+                    <a:pt x="0" y="1317069"/>
+                  </a:moveTo>
+                  <a:lnTo>
+                    <a:pt x="0" y="0"/>
+                  </a:lnTo>
+                  <a:lnTo>
+                    <a:pt x="0" y="0"/>
+                  </a:lnTo>
+                </a:path>
+              </a:pathLst>
+            </a:custGeom>
+            <a:ln w="13550" cap="flat">
+              <a:solidFill>
+                <a:srgbClr val="EBEBEB">
+                  <a:alpha val="100000"/>
+                </a:srgbClr>
+              </a:solidFill>
+              <a:prstDash val="solid"/>
+              <a:round/>
+            </a:ln>
+          </p:spPr>
+          <p:txBody>
+            <a:bodyPr/>
+            <a:lstStyle/>
+            <a:p/>
+          </p:txBody>
+        </p:sp>
+        <p:sp>
+          <p:nvSpPr>
+            <p:cNvPr id="60" name="pl60"/>
+            <p:cNvSpPr/>
+            <p:nvPr/>
+          </p:nvSpPr>
+          <p:spPr>
+            <a:xfrm>
+              <a:off x="3749979" y="4336484"/>
+              <a:ext cx="0" cy="1317069"/>
+            </a:xfrm>
+            <a:custGeom>
+              <a:avLst/>
+              <a:pathLst>
+                <a:path w="0" h="1317069">
+                  <a:moveTo>
+                    <a:pt x="0" y="1317069"/>
+                  </a:moveTo>
+                  <a:lnTo>
+                    <a:pt x="0" y="0"/>
+                  </a:lnTo>
+                  <a:lnTo>
+                    <a:pt x="0" y="0"/>
+                  </a:lnTo>
+                </a:path>
+              </a:pathLst>
+            </a:custGeom>
+            <a:ln w="13550" cap="flat">
+              <a:solidFill>
+                <a:srgbClr val="EBEBEB">
+                  <a:alpha val="100000"/>
+                </a:srgbClr>
+              </a:solidFill>
+              <a:prstDash val="solid"/>
+              <a:round/>
+            </a:ln>
+          </p:spPr>
+          <p:txBody>
+            <a:bodyPr/>
+            <a:lstStyle/>
+            <a:p/>
+          </p:txBody>
+        </p:sp>
+        <p:sp>
+          <p:nvSpPr>
+            <p:cNvPr id="61" name="pl61"/>
+            <p:cNvSpPr/>
+            <p:nvPr/>
+          </p:nvSpPr>
+          <p:spPr>
+            <a:xfrm>
+              <a:off x="4595266" y="4336484"/>
+              <a:ext cx="0" cy="1317069"/>
+            </a:xfrm>
+            <a:custGeom>
+              <a:avLst/>
+              <a:pathLst>
+                <a:path w="0" h="1317069">
+                  <a:moveTo>
+                    <a:pt x="0" y="1317069"/>
+                  </a:moveTo>
+                  <a:lnTo>
+                    <a:pt x="0" y="0"/>
+                  </a:lnTo>
+                  <a:lnTo>
+                    <a:pt x="0" y="0"/>
+                  </a:lnTo>
+                </a:path>
+              </a:pathLst>
+            </a:custGeom>
+            <a:ln w="13550" cap="flat">
+              <a:solidFill>
+                <a:srgbClr val="EBEBEB">
+                  <a:alpha val="100000"/>
+                </a:srgbClr>
+              </a:solidFill>
+              <a:prstDash val="solid"/>
+              <a:round/>
+            </a:ln>
+          </p:spPr>
+          <p:txBody>
+            <a:bodyPr/>
+            <a:lstStyle/>
+            <a:p/>
+          </p:txBody>
+        </p:sp>
+        <p:sp>
+          <p:nvSpPr>
+            <p:cNvPr id="62" name="pl62"/>
+            <p:cNvSpPr/>
+            <p:nvPr/>
+          </p:nvSpPr>
+          <p:spPr>
+            <a:xfrm>
+              <a:off x="5440552" y="4336484"/>
+              <a:ext cx="0" cy="1317069"/>
+            </a:xfrm>
+            <a:custGeom>
+              <a:avLst/>
+              <a:pathLst>
+                <a:path w="0" h="1317069">
+                  <a:moveTo>
+                    <a:pt x="0" y="1317069"/>
+                  </a:moveTo>
+                  <a:lnTo>
+                    <a:pt x="0" y="0"/>
+                  </a:lnTo>
+                  <a:lnTo>
+                    <a:pt x="0" y="0"/>
+                  </a:lnTo>
+                </a:path>
+              </a:pathLst>
+            </a:custGeom>
+            <a:ln w="13550" cap="flat">
+              <a:solidFill>
+                <a:srgbClr val="EBEBEB">
+                  <a:alpha val="100000"/>
+                </a:srgbClr>
+              </a:solidFill>
+              <a:prstDash val="solid"/>
+              <a:round/>
+            </a:ln>
+          </p:spPr>
+          <p:txBody>
+            <a:bodyPr/>
+            <a:lstStyle/>
+            <a:p/>
+          </p:txBody>
+        </p:sp>
+        <p:sp>
+          <p:nvSpPr>
+            <p:cNvPr id="63" name="pl63"/>
+            <p:cNvSpPr/>
+            <p:nvPr/>
+          </p:nvSpPr>
+          <p:spPr>
+            <a:xfrm>
+              <a:off x="6285838" y="4336484"/>
+              <a:ext cx="0" cy="1317069"/>
+            </a:xfrm>
+            <a:custGeom>
+              <a:avLst/>
+              <a:pathLst>
+                <a:path w="0" h="1317069">
+                  <a:moveTo>
+                    <a:pt x="0" y="1317069"/>
+                  </a:moveTo>
+                  <a:lnTo>
+                    <a:pt x="0" y="0"/>
+                  </a:lnTo>
+                  <a:lnTo>
+                    <a:pt x="0" y="0"/>
+                  </a:lnTo>
+                </a:path>
+              </a:pathLst>
+            </a:custGeom>
+            <a:ln w="13550" cap="flat">
+              <a:solidFill>
+                <a:srgbClr val="EBEBEB">
+                  <a:alpha val="100000"/>
+                </a:srgbClr>
+              </a:solidFill>
+              <a:prstDash val="solid"/>
+              <a:round/>
+            </a:ln>
+          </p:spPr>
+          <p:txBody>
+            <a:bodyPr/>
+            <a:lstStyle/>
+            <a:p/>
+          </p:txBody>
+        </p:sp>
+        <p:sp>
+          <p:nvSpPr>
+            <p:cNvPr id="64" name="pl64"/>
+            <p:cNvSpPr/>
+            <p:nvPr/>
+          </p:nvSpPr>
+          <p:spPr>
+            <a:xfrm>
+              <a:off x="7131125" y="4336484"/>
+              <a:ext cx="0" cy="1317069"/>
+            </a:xfrm>
+            <a:custGeom>
+              <a:avLst/>
+              <a:pathLst>
+                <a:path w="0" h="1317069">
+                  <a:moveTo>
+                    <a:pt x="0" y="1317069"/>
+                  </a:moveTo>
+                  <a:lnTo>
+                    <a:pt x="0" y="0"/>
+                  </a:lnTo>
+                  <a:lnTo>
+                    <a:pt x="0" y="0"/>
+                  </a:lnTo>
+                </a:path>
+              </a:pathLst>
+            </a:custGeom>
+            <a:ln w="13550" cap="flat">
+              <a:solidFill>
+                <a:srgbClr val="EBEBEB">
+                  <a:alpha val="100000"/>
+                </a:srgbClr>
+              </a:solidFill>
+              <a:prstDash val="solid"/>
+              <a:round/>
+            </a:ln>
+          </p:spPr>
+          <p:txBody>
+            <a:bodyPr/>
+            <a:lstStyle/>
+            <a:p/>
+          </p:txBody>
+        </p:sp>
+        <p:sp>
+          <p:nvSpPr>
+            <p:cNvPr id="65" name="pl65"/>
+            <p:cNvSpPr/>
+            <p:nvPr/>
+          </p:nvSpPr>
+          <p:spPr>
+            <a:xfrm>
+              <a:off x="7976411" y="4336484"/>
+              <a:ext cx="0" cy="1317069"/>
+            </a:xfrm>
+            <a:custGeom>
+              <a:avLst/>
+              <a:pathLst>
+                <a:path w="0" h="1317069">
+                  <a:moveTo>
+                    <a:pt x="0" y="1317069"/>
+                  </a:moveTo>
+                  <a:lnTo>
+                    <a:pt x="0" y="0"/>
+                  </a:lnTo>
+                  <a:lnTo>
+                    <a:pt x="0" y="0"/>
+                  </a:lnTo>
+                </a:path>
+              </a:pathLst>
+            </a:custGeom>
+            <a:ln w="13550" cap="flat">
+              <a:solidFill>
+                <a:srgbClr val="EBEBEB">
+                  <a:alpha val="100000"/>
+                </a:srgbClr>
+              </a:solidFill>
+              <a:prstDash val="solid"/>
+              <a:round/>
+            </a:ln>
+          </p:spPr>
+          <p:txBody>
+            <a:bodyPr/>
+            <a:lstStyle/>
+            <a:p/>
+          </p:txBody>
+        </p:sp>
+        <p:sp>
+          <p:nvSpPr>
+            <p:cNvPr id="66" name="pg66"/>
+            <p:cNvSpPr/>
+            <p:nvPr/>
+          </p:nvSpPr>
+          <p:spPr>
+            <a:xfrm>
+              <a:off x="1235312" y="4336484"/>
+              <a:ext cx="6964104" cy="1230966"/>
+            </a:xfrm>
+            <a:custGeom>
+              <a:avLst/>
+              <a:pathLst>
+                <a:path w="6964104" h="1230966">
+                  <a:moveTo>
+                    <a:pt x="1228112" y="0"/>
+                  </a:moveTo>
+                  <a:lnTo>
+                    <a:pt x="1266200" y="32231"/>
+                  </a:lnTo>
+                  <a:lnTo>
+                    <a:pt x="1336545" y="89000"/>
+                  </a:lnTo>
+                  <a:lnTo>
+                    <a:pt x="1406889" y="143139"/>
+                  </a:lnTo>
+                  <a:lnTo>
+                    <a:pt x="1477234" y="194768"/>
+                  </a:lnTo>
+                  <a:lnTo>
+                    <a:pt x="1547578" y="244004"/>
+                  </a:lnTo>
+                  <a:lnTo>
+                    <a:pt x="1617923" y="290959"/>
+                  </a:lnTo>
+                  <a:lnTo>
+                    <a:pt x="1688267" y="335738"/>
+                  </a:lnTo>
+                  <a:lnTo>
+                    <a:pt x="1758612" y="378441"/>
+                  </a:lnTo>
+                  <a:lnTo>
+                    <a:pt x="1828956" y="419166"/>
+                  </a:lnTo>
+                  <a:lnTo>
+                    <a:pt x="1899301" y="458003"/>
+                  </a:lnTo>
+                  <a:lnTo>
+                    <a:pt x="1969645" y="495041"/>
+                  </a:lnTo>
+                  <a:lnTo>
+                    <a:pt x="2039990" y="530361"/>
+                  </a:lnTo>
+                  <a:lnTo>
+                    <a:pt x="2110334" y="564046"/>
+                  </a:lnTo>
+                  <a:lnTo>
+                    <a:pt x="2180679" y="596169"/>
+                  </a:lnTo>
+                  <a:lnTo>
+                    <a:pt x="2251023" y="626803"/>
+                  </a:lnTo>
+                  <a:lnTo>
+                    <a:pt x="2321368" y="656018"/>
+                  </a:lnTo>
+                  <a:lnTo>
+                    <a:pt x="2391712" y="683878"/>
+                  </a:lnTo>
+                  <a:lnTo>
+                    <a:pt x="2462057" y="710448"/>
+                  </a:lnTo>
+                  <a:lnTo>
+                    <a:pt x="2532401" y="735786"/>
+                  </a:lnTo>
+                  <a:lnTo>
+                    <a:pt x="2602746" y="759950"/>
+                  </a:lnTo>
+                  <a:lnTo>
+                    <a:pt x="2673090" y="782995"/>
+                  </a:lnTo>
+                  <a:lnTo>
+                    <a:pt x="2743435" y="804971"/>
+                  </a:lnTo>
+                  <a:lnTo>
+                    <a:pt x="2813779" y="825929"/>
+                  </a:lnTo>
+                  <a:lnTo>
+                    <a:pt x="2884124" y="845915"/>
+                  </a:lnTo>
+                  <a:lnTo>
+                    <a:pt x="2954468" y="864976"/>
+                  </a:lnTo>
+                  <a:lnTo>
+                    <a:pt x="3024813" y="883153"/>
+                  </a:lnTo>
+                  <a:lnTo>
+                    <a:pt x="3095157" y="900487"/>
+                  </a:lnTo>
+                  <a:lnTo>
+                    <a:pt x="3165502" y="917018"/>
+                  </a:lnTo>
+                  <a:lnTo>
+                    <a:pt x="3235846" y="932784"/>
+                  </a:lnTo>
+                  <a:lnTo>
+                    <a:pt x="3306191" y="947818"/>
+                  </a:lnTo>
+                  <a:lnTo>
+                    <a:pt x="3376535" y="960272"/>
+                  </a:lnTo>
+                  <a:lnTo>
+                    <a:pt x="3446880" y="968044"/>
+                  </a:lnTo>
+                  <a:lnTo>
+                    <a:pt x="3517224" y="975612"/>
+                  </a:lnTo>
+                  <a:lnTo>
+                    <a:pt x="3587569" y="982982"/>
+                  </a:lnTo>
+                  <a:lnTo>
+                    <a:pt x="3657913" y="990159"/>
+                  </a:lnTo>
+                  <a:lnTo>
+                    <a:pt x="3728257" y="997149"/>
+                  </a:lnTo>
+                  <a:lnTo>
+                    <a:pt x="3798602" y="1003955"/>
+                  </a:lnTo>
+                  <a:lnTo>
+                    <a:pt x="3868946" y="1010583"/>
+                  </a:lnTo>
+                  <a:lnTo>
+                    <a:pt x="3939291" y="1017038"/>
+                  </a:lnTo>
+                  <a:lnTo>
+                    <a:pt x="4009635" y="1023324"/>
+                  </a:lnTo>
+                  <a:lnTo>
+                    <a:pt x="4079980" y="1029445"/>
+                  </a:lnTo>
+                  <a:lnTo>
+                    <a:pt x="4150324" y="1035406"/>
+                  </a:lnTo>
+                  <a:lnTo>
+                    <a:pt x="4220669" y="1041211"/>
+                  </a:lnTo>
+                  <a:lnTo>
+                    <a:pt x="4291013" y="1046865"/>
+                  </a:lnTo>
+                  <a:lnTo>
+                    <a:pt x="4361358" y="1052370"/>
+                  </a:lnTo>
+                  <a:lnTo>
+                    <a:pt x="4431702" y="1057731"/>
+                  </a:lnTo>
+                  <a:lnTo>
+                    <a:pt x="4502047" y="1062952"/>
+                  </a:lnTo>
+                  <a:lnTo>
+                    <a:pt x="4572391" y="1068036"/>
+                  </a:lnTo>
+                  <a:lnTo>
+                    <a:pt x="4642736" y="1072987"/>
+                  </a:lnTo>
+                  <a:lnTo>
+                    <a:pt x="4713080" y="1077808"/>
+                  </a:lnTo>
+                  <a:lnTo>
+                    <a:pt x="4783425" y="1082504"/>
+                  </a:lnTo>
+                  <a:lnTo>
+                    <a:pt x="4853769" y="1087076"/>
+                  </a:lnTo>
+                  <a:lnTo>
+                    <a:pt x="4924114" y="1091529"/>
+                  </a:lnTo>
+                  <a:lnTo>
+                    <a:pt x="4994458" y="1095865"/>
+                  </a:lnTo>
+                  <a:lnTo>
+                    <a:pt x="5064803" y="1100088"/>
+                  </a:lnTo>
+                  <a:lnTo>
+                    <a:pt x="5135147" y="1104200"/>
+                  </a:lnTo>
+                  <a:lnTo>
+                    <a:pt x="5205492" y="1108204"/>
+                  </a:lnTo>
+                  <a:lnTo>
+                    <a:pt x="5275836" y="1112104"/>
+                  </a:lnTo>
+                  <a:lnTo>
+                    <a:pt x="5346181" y="1115902"/>
+                  </a:lnTo>
+                  <a:lnTo>
+                    <a:pt x="5416525" y="1119600"/>
+                  </a:lnTo>
+                  <a:lnTo>
+                    <a:pt x="5486870" y="1123201"/>
+                  </a:lnTo>
+                  <a:lnTo>
+                    <a:pt x="5557214" y="1126709"/>
+                  </a:lnTo>
+                  <a:lnTo>
+                    <a:pt x="5627559" y="1130124"/>
+                  </a:lnTo>
+                  <a:lnTo>
+                    <a:pt x="5697903" y="1133450"/>
+                  </a:lnTo>
+                  <a:lnTo>
+                    <a:pt x="5768248" y="1136689"/>
+                  </a:lnTo>
+                  <a:lnTo>
+                    <a:pt x="5838592" y="1139843"/>
+                  </a:lnTo>
+                  <a:lnTo>
+                    <a:pt x="5908937" y="1142915"/>
+                  </a:lnTo>
+                  <a:lnTo>
+                    <a:pt x="5979281" y="1145906"/>
+                  </a:lnTo>
+                  <a:lnTo>
+                    <a:pt x="6049626" y="1148819"/>
+                  </a:lnTo>
+                  <a:lnTo>
+                    <a:pt x="6119970" y="1151656"/>
+                  </a:lnTo>
+                  <a:lnTo>
+                    <a:pt x="6190315" y="1154418"/>
+                  </a:lnTo>
+                  <a:lnTo>
+                    <a:pt x="6260659" y="1157108"/>
+                  </a:lnTo>
+                  <a:lnTo>
+                    <a:pt x="6331004" y="1159728"/>
+                  </a:lnTo>
+                  <a:lnTo>
+                    <a:pt x="6401348" y="1162279"/>
+                  </a:lnTo>
+                  <a:lnTo>
+                    <a:pt x="6471693" y="1164764"/>
+                  </a:lnTo>
+                  <a:lnTo>
+                    <a:pt x="6542037" y="1167183"/>
+                  </a:lnTo>
+                  <a:lnTo>
+                    <a:pt x="6612382" y="1169539"/>
+                  </a:lnTo>
+                  <a:lnTo>
+                    <a:pt x="6682726" y="1171834"/>
+                  </a:lnTo>
+                  <a:lnTo>
+                    <a:pt x="6753071" y="1174068"/>
+                  </a:lnTo>
+                  <a:lnTo>
+                    <a:pt x="6823415" y="1176244"/>
+                  </a:lnTo>
+                  <a:lnTo>
+                    <a:pt x="6893760" y="1178363"/>
+                  </a:lnTo>
+                  <a:lnTo>
+                    <a:pt x="6964104" y="1180426"/>
+                  </a:lnTo>
+                  <a:lnTo>
+                    <a:pt x="6964104" y="1230966"/>
+                  </a:lnTo>
+                  <a:lnTo>
+                    <a:pt x="6893760" y="1229691"/>
+                  </a:lnTo>
+                  <a:lnTo>
+                    <a:pt x="6823415" y="1228355"/>
+                  </a:lnTo>
+                  <a:lnTo>
+                    <a:pt x="6753071" y="1226953"/>
+                  </a:lnTo>
+                  <a:lnTo>
+                    <a:pt x="6682726" y="1225483"/>
+                  </a:lnTo>
+                  <a:lnTo>
+                    <a:pt x="6612382" y="1223941"/>
+                  </a:lnTo>
+                  <a:lnTo>
+                    <a:pt x="6542037" y="1222325"/>
+                  </a:lnTo>
+                  <a:lnTo>
+                    <a:pt x="6471693" y="1220630"/>
+                  </a:lnTo>
+                  <a:lnTo>
+                    <a:pt x="6401348" y="1218853"/>
+                  </a:lnTo>
+                  <a:lnTo>
+                    <a:pt x="6331004" y="1216990"/>
+                  </a:lnTo>
+                  <a:lnTo>
+                    <a:pt x="6260659" y="1215035"/>
+                  </a:lnTo>
+                  <a:lnTo>
+                    <a:pt x="6190315" y="1212986"/>
+                  </a:lnTo>
+                  <a:lnTo>
+                    <a:pt x="6119970" y="1210838"/>
+                  </a:lnTo>
+                  <a:lnTo>
+                    <a:pt x="6049626" y="1208585"/>
+                  </a:lnTo>
+                  <a:lnTo>
+                    <a:pt x="5979281" y="1206222"/>
+                  </a:lnTo>
+                  <a:lnTo>
+                    <a:pt x="5908937" y="1203745"/>
+                  </a:lnTo>
+                  <a:lnTo>
+                    <a:pt x="5838592" y="1201147"/>
+                  </a:lnTo>
+                  <a:lnTo>
+                    <a:pt x="5768248" y="1198423"/>
+                  </a:lnTo>
+                  <a:lnTo>
+                    <a:pt x="5697903" y="1195566"/>
+                  </a:lnTo>
+                  <a:lnTo>
+                    <a:pt x="5627559" y="1192571"/>
+                  </a:lnTo>
+                  <a:lnTo>
+                    <a:pt x="5557214" y="1189431"/>
+                  </a:lnTo>
+                  <a:lnTo>
+                    <a:pt x="5486870" y="1186137"/>
+                  </a:lnTo>
+                  <a:lnTo>
+                    <a:pt x="5416525" y="1182684"/>
+                  </a:lnTo>
+                  <a:lnTo>
+                    <a:pt x="5346181" y="1179063"/>
+                  </a:lnTo>
+                  <a:lnTo>
+                    <a:pt x="5275836" y="1175265"/>
+                  </a:lnTo>
+                  <a:lnTo>
+                    <a:pt x="5205492" y="1171284"/>
+                  </a:lnTo>
+                  <a:lnTo>
+                    <a:pt x="5135147" y="1167108"/>
+                  </a:lnTo>
+                  <a:lnTo>
+                    <a:pt x="5064803" y="1162730"/>
+                  </a:lnTo>
+                  <a:lnTo>
+                    <a:pt x="4994458" y="1158140"/>
+                  </a:lnTo>
+                  <a:lnTo>
+                    <a:pt x="4924114" y="1153326"/>
+                  </a:lnTo>
+                  <a:lnTo>
+                    <a:pt x="4853769" y="1148278"/>
+                  </a:lnTo>
+                  <a:lnTo>
+                    <a:pt x="4783425" y="1142984"/>
+                  </a:lnTo>
+                  <a:lnTo>
+                    <a:pt x="4713080" y="1137434"/>
+                  </a:lnTo>
+                  <a:lnTo>
+                    <a:pt x="4642736" y="1131614"/>
+                  </a:lnTo>
+                  <a:lnTo>
+                    <a:pt x="4572391" y="1125511"/>
+                  </a:lnTo>
+                  <a:lnTo>
+                    <a:pt x="4502047" y="1119111"/>
+                  </a:lnTo>
+                  <a:lnTo>
+                    <a:pt x="4431702" y="1112401"/>
+                  </a:lnTo>
+                  <a:lnTo>
+                    <a:pt x="4361358" y="1105364"/>
+                  </a:lnTo>
+                  <a:lnTo>
+                    <a:pt x="4291013" y="1097986"/>
+                  </a:lnTo>
+                  <a:lnTo>
+                    <a:pt x="4220669" y="1090249"/>
+                  </a:lnTo>
+                  <a:lnTo>
+                    <a:pt x="4150324" y="1082135"/>
+                  </a:lnTo>
+                  <a:lnTo>
+                    <a:pt x="4079980" y="1073628"/>
+                  </a:lnTo>
+                  <a:lnTo>
+                    <a:pt x="4009635" y="1064707"/>
+                  </a:lnTo>
+                  <a:lnTo>
+                    <a:pt x="3939291" y="1055353"/>
+                  </a:lnTo>
+                  <a:lnTo>
+                    <a:pt x="3868946" y="1045544"/>
+                  </a:lnTo>
+                  <a:lnTo>
+                    <a:pt x="3798602" y="1035258"/>
+                  </a:lnTo>
+                  <a:lnTo>
+                    <a:pt x="3728257" y="1024473"/>
+                  </a:lnTo>
+                  <a:lnTo>
+                    <a:pt x="3657913" y="1013164"/>
+                  </a:lnTo>
+                  <a:lnTo>
+                    <a:pt x="3587569" y="1001304"/>
+                  </a:lnTo>
+                  <a:lnTo>
+                    <a:pt x="3517224" y="988869"/>
+                  </a:lnTo>
+                  <a:lnTo>
+                    <a:pt x="3446880" y="975829"/>
+                  </a:lnTo>
+                  <a:lnTo>
+                    <a:pt x="3376535" y="962156"/>
+                  </a:lnTo>
+                  <a:lnTo>
+                    <a:pt x="3306191" y="952292"/>
+                  </a:lnTo>
+                  <a:lnTo>
+                    <a:pt x="3235846" y="944097"/>
+                  </a:lnTo>
+                  <a:lnTo>
+                    <a:pt x="3165502" y="935682"/>
+                  </a:lnTo>
+                  <a:lnTo>
+                    <a:pt x="3095157" y="927040"/>
+                  </a:lnTo>
+                  <a:lnTo>
+                    <a:pt x="3024813" y="918167"/>
+                  </a:lnTo>
+                  <a:lnTo>
+                    <a:pt x="2954468" y="909055"/>
+                  </a:lnTo>
+                  <a:lnTo>
+                    <a:pt x="2884124" y="899698"/>
+                  </a:lnTo>
+                  <a:lnTo>
+                    <a:pt x="2813779" y="890089"/>
+                  </a:lnTo>
+                  <a:lnTo>
+                    <a:pt x="2743435" y="880222"/>
+                  </a:lnTo>
+                  <a:lnTo>
+                    <a:pt x="2673090" y="870090"/>
+                  </a:lnTo>
+                  <a:lnTo>
+                    <a:pt x="2602746" y="859686"/>
+                  </a:lnTo>
+                  <a:lnTo>
+                    <a:pt x="2532401" y="849002"/>
+                  </a:lnTo>
+                  <a:lnTo>
+                    <a:pt x="2462057" y="838031"/>
+                  </a:lnTo>
+                  <a:lnTo>
+                    <a:pt x="2391712" y="826766"/>
+                  </a:lnTo>
+                  <a:lnTo>
+                    <a:pt x="2321368" y="815197"/>
+                  </a:lnTo>
+                  <a:lnTo>
+                    <a:pt x="2251023" y="803317"/>
+                  </a:lnTo>
+                  <a:lnTo>
+                    <a:pt x="2180679" y="791118"/>
+                  </a:lnTo>
+                  <a:lnTo>
+                    <a:pt x="2110334" y="778592"/>
+                  </a:lnTo>
+                  <a:lnTo>
+                    <a:pt x="2039990" y="765728"/>
+                  </a:lnTo>
+                  <a:lnTo>
+                    <a:pt x="1969645" y="752519"/>
+                  </a:lnTo>
+                  <a:lnTo>
+                    <a:pt x="1899301" y="738955"/>
+                  </a:lnTo>
+                  <a:lnTo>
+                    <a:pt x="1828956" y="725026"/>
+                  </a:lnTo>
+                  <a:lnTo>
+                    <a:pt x="1758612" y="710723"/>
+                  </a:lnTo>
+                  <a:lnTo>
+                    <a:pt x="1688267" y="696036"/>
+                  </a:lnTo>
+                  <a:lnTo>
+                    <a:pt x="1617923" y="680954"/>
+                  </a:lnTo>
+                  <a:lnTo>
+                    <a:pt x="1547578" y="665466"/>
+                  </a:lnTo>
+                  <a:lnTo>
+                    <a:pt x="1477234" y="649562"/>
+                  </a:lnTo>
+                  <a:lnTo>
+                    <a:pt x="1406889" y="633231"/>
+                  </a:lnTo>
+                  <a:lnTo>
+                    <a:pt x="1336545" y="616461"/>
+                  </a:lnTo>
+                  <a:lnTo>
+                    <a:pt x="1266200" y="599240"/>
+                  </a:lnTo>
+                  <a:lnTo>
+                    <a:pt x="1195856" y="581556"/>
+                  </a:lnTo>
+                  <a:lnTo>
+                    <a:pt x="1125511" y="563397"/>
+                  </a:lnTo>
+                  <a:lnTo>
+                    <a:pt x="1055167" y="544750"/>
+                  </a:lnTo>
+                  <a:lnTo>
+                    <a:pt x="984822" y="525602"/>
+                  </a:lnTo>
+                  <a:lnTo>
+                    <a:pt x="914478" y="505939"/>
+                  </a:lnTo>
+                  <a:lnTo>
+                    <a:pt x="844133" y="485747"/>
+                  </a:lnTo>
+                  <a:lnTo>
+                    <a:pt x="773789" y="465013"/>
+                  </a:lnTo>
+                  <a:lnTo>
+                    <a:pt x="703444" y="443722"/>
+                  </a:lnTo>
+                  <a:lnTo>
+                    <a:pt x="633100" y="421858"/>
+                  </a:lnTo>
+                  <a:lnTo>
+                    <a:pt x="562755" y="399407"/>
+                  </a:lnTo>
+                  <a:lnTo>
+                    <a:pt x="492411" y="376353"/>
+                  </a:lnTo>
+                  <a:lnTo>
+                    <a:pt x="422066" y="352678"/>
+                  </a:lnTo>
+                  <a:lnTo>
+                    <a:pt x="351722" y="328368"/>
+                  </a:lnTo>
+                  <a:lnTo>
+                    <a:pt x="281377" y="303404"/>
+                  </a:lnTo>
+                  <a:lnTo>
+                    <a:pt x="211033" y="277769"/>
+                  </a:lnTo>
+                  <a:lnTo>
+                    <a:pt x="140688" y="251445"/>
+                  </a:lnTo>
+                  <a:lnTo>
+                    <a:pt x="70344" y="224414"/>
+                  </a:lnTo>
+                  <a:lnTo>
+                    <a:pt x="0" y="196656"/>
+                  </a:lnTo>
+                  <a:close/>
+                </a:path>
+              </a:pathLst>
+            </a:custGeom>
+            <a:solidFill>
+              <a:srgbClr val="FF8C00">
+                <a:alpha val="20000"/>
+              </a:srgbClr>
+            </a:solidFill>
+          </p:spPr>
+          <p:txBody>
+            <a:bodyPr/>
+            <a:lstStyle/>
+            <a:p/>
+          </p:txBody>
+        </p:sp>
+        <p:sp>
+          <p:nvSpPr>
+            <p:cNvPr id="67" name="pl67"/>
+            <p:cNvSpPr/>
+            <p:nvPr/>
+          </p:nvSpPr>
+          <p:spPr>
+            <a:xfrm>
+              <a:off x="2463424" y="4336484"/>
+              <a:ext cx="5735992" cy="1180426"/>
+            </a:xfrm>
+            <a:custGeom>
+              <a:avLst/>
+              <a:pathLst>
+                <a:path w="5735992" h="1180426">
+                  <a:moveTo>
+                    <a:pt x="0" y="0"/>
+                  </a:moveTo>
+                  <a:lnTo>
+                    <a:pt x="38088" y="32231"/>
+                  </a:lnTo>
+                  <a:lnTo>
+                    <a:pt x="108433" y="89000"/>
+                  </a:lnTo>
+                  <a:lnTo>
+                    <a:pt x="178777" y="143139"/>
+                  </a:lnTo>
+                  <a:lnTo>
+                    <a:pt x="249122" y="194768"/>
+                  </a:lnTo>
+                  <a:lnTo>
+                    <a:pt x="319466" y="244004"/>
+                  </a:lnTo>
+                  <a:lnTo>
+                    <a:pt x="389811" y="290959"/>
+                  </a:lnTo>
+                  <a:lnTo>
+                    <a:pt x="460155" y="335738"/>
+                  </a:lnTo>
+                  <a:lnTo>
+                    <a:pt x="530500" y="378441"/>
+                  </a:lnTo>
+                  <a:lnTo>
+                    <a:pt x="600844" y="419166"/>
+                  </a:lnTo>
+                  <a:lnTo>
+                    <a:pt x="671189" y="458003"/>
+                  </a:lnTo>
+                  <a:lnTo>
+                    <a:pt x="741533" y="495041"/>
+                  </a:lnTo>
+                  <a:lnTo>
+                    <a:pt x="811878" y="530361"/>
+                  </a:lnTo>
+                  <a:lnTo>
+                    <a:pt x="882222" y="564046"/>
+                  </a:lnTo>
+                  <a:lnTo>
+                    <a:pt x="952567" y="596169"/>
+                  </a:lnTo>
+                  <a:lnTo>
+                    <a:pt x="1022911" y="626803"/>
+                  </a:lnTo>
+                  <a:lnTo>
+                    <a:pt x="1093256" y="656018"/>
+                  </a:lnTo>
+                  <a:lnTo>
+                    <a:pt x="1163600" y="683878"/>
+                  </a:lnTo>
+                  <a:lnTo>
+                    <a:pt x="1233945" y="710448"/>
+                  </a:lnTo>
+                  <a:lnTo>
+                    <a:pt x="1304289" y="735786"/>
+                  </a:lnTo>
+                  <a:lnTo>
+                    <a:pt x="1374634" y="759950"/>
+                  </a:lnTo>
+                  <a:lnTo>
+                    <a:pt x="1444978" y="782995"/>
+                  </a:lnTo>
+                  <a:lnTo>
+                    <a:pt x="1515323" y="804971"/>
+                  </a:lnTo>
+                  <a:lnTo>
+                    <a:pt x="1585667" y="825929"/>
+                  </a:lnTo>
+                  <a:lnTo>
+                    <a:pt x="1656012" y="845915"/>
+                  </a:lnTo>
+                  <a:lnTo>
+                    <a:pt x="1726356" y="864976"/>
+                  </a:lnTo>
+                  <a:lnTo>
+                    <a:pt x="1796701" y="883153"/>
+                  </a:lnTo>
+                  <a:lnTo>
+                    <a:pt x="1867045" y="900487"/>
+                  </a:lnTo>
+                  <a:lnTo>
+                    <a:pt x="1937390" y="917018"/>
+                  </a:lnTo>
+                  <a:lnTo>
+                    <a:pt x="2007734" y="932784"/>
+                  </a:lnTo>
+                  <a:lnTo>
+                    <a:pt x="2078078" y="947818"/>
+                  </a:lnTo>
+                  <a:lnTo>
+                    <a:pt x="2148423" y="960272"/>
+                  </a:lnTo>
+                  <a:lnTo>
+                    <a:pt x="2218767" y="968044"/>
+                  </a:lnTo>
+                  <a:lnTo>
+                    <a:pt x="2289112" y="975612"/>
+                  </a:lnTo>
+                  <a:lnTo>
+                    <a:pt x="2359456" y="982982"/>
+                  </a:lnTo>
+                  <a:lnTo>
+                    <a:pt x="2429801" y="990159"/>
+                  </a:lnTo>
+                  <a:lnTo>
+                    <a:pt x="2500145" y="997149"/>
+                  </a:lnTo>
+                  <a:lnTo>
+                    <a:pt x="2570490" y="1003955"/>
+                  </a:lnTo>
+                  <a:lnTo>
+                    <a:pt x="2640834" y="1010583"/>
+                  </a:lnTo>
+                  <a:lnTo>
+                    <a:pt x="2711179" y="1017038"/>
+                  </a:lnTo>
+                  <a:lnTo>
+                    <a:pt x="2781523" y="1023324"/>
+                  </a:lnTo>
+                  <a:lnTo>
+                    <a:pt x="2851868" y="1029445"/>
+                  </a:lnTo>
+                  <a:lnTo>
+                    <a:pt x="2922212" y="1035406"/>
+                  </a:lnTo>
+                  <a:lnTo>
+                    <a:pt x="2992557" y="1041211"/>
+                  </a:lnTo>
+                  <a:lnTo>
+                    <a:pt x="3062901" y="1046865"/>
+                  </a:lnTo>
+                  <a:lnTo>
+                    <a:pt x="3133246" y="1052370"/>
+                  </a:lnTo>
+                  <a:lnTo>
+                    <a:pt x="3203590" y="1057731"/>
+                  </a:lnTo>
+                  <a:lnTo>
+                    <a:pt x="3273935" y="1062952"/>
+                  </a:lnTo>
+                  <a:lnTo>
+                    <a:pt x="3344279" y="1068036"/>
+                  </a:lnTo>
+                  <a:lnTo>
+                    <a:pt x="3414624" y="1072987"/>
+                  </a:lnTo>
+                  <a:lnTo>
+                    <a:pt x="3484968" y="1077808"/>
+                  </a:lnTo>
+                  <a:lnTo>
+                    <a:pt x="3555313" y="1082504"/>
+                  </a:lnTo>
+                  <a:lnTo>
+                    <a:pt x="3625657" y="1087076"/>
+                  </a:lnTo>
+                  <a:lnTo>
+                    <a:pt x="3696002" y="1091529"/>
+                  </a:lnTo>
+                  <a:lnTo>
+                    <a:pt x="3766346" y="1095865"/>
+                  </a:lnTo>
+                  <a:lnTo>
+                    <a:pt x="3836691" y="1100088"/>
+                  </a:lnTo>
+                  <a:lnTo>
+                    <a:pt x="3907035" y="1104200"/>
+                  </a:lnTo>
+                  <a:lnTo>
+                    <a:pt x="3977380" y="1108204"/>
+                  </a:lnTo>
+                  <a:lnTo>
+                    <a:pt x="4047724" y="1112104"/>
+                  </a:lnTo>
+                  <a:lnTo>
+                    <a:pt x="4118069" y="1115902"/>
+                  </a:lnTo>
+                  <a:lnTo>
+                    <a:pt x="4188413" y="1119600"/>
+                  </a:lnTo>
+                  <a:lnTo>
+                    <a:pt x="4258758" y="1123201"/>
+                  </a:lnTo>
+                  <a:lnTo>
+                    <a:pt x="4329102" y="1126709"/>
+                  </a:lnTo>
+                  <a:lnTo>
+                    <a:pt x="4399447" y="1130124"/>
+                  </a:lnTo>
+                  <a:lnTo>
+                    <a:pt x="4469791" y="1133450"/>
+                  </a:lnTo>
+                  <a:lnTo>
+                    <a:pt x="4540136" y="1136689"/>
+                  </a:lnTo>
+                  <a:lnTo>
+                    <a:pt x="4610480" y="1139843"/>
+                  </a:lnTo>
+                  <a:lnTo>
+                    <a:pt x="4680825" y="1142915"/>
+                  </a:lnTo>
+                  <a:lnTo>
+                    <a:pt x="4751169" y="1145906"/>
+                  </a:lnTo>
+                  <a:lnTo>
+                    <a:pt x="4821514" y="1148819"/>
+                  </a:lnTo>
+                  <a:lnTo>
+                    <a:pt x="4891858" y="1151656"/>
+                  </a:lnTo>
+                  <a:lnTo>
+                    <a:pt x="4962203" y="1154418"/>
+                  </a:lnTo>
+                  <a:lnTo>
+                    <a:pt x="5032547" y="1157108"/>
+                  </a:lnTo>
+                  <a:lnTo>
+                    <a:pt x="5102892" y="1159728"/>
+                  </a:lnTo>
+                  <a:lnTo>
+                    <a:pt x="5173236" y="1162279"/>
+                  </a:lnTo>
+                  <a:lnTo>
+                    <a:pt x="5243581" y="1164764"/>
+                  </a:lnTo>
+                  <a:lnTo>
+                    <a:pt x="5313925" y="1167183"/>
+                  </a:lnTo>
+                  <a:lnTo>
+                    <a:pt x="5384270" y="1169539"/>
+                  </a:lnTo>
+                  <a:lnTo>
+                    <a:pt x="5454614" y="1171834"/>
+                  </a:lnTo>
+                  <a:lnTo>
+                    <a:pt x="5524959" y="1174068"/>
+                  </a:lnTo>
+                  <a:lnTo>
+                    <a:pt x="5595303" y="1176244"/>
+                  </a:lnTo>
+                  <a:lnTo>
+                    <a:pt x="5665648" y="1178363"/>
+                  </a:lnTo>
+                  <a:lnTo>
+                    <a:pt x="5735992" y="1180426"/>
+                  </a:lnTo>
+                </a:path>
+              </a:pathLst>
+            </a:custGeom>
+          </p:spPr>
+          <p:txBody>
+            <a:bodyPr/>
+            <a:lstStyle/>
+            <a:p/>
+          </p:txBody>
+        </p:sp>
+        <p:sp>
+          <p:nvSpPr>
+            <p:cNvPr id="68" name="pl68"/>
+            <p:cNvSpPr/>
+            <p:nvPr/>
+          </p:nvSpPr>
+          <p:spPr>
+            <a:xfrm>
+              <a:off x="1235312" y="4533141"/>
+              <a:ext cx="6964104" cy="1034310"/>
+            </a:xfrm>
+            <a:custGeom>
+              <a:avLst/>
+              <a:pathLst>
+                <a:path w="6964104" h="1034310">
+                  <a:moveTo>
+                    <a:pt x="6964104" y="1034310"/>
+                  </a:moveTo>
+                  <a:lnTo>
+                    <a:pt x="6893760" y="1033035"/>
+                  </a:lnTo>
+                  <a:lnTo>
+                    <a:pt x="6823415" y="1031698"/>
+                  </a:lnTo>
+                  <a:lnTo>
+                    <a:pt x="6753071" y="1030296"/>
+                  </a:lnTo>
+                  <a:lnTo>
+                    <a:pt x="6682726" y="1028826"/>
+                  </a:lnTo>
+                  <a:lnTo>
+                    <a:pt x="6612382" y="1027285"/>
+                  </a:lnTo>
+                  <a:lnTo>
+                    <a:pt x="6542037" y="1025668"/>
+                  </a:lnTo>
+                  <a:lnTo>
+                    <a:pt x="6471693" y="1023974"/>
+                  </a:lnTo>
+                  <a:lnTo>
+                    <a:pt x="6401348" y="1022196"/>
+                  </a:lnTo>
+                  <a:lnTo>
+                    <a:pt x="6331004" y="1020333"/>
+                  </a:lnTo>
+                  <a:lnTo>
+                    <a:pt x="6260659" y="1018379"/>
+                  </a:lnTo>
+                  <a:lnTo>
+                    <a:pt x="6190315" y="1016330"/>
+                  </a:lnTo>
+                  <a:lnTo>
+                    <a:pt x="6119970" y="1014181"/>
+                  </a:lnTo>
+                  <a:lnTo>
+                    <a:pt x="6049626" y="1011928"/>
+                  </a:lnTo>
+                  <a:lnTo>
+                    <a:pt x="5979281" y="1009565"/>
+                  </a:lnTo>
+                  <a:lnTo>
+                    <a:pt x="5908937" y="1007088"/>
+                  </a:lnTo>
+                  <a:lnTo>
+                    <a:pt x="5838592" y="1004490"/>
+                  </a:lnTo>
+                  <a:lnTo>
+                    <a:pt x="5768248" y="1001766"/>
+                  </a:lnTo>
+                  <a:lnTo>
+                    <a:pt x="5697903" y="998910"/>
+                  </a:lnTo>
+                  <a:lnTo>
+                    <a:pt x="5627559" y="995915"/>
+                  </a:lnTo>
+                  <a:lnTo>
+                    <a:pt x="5557214" y="992774"/>
+                  </a:lnTo>
+                  <a:lnTo>
+                    <a:pt x="5486870" y="989481"/>
+                  </a:lnTo>
+                  <a:lnTo>
+                    <a:pt x="5416525" y="986027"/>
+                  </a:lnTo>
+                  <a:lnTo>
+                    <a:pt x="5346181" y="982406"/>
+                  </a:lnTo>
+                  <a:lnTo>
+                    <a:pt x="5275836" y="978609"/>
+                  </a:lnTo>
+                  <a:lnTo>
+                    <a:pt x="5205492" y="974627"/>
+                  </a:lnTo>
+                  <a:lnTo>
+                    <a:pt x="5135147" y="970452"/>
+                  </a:lnTo>
+                  <a:lnTo>
+                    <a:pt x="5064803" y="966074"/>
+                  </a:lnTo>
+                  <a:lnTo>
+                    <a:pt x="4994458" y="961483"/>
+                  </a:lnTo>
+                  <a:lnTo>
+                    <a:pt x="4924114" y="956669"/>
+                  </a:lnTo>
+                  <a:lnTo>
+                    <a:pt x="4853769" y="951621"/>
+                  </a:lnTo>
+                  <a:lnTo>
+                    <a:pt x="4783425" y="946328"/>
+                  </a:lnTo>
+                  <a:lnTo>
+                    <a:pt x="4713080" y="940777"/>
+                  </a:lnTo>
+                  <a:lnTo>
+                    <a:pt x="4642736" y="934957"/>
+                  </a:lnTo>
+                  <a:lnTo>
+                    <a:pt x="4572391" y="928854"/>
+                  </a:lnTo>
+                  <a:lnTo>
+                    <a:pt x="4502047" y="922455"/>
+                  </a:lnTo>
+                  <a:lnTo>
+                    <a:pt x="4431702" y="915744"/>
+                  </a:lnTo>
+                  <a:lnTo>
+                    <a:pt x="4361358" y="908708"/>
+                  </a:lnTo>
+                  <a:lnTo>
+                    <a:pt x="4291013" y="901329"/>
+                  </a:lnTo>
+                  <a:lnTo>
+                    <a:pt x="4220669" y="893592"/>
+                  </a:lnTo>
+                  <a:lnTo>
+                    <a:pt x="4150324" y="885479"/>
+                  </a:lnTo>
+                  <a:lnTo>
+                    <a:pt x="4079980" y="876971"/>
+                  </a:lnTo>
+                  <a:lnTo>
+                    <a:pt x="4009635" y="868050"/>
+                  </a:lnTo>
+                  <a:lnTo>
+                    <a:pt x="3939291" y="858696"/>
+                  </a:lnTo>
+                  <a:lnTo>
+                    <a:pt x="3868946" y="848887"/>
+                  </a:lnTo>
+                  <a:lnTo>
+                    <a:pt x="3798602" y="838602"/>
+                  </a:lnTo>
+                  <a:lnTo>
+                    <a:pt x="3728257" y="827816"/>
+                  </a:lnTo>
+                  <a:lnTo>
+                    <a:pt x="3657913" y="816507"/>
+                  </a:lnTo>
+                  <a:lnTo>
+                    <a:pt x="3587569" y="804648"/>
+                  </a:lnTo>
+                  <a:lnTo>
+                    <a:pt x="3517224" y="792212"/>
+                  </a:lnTo>
+                  <a:lnTo>
+                    <a:pt x="3446880" y="779173"/>
+                  </a:lnTo>
+                  <a:lnTo>
+                    <a:pt x="3376535" y="765499"/>
+                  </a:lnTo>
+                  <a:lnTo>
+                    <a:pt x="3306191" y="755635"/>
+                  </a:lnTo>
+                  <a:lnTo>
+                    <a:pt x="3235846" y="747440"/>
+                  </a:lnTo>
+                  <a:lnTo>
+                    <a:pt x="3165502" y="739025"/>
+                  </a:lnTo>
+                  <a:lnTo>
+                    <a:pt x="3095157" y="730384"/>
+                  </a:lnTo>
+                  <a:lnTo>
+                    <a:pt x="3024813" y="721510"/>
+                  </a:lnTo>
+                  <a:lnTo>
+                    <a:pt x="2954468" y="712398"/>
+                  </a:lnTo>
+                  <a:lnTo>
+                    <a:pt x="2884124" y="703041"/>
+                  </a:lnTo>
+                  <a:lnTo>
+                    <a:pt x="2813779" y="693432"/>
+                  </a:lnTo>
+                  <a:lnTo>
+                    <a:pt x="2743435" y="683566"/>
+                  </a:lnTo>
+                  <a:lnTo>
+                    <a:pt x="2673090" y="673434"/>
+                  </a:lnTo>
+                  <a:lnTo>
+                    <a:pt x="2602746" y="663030"/>
+                  </a:lnTo>
+                  <a:lnTo>
+                    <a:pt x="2532401" y="652346"/>
+                  </a:lnTo>
+                  <a:lnTo>
+                    <a:pt x="2462057" y="641375"/>
+                  </a:lnTo>
+                  <a:lnTo>
+                    <a:pt x="2391712" y="630109"/>
+                  </a:lnTo>
+                  <a:lnTo>
+                    <a:pt x="2321368" y="618540"/>
+                  </a:lnTo>
+                  <a:lnTo>
+                    <a:pt x="2251023" y="606661"/>
+                  </a:lnTo>
+                  <a:lnTo>
+                    <a:pt x="2180679" y="594462"/>
+                  </a:lnTo>
+                  <a:lnTo>
+                    <a:pt x="2110334" y="581935"/>
+                  </a:lnTo>
+                  <a:lnTo>
+                    <a:pt x="2039990" y="569072"/>
+                  </a:lnTo>
+                  <a:lnTo>
+                    <a:pt x="1969645" y="555862"/>
+                  </a:lnTo>
+                  <a:lnTo>
+                    <a:pt x="1899301" y="542298"/>
+                  </a:lnTo>
+                  <a:lnTo>
+                    <a:pt x="1828956" y="528370"/>
+                  </a:lnTo>
+                  <a:lnTo>
+                    <a:pt x="1758612" y="514067"/>
+                  </a:lnTo>
+                  <a:lnTo>
+                    <a:pt x="1688267" y="499379"/>
+                  </a:lnTo>
+                  <a:lnTo>
+                    <a:pt x="1617923" y="484297"/>
+                  </a:lnTo>
+                  <a:lnTo>
+                    <a:pt x="1547578" y="468809"/>
+                  </a:lnTo>
+                  <a:lnTo>
+                    <a:pt x="1477234" y="452905"/>
+                  </a:lnTo>
+                  <a:lnTo>
+                    <a:pt x="1406889" y="436574"/>
+                  </a:lnTo>
+                  <a:lnTo>
+                    <a:pt x="1336545" y="419804"/>
+                  </a:lnTo>
+                  <a:lnTo>
+                    <a:pt x="1266200" y="402583"/>
+                  </a:lnTo>
+                  <a:lnTo>
+                    <a:pt x="1195856" y="384899"/>
+                  </a:lnTo>
+                  <a:lnTo>
+                    <a:pt x="1125511" y="366740"/>
+                  </a:lnTo>
+                  <a:lnTo>
+                    <a:pt x="1055167" y="348093"/>
+                  </a:lnTo>
+                  <a:lnTo>
+                    <a:pt x="984822" y="328945"/>
+                  </a:lnTo>
+                  <a:lnTo>
+                    <a:pt x="914478" y="309282"/>
+                  </a:lnTo>
+                  <a:lnTo>
+                    <a:pt x="844133" y="289091"/>
+                  </a:lnTo>
+                  <a:lnTo>
+                    <a:pt x="773789" y="268356"/>
+                  </a:lnTo>
+                  <a:lnTo>
+                    <a:pt x="703444" y="247065"/>
+                  </a:lnTo>
+                  <a:lnTo>
+                    <a:pt x="633100" y="225202"/>
+                  </a:lnTo>
+                  <a:lnTo>
+                    <a:pt x="562755" y="202750"/>
+                  </a:lnTo>
+                  <a:lnTo>
+                    <a:pt x="492411" y="179696"/>
+                  </a:lnTo>
+                  <a:lnTo>
+                    <a:pt x="422066" y="156022"/>
+                  </a:lnTo>
+                  <a:lnTo>
+                    <a:pt x="351722" y="131711"/>
+                  </a:lnTo>
+                  <a:lnTo>
+                    <a:pt x="281377" y="106747"/>
+                  </a:lnTo>
+                  <a:lnTo>
+                    <a:pt x="211033" y="81112"/>
+                  </a:lnTo>
+                  <a:lnTo>
+                    <a:pt x="140688" y="54789"/>
+                  </a:lnTo>
+                  <a:lnTo>
+                    <a:pt x="70344" y="27757"/>
+                  </a:lnTo>
+                  <a:lnTo>
+                    <a:pt x="0" y="0"/>
+                  </a:lnTo>
+                </a:path>
+              </a:pathLst>
+            </a:custGeom>
+          </p:spPr>
+          <p:txBody>
+            <a:bodyPr/>
+            <a:lstStyle/>
+            <a:p/>
+          </p:txBody>
+        </p:sp>
+        <p:sp>
+          <p:nvSpPr>
+            <p:cNvPr id="69" name="pl69"/>
+            <p:cNvSpPr/>
+            <p:nvPr/>
+          </p:nvSpPr>
+          <p:spPr>
+            <a:xfrm>
+              <a:off x="1861200" y="4336484"/>
+              <a:ext cx="6338215" cy="1212322"/>
+            </a:xfrm>
+            <a:custGeom>
+              <a:avLst/>
+              <a:pathLst>
+                <a:path w="6338215" h="1212322">
+                  <a:moveTo>
+                    <a:pt x="0" y="0"/>
+                  </a:moveTo>
+                  <a:lnTo>
+                    <a:pt x="7211" y="4837"/>
+                  </a:lnTo>
+                  <a:lnTo>
+                    <a:pt x="77556" y="50312"/>
+                  </a:lnTo>
+                  <a:lnTo>
+                    <a:pt x="147900" y="94135"/>
+                  </a:lnTo>
+                  <a:lnTo>
+                    <a:pt x="218245" y="136367"/>
+                  </a:lnTo>
+                  <a:lnTo>
+                    <a:pt x="288589" y="177066"/>
+                  </a:lnTo>
+                  <a:lnTo>
+                    <a:pt x="358934" y="216286"/>
+                  </a:lnTo>
+                  <a:lnTo>
+                    <a:pt x="429278" y="254083"/>
+                  </a:lnTo>
+                  <a:lnTo>
+                    <a:pt x="499623" y="290507"/>
+                  </a:lnTo>
+                  <a:lnTo>
+                    <a:pt x="569967" y="325609"/>
+                  </a:lnTo>
+                  <a:lnTo>
+                    <a:pt x="640312" y="359436"/>
+                  </a:lnTo>
+                  <a:lnTo>
+                    <a:pt x="710656" y="392034"/>
+                  </a:lnTo>
+                  <a:lnTo>
+                    <a:pt x="781001" y="423449"/>
+                  </a:lnTo>
+                  <a:lnTo>
+                    <a:pt x="851345" y="453724"/>
+                  </a:lnTo>
+                  <a:lnTo>
+                    <a:pt x="921690" y="482899"/>
+                  </a:lnTo>
+                  <a:lnTo>
+                    <a:pt x="992034" y="511014"/>
+                  </a:lnTo>
+                  <a:lnTo>
+                    <a:pt x="1062379" y="538109"/>
+                  </a:lnTo>
+                  <a:lnTo>
+                    <a:pt x="1132723" y="564220"/>
+                  </a:lnTo>
+                  <a:lnTo>
+                    <a:pt x="1203068" y="589383"/>
+                  </a:lnTo>
+                  <a:lnTo>
+                    <a:pt x="1273412" y="613632"/>
+                  </a:lnTo>
+                  <a:lnTo>
+                    <a:pt x="1343757" y="637001"/>
+                  </a:lnTo>
+                  <a:lnTo>
+                    <a:pt x="1414101" y="659521"/>
+                  </a:lnTo>
+                  <a:lnTo>
+                    <a:pt x="1484446" y="681223"/>
+                  </a:lnTo>
+                  <a:lnTo>
+                    <a:pt x="1554790" y="702137"/>
+                  </a:lnTo>
+                  <a:lnTo>
+                    <a:pt x="1625135" y="722292"/>
+                  </a:lnTo>
+                  <a:lnTo>
+                    <a:pt x="1695479" y="741715"/>
+                  </a:lnTo>
+                  <a:lnTo>
+                    <a:pt x="1765824" y="760433"/>
+                  </a:lnTo>
+                  <a:lnTo>
+                    <a:pt x="1836168" y="778471"/>
+                  </a:lnTo>
+                  <a:lnTo>
+                    <a:pt x="1906512" y="795854"/>
+                  </a:lnTo>
+                  <a:lnTo>
+                    <a:pt x="1976857" y="812606"/>
+                  </a:lnTo>
+                  <a:lnTo>
+                    <a:pt x="2047201" y="828750"/>
+                  </a:lnTo>
+                  <a:lnTo>
+                    <a:pt x="2117546" y="844307"/>
+                  </a:lnTo>
+                  <a:lnTo>
+                    <a:pt x="2187890" y="859300"/>
+                  </a:lnTo>
+                  <a:lnTo>
+                    <a:pt x="2258235" y="873748"/>
+                  </a:lnTo>
+                  <a:lnTo>
+                    <a:pt x="2328579" y="887672"/>
+                  </a:lnTo>
+                  <a:lnTo>
+                    <a:pt x="2398924" y="901090"/>
+                  </a:lnTo>
+                  <a:lnTo>
+                    <a:pt x="2469268" y="914020"/>
+                  </a:lnTo>
+                  <a:lnTo>
+                    <a:pt x="2539613" y="926482"/>
+                  </a:lnTo>
+                  <a:lnTo>
+                    <a:pt x="2609957" y="938490"/>
+                  </a:lnTo>
+                  <a:lnTo>
+                    <a:pt x="2680302" y="950063"/>
+                  </a:lnTo>
+                  <a:lnTo>
+                    <a:pt x="2750646" y="961216"/>
+                  </a:lnTo>
+                  <a:lnTo>
+                    <a:pt x="2820991" y="971963"/>
+                  </a:lnTo>
+                  <a:lnTo>
+                    <a:pt x="2891335" y="982320"/>
+                  </a:lnTo>
+                  <a:lnTo>
+                    <a:pt x="2961680" y="992302"/>
+                  </a:lnTo>
+                  <a:lnTo>
+                    <a:pt x="3032024" y="1001920"/>
+                  </a:lnTo>
+                  <a:lnTo>
+                    <a:pt x="3102369" y="1011190"/>
+                  </a:lnTo>
+                  <a:lnTo>
+                    <a:pt x="3172713" y="1020123"/>
+                  </a:lnTo>
+                  <a:lnTo>
+                    <a:pt x="3243058" y="1028731"/>
+                  </a:lnTo>
+                  <a:lnTo>
+                    <a:pt x="3313402" y="1037027"/>
+                  </a:lnTo>
+                  <a:lnTo>
+                    <a:pt x="3383747" y="1045022"/>
+                  </a:lnTo>
+                  <a:lnTo>
+                    <a:pt x="3454091" y="1052727"/>
+                  </a:lnTo>
+                  <a:lnTo>
+                    <a:pt x="3524436" y="1060151"/>
+                  </a:lnTo>
+                  <a:lnTo>
+                    <a:pt x="3594780" y="1067306"/>
+                  </a:lnTo>
+                  <a:lnTo>
+                    <a:pt x="3665125" y="1074202"/>
+                  </a:lnTo>
+                  <a:lnTo>
+                    <a:pt x="3735469" y="1080846"/>
+                  </a:lnTo>
+                  <a:lnTo>
+                    <a:pt x="3805814" y="1087250"/>
+                  </a:lnTo>
+                  <a:lnTo>
+                    <a:pt x="3876158" y="1093421"/>
+                  </a:lnTo>
+                  <a:lnTo>
+                    <a:pt x="3946503" y="1099368"/>
+                  </a:lnTo>
+                  <a:lnTo>
+                    <a:pt x="4016847" y="1105099"/>
+                  </a:lnTo>
+                  <a:lnTo>
+                    <a:pt x="4087192" y="1110622"/>
+                  </a:lnTo>
+                  <a:lnTo>
+                    <a:pt x="4157536" y="1115945"/>
+                  </a:lnTo>
+                  <a:lnTo>
+                    <a:pt x="4227881" y="1121074"/>
+                  </a:lnTo>
+                  <a:lnTo>
+                    <a:pt x="4298225" y="1126017"/>
+                  </a:lnTo>
+                  <a:lnTo>
+                    <a:pt x="4368570" y="1130780"/>
+                  </a:lnTo>
+                  <a:lnTo>
+                    <a:pt x="4438914" y="1135371"/>
+                  </a:lnTo>
+                  <a:lnTo>
+                    <a:pt x="4509259" y="1139795"/>
+                  </a:lnTo>
+                  <a:lnTo>
+                    <a:pt x="4579603" y="1144058"/>
+                  </a:lnTo>
+                  <a:lnTo>
+                    <a:pt x="4649948" y="1148166"/>
+                  </a:lnTo>
+                  <a:lnTo>
+                    <a:pt x="4720292" y="1152125"/>
+                  </a:lnTo>
+                  <a:lnTo>
+                    <a:pt x="4790637" y="1155941"/>
+                  </a:lnTo>
+                  <a:lnTo>
+                    <a:pt x="4860981" y="1159618"/>
+                  </a:lnTo>
+                  <a:lnTo>
+                    <a:pt x="4931326" y="1163161"/>
+                  </a:lnTo>
+                  <a:lnTo>
+                    <a:pt x="5001670" y="1166576"/>
+                  </a:lnTo>
+                  <a:lnTo>
+                    <a:pt x="5072015" y="1169866"/>
+                  </a:lnTo>
+                  <a:lnTo>
+                    <a:pt x="5142359" y="1173038"/>
+                  </a:lnTo>
+                  <a:lnTo>
+                    <a:pt x="5212704" y="1176094"/>
+                  </a:lnTo>
+                  <a:lnTo>
+                    <a:pt x="5283048" y="1179039"/>
+                  </a:lnTo>
+                  <a:lnTo>
+                    <a:pt x="5353393" y="1181877"/>
+                  </a:lnTo>
+                  <a:lnTo>
+                    <a:pt x="5423737" y="1184612"/>
+                  </a:lnTo>
+                  <a:lnTo>
+                    <a:pt x="5494081" y="1187248"/>
+                  </a:lnTo>
+                  <a:lnTo>
+                    <a:pt x="5564426" y="1189788"/>
+                  </a:lnTo>
+                  <a:lnTo>
+                    <a:pt x="5634770" y="1192236"/>
+                  </a:lnTo>
+                  <a:lnTo>
+                    <a:pt x="5705115" y="1194595"/>
+                  </a:lnTo>
+                  <a:lnTo>
+                    <a:pt x="5775459" y="1196868"/>
+                  </a:lnTo>
+                  <a:lnTo>
+                    <a:pt x="5845804" y="1199059"/>
+                  </a:lnTo>
+                  <a:lnTo>
+                    <a:pt x="5916148" y="1201170"/>
+                  </a:lnTo>
+                  <a:lnTo>
+                    <a:pt x="5986493" y="1203205"/>
+                  </a:lnTo>
+                  <a:lnTo>
+                    <a:pt x="6056837" y="1205165"/>
+                  </a:lnTo>
+                  <a:lnTo>
+                    <a:pt x="6127182" y="1207055"/>
+                  </a:lnTo>
+                  <a:lnTo>
+                    <a:pt x="6197526" y="1208876"/>
+                  </a:lnTo>
+                  <a:lnTo>
+                    <a:pt x="6267871" y="1210630"/>
+                  </a:lnTo>
+                  <a:lnTo>
+                    <a:pt x="6338215" y="1212322"/>
+                  </a:lnTo>
+                </a:path>
+              </a:pathLst>
+            </a:custGeom>
+            <a:ln w="27101" cap="flat">
+              <a:solidFill>
+                <a:srgbClr val="FF8C00">
+                  <a:alpha val="100000"/>
+                </a:srgbClr>
+              </a:solidFill>
+              <a:prstDash val="solid"/>
+              <a:round/>
+            </a:ln>
+          </p:spPr>
+          <p:txBody>
+            <a:bodyPr/>
+            <a:lstStyle/>
+            <a:p/>
+          </p:txBody>
+        </p:sp>
+        <p:sp>
+          <p:nvSpPr>
+            <p:cNvPr id="70" name="pl70"/>
+            <p:cNvSpPr/>
+            <p:nvPr/>
+          </p:nvSpPr>
+          <p:spPr>
+            <a:xfrm>
+              <a:off x="887106" y="5294352"/>
+              <a:ext cx="7660515" cy="0"/>
+            </a:xfrm>
+            <a:custGeom>
+              <a:avLst/>
+              <a:pathLst>
+                <a:path w="7660515" h="0">
+                  <a:moveTo>
+                    <a:pt x="0" y="0"/>
+                  </a:moveTo>
+                  <a:lnTo>
+                    <a:pt x="7660515" y="0"/>
+                  </a:lnTo>
+                  <a:lnTo>
+                    <a:pt x="7660515" y="0"/>
+                  </a:lnTo>
+                </a:path>
+              </a:pathLst>
+            </a:custGeom>
+            <a:ln w="13550" cap="flat">
+              <a:solidFill>
+                <a:srgbClr val="7F7F7F">
+                  <a:alpha val="100000"/>
+                </a:srgbClr>
+              </a:solidFill>
+              <a:prstDash val="dash"/>
+              <a:round/>
+            </a:ln>
+          </p:spPr>
+          <p:txBody>
+            <a:bodyPr/>
+            <a:lstStyle/>
+            <a:p/>
+          </p:txBody>
+        </p:sp>
+        <p:sp>
+          <p:nvSpPr>
+            <p:cNvPr id="71" name="pl71"/>
+            <p:cNvSpPr/>
+            <p:nvPr/>
+          </p:nvSpPr>
+          <p:spPr>
+            <a:xfrm>
+              <a:off x="4590457" y="4336484"/>
+              <a:ext cx="0" cy="1317069"/>
+            </a:xfrm>
+            <a:custGeom>
+              <a:avLst/>
+              <a:pathLst>
+                <a:path w="0" h="1317069">
+                  <a:moveTo>
+                    <a:pt x="0" y="1317069"/>
+                  </a:moveTo>
+                  <a:lnTo>
+                    <a:pt x="0" y="0"/>
+                  </a:lnTo>
+                  <a:lnTo>
+                    <a:pt x="0" y="0"/>
+                  </a:lnTo>
+                </a:path>
+              </a:pathLst>
+            </a:custGeom>
+            <a:ln w="13550" cap="flat">
+              <a:solidFill>
+                <a:srgbClr val="666666">
+                  <a:alpha val="100000"/>
+                </a:srgbClr>
+              </a:solidFill>
+              <a:prstDash val="dot"/>
+              <a:round/>
+            </a:ln>
+          </p:spPr>
+          <p:txBody>
+            <a:bodyPr/>
+            <a:lstStyle/>
+            <a:p/>
+          </p:txBody>
+        </p:sp>
+        <p:sp>
+          <p:nvSpPr>
+            <p:cNvPr id="72" name="tx72"/>
+            <p:cNvSpPr/>
+            <p:nvPr/>
+          </p:nvSpPr>
+          <p:spPr>
+            <a:xfrm>
+              <a:off x="762297" y="5553636"/>
+              <a:ext cx="62179" cy="80101"/>
+            </a:xfrm>
+            <a:prstGeom prst="rect">
+              <a:avLst/>
+            </a:prstGeom>
+            <a:noFill/>
+          </p:spPr>
+          <p:txBody>
+            <a:bodyPr lIns="0" rIns="0" tIns="0" bIns="0" anchorCtr="1" anchor="ctr" wrap="none"/>
+            <a:lstStyle/>
+            <a:p>
+              <a:pPr algn="l" marL="0" marR="0" indent="0">
+                <a:lnSpc>
+                  <a:spcPts val="880"/>
+                </a:lnSpc>
+                <a:spcBef>
+                  <a:spcPts val="0"/>
+                </a:spcBef>
+                <a:spcAft>
+                  <a:spcPts val="0"/>
+                </a:spcAft>
+              </a:pPr>
+              <a:r>
+                <a:rPr sz="880">
+                  <a:solidFill>
+                    <a:srgbClr val="4D4D4D">
+                      <a:alpha val="100000"/>
+                    </a:srgbClr>
+                  </a:solidFill>
+                  <a:latin typeface="Helvetica"/>
+                  <a:cs typeface="Helvetica"/>
+                </a:rPr>
+                <a:t>0</a:t>
+              </a:r>
+            </a:p>
+          </p:txBody>
+        </p:sp>
+        <p:sp>
+          <p:nvSpPr>
+            <p:cNvPr id="73" name="tx73"/>
+            <p:cNvSpPr/>
+            <p:nvPr/>
+          </p:nvSpPr>
+          <p:spPr>
+            <a:xfrm>
+              <a:off x="762297" y="5254302"/>
+              <a:ext cx="62179" cy="80101"/>
+            </a:xfrm>
+            <a:prstGeom prst="rect">
+              <a:avLst/>
+            </a:prstGeom>
+            <a:noFill/>
+          </p:spPr>
+          <p:txBody>
+            <a:bodyPr lIns="0" rIns="0" tIns="0" bIns="0" anchorCtr="1" anchor="ctr" wrap="none"/>
+            <a:lstStyle/>
+            <a:p>
+              <a:pPr algn="l" marL="0" marR="0" indent="0">
+                <a:lnSpc>
+                  <a:spcPts val="880"/>
+                </a:lnSpc>
+                <a:spcBef>
+                  <a:spcPts val="0"/>
+                </a:spcBef>
+                <a:spcAft>
+                  <a:spcPts val="0"/>
+                </a:spcAft>
+              </a:pPr>
+              <a:r>
+                <a:rPr sz="880">
+                  <a:solidFill>
+                    <a:srgbClr val="4D4D4D">
+                      <a:alpha val="100000"/>
+                    </a:srgbClr>
+                  </a:solidFill>
+                  <a:latin typeface="Helvetica"/>
+                  <a:cs typeface="Helvetica"/>
+                </a:rPr>
+                <a:t>1</a:t>
+              </a:r>
+            </a:p>
+          </p:txBody>
+        </p:sp>
+        <p:sp>
+          <p:nvSpPr>
+            <p:cNvPr id="74" name="tx74"/>
+            <p:cNvSpPr/>
+            <p:nvPr/>
+          </p:nvSpPr>
+          <p:spPr>
+            <a:xfrm>
+              <a:off x="762297" y="4954968"/>
+              <a:ext cx="62179" cy="80101"/>
+            </a:xfrm>
+            <a:prstGeom prst="rect">
+              <a:avLst/>
+            </a:prstGeom>
+            <a:noFill/>
+          </p:spPr>
+          <p:txBody>
+            <a:bodyPr lIns="0" rIns="0" tIns="0" bIns="0" anchorCtr="1" anchor="ctr" wrap="none"/>
+            <a:lstStyle/>
+            <a:p>
+              <a:pPr algn="l" marL="0" marR="0" indent="0">
+                <a:lnSpc>
+                  <a:spcPts val="880"/>
+                </a:lnSpc>
+                <a:spcBef>
+                  <a:spcPts val="0"/>
+                </a:spcBef>
+                <a:spcAft>
+                  <a:spcPts val="0"/>
+                </a:spcAft>
+              </a:pPr>
+              <a:r>
+                <a:rPr sz="880">
+                  <a:solidFill>
+                    <a:srgbClr val="4D4D4D">
+                      <a:alpha val="100000"/>
+                    </a:srgbClr>
+                  </a:solidFill>
+                  <a:latin typeface="Helvetica"/>
+                  <a:cs typeface="Helvetica"/>
+                </a:rPr>
+                <a:t>2</a:t>
+              </a:r>
+            </a:p>
+          </p:txBody>
+        </p:sp>
+        <p:sp>
+          <p:nvSpPr>
+            <p:cNvPr id="75" name="tx75"/>
+            <p:cNvSpPr/>
+            <p:nvPr/>
+          </p:nvSpPr>
+          <p:spPr>
+            <a:xfrm>
+              <a:off x="762297" y="4655634"/>
+              <a:ext cx="62179" cy="80101"/>
+            </a:xfrm>
+            <a:prstGeom prst="rect">
+              <a:avLst/>
+            </a:prstGeom>
+            <a:noFill/>
+          </p:spPr>
+          <p:txBody>
+            <a:bodyPr lIns="0" rIns="0" tIns="0" bIns="0" anchorCtr="1" anchor="ctr" wrap="none"/>
+            <a:lstStyle/>
+            <a:p>
+              <a:pPr algn="l" marL="0" marR="0" indent="0">
+                <a:lnSpc>
+                  <a:spcPts val="880"/>
+                </a:lnSpc>
+                <a:spcBef>
+                  <a:spcPts val="0"/>
+                </a:spcBef>
+                <a:spcAft>
+                  <a:spcPts val="0"/>
+                </a:spcAft>
+              </a:pPr>
+              <a:r>
+                <a:rPr sz="880">
+                  <a:solidFill>
+                    <a:srgbClr val="4D4D4D">
+                      <a:alpha val="100000"/>
+                    </a:srgbClr>
+                  </a:solidFill>
+                  <a:latin typeface="Helvetica"/>
+                  <a:cs typeface="Helvetica"/>
+                </a:rPr>
+                <a:t>3</a:t>
+              </a:r>
+            </a:p>
+          </p:txBody>
+        </p:sp>
+        <p:sp>
+          <p:nvSpPr>
+            <p:cNvPr id="76" name="tx76"/>
+            <p:cNvSpPr/>
+            <p:nvPr/>
+          </p:nvSpPr>
+          <p:spPr>
+            <a:xfrm>
+              <a:off x="762297" y="4356300"/>
+              <a:ext cx="62179" cy="80101"/>
+            </a:xfrm>
+            <a:prstGeom prst="rect">
+              <a:avLst/>
+            </a:prstGeom>
+            <a:noFill/>
+          </p:spPr>
+          <p:txBody>
+            <a:bodyPr lIns="0" rIns="0" tIns="0" bIns="0" anchorCtr="1" anchor="ctr" wrap="none"/>
+            <a:lstStyle/>
+            <a:p>
+              <a:pPr algn="l" marL="0" marR="0" indent="0">
+                <a:lnSpc>
+                  <a:spcPts val="880"/>
+                </a:lnSpc>
+                <a:spcBef>
+                  <a:spcPts val="0"/>
+                </a:spcBef>
+                <a:spcAft>
+                  <a:spcPts val="0"/>
+                </a:spcAft>
+              </a:pPr>
+              <a:r>
+                <a:rPr sz="880">
+                  <a:solidFill>
+                    <a:srgbClr val="4D4D4D">
+                      <a:alpha val="100000"/>
+                    </a:srgbClr>
+                  </a:solidFill>
+                  <a:latin typeface="Helvetica"/>
+                  <a:cs typeface="Helvetica"/>
+                </a:rPr>
+                <a:t>4</a:t>
+              </a:r>
+            </a:p>
+          </p:txBody>
+        </p:sp>
+        <p:sp>
+          <p:nvSpPr>
+            <p:cNvPr id="77" name="tx77"/>
+            <p:cNvSpPr/>
+            <p:nvPr/>
+          </p:nvSpPr>
+          <p:spPr>
+            <a:xfrm>
+              <a:off x="1133333" y="5716183"/>
+              <a:ext cx="161574" cy="80101"/>
+            </a:xfrm>
+            <a:prstGeom prst="rect">
+              <a:avLst/>
+            </a:prstGeom>
+            <a:noFill/>
+          </p:spPr>
+          <p:txBody>
+            <a:bodyPr lIns="0" rIns="0" tIns="0" bIns="0" anchorCtr="1" anchor="ctr" wrap="none"/>
+            <a:lstStyle/>
+            <a:p>
+              <a:pPr algn="l" marL="0" marR="0" indent="0">
+                <a:lnSpc>
+                  <a:spcPts val="880"/>
+                </a:lnSpc>
+                <a:spcBef>
+                  <a:spcPts val="0"/>
+                </a:spcBef>
+                <a:spcAft>
+                  <a:spcPts val="0"/>
+                </a:spcAft>
+              </a:pPr>
+              <a:r>
+                <a:rPr sz="880">
+                  <a:solidFill>
+                    <a:srgbClr val="4D4D4D">
+                      <a:alpha val="100000"/>
+                    </a:srgbClr>
+                  </a:solidFill>
+                  <a:latin typeface="Helvetica"/>
+                  <a:cs typeface="Helvetica"/>
+                </a:rPr>
+                <a:t>-40</a:t>
+              </a:r>
+            </a:p>
+          </p:txBody>
+        </p:sp>
+        <p:sp>
+          <p:nvSpPr>
+            <p:cNvPr id="78" name="tx78"/>
+            <p:cNvSpPr/>
+            <p:nvPr/>
+          </p:nvSpPr>
+          <p:spPr>
+            <a:xfrm>
+              <a:off x="1978619" y="5716183"/>
+              <a:ext cx="161574" cy="80101"/>
+            </a:xfrm>
+            <a:prstGeom prst="rect">
+              <a:avLst/>
+            </a:prstGeom>
+            <a:noFill/>
+          </p:spPr>
+          <p:txBody>
+            <a:bodyPr lIns="0" rIns="0" tIns="0" bIns="0" anchorCtr="1" anchor="ctr" wrap="none"/>
+            <a:lstStyle/>
+            <a:p>
+              <a:pPr algn="l" marL="0" marR="0" indent="0">
+                <a:lnSpc>
+                  <a:spcPts val="880"/>
+                </a:lnSpc>
+                <a:spcBef>
+                  <a:spcPts val="0"/>
+                </a:spcBef>
+                <a:spcAft>
+                  <a:spcPts val="0"/>
+                </a:spcAft>
+              </a:pPr>
+              <a:r>
+                <a:rPr sz="880">
+                  <a:solidFill>
+                    <a:srgbClr val="4D4D4D">
+                      <a:alpha val="100000"/>
+                    </a:srgbClr>
+                  </a:solidFill>
+                  <a:latin typeface="Helvetica"/>
+                  <a:cs typeface="Helvetica"/>
+                </a:rPr>
+                <a:t>-30</a:t>
+              </a:r>
+            </a:p>
+          </p:txBody>
+        </p:sp>
+        <p:sp>
+          <p:nvSpPr>
+            <p:cNvPr id="79" name="tx79"/>
+            <p:cNvSpPr/>
+            <p:nvPr/>
+          </p:nvSpPr>
+          <p:spPr>
+            <a:xfrm>
+              <a:off x="2823906" y="5716183"/>
+              <a:ext cx="161574" cy="80101"/>
+            </a:xfrm>
+            <a:prstGeom prst="rect">
+              <a:avLst/>
+            </a:prstGeom>
+            <a:noFill/>
+          </p:spPr>
+          <p:txBody>
+            <a:bodyPr lIns="0" rIns="0" tIns="0" bIns="0" anchorCtr="1" anchor="ctr" wrap="none"/>
+            <a:lstStyle/>
+            <a:p>
+              <a:pPr algn="l" marL="0" marR="0" indent="0">
+                <a:lnSpc>
+                  <a:spcPts val="880"/>
+                </a:lnSpc>
+                <a:spcBef>
+                  <a:spcPts val="0"/>
+                </a:spcBef>
+                <a:spcAft>
+                  <a:spcPts val="0"/>
+                </a:spcAft>
+              </a:pPr>
+              <a:r>
+                <a:rPr sz="880">
+                  <a:solidFill>
+                    <a:srgbClr val="4D4D4D">
+                      <a:alpha val="100000"/>
+                    </a:srgbClr>
+                  </a:solidFill>
+                  <a:latin typeface="Helvetica"/>
+                  <a:cs typeface="Helvetica"/>
+                </a:rPr>
+                <a:t>-20</a:t>
+              </a:r>
+            </a:p>
+          </p:txBody>
+        </p:sp>
+        <p:sp>
+          <p:nvSpPr>
+            <p:cNvPr id="80" name="tx80"/>
+            <p:cNvSpPr/>
+            <p:nvPr/>
+          </p:nvSpPr>
+          <p:spPr>
+            <a:xfrm>
+              <a:off x="3669192" y="5716183"/>
+              <a:ext cx="161574" cy="80101"/>
+            </a:xfrm>
+            <a:prstGeom prst="rect">
+              <a:avLst/>
+            </a:prstGeom>
+            <a:noFill/>
+          </p:spPr>
+          <p:txBody>
+            <a:bodyPr lIns="0" rIns="0" tIns="0" bIns="0" anchorCtr="1" anchor="ctr" wrap="none"/>
+            <a:lstStyle/>
+            <a:p>
+              <a:pPr algn="l" marL="0" marR="0" indent="0">
+                <a:lnSpc>
+                  <a:spcPts val="880"/>
+                </a:lnSpc>
+                <a:spcBef>
+                  <a:spcPts val="0"/>
+                </a:spcBef>
+                <a:spcAft>
+                  <a:spcPts val="0"/>
+                </a:spcAft>
+              </a:pPr>
+              <a:r>
+                <a:rPr sz="880">
+                  <a:solidFill>
+                    <a:srgbClr val="4D4D4D">
+                      <a:alpha val="100000"/>
+                    </a:srgbClr>
+                  </a:solidFill>
+                  <a:latin typeface="Helvetica"/>
+                  <a:cs typeface="Helvetica"/>
+                </a:rPr>
+                <a:t>-10</a:t>
+              </a:r>
+            </a:p>
+          </p:txBody>
+        </p:sp>
+        <p:sp>
+          <p:nvSpPr>
+            <p:cNvPr id="81" name="tx81"/>
+            <p:cNvSpPr/>
+            <p:nvPr/>
+          </p:nvSpPr>
+          <p:spPr>
+            <a:xfrm>
+              <a:off x="4564176" y="5716183"/>
+              <a:ext cx="62179" cy="80101"/>
+            </a:xfrm>
+            <a:prstGeom prst="rect">
+              <a:avLst/>
+            </a:prstGeom>
+            <a:noFill/>
+          </p:spPr>
+          <p:txBody>
+            <a:bodyPr lIns="0" rIns="0" tIns="0" bIns="0" anchorCtr="1" anchor="ctr" wrap="none"/>
+            <a:lstStyle/>
+            <a:p>
+              <a:pPr algn="l" marL="0" marR="0" indent="0">
+                <a:lnSpc>
+                  <a:spcPts val="880"/>
+                </a:lnSpc>
+                <a:spcBef>
+                  <a:spcPts val="0"/>
+                </a:spcBef>
+                <a:spcAft>
+                  <a:spcPts val="0"/>
+                </a:spcAft>
+              </a:pPr>
+              <a:r>
+                <a:rPr sz="880">
+                  <a:solidFill>
+                    <a:srgbClr val="4D4D4D">
+                      <a:alpha val="100000"/>
+                    </a:srgbClr>
+                  </a:solidFill>
+                  <a:latin typeface="Helvetica"/>
+                  <a:cs typeface="Helvetica"/>
+                </a:rPr>
+                <a:t>0</a:t>
+              </a:r>
+            </a:p>
+          </p:txBody>
+        </p:sp>
+        <p:sp>
+          <p:nvSpPr>
+            <p:cNvPr id="82" name="tx82"/>
+            <p:cNvSpPr/>
+            <p:nvPr/>
+          </p:nvSpPr>
+          <p:spPr>
+            <a:xfrm>
+              <a:off x="5378373" y="5716183"/>
+              <a:ext cx="124358" cy="80101"/>
+            </a:xfrm>
+            <a:prstGeom prst="rect">
+              <a:avLst/>
+            </a:prstGeom>
+            <a:noFill/>
+          </p:spPr>
+          <p:txBody>
+            <a:bodyPr lIns="0" rIns="0" tIns="0" bIns="0" anchorCtr="1" anchor="ctr" wrap="none"/>
+            <a:lstStyle/>
+            <a:p>
+              <a:pPr algn="l" marL="0" marR="0" indent="0">
+                <a:lnSpc>
+                  <a:spcPts val="880"/>
+                </a:lnSpc>
+                <a:spcBef>
+                  <a:spcPts val="0"/>
+                </a:spcBef>
+                <a:spcAft>
+                  <a:spcPts val="0"/>
+                </a:spcAft>
+              </a:pPr>
+              <a:r>
+                <a:rPr sz="880">
+                  <a:solidFill>
+                    <a:srgbClr val="4D4D4D">
+                      <a:alpha val="100000"/>
+                    </a:srgbClr>
+                  </a:solidFill>
+                  <a:latin typeface="Helvetica"/>
+                  <a:cs typeface="Helvetica"/>
+                </a:rPr>
+                <a:t>10</a:t>
+              </a:r>
+            </a:p>
+          </p:txBody>
+        </p:sp>
+        <p:sp>
+          <p:nvSpPr>
+            <p:cNvPr id="83" name="tx83"/>
+            <p:cNvSpPr/>
+            <p:nvPr/>
+          </p:nvSpPr>
+          <p:spPr>
+            <a:xfrm>
+              <a:off x="6223659" y="5716183"/>
+              <a:ext cx="124358" cy="80101"/>
+            </a:xfrm>
+            <a:prstGeom prst="rect">
+              <a:avLst/>
+            </a:prstGeom>
+            <a:noFill/>
+          </p:spPr>
+          <p:txBody>
+            <a:bodyPr lIns="0" rIns="0" tIns="0" bIns="0" anchorCtr="1" anchor="ctr" wrap="none"/>
+            <a:lstStyle/>
+            <a:p>
+              <a:pPr algn="l" marL="0" marR="0" indent="0">
+                <a:lnSpc>
+                  <a:spcPts val="880"/>
+                </a:lnSpc>
+                <a:spcBef>
+                  <a:spcPts val="0"/>
+                </a:spcBef>
+                <a:spcAft>
+                  <a:spcPts val="0"/>
+                </a:spcAft>
+              </a:pPr>
+              <a:r>
+                <a:rPr sz="880">
+                  <a:solidFill>
+                    <a:srgbClr val="4D4D4D">
+                      <a:alpha val="100000"/>
+                    </a:srgbClr>
+                  </a:solidFill>
+                  <a:latin typeface="Helvetica"/>
+                  <a:cs typeface="Helvetica"/>
+                </a:rPr>
+                <a:t>20</a:t>
+              </a:r>
+            </a:p>
+          </p:txBody>
+        </p:sp>
+        <p:sp>
+          <p:nvSpPr>
+            <p:cNvPr id="84" name="tx84"/>
+            <p:cNvSpPr/>
+            <p:nvPr/>
+          </p:nvSpPr>
+          <p:spPr>
+            <a:xfrm>
+              <a:off x="7068946" y="5716183"/>
+              <a:ext cx="124358" cy="80101"/>
+            </a:xfrm>
+            <a:prstGeom prst="rect">
+              <a:avLst/>
+            </a:prstGeom>
+            <a:noFill/>
+          </p:spPr>
+          <p:txBody>
+            <a:bodyPr lIns="0" rIns="0" tIns="0" bIns="0" anchorCtr="1" anchor="ctr" wrap="none"/>
+            <a:lstStyle/>
+            <a:p>
+              <a:pPr algn="l" marL="0" marR="0" indent="0">
+                <a:lnSpc>
+                  <a:spcPts val="880"/>
+                </a:lnSpc>
+                <a:spcBef>
+                  <a:spcPts val="0"/>
+                </a:spcBef>
+                <a:spcAft>
+                  <a:spcPts val="0"/>
+                </a:spcAft>
+              </a:pPr>
+              <a:r>
+                <a:rPr sz="880">
+                  <a:solidFill>
+                    <a:srgbClr val="4D4D4D">
+                      <a:alpha val="100000"/>
+                    </a:srgbClr>
+                  </a:solidFill>
+                  <a:latin typeface="Helvetica"/>
+                  <a:cs typeface="Helvetica"/>
+                </a:rPr>
+                <a:t>30</a:t>
+              </a:r>
+            </a:p>
+          </p:txBody>
+        </p:sp>
+        <p:sp>
+          <p:nvSpPr>
+            <p:cNvPr id="85" name="tx85"/>
+            <p:cNvSpPr/>
+            <p:nvPr/>
+          </p:nvSpPr>
+          <p:spPr>
+            <a:xfrm>
+              <a:off x="7914232" y="5716183"/>
+              <a:ext cx="124358" cy="80101"/>
+            </a:xfrm>
+            <a:prstGeom prst="rect">
+              <a:avLst/>
+            </a:prstGeom>
+            <a:noFill/>
+          </p:spPr>
+          <p:txBody>
+            <a:bodyPr lIns="0" rIns="0" tIns="0" bIns="0" anchorCtr="1" anchor="ctr" wrap="none"/>
+            <a:lstStyle/>
+            <a:p>
+              <a:pPr algn="l" marL="0" marR="0" indent="0">
+                <a:lnSpc>
+                  <a:spcPts val="880"/>
+                </a:lnSpc>
+                <a:spcBef>
+                  <a:spcPts val="0"/>
+                </a:spcBef>
+                <a:spcAft>
+                  <a:spcPts val="0"/>
+                </a:spcAft>
+              </a:pPr>
+              <a:r>
+                <a:rPr sz="880">
+                  <a:solidFill>
+                    <a:srgbClr val="4D4D4D">
+                      <a:alpha val="100000"/>
+                    </a:srgbClr>
+                  </a:solidFill>
+                  <a:latin typeface="Helvetica"/>
+                  <a:cs typeface="Helvetica"/>
+                </a:rPr>
+                <a:t>40</a:t>
+              </a:r>
+            </a:p>
+          </p:txBody>
+        </p:sp>
+        <p:sp>
+          <p:nvSpPr>
+            <p:cNvPr id="86" name="tx86"/>
+            <p:cNvSpPr/>
+            <p:nvPr/>
+          </p:nvSpPr>
+          <p:spPr>
+            <a:xfrm>
+              <a:off x="2928340" y="5855859"/>
+              <a:ext cx="3578047" cy="100218"/>
+            </a:xfrm>
+            <a:prstGeom prst="rect">
+              <a:avLst/>
+            </a:prstGeom>
+            <a:noFill/>
+          </p:spPr>
+          <p:txBody>
+            <a:bodyPr lIns="0" rIns="0" tIns="0" bIns="0" anchorCtr="1" anchor="ctr" wrap="none"/>
+            <a:lstStyle/>
+            <a:p>
+              <a:pPr algn="l" marL="0" marR="0" indent="0">
+                <a:lnSpc>
+                  <a:spcPts val="1100"/>
+                </a:lnSpc>
+                <a:spcBef>
+                  <a:spcPts val="0"/>
+                </a:spcBef>
+                <a:spcAft>
+                  <a:spcPts val="0"/>
+                </a:spcAft>
+              </a:pPr>
+              <a:r>
+                <a:rPr sz="1100">
+                  <a:solidFill>
+                    <a:srgbClr val="000000">
+                      <a:alpha val="100000"/>
+                    </a:srgbClr>
+                  </a:solidFill>
+                  <a:latin typeface="Helvetica"/>
+                  <a:cs typeface="Helvetica"/>
+                </a:rPr>
+                <a:t>eGFR difference (%): 100 × (CKD-EPI Cr-Cys − CG) / CG</a:t>
+              </a:r>
+            </a:p>
+          </p:txBody>
+        </p:sp>
+        <p:sp>
+          <p:nvSpPr>
+            <p:cNvPr id="87" name="tx87"/>
+            <p:cNvSpPr/>
+            <p:nvPr/>
+          </p:nvSpPr>
+          <p:spPr>
+            <a:xfrm rot="-5400000">
+              <a:off x="138035" y="4944909"/>
+              <a:ext cx="1016904" cy="100218"/>
+            </a:xfrm>
+            <a:prstGeom prst="rect">
+              <a:avLst/>
+            </a:prstGeom>
+            <a:noFill/>
+          </p:spPr>
+          <p:txBody>
+            <a:bodyPr lIns="0" rIns="0" tIns="0" bIns="0" anchorCtr="1" anchor="ctr" wrap="none"/>
+            <a:lstStyle/>
+            <a:p>
+              <a:pPr algn="l" marL="0" marR="0" indent="0">
+                <a:lnSpc>
+                  <a:spcPts val="1100"/>
+                </a:lnSpc>
+                <a:spcBef>
+                  <a:spcPts val="0"/>
+                </a:spcBef>
+                <a:spcAft>
+                  <a:spcPts val="0"/>
+                </a:spcAft>
+              </a:pPr>
+              <a:r>
+                <a:rPr sz="1100">
+                  <a:solidFill>
+                    <a:srgbClr val="000000">
+                      <a:alpha val="100000"/>
+                    </a:srgbClr>
+                  </a:solidFill>
+                  <a:latin typeface="Helvetica"/>
+                  <a:cs typeface="Helvetica"/>
+                </a:rPr>
+                <a:t>subHR (95% CI)</a:t>
+              </a:r>
+            </a:p>
+          </p:txBody>
+        </p:sp>
+        <p:sp>
+          <p:nvSpPr>
+            <p:cNvPr id="88" name="tx88"/>
+            <p:cNvSpPr/>
+            <p:nvPr/>
+          </p:nvSpPr>
+          <p:spPr>
+            <a:xfrm>
+              <a:off x="887106" y="4159544"/>
+              <a:ext cx="7052127" cy="82021"/>
+            </a:xfrm>
+            <a:prstGeom prst="rect">
+              <a:avLst/>
+            </a:prstGeom>
+            <a:noFill/>
+          </p:spPr>
+          <p:txBody>
+            <a:bodyPr lIns="0" rIns="0" tIns="0" bIns="0" anchorCtr="1" anchor="ctr" wrap="none"/>
+            <a:lstStyle/>
+            <a:p>
+              <a:pPr algn="l" marL="0" marR="0" indent="0">
+                <a:lnSpc>
+                  <a:spcPts val="900"/>
+                </a:lnSpc>
+                <a:spcBef>
+                  <a:spcPts val="0"/>
+                </a:spcBef>
+                <a:spcAft>
+                  <a:spcPts val="0"/>
+                </a:spcAft>
+              </a:pPr>
+              <a:r>
+                <a:rPr sz="900">
+                  <a:solidFill>
+                    <a:srgbClr val="404040">
+                      <a:alpha val="100000"/>
+                    </a:srgbClr>
+                  </a:solidFill>
+                  <a:latin typeface="Helvetica"/>
+                  <a:cs typeface="Helvetica"/>
+                </a:rPr>
+                <a:t>subHR per 10 % decline: 1.56 (1.38-1.77), p_Bonf = &lt;0.001 (n = 6)  |  per IQR decline (Δ = 29.3 %): 3.67 (2.54-5.31)  |  IQR: [-14.6, 14.7] %</a:t>
+              </a:r>
+            </a:p>
+          </p:txBody>
+        </p:sp>
+        <p:sp>
+          <p:nvSpPr>
+            <p:cNvPr id="89" name="tx89"/>
+            <p:cNvSpPr/>
+            <p:nvPr/>
+          </p:nvSpPr>
+          <p:spPr>
+            <a:xfrm>
+              <a:off x="887106" y="3932770"/>
               <a:ext cx="1806397" cy="120152"/>
             </a:xfrm>
             <a:prstGeom prst="rect">
